--- a/Fase 1/Evidencias Grupales/Proyecto_APT_App_Finanzas_Completo_1.pptx
+++ b/Fase 1/Evidencias Grupales/Proyecto_APT_App_Finanzas_Completo_1.pptx
@@ -4,6 +4,9 @@
   <p:sldMasterIdLst>
     <p:sldMasterId id="2147483648" r:id="rId1"/>
   </p:sldMasterIdLst>
+  <p:notesMasterIdLst>
+    <p:notesMasterId r:id="rId16"/>
+  </p:notesMasterIdLst>
   <p:sldIdLst>
     <p:sldId id="256" r:id="rId2"/>
     <p:sldId id="257" r:id="rId3"/>
@@ -20,9 +23,6 @@
     <p:sldId id="268" r:id="rId14"/>
     <p:sldId id="269" r:id="rId15"/>
   </p:sldIdLst>
-  <p:notesMasterIdLst>
-    <p:notesMasterId r:id="rId16"/>
-  </p:notesMasterIdLst>
   <p:sldSz cx="12192000" cy="6858000"/>
   <p:notesSz cx="6858000" cy="12192000"/>
   <p:defaultTextStyle>
@@ -117,6 +117,11 @@
       </a:defRPr>
     </a:lvl9pPr>
   </p:defaultTextStyle>
+  <p:extLst>
+    <p:ext uri="{EFAFB233-063F-42B5-8137-9DF3F51BA10A}">
+      <p15:sldGuideLst xmlns:p15="http://schemas.microsoft.com/office/powerpoint/2012/main"/>
+    </p:ext>
+  </p:extLst>
 </p:presentation>
 </file>
 
@@ -142,234 +147,10 @@
           <a:chExt cx="0" cy="0"/>
         </a:xfrm>
       </p:grpSpPr>
-      <p:sp>
-        <p:nvSpPr>
-          <p:cNvPr id="2" name="Header Placeholder 1"/>
-          <p:cNvSpPr>
-            <a:spLocks noGrp="1"/>
-          </p:cNvSpPr>
-          <p:nvPr>
-            <p:ph type="hdr" sz="quarter"/>
-          </p:nvPr>
-        </p:nvSpPr>
-        <p:spPr>
-          <a:xfrm>
-            <a:off x="0" y="0"/>
-            <a:ext cx="2971800" cy="458788"/>
-          </a:xfrm>
-          <a:prstGeom prst="rect">
-            <a:avLst/>
-          </a:prstGeom>
-        </p:spPr>
-        <p:txBody>
-          <a:bodyPr vert="horz" lIns="91440" tIns="45720" rIns="91440" bIns="45720" rtlCol="0"/>
-          <a:lstStyle>
-            <a:lvl1pPr algn="l">
-              <a:defRPr sz="1200"/>
-            </a:lvl1pPr>
-          </a:lstStyle>
-          <a:p>
-            <a:endParaRPr lang="en-US"/>
-          </a:p>
-        </p:txBody>
-      </p:sp>
-      <p:sp>
-        <p:nvSpPr>
-          <p:cNvPr id="3" name="Date Placeholder 2"/>
-          <p:cNvSpPr>
-            <a:spLocks noGrp="1"/>
-          </p:cNvSpPr>
-          <p:nvPr>
-            <p:ph type="dt" idx="1"/>
-          </p:nvPr>
-        </p:nvSpPr>
-        <p:spPr>
-          <a:xfrm>
-            <a:off x="3884613" y="0"/>
-            <a:ext cx="2971800" cy="458788"/>
-          </a:xfrm>
-          <a:prstGeom prst="rect">
-            <a:avLst/>
-          </a:prstGeom>
-        </p:spPr>
-        <p:txBody>
-          <a:bodyPr vert="horz" lIns="91440" tIns="45720" rIns="91440" bIns="45720" rtlCol="0"/>
-          <a:lstStyle>
-            <a:lvl1pPr algn="r">
-              <a:defRPr sz="1200"/>
-            </a:lvl1pPr>
-          </a:lstStyle>
-          <a:p>
-            <a:fld id="{5282F153-3F37-0F45-9E97-73ACFA13230C}" type="datetimeFigureOut">
-              <a:rPr lang="en-US"/>
-              <a:t>7/23/19</a:t>
-            </a:fld>
-            <a:endParaRPr lang="en-US"/>
-          </a:p>
-        </p:txBody>
-      </p:sp>
-      <p:sp>
-        <p:nvSpPr>
-          <p:cNvPr id="4" name="Slide Image Placeholder 3"/>
-          <p:cNvSpPr>
-            <a:spLocks noGrp="1" noRot="1" noChangeAspect="1"/>
-          </p:cNvSpPr>
-          <p:nvPr>
-            <p:ph type="sldImg" idx="2"/>
-          </p:nvPr>
-        </p:nvSpPr>
-        <p:spPr>
-          <a:xfrm>
-            <a:off x="685800" y="1143000"/>
-            <a:ext cx="5486400" cy="3086100"/>
-          </a:xfrm>
-          <a:prstGeom prst="rect">
-            <a:avLst/>
-          </a:prstGeom>
-          <a:noFill/>
-          <a:ln w="12700">
-            <a:solidFill>
-              <a:prstClr val="black"/>
-            </a:solidFill>
-          </a:ln>
-        </p:spPr>
-        <p:txBody>
-          <a:bodyPr vert="horz" lIns="91440" tIns="45720" rIns="91440" bIns="45720" rtlCol="0" anchor="ctr"/>
-          <a:lstStyle/>
-          <a:p>
-            <a:endParaRPr lang="en-US"/>
-          </a:p>
-        </p:txBody>
-      </p:sp>
-      <p:sp>
-        <p:nvSpPr>
-          <p:cNvPr id="5" name="Notes Placeholder 4"/>
-          <p:cNvSpPr>
-            <a:spLocks noGrp="1"/>
-          </p:cNvSpPr>
-          <p:nvPr>
-            <p:ph type="body" sz="quarter" idx="3"/>
-          </p:nvPr>
-        </p:nvSpPr>
-        <p:spPr>
-          <a:xfrm>
-            <a:off x="685800" y="4400550"/>
-            <a:ext cx="5486400" cy="3600450"/>
-          </a:xfrm>
-          <a:prstGeom prst="rect">
-            <a:avLst/>
-          </a:prstGeom>
-        </p:spPr>
-        <p:txBody>
-          <a:bodyPr vert="horz" lIns="91440" tIns="45720" rIns="91440" bIns="45720" rtlCol="0"/>
-          <a:lstStyle/>
-          <a:p>
-            <a:pPr lvl="0"/>
-            <a:r>
-              <a:rPr lang="en-US"/>
-              <a:t>Click to edit Master text styles</a:t>
-            </a:r>
-          </a:p>
-          <a:p>
-            <a:pPr lvl="1"/>
-            <a:r>
-              <a:rPr lang="en-US"/>
-              <a:t>Second level</a:t>
-            </a:r>
-          </a:p>
-          <a:p>
-            <a:pPr lvl="2"/>
-            <a:r>
-              <a:rPr lang="en-US"/>
-              <a:t>Third level</a:t>
-            </a:r>
-          </a:p>
-          <a:p>
-            <a:pPr lvl="3"/>
-            <a:r>
-              <a:rPr lang="en-US"/>
-              <a:t>Fourth level</a:t>
-            </a:r>
-          </a:p>
-          <a:p>
-            <a:pPr lvl="4"/>
-            <a:r>
-              <a:rPr lang="en-US"/>
-              <a:t>Fifth level</a:t>
-            </a:r>
-          </a:p>
-        </p:txBody>
-      </p:sp>
-      <p:sp>
-        <p:nvSpPr>
-          <p:cNvPr id="6" name="Footer Placeholder 5"/>
-          <p:cNvSpPr>
-            <a:spLocks noGrp="1"/>
-          </p:cNvSpPr>
-          <p:nvPr>
-            <p:ph type="ftr" sz="quarter" idx="4"/>
-          </p:nvPr>
-        </p:nvSpPr>
-        <p:spPr>
-          <a:xfrm>
-            <a:off x="0" y="8685213"/>
-            <a:ext cx="2971800" cy="458787"/>
-          </a:xfrm>
-          <a:prstGeom prst="rect">
-            <a:avLst/>
-          </a:prstGeom>
-        </p:spPr>
-        <p:txBody>
-          <a:bodyPr vert="horz" lIns="91440" tIns="45720" rIns="91440" bIns="45720" rtlCol="0" anchor="b"/>
-          <a:lstStyle>
-            <a:lvl1pPr algn="l">
-              <a:defRPr sz="1200"/>
-            </a:lvl1pPr>
-          </a:lstStyle>
-          <a:p>
-            <a:endParaRPr lang="en-US"/>
-          </a:p>
-        </p:txBody>
-      </p:sp>
-      <p:sp>
-        <p:nvSpPr>
-          <p:cNvPr id="7" name="Slide Number Placeholder 6"/>
-          <p:cNvSpPr>
-            <a:spLocks noGrp="1"/>
-          </p:cNvSpPr>
-          <p:nvPr>
-            <p:ph type="sldNum" sz="quarter" idx="5"/>
-          </p:nvPr>
-        </p:nvSpPr>
-        <p:spPr>
-          <a:xfrm>
-            <a:off x="3884613" y="8685213"/>
-            <a:ext cx="2971800" cy="458787"/>
-          </a:xfrm>
-          <a:prstGeom prst="rect">
-            <a:avLst/>
-          </a:prstGeom>
-        </p:spPr>
-        <p:txBody>
-          <a:bodyPr vert="horz" lIns="91440" tIns="45720" rIns="91440" bIns="45720" rtlCol="0" anchor="b"/>
-          <a:lstStyle>
-            <a:lvl1pPr algn="r">
-              <a:defRPr sz="1200"/>
-            </a:lvl1pPr>
-          </a:lstStyle>
-          <a:p>
-            <a:fld id="{CE5E9CC1-C706-0F49-92D6-E571CC5EEA8F}" type="slidenum">
-              <a:rPr lang="en-US"/>
-              <a:t>‹#›</a:t>
-            </a:fld>
-            <a:endParaRPr lang="en-US"/>
-          </a:p>
-        </p:txBody>
-      </p:sp>
     </p:spTree>
     <p:extLst>
       <p:ext uri="{BB962C8B-B14F-4D97-AF65-F5344CB8AC3E}">
-        <p14:creationId xmlns:p14="http://schemas.microsoft.com/office/powerpoint/2010/main" val="1024086991"/>
+        <p14:creationId xmlns:p14="http://schemas.microsoft.com/office/powerpoint/2010/main" val="3016418684"/>
       </p:ext>
     </p:extLst>
   </p:cSld>
@@ -513,10 +294,6 @@
           <a:bodyPr/>
           <a:lstStyle/>
           <a:p>
-            <a:r>
-              <a:rPr lang="en-US" dirty="0"/>
-              <a:t/>
-            </a:r>
             <a:endParaRPr lang="en-US" dirty="0"/>
           </a:p>
         </p:txBody>
@@ -601,10 +378,6 @@
           <a:bodyPr/>
           <a:lstStyle/>
           <a:p>
-            <a:r>
-              <a:rPr lang="en-US" dirty="0"/>
-              <a:t/>
-            </a:r>
             <a:endParaRPr lang="en-US" dirty="0"/>
           </a:p>
         </p:txBody>
@@ -689,10 +462,6 @@
           <a:bodyPr/>
           <a:lstStyle/>
           <a:p>
-            <a:r>
-              <a:rPr lang="en-US" dirty="0"/>
-              <a:t/>
-            </a:r>
             <a:endParaRPr lang="en-US" dirty="0"/>
           </a:p>
         </p:txBody>
@@ -777,10 +546,6 @@
           <a:bodyPr/>
           <a:lstStyle/>
           <a:p>
-            <a:r>
-              <a:rPr lang="en-US" dirty="0"/>
-              <a:t/>
-            </a:r>
             <a:endParaRPr lang="en-US" dirty="0"/>
           </a:p>
         </p:txBody>
@@ -865,10 +630,6 @@
           <a:bodyPr/>
           <a:lstStyle/>
           <a:p>
-            <a:r>
-              <a:rPr lang="en-US" dirty="0"/>
-              <a:t/>
-            </a:r>
             <a:endParaRPr lang="en-US" dirty="0"/>
           </a:p>
         </p:txBody>
@@ -953,10 +714,6 @@
           <a:bodyPr/>
           <a:lstStyle/>
           <a:p>
-            <a:r>
-              <a:rPr lang="en-US" dirty="0"/>
-              <a:t/>
-            </a:r>
             <a:endParaRPr lang="en-US" dirty="0"/>
           </a:p>
         </p:txBody>
@@ -1041,10 +798,6 @@
           <a:bodyPr/>
           <a:lstStyle/>
           <a:p>
-            <a:r>
-              <a:rPr lang="en-US" dirty="0"/>
-              <a:t/>
-            </a:r>
             <a:endParaRPr lang="en-US" dirty="0"/>
           </a:p>
         </p:txBody>
@@ -1129,10 +882,6 @@
           <a:bodyPr/>
           <a:lstStyle/>
           <a:p>
-            <a:r>
-              <a:rPr lang="en-US" dirty="0"/>
-              <a:t/>
-            </a:r>
             <a:endParaRPr lang="en-US" dirty="0"/>
           </a:p>
         </p:txBody>
@@ -1217,10 +966,6 @@
           <a:bodyPr/>
           <a:lstStyle/>
           <a:p>
-            <a:r>
-              <a:rPr lang="en-US" dirty="0"/>
-              <a:t/>
-            </a:r>
             <a:endParaRPr lang="en-US" dirty="0"/>
           </a:p>
         </p:txBody>
@@ -1305,10 +1050,6 @@
           <a:bodyPr/>
           <a:lstStyle/>
           <a:p>
-            <a:r>
-              <a:rPr lang="en-US" dirty="0"/>
-              <a:t/>
-            </a:r>
             <a:endParaRPr lang="en-US" dirty="0"/>
           </a:p>
         </p:txBody>
@@ -1393,10 +1134,6 @@
           <a:bodyPr/>
           <a:lstStyle/>
           <a:p>
-            <a:r>
-              <a:rPr lang="en-US" dirty="0"/>
-              <a:t/>
-            </a:r>
             <a:endParaRPr lang="en-US" dirty="0"/>
           </a:p>
         </p:txBody>
@@ -1481,10 +1218,6 @@
           <a:bodyPr/>
           <a:lstStyle/>
           <a:p>
-            <a:r>
-              <a:rPr lang="en-US" dirty="0"/>
-              <a:t/>
-            </a:r>
             <a:endParaRPr lang="en-US" dirty="0"/>
           </a:p>
         </p:txBody>
@@ -1569,10 +1302,6 @@
           <a:bodyPr/>
           <a:lstStyle/>
           <a:p>
-            <a:r>
-              <a:rPr lang="en-US" dirty="0"/>
-              <a:t/>
-            </a:r>
             <a:endParaRPr lang="en-US" dirty="0"/>
           </a:p>
         </p:txBody>
@@ -1657,10 +1386,6 @@
           <a:bodyPr/>
           <a:lstStyle/>
           <a:p>
-            <a:r>
-              <a:rPr lang="en-US" dirty="0"/>
-              <a:t/>
-            </a:r>
             <a:endParaRPr lang="en-US" dirty="0"/>
           </a:p>
         </p:txBody>
@@ -1734,6 +1459,11 @@
 <file path=ppt/slideMasters/slideMaster1.xml><?xml version="1.0" encoding="utf-8"?>
 <p:sldMaster xmlns:a="http://schemas.openxmlformats.org/drawingml/2006/main" xmlns:r="http://schemas.openxmlformats.org/officeDocument/2006/relationships" xmlns:p="http://schemas.openxmlformats.org/presentationml/2006/main">
   <p:cSld>
+    <p:bg>
+      <p:bgRef idx="1001">
+        <a:schemeClr val="bg1"/>
+      </p:bgRef>
+    </p:bg>
     <p:spTree>
       <p:nvGrpSpPr>
         <p:cNvPr id="1" name=""/>
@@ -2016,6 +1746,7 @@
         <a:solidFill>
           <a:srgbClr val="013A40"/>
         </a:solidFill>
+        <a:effectLst/>
       </p:bgPr>
     </p:bg>
     <p:spTree>
@@ -2053,6 +1784,13 @@
           </a:solidFill>
           <a:ln/>
         </p:spPr>
+        <p:txBody>
+          <a:bodyPr/>
+          <a:lstStyle/>
+          <a:p>
+            <a:endParaRPr lang="es-CL"/>
+          </a:p>
+        </p:txBody>
       </p:sp>
       <p:sp>
         <p:nvSpPr>
@@ -2075,6 +1813,13 @@
           </a:solidFill>
           <a:ln/>
         </p:spPr>
+        <p:txBody>
+          <a:bodyPr/>
+          <a:lstStyle/>
+          <a:p>
+            <a:endParaRPr lang="es-CL"/>
+          </a:p>
+        </p:txBody>
       </p:sp>
       <p:sp>
         <p:nvSpPr>
@@ -2097,11 +1842,11 @@
           <a:bodyPr wrap="square" rtlCol="0" anchor="ctr"/>
           <a:lstStyle/>
           <a:p>
-            <a:pPr indent="0" marL="0">
-              <a:buNone/>
-            </a:pPr>
-            <a:r>
-              <a:rPr lang="en-US" sz="1400" b="1" spc="300" kern="0" dirty="0">
+            <a:pPr marL="0" indent="0">
+              <a:buNone/>
+            </a:pPr>
+            <a:r>
+              <a:rPr lang="en-US" sz="1400" b="1" kern="0" spc="300" dirty="0">
                 <a:solidFill>
                   <a:srgbClr val="02C39A"/>
                 </a:solidFill>
@@ -2136,7 +1881,7 @@
           <a:bodyPr wrap="square" lIns="0" tIns="0" rIns="0" bIns="0" rtlCol="0" anchor="ctr"/>
           <a:lstStyle/>
           <a:p>
-            <a:pPr indent="0" marL="0">
+            <a:pPr marL="0" indent="0">
               <a:buNone/>
             </a:pPr>
             <a:r>
@@ -2175,7 +1920,7 @@
           <a:bodyPr wrap="square" rtlCol="0" anchor="ctr"/>
           <a:lstStyle/>
           <a:p>
-            <a:pPr indent="0" marL="0">
+            <a:pPr marL="0" indent="0">
               <a:buNone/>
             </a:pPr>
             <a:r>
@@ -2215,6 +1960,13 @@
             <a:prstDash val="solid"/>
           </a:ln>
         </p:spPr>
+        <p:txBody>
+          <a:bodyPr/>
+          <a:lstStyle/>
+          <a:p>
+            <a:endParaRPr lang="es-CL"/>
+          </a:p>
+        </p:txBody>
       </p:sp>
       <p:sp>
         <p:nvSpPr>
@@ -2237,7 +1989,7 @@
           <a:bodyPr wrap="square" rtlCol="0" anchor="ctr"/>
           <a:lstStyle/>
           <a:p>
-            <a:pPr indent="0" marL="0">
+            <a:pPr marL="0" indent="0">
               <a:buNone/>
             </a:pPr>
             <a:r>
@@ -2251,9 +2003,6 @@
               </a:rPr>
               <a:t>Alumno: </a:t>
             </a:r>
-            <a:pPr indent="0" marL="0">
-              <a:buNone/>
-            </a:pPr>
             <a:r>
               <a:rPr lang="en-US" sz="1400" dirty="0">
                 <a:solidFill>
@@ -2290,7 +2039,7 @@
           <a:bodyPr wrap="square" rtlCol="0" anchor="ctr"/>
           <a:lstStyle/>
           <a:p>
-            <a:pPr indent="0" marL="0">
+            <a:pPr marL="0" indent="0">
               <a:buNone/>
             </a:pPr>
             <a:r>
@@ -2304,9 +2053,6 @@
               </a:rPr>
               <a:t>Docente: </a:t>
             </a:r>
-            <a:pPr indent="0" marL="0">
-              <a:buNone/>
-            </a:pPr>
             <a:r>
               <a:rPr lang="en-US" sz="1400" dirty="0">
                 <a:solidFill>
@@ -2316,7 +2062,7 @@
                 <a:ea typeface="Calibri" pitchFamily="34" charset="-122"/>
                 <a:cs typeface="Calibri" pitchFamily="34" charset="-120"/>
               </a:rPr>
-              <a:t>German</a:t>
+              <a:t>Anibal Faundez</a:t>
             </a:r>
             <a:endParaRPr lang="en-US" sz="1400" dirty="0"/>
           </a:p>
@@ -2343,7 +2089,7 @@
           <a:bodyPr wrap="square" rtlCol="0" anchor="ctr"/>
           <a:lstStyle/>
           <a:p>
-            <a:pPr indent="0" marL="0">
+            <a:pPr marL="0" indent="0">
               <a:buNone/>
             </a:pPr>
             <a:r>
@@ -2357,9 +2103,6 @@
               </a:rPr>
               <a:t>Carrera: </a:t>
             </a:r>
-            <a:pPr indent="0" marL="0">
-              <a:buNone/>
-            </a:pPr>
             <a:r>
               <a:rPr lang="en-US" sz="1400" dirty="0">
                 <a:solidFill>
@@ -2396,7 +2139,7 @@
           <a:bodyPr wrap="square" rtlCol="0" anchor="ctr"/>
           <a:lstStyle/>
           <a:p>
-            <a:pPr indent="0" marL="0">
+            <a:pPr marL="0" indent="0">
               <a:buNone/>
             </a:pPr>
             <a:r>
@@ -2430,6 +2173,7 @@
         <a:solidFill>
           <a:srgbClr val="FFFFFF"/>
         </a:solidFill>
+        <a:effectLst/>
       </p:bgPr>
     </p:bg>
     <p:spTree>
@@ -2467,7 +2211,7 @@
           <a:bodyPr wrap="square" rtlCol="0" anchor="ctr"/>
           <a:lstStyle/>
           <a:p>
-            <a:pPr indent="0" marL="0">
+            <a:pPr marL="0" indent="0">
               <a:buNone/>
             </a:pPr>
             <a:r>
@@ -2506,7 +2250,7 @@
           <a:bodyPr wrap="square" rtlCol="0" anchor="ctr"/>
           <a:lstStyle/>
           <a:p>
-            <a:pPr indent="0" marL="0">
+            <a:pPr marL="0" indent="0">
               <a:buNone/>
             </a:pPr>
             <a:r>
@@ -2548,6 +2292,13 @@
             <a:prstDash val="solid"/>
           </a:ln>
         </p:spPr>
+        <p:txBody>
+          <a:bodyPr/>
+          <a:lstStyle/>
+          <a:p>
+            <a:endParaRPr lang="es-CL"/>
+          </a:p>
+        </p:txBody>
       </p:sp>
       <p:sp>
         <p:nvSpPr>
@@ -2568,6 +2319,13 @@
           </a:solidFill>
           <a:ln/>
         </p:spPr>
+        <p:txBody>
+          <a:bodyPr/>
+          <a:lstStyle/>
+          <a:p>
+            <a:endParaRPr lang="es-CL"/>
+          </a:p>
+        </p:txBody>
       </p:sp>
       <p:sp>
         <p:nvSpPr>
@@ -2590,7 +2348,7 @@
           <a:bodyPr wrap="square" rtlCol="0" anchor="ctr"/>
           <a:lstStyle/>
           <a:p>
-            <a:pPr algn="ctr" indent="0" marL="0">
+            <a:pPr marL="0" indent="0" algn="ctr">
               <a:buNone/>
             </a:pPr>
             <a:r>
@@ -2629,7 +2387,7 @@
           <a:bodyPr wrap="square" rtlCol="0" anchor="ctr"/>
           <a:lstStyle/>
           <a:p>
-            <a:pPr indent="0" marL="0">
+            <a:pPr marL="0" indent="0">
               <a:buNone/>
             </a:pPr>
             <a:r>
@@ -2668,7 +2426,7 @@
           <a:bodyPr wrap="square" rtlCol="0" anchor="ctr"/>
           <a:lstStyle/>
           <a:p>
-            <a:pPr indent="0" marL="0">
+            <a:pPr marL="0" indent="0">
               <a:buNone/>
             </a:pPr>
             <a:r>
@@ -2707,7 +2465,7 @@
           <a:bodyPr wrap="square" rtlCol="0" anchor="ctr"/>
           <a:lstStyle/>
           <a:p>
-            <a:pPr indent="0" marL="0">
+            <a:pPr marL="0" indent="0">
               <a:buNone/>
             </a:pPr>
             <a:r>
@@ -2749,6 +2507,13 @@
             <a:prstDash val="solid"/>
           </a:ln>
         </p:spPr>
+        <p:txBody>
+          <a:bodyPr/>
+          <a:lstStyle/>
+          <a:p>
+            <a:endParaRPr lang="es-CL"/>
+          </a:p>
+        </p:txBody>
       </p:sp>
       <p:sp>
         <p:nvSpPr>
@@ -2769,6 +2534,13 @@
           </a:solidFill>
           <a:ln/>
         </p:spPr>
+        <p:txBody>
+          <a:bodyPr/>
+          <a:lstStyle/>
+          <a:p>
+            <a:endParaRPr lang="es-CL"/>
+          </a:p>
+        </p:txBody>
       </p:sp>
       <p:sp>
         <p:nvSpPr>
@@ -2791,7 +2563,7 @@
           <a:bodyPr wrap="square" rtlCol="0" anchor="ctr"/>
           <a:lstStyle/>
           <a:p>
-            <a:pPr algn="ctr" indent="0" marL="0">
+            <a:pPr marL="0" indent="0" algn="ctr">
               <a:buNone/>
             </a:pPr>
             <a:r>
@@ -2830,7 +2602,7 @@
           <a:bodyPr wrap="square" rtlCol="0" anchor="ctr"/>
           <a:lstStyle/>
           <a:p>
-            <a:pPr indent="0" marL="0">
+            <a:pPr marL="0" indent="0">
               <a:buNone/>
             </a:pPr>
             <a:r>
@@ -2869,7 +2641,7 @@
           <a:bodyPr wrap="square" rtlCol="0" anchor="ctr"/>
           <a:lstStyle/>
           <a:p>
-            <a:pPr indent="0" marL="0">
+            <a:pPr marL="0" indent="0">
               <a:buNone/>
             </a:pPr>
             <a:r>
@@ -2908,7 +2680,7 @@
           <a:bodyPr wrap="square" rtlCol="0" anchor="ctr"/>
           <a:lstStyle/>
           <a:p>
-            <a:pPr indent="0" marL="0">
+            <a:pPr marL="0" indent="0">
               <a:buNone/>
             </a:pPr>
             <a:r>
@@ -2950,6 +2722,13 @@
             <a:prstDash val="solid"/>
           </a:ln>
         </p:spPr>
+        <p:txBody>
+          <a:bodyPr/>
+          <a:lstStyle/>
+          <a:p>
+            <a:endParaRPr lang="es-CL"/>
+          </a:p>
+        </p:txBody>
       </p:sp>
       <p:sp>
         <p:nvSpPr>
@@ -2970,6 +2749,13 @@
           </a:solidFill>
           <a:ln/>
         </p:spPr>
+        <p:txBody>
+          <a:bodyPr/>
+          <a:lstStyle/>
+          <a:p>
+            <a:endParaRPr lang="es-CL"/>
+          </a:p>
+        </p:txBody>
       </p:sp>
       <p:sp>
         <p:nvSpPr>
@@ -2992,7 +2778,7 @@
           <a:bodyPr wrap="square" rtlCol="0" anchor="ctr"/>
           <a:lstStyle/>
           <a:p>
-            <a:pPr algn="ctr" indent="0" marL="0">
+            <a:pPr marL="0" indent="0" algn="ctr">
               <a:buNone/>
             </a:pPr>
             <a:r>
@@ -3031,7 +2817,7 @@
           <a:bodyPr wrap="square" rtlCol="0" anchor="ctr"/>
           <a:lstStyle/>
           <a:p>
-            <a:pPr indent="0" marL="0">
+            <a:pPr marL="0" indent="0">
               <a:buNone/>
             </a:pPr>
             <a:r>
@@ -3070,7 +2856,7 @@
           <a:bodyPr wrap="square" rtlCol="0" anchor="ctr"/>
           <a:lstStyle/>
           <a:p>
-            <a:pPr indent="0" marL="0">
+            <a:pPr marL="0" indent="0">
               <a:buNone/>
             </a:pPr>
             <a:r>
@@ -3109,7 +2895,7 @@
           <a:bodyPr wrap="square" rtlCol="0" anchor="ctr"/>
           <a:lstStyle/>
           <a:p>
-            <a:pPr indent="0" marL="0">
+            <a:pPr marL="0" indent="0">
               <a:buNone/>
             </a:pPr>
             <a:r>
@@ -3148,7 +2934,7 @@
           <a:bodyPr wrap="square" rtlCol="0" anchor="ctr"/>
           <a:lstStyle/>
           <a:p>
-            <a:pPr indent="0" marL="0">
+            <a:pPr marL="0" indent="0">
               <a:buNone/>
             </a:pPr>
             <a:r>
@@ -3187,7 +2973,7 @@
           <a:bodyPr wrap="square" rtlCol="0" anchor="ctr"/>
           <a:lstStyle/>
           <a:p>
-            <a:pPr indent="0" marL="0">
+            <a:pPr marL="0" indent="0">
               <a:buNone/>
             </a:pPr>
             <a:r>
@@ -3226,7 +3012,7 @@
           <a:bodyPr wrap="square" rtlCol="0" anchor="ctr"/>
           <a:lstStyle/>
           <a:p>
-            <a:pPr indent="0" marL="0">
+            <a:pPr marL="0" indent="0">
               <a:buNone/>
             </a:pPr>
             <a:r>
@@ -3268,6 +3054,13 @@
             <a:prstDash val="solid"/>
           </a:ln>
         </p:spPr>
+        <p:txBody>
+          <a:bodyPr/>
+          <a:lstStyle/>
+          <a:p>
+            <a:endParaRPr lang="es-CL"/>
+          </a:p>
+        </p:txBody>
       </p:sp>
       <p:sp>
         <p:nvSpPr>
@@ -3288,6 +3081,13 @@
           </a:solidFill>
           <a:ln/>
         </p:spPr>
+        <p:txBody>
+          <a:bodyPr/>
+          <a:lstStyle/>
+          <a:p>
+            <a:endParaRPr lang="es-CL"/>
+          </a:p>
+        </p:txBody>
       </p:sp>
       <p:sp>
         <p:nvSpPr>
@@ -3310,7 +3110,7 @@
           <a:bodyPr wrap="square" rtlCol="0" anchor="ctr"/>
           <a:lstStyle/>
           <a:p>
-            <a:pPr algn="ctr" indent="0" marL="0">
+            <a:pPr marL="0" indent="0" algn="ctr">
               <a:buNone/>
             </a:pPr>
             <a:r>
@@ -3349,7 +3149,7 @@
           <a:bodyPr wrap="square" rtlCol="0" anchor="ctr"/>
           <a:lstStyle/>
           <a:p>
-            <a:pPr indent="0" marL="0">
+            <a:pPr marL="0" indent="0">
               <a:buNone/>
             </a:pPr>
             <a:r>
@@ -3388,7 +3188,7 @@
           <a:bodyPr wrap="square" rtlCol="0" anchor="ctr"/>
           <a:lstStyle/>
           <a:p>
-            <a:pPr indent="0" marL="0">
+            <a:pPr marL="0" indent="0">
               <a:buNone/>
             </a:pPr>
             <a:r>
@@ -3427,7 +3227,7 @@
           <a:bodyPr wrap="square" rtlCol="0" anchor="ctr"/>
           <a:lstStyle/>
           <a:p>
-            <a:pPr indent="0" marL="0">
+            <a:pPr marL="0" indent="0">
               <a:buNone/>
             </a:pPr>
             <a:r>
@@ -3466,7 +3266,7 @@
           <a:bodyPr wrap="square" rtlCol="0" anchor="ctr"/>
           <a:lstStyle/>
           <a:p>
-            <a:pPr indent="0" marL="0">
+            <a:pPr marL="0" indent="0">
               <a:buNone/>
             </a:pPr>
             <a:r>
@@ -3506,6 +3306,13 @@
             <a:prstDash val="solid"/>
           </a:ln>
         </p:spPr>
+        <p:txBody>
+          <a:bodyPr/>
+          <a:lstStyle/>
+          <a:p>
+            <a:endParaRPr lang="es-CL"/>
+          </a:p>
+        </p:txBody>
       </p:sp>
       <p:sp>
         <p:nvSpPr>
@@ -3516,7 +3323,7 @@
         <p:spPr>
           <a:xfrm>
             <a:off x="3200400" y="4393692"/>
-            <a:ext cx="1005840" cy="-932688"/>
+            <a:ext cx="1005840" cy="0"/>
           </a:xfrm>
           <a:prstGeom prst="line">
             <a:avLst/>
@@ -3529,6 +3336,13 @@
             <a:prstDash val="solid"/>
           </a:ln>
         </p:spPr>
+        <p:txBody>
+          <a:bodyPr/>
+          <a:lstStyle/>
+          <a:p>
+            <a:endParaRPr lang="es-CL"/>
+          </a:p>
+        </p:txBody>
       </p:sp>
       <p:sp>
         <p:nvSpPr>
@@ -3539,7 +3353,7 @@
         <p:spPr>
           <a:xfrm>
             <a:off x="7223760" y="3461004"/>
-            <a:ext cx="1005840" cy="-1357884"/>
+            <a:ext cx="1005840" cy="0"/>
           </a:xfrm>
           <a:prstGeom prst="line">
             <a:avLst/>
@@ -3552,6 +3366,13 @@
             <a:prstDash val="solid"/>
           </a:ln>
         </p:spPr>
+        <p:txBody>
+          <a:bodyPr/>
+          <a:lstStyle/>
+          <a:p>
+            <a:endParaRPr lang="es-CL"/>
+          </a:p>
+        </p:txBody>
       </p:sp>
       <p:sp>
         <p:nvSpPr>
@@ -3574,7 +3395,7 @@
           <a:bodyPr wrap="square" rtlCol="0" anchor="ctr"/>
           <a:lstStyle/>
           <a:p>
-            <a:pPr indent="0" marL="0">
+            <a:pPr marL="0" indent="0">
               <a:buNone/>
             </a:pPr>
             <a:r>
@@ -3613,7 +3434,7 @@
           <a:bodyPr wrap="square" rtlCol="0" anchor="ctr"/>
           <a:lstStyle/>
           <a:p>
-            <a:pPr indent="0" marL="0">
+            <a:pPr marL="0" indent="0">
               <a:buNone/>
             </a:pPr>
             <a:r>
@@ -3652,7 +3473,7 @@
           <a:bodyPr wrap="square" rtlCol="0" anchor="ctr"/>
           <a:lstStyle/>
           <a:p>
-            <a:pPr indent="0" marL="0">
+            <a:pPr marL="0" indent="0">
               <a:buNone/>
             </a:pPr>
             <a:r>
@@ -3691,7 +3512,7 @@
           <a:bodyPr wrap="square" rtlCol="0" anchor="ctr"/>
           <a:lstStyle/>
           <a:p>
-            <a:pPr indent="0" marL="0">
+            <a:pPr marL="0" indent="0">
               <a:buNone/>
             </a:pPr>
             <a:r>
@@ -3730,7 +3551,7 @@
           <a:bodyPr wrap="square" rtlCol="0" anchor="ctr"/>
           <a:lstStyle/>
           <a:p>
-            <a:pPr algn="r" indent="0" marL="0">
+            <a:pPr marL="0" indent="0" algn="r">
               <a:buNone/>
             </a:pPr>
             <a:r>
@@ -3764,6 +3585,7 @@
         <a:solidFill>
           <a:srgbClr val="F2F2F2"/>
         </a:solidFill>
+        <a:effectLst/>
       </p:bgPr>
     </p:bg>
     <p:spTree>
@@ -3801,7 +3623,7 @@
           <a:bodyPr wrap="square" rtlCol="0" anchor="ctr"/>
           <a:lstStyle/>
           <a:p>
-            <a:pPr indent="0" marL="0">
+            <a:pPr marL="0" indent="0">
               <a:buNone/>
             </a:pPr>
             <a:r>
@@ -3840,7 +3662,7 @@
           <a:bodyPr wrap="square" rtlCol="0" anchor="ctr"/>
           <a:lstStyle/>
           <a:p>
-            <a:pPr indent="0" marL="0">
+            <a:pPr marL="0" indent="0">
               <a:buNone/>
             </a:pPr>
             <a:r>
@@ -3877,6 +3699,13 @@
           </a:solidFill>
           <a:ln/>
         </p:spPr>
+        <p:txBody>
+          <a:bodyPr/>
+          <a:lstStyle/>
+          <a:p>
+            <a:endParaRPr lang="es-CL"/>
+          </a:p>
+        </p:txBody>
       </p:sp>
       <p:sp>
         <p:nvSpPr>
@@ -3899,7 +3728,7 @@
           <a:bodyPr wrap="square" rtlCol="0" anchor="ctr"/>
           <a:lstStyle/>
           <a:p>
-            <a:pPr algn="ctr" indent="0" marL="0">
+            <a:pPr marL="0" indent="0" algn="ctr">
               <a:buNone/>
             </a:pPr>
             <a:r>
@@ -3936,6 +3765,13 @@
           </a:solidFill>
           <a:ln/>
         </p:spPr>
+        <p:txBody>
+          <a:bodyPr/>
+          <a:lstStyle/>
+          <a:p>
+            <a:endParaRPr lang="es-CL"/>
+          </a:p>
+        </p:txBody>
       </p:sp>
       <p:sp>
         <p:nvSpPr>
@@ -3958,7 +3794,7 @@
           <a:bodyPr wrap="square" rtlCol="0" anchor="ctr"/>
           <a:lstStyle/>
           <a:p>
-            <a:pPr indent="0" marL="0">
+            <a:pPr marL="0" indent="0">
               <a:buNone/>
             </a:pPr>
             <a:r>
@@ -3995,6 +3831,13 @@
           </a:solidFill>
           <a:ln/>
         </p:spPr>
+        <p:txBody>
+          <a:bodyPr/>
+          <a:lstStyle/>
+          <a:p>
+            <a:endParaRPr lang="es-CL"/>
+          </a:p>
+        </p:txBody>
       </p:sp>
       <p:sp>
         <p:nvSpPr>
@@ -4017,7 +3860,7 @@
           <a:bodyPr wrap="square" rtlCol="0" anchor="ctr"/>
           <a:lstStyle/>
           <a:p>
-            <a:pPr algn="ctr" indent="0" marL="0">
+            <a:pPr marL="0" indent="0" algn="ctr">
               <a:buNone/>
             </a:pPr>
             <a:r>
@@ -4054,6 +3897,13 @@
           </a:solidFill>
           <a:ln/>
         </p:spPr>
+        <p:txBody>
+          <a:bodyPr/>
+          <a:lstStyle/>
+          <a:p>
+            <a:endParaRPr lang="es-CL"/>
+          </a:p>
+        </p:txBody>
       </p:sp>
       <p:sp>
         <p:nvSpPr>
@@ -4076,7 +3926,7 @@
           <a:bodyPr wrap="square" rtlCol="0" anchor="ctr"/>
           <a:lstStyle/>
           <a:p>
-            <a:pPr indent="0" marL="0">
+            <a:pPr marL="0" indent="0">
               <a:buNone/>
             </a:pPr>
             <a:r>
@@ -4113,6 +3963,13 @@
           </a:solidFill>
           <a:ln/>
         </p:spPr>
+        <p:txBody>
+          <a:bodyPr/>
+          <a:lstStyle/>
+          <a:p>
+            <a:endParaRPr lang="es-CL"/>
+          </a:p>
+        </p:txBody>
       </p:sp>
       <p:sp>
         <p:nvSpPr>
@@ -4135,7 +3992,7 @@
           <a:bodyPr wrap="square" rtlCol="0" anchor="ctr"/>
           <a:lstStyle/>
           <a:p>
-            <a:pPr algn="ctr" indent="0" marL="0">
+            <a:pPr marL="0" indent="0" algn="ctr">
               <a:buNone/>
             </a:pPr>
             <a:r>
@@ -4172,6 +4029,13 @@
           </a:solidFill>
           <a:ln/>
         </p:spPr>
+        <p:txBody>
+          <a:bodyPr/>
+          <a:lstStyle/>
+          <a:p>
+            <a:endParaRPr lang="es-CL"/>
+          </a:p>
+        </p:txBody>
       </p:sp>
       <p:sp>
         <p:nvSpPr>
@@ -4194,7 +4058,7 @@
           <a:bodyPr wrap="square" rtlCol="0" anchor="ctr"/>
           <a:lstStyle/>
           <a:p>
-            <a:pPr indent="0" marL="0">
+            <a:pPr marL="0" indent="0">
               <a:buNone/>
             </a:pPr>
             <a:r>
@@ -4231,6 +4095,13 @@
           </a:solidFill>
           <a:ln/>
         </p:spPr>
+        <p:txBody>
+          <a:bodyPr/>
+          <a:lstStyle/>
+          <a:p>
+            <a:endParaRPr lang="es-CL"/>
+          </a:p>
+        </p:txBody>
       </p:sp>
       <p:sp>
         <p:nvSpPr>
@@ -4253,7 +4124,7 @@
           <a:bodyPr wrap="square" rtlCol="0" anchor="ctr"/>
           <a:lstStyle/>
           <a:p>
-            <a:pPr algn="ctr" indent="0" marL="0">
+            <a:pPr marL="0" indent="0" algn="ctr">
               <a:buNone/>
             </a:pPr>
             <a:r>
@@ -4290,6 +4161,13 @@
           </a:solidFill>
           <a:ln/>
         </p:spPr>
+        <p:txBody>
+          <a:bodyPr/>
+          <a:lstStyle/>
+          <a:p>
+            <a:endParaRPr lang="es-CL"/>
+          </a:p>
+        </p:txBody>
       </p:sp>
       <p:sp>
         <p:nvSpPr>
@@ -4312,7 +4190,7 @@
           <a:bodyPr wrap="square" rtlCol="0" anchor="ctr"/>
           <a:lstStyle/>
           <a:p>
-            <a:pPr indent="0" marL="0">
+            <a:pPr marL="0" indent="0">
               <a:buNone/>
             </a:pPr>
             <a:r>
@@ -4349,6 +4227,13 @@
           </a:solidFill>
           <a:ln/>
         </p:spPr>
+        <p:txBody>
+          <a:bodyPr/>
+          <a:lstStyle/>
+          <a:p>
+            <a:endParaRPr lang="es-CL"/>
+          </a:p>
+        </p:txBody>
       </p:sp>
       <p:sp>
         <p:nvSpPr>
@@ -4371,7 +4256,7 @@
           <a:bodyPr wrap="square" rtlCol="0" anchor="ctr"/>
           <a:lstStyle/>
           <a:p>
-            <a:pPr algn="ctr" indent="0" marL="0">
+            <a:pPr marL="0" indent="0" algn="ctr">
               <a:buNone/>
             </a:pPr>
             <a:r>
@@ -4408,6 +4293,13 @@
           </a:solidFill>
           <a:ln/>
         </p:spPr>
+        <p:txBody>
+          <a:bodyPr/>
+          <a:lstStyle/>
+          <a:p>
+            <a:endParaRPr lang="es-CL"/>
+          </a:p>
+        </p:txBody>
       </p:sp>
       <p:sp>
         <p:nvSpPr>
@@ -4430,7 +4322,7 @@
           <a:bodyPr wrap="square" rtlCol="0" anchor="ctr"/>
           <a:lstStyle/>
           <a:p>
-            <a:pPr indent="0" marL="0">
+            <a:pPr marL="0" indent="0">
               <a:buNone/>
             </a:pPr>
             <a:r>
@@ -4467,6 +4359,13 @@
           </a:solidFill>
           <a:ln/>
         </p:spPr>
+        <p:txBody>
+          <a:bodyPr/>
+          <a:lstStyle/>
+          <a:p>
+            <a:endParaRPr lang="es-CL"/>
+          </a:p>
+        </p:txBody>
       </p:sp>
       <p:sp>
         <p:nvSpPr>
@@ -4489,7 +4388,7 @@
           <a:bodyPr wrap="square" rtlCol="0" anchor="ctr"/>
           <a:lstStyle/>
           <a:p>
-            <a:pPr algn="ctr" indent="0" marL="0">
+            <a:pPr marL="0" indent="0" algn="ctr">
               <a:buNone/>
             </a:pPr>
             <a:r>
@@ -4526,6 +4425,13 @@
           </a:solidFill>
           <a:ln/>
         </p:spPr>
+        <p:txBody>
+          <a:bodyPr/>
+          <a:lstStyle/>
+          <a:p>
+            <a:endParaRPr lang="es-CL"/>
+          </a:p>
+        </p:txBody>
       </p:sp>
       <p:sp>
         <p:nvSpPr>
@@ -4548,7 +4454,7 @@
           <a:bodyPr wrap="square" rtlCol="0" anchor="ctr"/>
           <a:lstStyle/>
           <a:p>
-            <a:pPr indent="0" marL="0">
+            <a:pPr marL="0" indent="0">
               <a:buNone/>
             </a:pPr>
             <a:r>
@@ -4587,7 +4493,7 @@
           <a:bodyPr wrap="square" rtlCol="0" anchor="ctr"/>
           <a:lstStyle/>
           <a:p>
-            <a:pPr algn="r" indent="0" marL="0">
+            <a:pPr marL="0" indent="0" algn="r">
               <a:buNone/>
             </a:pPr>
             <a:r>
@@ -4621,6 +4527,7 @@
         <a:solidFill>
           <a:srgbClr val="013A40"/>
         </a:solidFill>
+        <a:effectLst/>
       </p:bgPr>
     </p:bg>
     <p:spTree>
@@ -4658,7 +4565,7 @@
           <a:bodyPr wrap="square" rtlCol="0" anchor="ctr"/>
           <a:lstStyle/>
           <a:p>
-            <a:pPr indent="0" marL="0">
+            <a:pPr marL="0" indent="0">
               <a:buNone/>
             </a:pPr>
             <a:r>
@@ -4697,7 +4604,7 @@
           <a:bodyPr wrap="square" rtlCol="0" anchor="ctr"/>
           <a:lstStyle/>
           <a:p>
-            <a:pPr indent="0" marL="0">
+            <a:pPr marL="0" indent="0">
               <a:buNone/>
             </a:pPr>
             <a:r>
@@ -4734,6 +4641,13 @@
           </a:solidFill>
           <a:ln/>
         </p:spPr>
+        <p:txBody>
+          <a:bodyPr/>
+          <a:lstStyle/>
+          <a:p>
+            <a:endParaRPr lang="es-CL"/>
+          </a:p>
+        </p:txBody>
       </p:sp>
       <p:sp>
         <p:nvSpPr>
@@ -4756,7 +4670,7 @@
           <a:bodyPr wrap="square" rtlCol="0" anchor="ctr"/>
           <a:lstStyle/>
           <a:p>
-            <a:pPr algn="ctr" indent="0" marL="0">
+            <a:pPr marL="0" indent="0" algn="ctr">
               <a:buNone/>
             </a:pPr>
             <a:r>
@@ -4795,7 +4709,7 @@
           <a:bodyPr wrap="square" rtlCol="0" anchor="ctr"/>
           <a:lstStyle/>
           <a:p>
-            <a:pPr indent="0" marL="0">
+            <a:pPr marL="0" indent="0">
               <a:buNone/>
             </a:pPr>
             <a:r>
@@ -4834,7 +4748,7 @@
           <a:bodyPr wrap="square" rtlCol="0" anchor="ctr"/>
           <a:lstStyle/>
           <a:p>
-            <a:pPr indent="0" marL="0">
+            <a:pPr marL="0" indent="0">
               <a:buNone/>
             </a:pPr>
             <a:r>
@@ -4871,6 +4785,13 @@
           </a:solidFill>
           <a:ln/>
         </p:spPr>
+        <p:txBody>
+          <a:bodyPr/>
+          <a:lstStyle/>
+          <a:p>
+            <a:endParaRPr lang="es-CL"/>
+          </a:p>
+        </p:txBody>
       </p:sp>
       <p:sp>
         <p:nvSpPr>
@@ -4893,7 +4814,7 @@
           <a:bodyPr wrap="square" rtlCol="0" anchor="ctr"/>
           <a:lstStyle/>
           <a:p>
-            <a:pPr algn="ctr" indent="0" marL="0">
+            <a:pPr marL="0" indent="0" algn="ctr">
               <a:buNone/>
             </a:pPr>
             <a:r>
@@ -4932,7 +4853,7 @@
           <a:bodyPr wrap="square" rtlCol="0" anchor="ctr"/>
           <a:lstStyle/>
           <a:p>
-            <a:pPr indent="0" marL="0">
+            <a:pPr marL="0" indent="0">
               <a:buNone/>
             </a:pPr>
             <a:r>
@@ -4971,7 +4892,7 @@
           <a:bodyPr wrap="square" rtlCol="0" anchor="ctr"/>
           <a:lstStyle/>
           <a:p>
-            <a:pPr indent="0" marL="0">
+            <a:pPr marL="0" indent="0">
               <a:buNone/>
             </a:pPr>
             <a:r>
@@ -5008,6 +4929,13 @@
           </a:solidFill>
           <a:ln/>
         </p:spPr>
+        <p:txBody>
+          <a:bodyPr/>
+          <a:lstStyle/>
+          <a:p>
+            <a:endParaRPr lang="es-CL"/>
+          </a:p>
+        </p:txBody>
       </p:sp>
       <p:sp>
         <p:nvSpPr>
@@ -5030,7 +4958,7 @@
           <a:bodyPr wrap="square" rtlCol="0" anchor="ctr"/>
           <a:lstStyle/>
           <a:p>
-            <a:pPr algn="ctr" indent="0" marL="0">
+            <a:pPr marL="0" indent="0" algn="ctr">
               <a:buNone/>
             </a:pPr>
             <a:r>
@@ -5069,7 +4997,7 @@
           <a:bodyPr wrap="square" rtlCol="0" anchor="ctr"/>
           <a:lstStyle/>
           <a:p>
-            <a:pPr indent="0" marL="0">
+            <a:pPr marL="0" indent="0">
               <a:buNone/>
             </a:pPr>
             <a:r>
@@ -5108,7 +5036,7 @@
           <a:bodyPr wrap="square" rtlCol="0" anchor="ctr"/>
           <a:lstStyle/>
           <a:p>
-            <a:pPr indent="0" marL="0">
+            <a:pPr marL="0" indent="0">
               <a:buNone/>
             </a:pPr>
             <a:r>
@@ -5145,6 +5073,13 @@
           </a:solidFill>
           <a:ln/>
         </p:spPr>
+        <p:txBody>
+          <a:bodyPr/>
+          <a:lstStyle/>
+          <a:p>
+            <a:endParaRPr lang="es-CL"/>
+          </a:p>
+        </p:txBody>
       </p:sp>
       <p:sp>
         <p:nvSpPr>
@@ -5167,7 +5102,7 @@
           <a:bodyPr wrap="square" rtlCol="0" anchor="ctr"/>
           <a:lstStyle/>
           <a:p>
-            <a:pPr algn="ctr" indent="0" marL="0">
+            <a:pPr marL="0" indent="0" algn="ctr">
               <a:buNone/>
             </a:pPr>
             <a:r>
@@ -5206,7 +5141,7 @@
           <a:bodyPr wrap="square" rtlCol="0" anchor="ctr"/>
           <a:lstStyle/>
           <a:p>
-            <a:pPr indent="0" marL="0">
+            <a:pPr marL="0" indent="0">
               <a:buNone/>
             </a:pPr>
             <a:r>
@@ -5245,7 +5180,7 @@
           <a:bodyPr wrap="square" rtlCol="0" anchor="ctr"/>
           <a:lstStyle/>
           <a:p>
-            <a:pPr indent="0" marL="0">
+            <a:pPr marL="0" indent="0">
               <a:buNone/>
             </a:pPr>
             <a:r>
@@ -5282,6 +5217,13 @@
           </a:solidFill>
           <a:ln/>
         </p:spPr>
+        <p:txBody>
+          <a:bodyPr/>
+          <a:lstStyle/>
+          <a:p>
+            <a:endParaRPr lang="es-CL"/>
+          </a:p>
+        </p:txBody>
       </p:sp>
       <p:sp>
         <p:nvSpPr>
@@ -5304,7 +5246,7 @@
           <a:bodyPr wrap="square" rtlCol="0" anchor="ctr"/>
           <a:lstStyle/>
           <a:p>
-            <a:pPr algn="ctr" indent="0" marL="0">
+            <a:pPr marL="0" indent="0" algn="ctr">
               <a:buNone/>
             </a:pPr>
             <a:r>
@@ -5343,7 +5285,7 @@
           <a:bodyPr wrap="square" rtlCol="0" anchor="ctr"/>
           <a:lstStyle/>
           <a:p>
-            <a:pPr indent="0" marL="0">
+            <a:pPr marL="0" indent="0">
               <a:buNone/>
             </a:pPr>
             <a:r>
@@ -5382,7 +5324,7 @@
           <a:bodyPr wrap="square" rtlCol="0" anchor="ctr"/>
           <a:lstStyle/>
           <a:p>
-            <a:pPr indent="0" marL="0">
+            <a:pPr marL="0" indent="0">
               <a:buNone/>
             </a:pPr>
             <a:r>
@@ -5421,7 +5363,7 @@
           <a:bodyPr wrap="square" rtlCol="0" anchor="ctr"/>
           <a:lstStyle/>
           <a:p>
-            <a:pPr algn="r" indent="0" marL="0">
+            <a:pPr marL="0" indent="0" algn="r">
               <a:buNone/>
             </a:pPr>
             <a:r>
@@ -5455,6 +5397,7 @@
         <a:solidFill>
           <a:srgbClr val="F2F2F2"/>
         </a:solidFill>
+        <a:effectLst/>
       </p:bgPr>
     </p:bg>
     <p:spTree>
@@ -5492,7 +5435,7 @@
           <a:bodyPr wrap="square" rtlCol="0" anchor="ctr"/>
           <a:lstStyle/>
           <a:p>
-            <a:pPr indent="0" marL="0">
+            <a:pPr marL="0" indent="0">
               <a:buNone/>
             </a:pPr>
             <a:r>
@@ -5531,7 +5474,7 @@
           <a:bodyPr wrap="square" rtlCol="0" anchor="ctr"/>
           <a:lstStyle/>
           <a:p>
-            <a:pPr indent="0" marL="0">
+            <a:pPr marL="0" indent="0">
               <a:buNone/>
             </a:pPr>
             <a:r>
@@ -5570,6 +5513,13 @@
           </a:solidFill>
           <a:ln/>
         </p:spPr>
+        <p:txBody>
+          <a:bodyPr/>
+          <a:lstStyle/>
+          <a:p>
+            <a:endParaRPr lang="es-CL"/>
+          </a:p>
+        </p:txBody>
       </p:sp>
       <p:sp>
         <p:nvSpPr>
@@ -5592,6 +5542,13 @@
           </a:solidFill>
           <a:ln/>
         </p:spPr>
+        <p:txBody>
+          <a:bodyPr/>
+          <a:lstStyle/>
+          <a:p>
+            <a:endParaRPr lang="es-CL"/>
+          </a:p>
+        </p:txBody>
       </p:sp>
       <p:sp>
         <p:nvSpPr>
@@ -5614,6 +5571,13 @@
           </a:solidFill>
           <a:ln/>
         </p:spPr>
+        <p:txBody>
+          <a:bodyPr/>
+          <a:lstStyle/>
+          <a:p>
+            <a:endParaRPr lang="es-CL"/>
+          </a:p>
+        </p:txBody>
       </p:sp>
       <p:sp>
         <p:nvSpPr>
@@ -5636,7 +5600,7 @@
           <a:bodyPr wrap="square" rtlCol="0" anchor="ctr"/>
           <a:lstStyle/>
           <a:p>
-            <a:pPr indent="0" marL="0">
+            <a:pPr marL="0" indent="0">
               <a:buNone/>
             </a:pPr>
             <a:r>
@@ -5673,6 +5637,13 @@
           </a:solidFill>
           <a:ln/>
         </p:spPr>
+        <p:txBody>
+          <a:bodyPr/>
+          <a:lstStyle/>
+          <a:p>
+            <a:endParaRPr lang="es-CL"/>
+          </a:p>
+        </p:txBody>
       </p:sp>
       <p:sp>
         <p:nvSpPr>
@@ -5695,7 +5666,7 @@
           <a:bodyPr wrap="square" rtlCol="0" anchor="ctr"/>
           <a:lstStyle/>
           <a:p>
-            <a:pPr indent="0" marL="0">
+            <a:pPr marL="0" indent="0">
               <a:buNone/>
             </a:pPr>
             <a:r>
@@ -5734,6 +5705,13 @@
           </a:solidFill>
           <a:ln/>
         </p:spPr>
+        <p:txBody>
+          <a:bodyPr/>
+          <a:lstStyle/>
+          <a:p>
+            <a:endParaRPr lang="es-CL"/>
+          </a:p>
+        </p:txBody>
       </p:sp>
       <p:sp>
         <p:nvSpPr>
@@ -5756,7 +5734,7 @@
           <a:bodyPr wrap="square" rtlCol="0" anchor="ctr"/>
           <a:lstStyle/>
           <a:p>
-            <a:pPr indent="0" marL="0">
+            <a:pPr marL="0" indent="0">
               <a:buNone/>
             </a:pPr>
             <a:r>
@@ -5795,7 +5773,7 @@
           <a:bodyPr wrap="square" rtlCol="0" anchor="ctr"/>
           <a:lstStyle/>
           <a:p>
-            <a:pPr indent="0" marL="0">
+            <a:pPr marL="0" indent="0">
               <a:buNone/>
             </a:pPr>
             <a:r>
@@ -5834,7 +5812,7 @@
           <a:bodyPr wrap="square" rtlCol="0" anchor="ctr"/>
           <a:lstStyle/>
           <a:p>
-            <a:pPr indent="0" marL="0">
+            <a:pPr marL="0" indent="0">
               <a:buNone/>
             </a:pPr>
             <a:r>
@@ -5873,7 +5851,7 @@
           <a:bodyPr wrap="square" rtlCol="0" anchor="ctr"/>
           <a:lstStyle/>
           <a:p>
-            <a:pPr indent="0" marL="0">
+            <a:pPr marL="0" indent="0">
               <a:buNone/>
             </a:pPr>
             <a:r>
@@ -5910,6 +5888,13 @@
           </a:solidFill>
           <a:ln/>
         </p:spPr>
+        <p:txBody>
+          <a:bodyPr/>
+          <a:lstStyle/>
+          <a:p>
+            <a:endParaRPr lang="es-CL"/>
+          </a:p>
+        </p:txBody>
       </p:sp>
       <p:sp>
         <p:nvSpPr>
@@ -5930,6 +5915,13 @@
           </a:solidFill>
           <a:ln/>
         </p:spPr>
+        <p:txBody>
+          <a:bodyPr/>
+          <a:lstStyle/>
+          <a:p>
+            <a:endParaRPr lang="es-CL"/>
+          </a:p>
+        </p:txBody>
       </p:sp>
       <p:sp>
         <p:nvSpPr>
@@ -5952,7 +5944,7 @@
           <a:bodyPr wrap="square" rtlCol="0" anchor="ctr"/>
           <a:lstStyle/>
           <a:p>
-            <a:pPr indent="0" marL="0">
+            <a:pPr marL="0" indent="0">
               <a:buNone/>
             </a:pPr>
             <a:r>
@@ -5989,6 +5981,13 @@
           </a:solidFill>
           <a:ln/>
         </p:spPr>
+        <p:txBody>
+          <a:bodyPr/>
+          <a:lstStyle/>
+          <a:p>
+            <a:endParaRPr lang="es-CL"/>
+          </a:p>
+        </p:txBody>
       </p:sp>
       <p:sp>
         <p:nvSpPr>
@@ -6009,6 +6008,13 @@
           </a:solidFill>
           <a:ln/>
         </p:spPr>
+        <p:txBody>
+          <a:bodyPr/>
+          <a:lstStyle/>
+          <a:p>
+            <a:endParaRPr lang="es-CL"/>
+          </a:p>
+        </p:txBody>
       </p:sp>
       <p:sp>
         <p:nvSpPr>
@@ -6031,7 +6037,7 @@
           <a:bodyPr wrap="square" rtlCol="0" anchor="ctr"/>
           <a:lstStyle/>
           <a:p>
-            <a:pPr indent="0" marL="0">
+            <a:pPr marL="0" indent="0">
               <a:buNone/>
             </a:pPr>
             <a:r>
@@ -6068,6 +6074,13 @@
           </a:solidFill>
           <a:ln/>
         </p:spPr>
+        <p:txBody>
+          <a:bodyPr/>
+          <a:lstStyle/>
+          <a:p>
+            <a:endParaRPr lang="es-CL"/>
+          </a:p>
+        </p:txBody>
       </p:sp>
       <p:sp>
         <p:nvSpPr>
@@ -6088,6 +6101,13 @@
           </a:solidFill>
           <a:ln/>
         </p:spPr>
+        <p:txBody>
+          <a:bodyPr/>
+          <a:lstStyle/>
+          <a:p>
+            <a:endParaRPr lang="es-CL"/>
+          </a:p>
+        </p:txBody>
       </p:sp>
       <p:sp>
         <p:nvSpPr>
@@ -6110,7 +6130,7 @@
           <a:bodyPr wrap="square" rtlCol="0" anchor="ctr"/>
           <a:lstStyle/>
           <a:p>
-            <a:pPr indent="0" marL="0">
+            <a:pPr marL="0" indent="0">
               <a:buNone/>
             </a:pPr>
             <a:r>
@@ -6149,7 +6169,7 @@
           <a:bodyPr wrap="square" rtlCol="0" anchor="ctr"/>
           <a:lstStyle/>
           <a:p>
-            <a:pPr indent="0" marL="0">
+            <a:pPr marL="0" indent="0">
               <a:buNone/>
             </a:pPr>
             <a:r>
@@ -6188,7 +6208,7 @@
           <a:bodyPr wrap="square" rtlCol="0" anchor="ctr"/>
           <a:lstStyle/>
           <a:p>
-            <a:pPr algn="r" indent="0" marL="0">
+            <a:pPr marL="0" indent="0" algn="r">
               <a:buNone/>
             </a:pPr>
             <a:r>
@@ -6227,7 +6247,7 @@
           <a:bodyPr wrap="square" rtlCol="0" anchor="ctr"/>
           <a:lstStyle/>
           <a:p>
-            <a:pPr indent="0" marL="0">
+            <a:pPr marL="0" indent="0">
               <a:buNone/>
             </a:pPr>
             <a:r>
@@ -6266,7 +6286,7 @@
           <a:bodyPr wrap="square" rtlCol="0" anchor="ctr"/>
           <a:lstStyle/>
           <a:p>
-            <a:pPr algn="r" indent="0" marL="0">
+            <a:pPr marL="0" indent="0" algn="r">
               <a:buNone/>
             </a:pPr>
             <a:r>
@@ -6305,7 +6325,7 @@
           <a:bodyPr wrap="square" rtlCol="0" anchor="ctr"/>
           <a:lstStyle/>
           <a:p>
-            <a:pPr indent="0" marL="0">
+            <a:pPr marL="0" indent="0">
               <a:buNone/>
             </a:pPr>
             <a:r>
@@ -6344,7 +6364,7 @@
           <a:bodyPr wrap="square" rtlCol="0" anchor="ctr"/>
           <a:lstStyle/>
           <a:p>
-            <a:pPr algn="r" indent="0" marL="0">
+            <a:pPr marL="0" indent="0" algn="r">
               <a:buNone/>
             </a:pPr>
             <a:r>
@@ -6383,6 +6403,13 @@
           </a:solidFill>
           <a:ln/>
         </p:spPr>
+        <p:txBody>
+          <a:bodyPr/>
+          <a:lstStyle/>
+          <a:p>
+            <a:endParaRPr lang="es-CL"/>
+          </a:p>
+        </p:txBody>
       </p:sp>
       <p:sp>
         <p:nvSpPr>
@@ -6405,6 +6432,13 @@
           </a:solidFill>
           <a:ln/>
         </p:spPr>
+        <p:txBody>
+          <a:bodyPr/>
+          <a:lstStyle/>
+          <a:p>
+            <a:endParaRPr lang="es-CL"/>
+          </a:p>
+        </p:txBody>
       </p:sp>
       <p:sp>
         <p:nvSpPr>
@@ -6427,6 +6461,13 @@
           </a:solidFill>
           <a:ln/>
         </p:spPr>
+        <p:txBody>
+          <a:bodyPr/>
+          <a:lstStyle/>
+          <a:p>
+            <a:endParaRPr lang="es-CL"/>
+          </a:p>
+        </p:txBody>
       </p:sp>
       <p:sp>
         <p:nvSpPr>
@@ -6449,7 +6490,7 @@
           <a:bodyPr wrap="square" rtlCol="0" anchor="ctr"/>
           <a:lstStyle/>
           <a:p>
-            <a:pPr indent="0" marL="0">
+            <a:pPr marL="0" indent="0">
               <a:buNone/>
             </a:pPr>
             <a:r>
@@ -6486,6 +6527,13 @@
           </a:solidFill>
           <a:ln/>
         </p:spPr>
+        <p:txBody>
+          <a:bodyPr/>
+          <a:lstStyle/>
+          <a:p>
+            <a:endParaRPr lang="es-CL"/>
+          </a:p>
+        </p:txBody>
       </p:sp>
       <p:sp>
         <p:nvSpPr>
@@ -6508,7 +6556,7 @@
           <a:bodyPr wrap="square" rtlCol="0" anchor="ctr"/>
           <a:lstStyle/>
           <a:p>
-            <a:pPr indent="0" marL="0">
+            <a:pPr marL="0" indent="0">
               <a:buNone/>
             </a:pPr>
             <a:r>
@@ -6547,6 +6595,13 @@
           </a:solidFill>
           <a:ln/>
         </p:spPr>
+        <p:txBody>
+          <a:bodyPr/>
+          <a:lstStyle/>
+          <a:p>
+            <a:endParaRPr lang="es-CL"/>
+          </a:p>
+        </p:txBody>
       </p:sp>
       <p:sp>
         <p:nvSpPr>
@@ -6569,7 +6624,7 @@
           <a:bodyPr wrap="square" rtlCol="0" anchor="ctr"/>
           <a:lstStyle/>
           <a:p>
-            <a:pPr algn="ctr" indent="0" marL="0">
+            <a:pPr marL="0" indent="0" algn="ctr">
               <a:buNone/>
             </a:pPr>
             <a:r>
@@ -6608,6 +6663,13 @@
           </a:solidFill>
           <a:ln/>
         </p:spPr>
+        <p:txBody>
+          <a:bodyPr/>
+          <a:lstStyle/>
+          <a:p>
+            <a:endParaRPr lang="es-CL"/>
+          </a:p>
+        </p:txBody>
       </p:sp>
       <p:sp>
         <p:nvSpPr>
@@ -6630,7 +6692,7 @@
           <a:bodyPr wrap="square" rtlCol="0" anchor="ctr"/>
           <a:lstStyle/>
           <a:p>
-            <a:pPr algn="ctr" indent="0" marL="0">
+            <a:pPr marL="0" indent="0" algn="ctr">
               <a:buNone/>
             </a:pPr>
             <a:r>
@@ -6669,7 +6731,7 @@
           <a:bodyPr wrap="square" rtlCol="0" anchor="ctr"/>
           <a:lstStyle/>
           <a:p>
-            <a:pPr indent="0" marL="0">
+            <a:pPr marL="0" indent="0">
               <a:buNone/>
             </a:pPr>
             <a:r>
@@ -6708,7 +6770,7 @@
           <a:bodyPr wrap="square" rtlCol="0" anchor="ctr"/>
           <a:lstStyle/>
           <a:p>
-            <a:pPr indent="0" marL="0">
+            <a:pPr marL="0" indent="0">
               <a:buNone/>
             </a:pPr>
             <a:r>
@@ -6748,6 +6810,13 @@
             <a:prstDash val="solid"/>
           </a:ln>
         </p:spPr>
+        <p:txBody>
+          <a:bodyPr/>
+          <a:lstStyle/>
+          <a:p>
+            <a:endParaRPr lang="es-CL"/>
+          </a:p>
+        </p:txBody>
       </p:sp>
       <p:sp>
         <p:nvSpPr>
@@ -6770,7 +6839,7 @@
           <a:bodyPr wrap="square" rtlCol="0" anchor="ctr"/>
           <a:lstStyle/>
           <a:p>
-            <a:pPr indent="0" marL="0">
+            <a:pPr marL="0" indent="0">
               <a:buNone/>
             </a:pPr>
             <a:r>
@@ -6809,6 +6878,13 @@
           </a:solidFill>
           <a:ln/>
         </p:spPr>
+        <p:txBody>
+          <a:bodyPr/>
+          <a:lstStyle/>
+          <a:p>
+            <a:endParaRPr lang="es-CL"/>
+          </a:p>
+        </p:txBody>
       </p:sp>
       <p:sp>
         <p:nvSpPr>
@@ -6831,7 +6907,7 @@
           <a:bodyPr wrap="square" rtlCol="0" anchor="ctr"/>
           <a:lstStyle/>
           <a:p>
-            <a:pPr indent="0" marL="0">
+            <a:pPr marL="0" indent="0">
               <a:buNone/>
             </a:pPr>
             <a:r>
@@ -6870,7 +6946,7 @@
           <a:bodyPr wrap="square" rtlCol="0" anchor="ctr"/>
           <a:lstStyle/>
           <a:p>
-            <a:pPr indent="0" marL="0">
+            <a:pPr marL="0" indent="0">
               <a:buNone/>
             </a:pPr>
             <a:r>
@@ -6909,6 +6985,13 @@
           </a:solidFill>
           <a:ln/>
         </p:spPr>
+        <p:txBody>
+          <a:bodyPr/>
+          <a:lstStyle/>
+          <a:p>
+            <a:endParaRPr lang="es-CL"/>
+          </a:p>
+        </p:txBody>
       </p:sp>
       <p:sp>
         <p:nvSpPr>
@@ -6931,7 +7014,7 @@
           <a:bodyPr wrap="square" rtlCol="0" anchor="ctr"/>
           <a:lstStyle/>
           <a:p>
-            <a:pPr indent="0" marL="0">
+            <a:pPr marL="0" indent="0">
               <a:buNone/>
             </a:pPr>
             <a:r>
@@ -6970,7 +7053,7 @@
           <a:bodyPr wrap="square" rtlCol="0" anchor="ctr"/>
           <a:lstStyle/>
           <a:p>
-            <a:pPr indent="0" marL="0">
+            <a:pPr marL="0" indent="0">
               <a:buNone/>
             </a:pPr>
             <a:r>
@@ -7009,6 +7092,13 @@
           </a:solidFill>
           <a:ln/>
         </p:spPr>
+        <p:txBody>
+          <a:bodyPr/>
+          <a:lstStyle/>
+          <a:p>
+            <a:endParaRPr lang="es-CL"/>
+          </a:p>
+        </p:txBody>
       </p:sp>
       <p:sp>
         <p:nvSpPr>
@@ -7031,7 +7121,7 @@
           <a:bodyPr wrap="square" rtlCol="0" anchor="ctr"/>
           <a:lstStyle/>
           <a:p>
-            <a:pPr indent="0" marL="0">
+            <a:pPr marL="0" indent="0">
               <a:buNone/>
             </a:pPr>
             <a:r>
@@ -7070,6 +7160,13 @@
           </a:solidFill>
           <a:ln/>
         </p:spPr>
+        <p:txBody>
+          <a:bodyPr/>
+          <a:lstStyle/>
+          <a:p>
+            <a:endParaRPr lang="es-CL"/>
+          </a:p>
+        </p:txBody>
       </p:sp>
       <p:sp>
         <p:nvSpPr>
@@ -7092,7 +7189,7 @@
           <a:bodyPr wrap="square" rtlCol="0" anchor="ctr"/>
           <a:lstStyle/>
           <a:p>
-            <a:pPr algn="ctr" indent="0" marL="0">
+            <a:pPr marL="0" indent="0" algn="ctr">
               <a:buNone/>
             </a:pPr>
             <a:r>
@@ -7131,7 +7228,7 @@
           <a:bodyPr wrap="square" rtlCol="0" anchor="ctr"/>
           <a:lstStyle/>
           <a:p>
-            <a:pPr algn="r" indent="0" marL="0">
+            <a:pPr marL="0" indent="0" algn="r">
               <a:buNone/>
             </a:pPr>
             <a:r>
@@ -7165,6 +7262,7 @@
         <a:solidFill>
           <a:srgbClr val="F2F2F2"/>
         </a:solidFill>
+        <a:effectLst/>
       </p:bgPr>
     </p:bg>
     <p:spTree>
@@ -7202,7 +7300,7 @@
           <a:bodyPr wrap="square" rtlCol="0" anchor="ctr"/>
           <a:lstStyle/>
           <a:p>
-            <a:pPr indent="0" marL="0">
+            <a:pPr marL="0" indent="0">
               <a:buNone/>
             </a:pPr>
             <a:r>
@@ -7241,7 +7339,7 @@
           <a:bodyPr wrap="square" rtlCol="0" anchor="ctr"/>
           <a:lstStyle/>
           <a:p>
-            <a:pPr indent="0" marL="0">
+            <a:pPr marL="0" indent="0">
               <a:buNone/>
             </a:pPr>
             <a:r>
@@ -7280,6 +7378,13 @@
           </a:solidFill>
           <a:ln/>
         </p:spPr>
+        <p:txBody>
+          <a:bodyPr/>
+          <a:lstStyle/>
+          <a:p>
+            <a:endParaRPr lang="es-CL"/>
+          </a:p>
+        </p:txBody>
       </p:sp>
       <p:sp>
         <p:nvSpPr>
@@ -7302,6 +7407,13 @@
           </a:solidFill>
           <a:ln/>
         </p:spPr>
+        <p:txBody>
+          <a:bodyPr/>
+          <a:lstStyle/>
+          <a:p>
+            <a:endParaRPr lang="es-CL"/>
+          </a:p>
+        </p:txBody>
       </p:sp>
       <p:sp>
         <p:nvSpPr>
@@ -7324,6 +7436,13 @@
           </a:solidFill>
           <a:ln/>
         </p:spPr>
+        <p:txBody>
+          <a:bodyPr/>
+          <a:lstStyle/>
+          <a:p>
+            <a:endParaRPr lang="es-CL"/>
+          </a:p>
+        </p:txBody>
       </p:sp>
       <p:sp>
         <p:nvSpPr>
@@ -7346,7 +7465,7 @@
           <a:bodyPr wrap="square" rtlCol="0" anchor="ctr"/>
           <a:lstStyle/>
           <a:p>
-            <a:pPr indent="0" marL="0">
+            <a:pPr marL="0" indent="0">
               <a:buNone/>
             </a:pPr>
             <a:r>
@@ -7383,6 +7502,13 @@
           </a:solidFill>
           <a:ln/>
         </p:spPr>
+        <p:txBody>
+          <a:bodyPr/>
+          <a:lstStyle/>
+          <a:p>
+            <a:endParaRPr lang="es-CL"/>
+          </a:p>
+        </p:txBody>
       </p:sp>
       <p:sp>
         <p:nvSpPr>
@@ -7405,7 +7531,7 @@
           <a:bodyPr wrap="square" rtlCol="0" anchor="ctr"/>
           <a:lstStyle/>
           <a:p>
-            <a:pPr indent="0" marL="0">
+            <a:pPr marL="0" indent="0">
               <a:buNone/>
             </a:pPr>
             <a:r>
@@ -7444,7 +7570,7 @@
           <a:bodyPr wrap="square" rtlCol="0" anchor="ctr"/>
           <a:lstStyle/>
           <a:p>
-            <a:pPr indent="0" marL="0">
+            <a:pPr marL="0" indent="0">
               <a:buNone/>
             </a:pPr>
             <a:r>
@@ -7481,6 +7607,13 @@
           </a:solidFill>
           <a:ln/>
         </p:spPr>
+        <p:txBody>
+          <a:bodyPr/>
+          <a:lstStyle/>
+          <a:p>
+            <a:endParaRPr lang="es-CL"/>
+          </a:p>
+        </p:txBody>
       </p:sp>
       <p:sp>
         <p:nvSpPr>
@@ -7501,6 +7634,13 @@
           </a:solidFill>
           <a:ln/>
         </p:spPr>
+        <p:txBody>
+          <a:bodyPr/>
+          <a:lstStyle/>
+          <a:p>
+            <a:endParaRPr lang="es-CL"/>
+          </a:p>
+        </p:txBody>
       </p:sp>
       <p:sp>
         <p:nvSpPr>
@@ -7523,7 +7663,7 @@
           <a:bodyPr wrap="square" rtlCol="0" anchor="ctr"/>
           <a:lstStyle/>
           <a:p>
-            <a:pPr indent="0" marL="0">
+            <a:pPr marL="0" indent="0">
               <a:buNone/>
             </a:pPr>
             <a:r>
@@ -7562,7 +7702,7 @@
           <a:bodyPr wrap="square" rtlCol="0" anchor="ctr"/>
           <a:lstStyle/>
           <a:p>
-            <a:pPr indent="0" marL="0">
+            <a:pPr marL="0" indent="0">
               <a:buNone/>
             </a:pPr>
             <a:r>
@@ -7599,6 +7739,13 @@
           </a:solidFill>
           <a:ln/>
         </p:spPr>
+        <p:txBody>
+          <a:bodyPr/>
+          <a:lstStyle/>
+          <a:p>
+            <a:endParaRPr lang="es-CL"/>
+          </a:p>
+        </p:txBody>
       </p:sp>
       <p:sp>
         <p:nvSpPr>
@@ -7619,6 +7766,13 @@
           </a:solidFill>
           <a:ln/>
         </p:spPr>
+        <p:txBody>
+          <a:bodyPr/>
+          <a:lstStyle/>
+          <a:p>
+            <a:endParaRPr lang="es-CL"/>
+          </a:p>
+        </p:txBody>
       </p:sp>
       <p:sp>
         <p:nvSpPr>
@@ -7641,7 +7795,7 @@
           <a:bodyPr wrap="square" rtlCol="0" anchor="ctr"/>
           <a:lstStyle/>
           <a:p>
-            <a:pPr indent="0" marL="0">
+            <a:pPr marL="0" indent="0">
               <a:buNone/>
             </a:pPr>
             <a:r>
@@ -7680,7 +7834,7 @@
           <a:bodyPr wrap="square" rtlCol="0" anchor="ctr"/>
           <a:lstStyle/>
           <a:p>
-            <a:pPr indent="0" marL="0">
+            <a:pPr marL="0" indent="0">
               <a:buNone/>
             </a:pPr>
             <a:r>
@@ -7717,6 +7871,13 @@
           </a:solidFill>
           <a:ln/>
         </p:spPr>
+        <p:txBody>
+          <a:bodyPr/>
+          <a:lstStyle/>
+          <a:p>
+            <a:endParaRPr lang="es-CL"/>
+          </a:p>
+        </p:txBody>
       </p:sp>
       <p:sp>
         <p:nvSpPr>
@@ -7737,6 +7898,13 @@
           </a:solidFill>
           <a:ln/>
         </p:spPr>
+        <p:txBody>
+          <a:bodyPr/>
+          <a:lstStyle/>
+          <a:p>
+            <a:endParaRPr lang="es-CL"/>
+          </a:p>
+        </p:txBody>
       </p:sp>
       <p:sp>
         <p:nvSpPr>
@@ -7759,7 +7927,7 @@
           <a:bodyPr wrap="square" rtlCol="0" anchor="ctr"/>
           <a:lstStyle/>
           <a:p>
-            <a:pPr indent="0" marL="0">
+            <a:pPr marL="0" indent="0">
               <a:buNone/>
             </a:pPr>
             <a:r>
@@ -7798,7 +7966,7 @@
           <a:bodyPr wrap="square" rtlCol="0" anchor="ctr"/>
           <a:lstStyle/>
           <a:p>
-            <a:pPr indent="0" marL="0">
+            <a:pPr marL="0" indent="0">
               <a:buNone/>
             </a:pPr>
             <a:r>
@@ -7835,6 +8003,13 @@
           </a:solidFill>
           <a:ln/>
         </p:spPr>
+        <p:txBody>
+          <a:bodyPr/>
+          <a:lstStyle/>
+          <a:p>
+            <a:endParaRPr lang="es-CL"/>
+          </a:p>
+        </p:txBody>
       </p:sp>
       <p:sp>
         <p:nvSpPr>
@@ -7855,6 +8030,13 @@
           </a:solidFill>
           <a:ln/>
         </p:spPr>
+        <p:txBody>
+          <a:bodyPr/>
+          <a:lstStyle/>
+          <a:p>
+            <a:endParaRPr lang="es-CL"/>
+          </a:p>
+        </p:txBody>
       </p:sp>
       <p:sp>
         <p:nvSpPr>
@@ -7877,7 +8059,7 @@
           <a:bodyPr wrap="square" rtlCol="0" anchor="ctr"/>
           <a:lstStyle/>
           <a:p>
-            <a:pPr indent="0" marL="0">
+            <a:pPr marL="0" indent="0">
               <a:buNone/>
             </a:pPr>
             <a:r>
@@ -7921,6 +8103,13 @@
             <a:prstDash val="solid"/>
           </a:ln>
         </p:spPr>
+        <p:txBody>
+          <a:bodyPr/>
+          <a:lstStyle/>
+          <a:p>
+            <a:endParaRPr lang="es-CL"/>
+          </a:p>
+        </p:txBody>
       </p:sp>
       <p:sp>
         <p:nvSpPr>
@@ -7943,7 +8132,7 @@
           <a:bodyPr wrap="square" rtlCol="0" anchor="ctr"/>
           <a:lstStyle/>
           <a:p>
-            <a:pPr algn="ctr" indent="0" marL="0">
+            <a:pPr marL="0" indent="0" algn="ctr">
               <a:buNone/>
             </a:pPr>
             <a:r>
@@ -7982,6 +8171,13 @@
           </a:solidFill>
           <a:ln/>
         </p:spPr>
+        <p:txBody>
+          <a:bodyPr/>
+          <a:lstStyle/>
+          <a:p>
+            <a:endParaRPr lang="es-CL"/>
+          </a:p>
+        </p:txBody>
       </p:sp>
       <p:sp>
         <p:nvSpPr>
@@ -8004,6 +8200,13 @@
           </a:solidFill>
           <a:ln/>
         </p:spPr>
+        <p:txBody>
+          <a:bodyPr/>
+          <a:lstStyle/>
+          <a:p>
+            <a:endParaRPr lang="es-CL"/>
+          </a:p>
+        </p:txBody>
       </p:sp>
       <p:sp>
         <p:nvSpPr>
@@ -8026,6 +8229,13 @@
           </a:solidFill>
           <a:ln/>
         </p:spPr>
+        <p:txBody>
+          <a:bodyPr/>
+          <a:lstStyle/>
+          <a:p>
+            <a:endParaRPr lang="es-CL"/>
+          </a:p>
+        </p:txBody>
       </p:sp>
       <p:sp>
         <p:nvSpPr>
@@ -8048,7 +8258,7 @@
           <a:bodyPr wrap="square" rtlCol="0" anchor="ctr"/>
           <a:lstStyle/>
           <a:p>
-            <a:pPr indent="0" marL="0">
+            <a:pPr marL="0" indent="0">
               <a:buNone/>
             </a:pPr>
             <a:r>
@@ -8085,6 +8295,13 @@
           </a:solidFill>
           <a:ln/>
         </p:spPr>
+        <p:txBody>
+          <a:bodyPr/>
+          <a:lstStyle/>
+          <a:p>
+            <a:endParaRPr lang="es-CL"/>
+          </a:p>
+        </p:txBody>
       </p:sp>
       <p:sp>
         <p:nvSpPr>
@@ -8107,7 +8324,7 @@
           <a:bodyPr wrap="square" rtlCol="0" anchor="ctr"/>
           <a:lstStyle/>
           <a:p>
-            <a:pPr indent="0" marL="0">
+            <a:pPr marL="0" indent="0">
               <a:buNone/>
             </a:pPr>
             <a:r>
@@ -8146,6 +8363,13 @@
           </a:solidFill>
           <a:ln/>
         </p:spPr>
+        <p:txBody>
+          <a:bodyPr/>
+          <a:lstStyle/>
+          <a:p>
+            <a:endParaRPr lang="es-CL"/>
+          </a:p>
+        </p:txBody>
       </p:sp>
       <p:sp>
         <p:nvSpPr>
@@ -8168,7 +8392,7 @@
           <a:bodyPr wrap="square" rtlCol="0" anchor="ctr"/>
           <a:lstStyle/>
           <a:p>
-            <a:pPr indent="0" marL="0">
+            <a:pPr marL="0" indent="0">
               <a:buNone/>
             </a:pPr>
             <a:r>
@@ -8207,7 +8431,7 @@
           <a:bodyPr wrap="square" rtlCol="0" anchor="ctr"/>
           <a:lstStyle/>
           <a:p>
-            <a:pPr indent="0" marL="0">
+            <a:pPr marL="0" indent="0">
               <a:buNone/>
             </a:pPr>
             <a:r>
@@ -8246,7 +8470,7 @@
           <a:bodyPr wrap="square" rtlCol="0" anchor="ctr"/>
           <a:lstStyle/>
           <a:p>
-            <a:pPr indent="0" marL="0">
+            <a:pPr marL="0" indent="0">
               <a:buNone/>
             </a:pPr>
             <a:r>
@@ -8285,7 +8509,7 @@
           <a:bodyPr wrap="square" rtlCol="0" anchor="ctr"/>
           <a:lstStyle/>
           <a:p>
-            <a:pPr indent="0" marL="0">
+            <a:pPr marL="0" indent="0">
               <a:buNone/>
             </a:pPr>
             <a:r>
@@ -8324,7 +8548,7 @@
           <a:bodyPr wrap="square" rtlCol="0" anchor="ctr"/>
           <a:lstStyle/>
           <a:p>
-            <a:pPr indent="0" marL="0">
+            <a:pPr marL="0" indent="0">
               <a:buNone/>
             </a:pPr>
             <a:r>
@@ -8363,7 +8587,7 @@
           <a:bodyPr wrap="square" rtlCol="0" anchor="ctr"/>
           <a:lstStyle/>
           <a:p>
-            <a:pPr indent="0" marL="0">
+            <a:pPr marL="0" indent="0">
               <a:buNone/>
             </a:pPr>
             <a:r>
@@ -8400,6 +8624,13 @@
           </a:solidFill>
           <a:ln/>
         </p:spPr>
+        <p:txBody>
+          <a:bodyPr/>
+          <a:lstStyle/>
+          <a:p>
+            <a:endParaRPr lang="es-CL"/>
+          </a:p>
+        </p:txBody>
       </p:sp>
       <p:sp>
         <p:nvSpPr>
@@ -8420,6 +8651,13 @@
           </a:solidFill>
           <a:ln/>
         </p:spPr>
+        <p:txBody>
+          <a:bodyPr/>
+          <a:lstStyle/>
+          <a:p>
+            <a:endParaRPr lang="es-CL"/>
+          </a:p>
+        </p:txBody>
       </p:sp>
       <p:sp>
         <p:nvSpPr>
@@ -8442,7 +8680,7 @@
           <a:bodyPr wrap="square" rtlCol="0" anchor="ctr"/>
           <a:lstStyle/>
           <a:p>
-            <a:pPr indent="0" marL="0">
+            <a:pPr marL="0" indent="0">
               <a:buNone/>
             </a:pPr>
             <a:r>
@@ -8481,7 +8719,7 @@
           <a:bodyPr wrap="square" rtlCol="0" anchor="ctr"/>
           <a:lstStyle/>
           <a:p>
-            <a:pPr indent="0" marL="0">
+            <a:pPr marL="0" indent="0">
               <a:buNone/>
             </a:pPr>
             <a:r>
@@ -8518,6 +8756,13 @@
           </a:solidFill>
           <a:ln/>
         </p:spPr>
+        <p:txBody>
+          <a:bodyPr/>
+          <a:lstStyle/>
+          <a:p>
+            <a:endParaRPr lang="es-CL"/>
+          </a:p>
+        </p:txBody>
       </p:sp>
       <p:sp>
         <p:nvSpPr>
@@ -8538,6 +8783,13 @@
           </a:solidFill>
           <a:ln/>
         </p:spPr>
+        <p:txBody>
+          <a:bodyPr/>
+          <a:lstStyle/>
+          <a:p>
+            <a:endParaRPr lang="es-CL"/>
+          </a:p>
+        </p:txBody>
       </p:sp>
       <p:sp>
         <p:nvSpPr>
@@ -8560,7 +8812,7 @@
           <a:bodyPr wrap="square" rtlCol="0" anchor="ctr"/>
           <a:lstStyle/>
           <a:p>
-            <a:pPr indent="0" marL="0">
+            <a:pPr marL="0" indent="0">
               <a:buNone/>
             </a:pPr>
             <a:r>
@@ -8599,7 +8851,7 @@
           <a:bodyPr wrap="square" rtlCol="0" anchor="ctr"/>
           <a:lstStyle/>
           <a:p>
-            <a:pPr indent="0" marL="0">
+            <a:pPr marL="0" indent="0">
               <a:buNone/>
             </a:pPr>
             <a:r>
@@ -8636,6 +8888,13 @@
           </a:solidFill>
           <a:ln/>
         </p:spPr>
+        <p:txBody>
+          <a:bodyPr/>
+          <a:lstStyle/>
+          <a:p>
+            <a:endParaRPr lang="es-CL"/>
+          </a:p>
+        </p:txBody>
       </p:sp>
       <p:sp>
         <p:nvSpPr>
@@ -8656,6 +8915,13 @@
           </a:solidFill>
           <a:ln/>
         </p:spPr>
+        <p:txBody>
+          <a:bodyPr/>
+          <a:lstStyle/>
+          <a:p>
+            <a:endParaRPr lang="es-CL"/>
+          </a:p>
+        </p:txBody>
       </p:sp>
       <p:sp>
         <p:nvSpPr>
@@ -8678,7 +8944,7 @@
           <a:bodyPr wrap="square" rtlCol="0" anchor="ctr"/>
           <a:lstStyle/>
           <a:p>
-            <a:pPr indent="0" marL="0">
+            <a:pPr marL="0" indent="0">
               <a:buNone/>
             </a:pPr>
             <a:r>
@@ -8717,7 +8983,7 @@
           <a:bodyPr wrap="square" rtlCol="0" anchor="ctr"/>
           <a:lstStyle/>
           <a:p>
-            <a:pPr indent="0" marL="0">
+            <a:pPr marL="0" indent="0">
               <a:buNone/>
             </a:pPr>
             <a:r>
@@ -8754,6 +9020,13 @@
           </a:solidFill>
           <a:ln/>
         </p:spPr>
+        <p:txBody>
+          <a:bodyPr/>
+          <a:lstStyle/>
+          <a:p>
+            <a:endParaRPr lang="es-CL"/>
+          </a:p>
+        </p:txBody>
       </p:sp>
       <p:sp>
         <p:nvSpPr>
@@ -8774,6 +9047,13 @@
           </a:solidFill>
           <a:ln/>
         </p:spPr>
+        <p:txBody>
+          <a:bodyPr/>
+          <a:lstStyle/>
+          <a:p>
+            <a:endParaRPr lang="es-CL"/>
+          </a:p>
+        </p:txBody>
       </p:sp>
       <p:sp>
         <p:nvSpPr>
@@ -8796,7 +9076,7 @@
           <a:bodyPr wrap="square" rtlCol="0" anchor="ctr"/>
           <a:lstStyle/>
           <a:p>
-            <a:pPr indent="0" marL="0">
+            <a:pPr marL="0" indent="0">
               <a:buNone/>
             </a:pPr>
             <a:r>
@@ -8835,7 +9115,7 @@
           <a:bodyPr wrap="square" rtlCol="0" anchor="ctr"/>
           <a:lstStyle/>
           <a:p>
-            <a:pPr indent="0" marL="0">
+            <a:pPr marL="0" indent="0">
               <a:buNone/>
             </a:pPr>
             <a:r>
@@ -8872,6 +9152,13 @@
           </a:solidFill>
           <a:ln/>
         </p:spPr>
+        <p:txBody>
+          <a:bodyPr/>
+          <a:lstStyle/>
+          <a:p>
+            <a:endParaRPr lang="es-CL"/>
+          </a:p>
+        </p:txBody>
       </p:sp>
       <p:sp>
         <p:nvSpPr>
@@ -8892,6 +9179,13 @@
           </a:solidFill>
           <a:ln/>
         </p:spPr>
+        <p:txBody>
+          <a:bodyPr/>
+          <a:lstStyle/>
+          <a:p>
+            <a:endParaRPr lang="es-CL"/>
+          </a:p>
+        </p:txBody>
       </p:sp>
       <p:sp>
         <p:nvSpPr>
@@ -8914,7 +9208,7 @@
           <a:bodyPr wrap="square" rtlCol="0" anchor="ctr"/>
           <a:lstStyle/>
           <a:p>
-            <a:pPr indent="0" marL="0">
+            <a:pPr marL="0" indent="0">
               <a:buNone/>
             </a:pPr>
             <a:r>
@@ -8953,7 +9247,7 @@
           <a:bodyPr wrap="square" rtlCol="0" anchor="ctr"/>
           <a:lstStyle/>
           <a:p>
-            <a:pPr algn="r" indent="0" marL="0">
+            <a:pPr marL="0" indent="0" algn="r">
               <a:buNone/>
             </a:pPr>
             <a:r>
@@ -8987,6 +9281,7 @@
         <a:solidFill>
           <a:srgbClr val="FFFFFF"/>
         </a:solidFill>
+        <a:effectLst/>
       </p:bgPr>
     </p:bg>
     <p:spTree>
@@ -9024,7 +9319,7 @@
           <a:bodyPr wrap="square" rtlCol="0" anchor="ctr"/>
           <a:lstStyle/>
           <a:p>
-            <a:pPr indent="0" marL="0">
+            <a:pPr marL="0" indent="0">
               <a:buNone/>
             </a:pPr>
             <a:r>
@@ -9063,7 +9358,7 @@
           <a:bodyPr wrap="square" rtlCol="0" anchor="ctr"/>
           <a:lstStyle/>
           <a:p>
-            <a:pPr indent="0" marL="0">
+            <a:pPr marL="0" indent="0">
               <a:buNone/>
             </a:pPr>
             <a:r>
@@ -9100,6 +9395,13 @@
           </a:solidFill>
           <a:ln/>
         </p:spPr>
+        <p:txBody>
+          <a:bodyPr/>
+          <a:lstStyle/>
+          <a:p>
+            <a:endParaRPr lang="es-CL"/>
+          </a:p>
+        </p:txBody>
       </p:sp>
       <p:sp>
         <p:nvSpPr>
@@ -9122,7 +9424,7 @@
           <a:bodyPr wrap="square" rtlCol="0" anchor="ctr"/>
           <a:lstStyle/>
           <a:p>
-            <a:pPr indent="0" marL="0">
+            <a:pPr marL="0" indent="0">
               <a:buNone/>
             </a:pPr>
             <a:r>
@@ -9161,7 +9463,7 @@
           <a:bodyPr wrap="square" rtlCol="0" anchor="ctr"/>
           <a:lstStyle/>
           <a:p>
-            <a:pPr indent="0" marL="0">
+            <a:pPr marL="0" indent="0">
               <a:buNone/>
             </a:pPr>
             <a:r>
@@ -9203,6 +9505,13 @@
             <a:prstDash val="solid"/>
           </a:ln>
         </p:spPr>
+        <p:txBody>
+          <a:bodyPr/>
+          <a:lstStyle/>
+          <a:p>
+            <a:endParaRPr lang="es-CL"/>
+          </a:p>
+        </p:txBody>
       </p:sp>
       <p:sp>
         <p:nvSpPr>
@@ -9223,6 +9532,13 @@
           </a:solidFill>
           <a:ln/>
         </p:spPr>
+        <p:txBody>
+          <a:bodyPr/>
+          <a:lstStyle/>
+          <a:p>
+            <a:endParaRPr lang="es-CL"/>
+          </a:p>
+        </p:txBody>
       </p:sp>
       <p:sp>
         <p:nvSpPr>
@@ -9245,7 +9561,7 @@
           <a:bodyPr wrap="square" rtlCol="0" anchor="ctr"/>
           <a:lstStyle/>
           <a:p>
-            <a:pPr algn="ctr" indent="0" marL="0">
+            <a:pPr marL="0" indent="0" algn="ctr">
               <a:buNone/>
             </a:pPr>
             <a:r>
@@ -9284,7 +9600,7 @@
           <a:bodyPr wrap="square" rtlCol="0" anchor="ctr"/>
           <a:lstStyle/>
           <a:p>
-            <a:pPr algn="ctr" indent="0" marL="0">
+            <a:pPr marL="0" indent="0" algn="ctr">
               <a:buNone/>
             </a:pPr>
             <a:r>
@@ -9323,7 +9639,7 @@
           <a:bodyPr wrap="square" rtlCol="0" anchor="ctr"/>
           <a:lstStyle/>
           <a:p>
-            <a:pPr algn="ctr" indent="0" marL="0">
+            <a:pPr marL="0" indent="0" algn="ctr">
               <a:buNone/>
             </a:pPr>
             <a:r>
@@ -9365,6 +9681,13 @@
             <a:prstDash val="solid"/>
           </a:ln>
         </p:spPr>
+        <p:txBody>
+          <a:bodyPr/>
+          <a:lstStyle/>
+          <a:p>
+            <a:endParaRPr lang="es-CL"/>
+          </a:p>
+        </p:txBody>
       </p:sp>
       <p:sp>
         <p:nvSpPr>
@@ -9385,6 +9708,13 @@
           </a:solidFill>
           <a:ln/>
         </p:spPr>
+        <p:txBody>
+          <a:bodyPr/>
+          <a:lstStyle/>
+          <a:p>
+            <a:endParaRPr lang="es-CL"/>
+          </a:p>
+        </p:txBody>
       </p:sp>
       <p:sp>
         <p:nvSpPr>
@@ -9407,7 +9737,7 @@
           <a:bodyPr wrap="square" rtlCol="0" anchor="ctr"/>
           <a:lstStyle/>
           <a:p>
-            <a:pPr algn="ctr" indent="0" marL="0">
+            <a:pPr marL="0" indent="0" algn="ctr">
               <a:buNone/>
             </a:pPr>
             <a:r>
@@ -9446,7 +9776,7 @@
           <a:bodyPr wrap="square" rtlCol="0" anchor="ctr"/>
           <a:lstStyle/>
           <a:p>
-            <a:pPr algn="ctr" indent="0" marL="0">
+            <a:pPr marL="0" indent="0" algn="ctr">
               <a:buNone/>
             </a:pPr>
             <a:r>
@@ -9485,7 +9815,7 @@
           <a:bodyPr wrap="square" rtlCol="0" anchor="ctr"/>
           <a:lstStyle/>
           <a:p>
-            <a:pPr algn="ctr" indent="0" marL="0">
+            <a:pPr marL="0" indent="0" algn="ctr">
               <a:buNone/>
             </a:pPr>
             <a:r>
@@ -9527,6 +9857,13 @@
             <a:prstDash val="solid"/>
           </a:ln>
         </p:spPr>
+        <p:txBody>
+          <a:bodyPr/>
+          <a:lstStyle/>
+          <a:p>
+            <a:endParaRPr lang="es-CL"/>
+          </a:p>
+        </p:txBody>
       </p:sp>
       <p:sp>
         <p:nvSpPr>
@@ -9547,6 +9884,13 @@
           </a:solidFill>
           <a:ln/>
         </p:spPr>
+        <p:txBody>
+          <a:bodyPr/>
+          <a:lstStyle/>
+          <a:p>
+            <a:endParaRPr lang="es-CL"/>
+          </a:p>
+        </p:txBody>
       </p:sp>
       <p:sp>
         <p:nvSpPr>
@@ -9569,7 +9913,7 @@
           <a:bodyPr wrap="square" rtlCol="0" anchor="ctr"/>
           <a:lstStyle/>
           <a:p>
-            <a:pPr algn="ctr" indent="0" marL="0">
+            <a:pPr marL="0" indent="0" algn="ctr">
               <a:buNone/>
             </a:pPr>
             <a:r>
@@ -9608,7 +9952,7 @@
           <a:bodyPr wrap="square" rtlCol="0" anchor="ctr"/>
           <a:lstStyle/>
           <a:p>
-            <a:pPr algn="ctr" indent="0" marL="0">
+            <a:pPr marL="0" indent="0" algn="ctr">
               <a:buNone/>
             </a:pPr>
             <a:r>
@@ -9647,7 +9991,7 @@
           <a:bodyPr wrap="square" rtlCol="0" anchor="ctr"/>
           <a:lstStyle/>
           <a:p>
-            <a:pPr algn="ctr" indent="0" marL="0">
+            <a:pPr marL="0" indent="0" algn="ctr">
               <a:buNone/>
             </a:pPr>
             <a:r>
@@ -9686,7 +10030,7 @@
           <a:bodyPr wrap="square" rtlCol="0" anchor="ctr"/>
           <a:lstStyle/>
           <a:p>
-            <a:pPr algn="r" indent="0" marL="0">
+            <a:pPr marL="0" indent="0" algn="r">
               <a:buNone/>
             </a:pPr>
             <a:r>
@@ -9720,6 +10064,7 @@
         <a:solidFill>
           <a:srgbClr val="F2F2F2"/>
         </a:solidFill>
+        <a:effectLst/>
       </p:bgPr>
     </p:bg>
     <p:spTree>
@@ -9757,7 +10102,7 @@
           <a:bodyPr wrap="square" rtlCol="0" anchor="ctr"/>
           <a:lstStyle/>
           <a:p>
-            <a:pPr indent="0" marL="0">
+            <a:pPr marL="0" indent="0">
               <a:buNone/>
             </a:pPr>
             <a:r>
@@ -9796,7 +10141,7 @@
           <a:bodyPr wrap="square" rtlCol="0" anchor="ctr"/>
           <a:lstStyle/>
           <a:p>
-            <a:pPr indent="0" marL="0">
+            <a:pPr marL="0" indent="0">
               <a:buNone/>
             </a:pPr>
             <a:r>
@@ -9833,6 +10178,13 @@
           </a:solidFill>
           <a:ln/>
         </p:spPr>
+        <p:txBody>
+          <a:bodyPr/>
+          <a:lstStyle/>
+          <a:p>
+            <a:endParaRPr lang="es-CL"/>
+          </a:p>
+        </p:txBody>
       </p:sp>
       <p:sp>
         <p:nvSpPr>
@@ -9853,6 +10205,13 @@
           </a:solidFill>
           <a:ln/>
         </p:spPr>
+        <p:txBody>
+          <a:bodyPr/>
+          <a:lstStyle/>
+          <a:p>
+            <a:endParaRPr lang="es-CL"/>
+          </a:p>
+        </p:txBody>
       </p:sp>
       <p:sp>
         <p:nvSpPr>
@@ -9875,7 +10234,7 @@
           <a:bodyPr wrap="square" rtlCol="0" anchor="ctr"/>
           <a:lstStyle/>
           <a:p>
-            <a:pPr algn="ctr" indent="0" marL="0">
+            <a:pPr marL="0" indent="0" algn="ctr">
               <a:buNone/>
             </a:pPr>
             <a:r>
@@ -9914,7 +10273,7 @@
           <a:bodyPr wrap="square" rtlCol="0" anchor="ctr"/>
           <a:lstStyle/>
           <a:p>
-            <a:pPr algn="ctr" indent="0" marL="0">
+            <a:pPr marL="0" indent="0" algn="ctr">
               <a:buNone/>
             </a:pPr>
             <a:r>
@@ -9953,7 +10312,7 @@
           <a:bodyPr wrap="square" rtlCol="0" anchor="ctr"/>
           <a:lstStyle/>
           <a:p>
-            <a:pPr algn="ctr" indent="0" marL="0">
+            <a:pPr marL="0" indent="0" algn="ctr">
               <a:buNone/>
             </a:pPr>
             <a:r>
@@ -9990,6 +10349,13 @@
           </a:solidFill>
           <a:ln/>
         </p:spPr>
+        <p:txBody>
+          <a:bodyPr/>
+          <a:lstStyle/>
+          <a:p>
+            <a:endParaRPr lang="es-CL"/>
+          </a:p>
+        </p:txBody>
       </p:sp>
       <p:sp>
         <p:nvSpPr>
@@ -10010,6 +10376,13 @@
           </a:solidFill>
           <a:ln/>
         </p:spPr>
+        <p:txBody>
+          <a:bodyPr/>
+          <a:lstStyle/>
+          <a:p>
+            <a:endParaRPr lang="es-CL"/>
+          </a:p>
+        </p:txBody>
       </p:sp>
       <p:sp>
         <p:nvSpPr>
@@ -10032,7 +10405,7 @@
           <a:bodyPr wrap="square" rtlCol="0" anchor="ctr"/>
           <a:lstStyle/>
           <a:p>
-            <a:pPr algn="ctr" indent="0" marL="0">
+            <a:pPr marL="0" indent="0" algn="ctr">
               <a:buNone/>
             </a:pPr>
             <a:r>
@@ -10071,7 +10444,7 @@
           <a:bodyPr wrap="square" rtlCol="0" anchor="ctr"/>
           <a:lstStyle/>
           <a:p>
-            <a:pPr algn="ctr" indent="0" marL="0">
+            <a:pPr marL="0" indent="0" algn="ctr">
               <a:buNone/>
             </a:pPr>
             <a:r>
@@ -10110,7 +10483,7 @@
           <a:bodyPr wrap="square" rtlCol="0" anchor="ctr"/>
           <a:lstStyle/>
           <a:p>
-            <a:pPr algn="ctr" indent="0" marL="0">
+            <a:pPr marL="0" indent="0" algn="ctr">
               <a:buNone/>
             </a:pPr>
             <a:r>
@@ -10147,6 +10520,13 @@
           </a:solidFill>
           <a:ln/>
         </p:spPr>
+        <p:txBody>
+          <a:bodyPr/>
+          <a:lstStyle/>
+          <a:p>
+            <a:endParaRPr lang="es-CL"/>
+          </a:p>
+        </p:txBody>
       </p:sp>
       <p:sp>
         <p:nvSpPr>
@@ -10167,6 +10547,13 @@
           </a:solidFill>
           <a:ln/>
         </p:spPr>
+        <p:txBody>
+          <a:bodyPr/>
+          <a:lstStyle/>
+          <a:p>
+            <a:endParaRPr lang="es-CL"/>
+          </a:p>
+        </p:txBody>
       </p:sp>
       <p:sp>
         <p:nvSpPr>
@@ -10189,7 +10576,7 @@
           <a:bodyPr wrap="square" rtlCol="0" anchor="ctr"/>
           <a:lstStyle/>
           <a:p>
-            <a:pPr algn="ctr" indent="0" marL="0">
+            <a:pPr marL="0" indent="0" algn="ctr">
               <a:buNone/>
             </a:pPr>
             <a:r>
@@ -10228,7 +10615,7 @@
           <a:bodyPr wrap="square" rtlCol="0" anchor="ctr"/>
           <a:lstStyle/>
           <a:p>
-            <a:pPr algn="ctr" indent="0" marL="0">
+            <a:pPr marL="0" indent="0" algn="ctr">
               <a:buNone/>
             </a:pPr>
             <a:r>
@@ -10267,7 +10654,7 @@
           <a:bodyPr wrap="square" rtlCol="0" anchor="ctr"/>
           <a:lstStyle/>
           <a:p>
-            <a:pPr algn="ctr" indent="0" marL="0">
+            <a:pPr marL="0" indent="0" algn="ctr">
               <a:buNone/>
             </a:pPr>
             <a:r>
@@ -10306,7 +10693,7 @@
           <a:bodyPr wrap="square" rtlCol="0" anchor="ctr"/>
           <a:lstStyle/>
           <a:p>
-            <a:pPr algn="r" indent="0" marL="0">
+            <a:pPr marL="0" indent="0" algn="r">
               <a:buNone/>
             </a:pPr>
             <a:r>
@@ -10340,6 +10727,7 @@
         <a:solidFill>
           <a:srgbClr val="FFFFFF"/>
         </a:solidFill>
+        <a:effectLst/>
       </p:bgPr>
     </p:bg>
     <p:spTree>
@@ -10377,7 +10765,7 @@
           <a:bodyPr wrap="square" rtlCol="0" anchor="ctr"/>
           <a:lstStyle/>
           <a:p>
-            <a:pPr indent="0" marL="0">
+            <a:pPr marL="0" indent="0">
               <a:buNone/>
             </a:pPr>
             <a:r>
@@ -10416,7 +10804,7 @@
           <a:bodyPr wrap="square" rtlCol="0" anchor="ctr"/>
           <a:lstStyle/>
           <a:p>
-            <a:pPr indent="0" marL="0">
+            <a:pPr marL="0" indent="0">
               <a:buNone/>
             </a:pPr>
             <a:r>
@@ -10453,6 +10841,13 @@
           </a:solidFill>
           <a:ln/>
         </p:spPr>
+        <p:txBody>
+          <a:bodyPr/>
+          <a:lstStyle/>
+          <a:p>
+            <a:endParaRPr lang="es-CL"/>
+          </a:p>
+        </p:txBody>
       </p:sp>
       <p:sp>
         <p:nvSpPr>
@@ -10475,7 +10870,7 @@
           <a:bodyPr wrap="square" rtlCol="0" anchor="ctr"/>
           <a:lstStyle/>
           <a:p>
-            <a:pPr indent="0" marL="0">
+            <a:pPr marL="0" indent="0">
               <a:buNone/>
             </a:pPr>
             <a:r>
@@ -10514,7 +10909,7 @@
           <a:bodyPr wrap="square" rtlCol="0" anchor="t"/>
           <a:lstStyle/>
           <a:p>
-            <a:pPr indent="0" marL="0">
+            <a:pPr marL="0" indent="0">
               <a:buNone/>
             </a:pPr>
             <a:r>
@@ -10531,7 +10926,7 @@
             <a:endParaRPr lang="en-US" sz="1250" dirty="0"/>
           </a:p>
           <a:p>
-            <a:pPr indent="0" marL="0">
+            <a:pPr marL="0" indent="0">
               <a:buNone/>
             </a:pPr>
             <a:r>
@@ -10549,7 +10944,7 @@
             <a:endParaRPr lang="en-US" sz="1250" dirty="0"/>
           </a:p>
           <a:p>
-            <a:pPr indent="0" marL="0">
+            <a:pPr marL="0" indent="0">
               <a:buNone/>
             </a:pPr>
             <a:r>
@@ -10566,7 +10961,7 @@
             <a:endParaRPr lang="en-US" sz="1250" dirty="0"/>
           </a:p>
           <a:p>
-            <a:pPr indent="0" marL="0">
+            <a:pPr marL="0" indent="0">
               <a:buNone/>
             </a:pPr>
             <a:r>
@@ -10584,7 +10979,7 @@
             <a:endParaRPr lang="en-US" sz="1250" dirty="0"/>
           </a:p>
           <a:p>
-            <a:pPr indent="0" marL="0">
+            <a:pPr marL="0" indent="0">
               <a:buNone/>
             </a:pPr>
             <a:r>
@@ -10601,7 +10996,7 @@
             <a:endParaRPr lang="en-US" sz="1250" dirty="0"/>
           </a:p>
           <a:p>
-            <a:pPr indent="0" marL="0">
+            <a:pPr marL="0" indent="0">
               <a:buNone/>
             </a:pPr>
             <a:r>
@@ -10638,6 +11033,13 @@
           </a:solidFill>
           <a:ln/>
         </p:spPr>
+        <p:txBody>
+          <a:bodyPr/>
+          <a:lstStyle/>
+          <a:p>
+            <a:endParaRPr lang="es-CL"/>
+          </a:p>
+        </p:txBody>
       </p:sp>
       <p:sp>
         <p:nvSpPr>
@@ -10660,7 +11062,7 @@
           <a:bodyPr wrap="square" rtlCol="0" anchor="ctr"/>
           <a:lstStyle/>
           <a:p>
-            <a:pPr indent="0" marL="0">
+            <a:pPr marL="0" indent="0">
               <a:buNone/>
             </a:pPr>
             <a:r>
@@ -10699,7 +11101,7 @@
           <a:bodyPr wrap="square" rtlCol="0" anchor="t"/>
           <a:lstStyle/>
           <a:p>
-            <a:pPr indent="0" marL="0">
+            <a:pPr marL="0" indent="0">
               <a:buNone/>
             </a:pPr>
             <a:r>
@@ -10716,7 +11118,7 @@
             <a:endParaRPr lang="en-US" sz="1250" dirty="0"/>
           </a:p>
           <a:p>
-            <a:pPr indent="0" marL="0">
+            <a:pPr marL="0" indent="0">
               <a:buNone/>
             </a:pPr>
             <a:r>
@@ -10734,7 +11136,7 @@
             <a:endParaRPr lang="en-US" sz="1250" dirty="0"/>
           </a:p>
           <a:p>
-            <a:pPr indent="0" marL="0">
+            <a:pPr marL="0" indent="0">
               <a:buNone/>
             </a:pPr>
             <a:r>
@@ -10751,7 +11153,7 @@
             <a:endParaRPr lang="en-US" sz="1250" dirty="0"/>
           </a:p>
           <a:p>
-            <a:pPr indent="0" marL="0">
+            <a:pPr marL="0" indent="0">
               <a:buNone/>
             </a:pPr>
             <a:r>
@@ -10769,7 +11171,7 @@
             <a:endParaRPr lang="en-US" sz="1250" dirty="0"/>
           </a:p>
           <a:p>
-            <a:pPr indent="0" marL="0">
+            <a:pPr marL="0" indent="0">
               <a:buNone/>
             </a:pPr>
             <a:r>
@@ -10786,7 +11188,7 @@
             <a:endParaRPr lang="en-US" sz="1250" dirty="0"/>
           </a:p>
           <a:p>
-            <a:pPr indent="0" marL="0">
+            <a:pPr marL="0" indent="0">
               <a:buNone/>
             </a:pPr>
             <a:r>
@@ -10804,7 +11206,7 @@
             <a:endParaRPr lang="en-US" sz="1250" dirty="0"/>
           </a:p>
           <a:p>
-            <a:pPr indent="0" marL="0">
+            <a:pPr marL="0" indent="0">
               <a:buNone/>
             </a:pPr>
             <a:r>
@@ -10821,7 +11223,7 @@
             <a:endParaRPr lang="en-US" sz="1250" dirty="0"/>
           </a:p>
           <a:p>
-            <a:pPr indent="0" marL="0">
+            <a:pPr marL="0" indent="0">
               <a:buNone/>
             </a:pPr>
             <a:r>
@@ -10860,7 +11262,7 @@
           <a:bodyPr wrap="square" rtlCol="0" anchor="ctr"/>
           <a:lstStyle/>
           <a:p>
-            <a:pPr algn="r" indent="0" marL="0">
+            <a:pPr marL="0" indent="0" algn="r">
               <a:buNone/>
             </a:pPr>
             <a:r>
@@ -10894,6 +11296,7 @@
         <a:solidFill>
           <a:srgbClr val="F2F2F2"/>
         </a:solidFill>
+        <a:effectLst/>
       </p:bgPr>
     </p:bg>
     <p:spTree>
@@ -10931,7 +11334,7 @@
           <a:bodyPr wrap="square" rtlCol="0" anchor="ctr"/>
           <a:lstStyle/>
           <a:p>
-            <a:pPr indent="0" marL="0">
+            <a:pPr marL="0" indent="0">
               <a:buNone/>
             </a:pPr>
             <a:r>
@@ -10968,6 +11371,13 @@
           </a:solidFill>
           <a:ln/>
         </p:spPr>
+        <p:txBody>
+          <a:bodyPr/>
+          <a:lstStyle/>
+          <a:p>
+            <a:endParaRPr lang="es-CL"/>
+          </a:p>
+        </p:txBody>
       </p:sp>
       <p:sp>
         <p:nvSpPr>
@@ -10990,7 +11400,7 @@
           <a:bodyPr wrap="square" rtlCol="0" anchor="ctr"/>
           <a:lstStyle/>
           <a:p>
-            <a:pPr indent="0" marL="0">
+            <a:pPr marL="0" indent="0">
               <a:buNone/>
             </a:pPr>
             <a:r>
@@ -11029,7 +11439,7 @@
           <a:bodyPr wrap="square" rtlCol="0" anchor="ctr"/>
           <a:lstStyle/>
           <a:p>
-            <a:pPr indent="0" marL="0">
+            <a:pPr marL="0" indent="0">
               <a:buNone/>
             </a:pPr>
             <a:r>
@@ -11068,7 +11478,7 @@
           <a:bodyPr wrap="square" rtlCol="0" anchor="ctr"/>
           <a:lstStyle/>
           <a:p>
-            <a:pPr indent="0" marL="0">
+            <a:pPr marL="0" indent="0">
               <a:buNone/>
             </a:pPr>
             <a:r>
@@ -11105,6 +11515,13 @@
           </a:solidFill>
           <a:ln/>
         </p:spPr>
+        <p:txBody>
+          <a:bodyPr/>
+          <a:lstStyle/>
+          <a:p>
+            <a:endParaRPr lang="es-CL"/>
+          </a:p>
+        </p:txBody>
       </p:sp>
       <p:sp>
         <p:nvSpPr>
@@ -11127,7 +11544,7 @@
           <a:bodyPr wrap="square" rtlCol="0" anchor="ctr"/>
           <a:lstStyle/>
           <a:p>
-            <a:pPr algn="ctr" indent="0" marL="0">
+            <a:pPr marL="0" indent="0" algn="ctr">
               <a:buNone/>
             </a:pPr>
             <a:r>
@@ -11166,7 +11583,7 @@
           <a:bodyPr wrap="square" rtlCol="0" anchor="ctr"/>
           <a:lstStyle/>
           <a:p>
-            <a:pPr indent="0" marL="0">
+            <a:pPr marL="0" indent="0">
               <a:buNone/>
             </a:pPr>
             <a:r>
@@ -11203,6 +11620,13 @@
           </a:solidFill>
           <a:ln/>
         </p:spPr>
+        <p:txBody>
+          <a:bodyPr/>
+          <a:lstStyle/>
+          <a:p>
+            <a:endParaRPr lang="es-CL"/>
+          </a:p>
+        </p:txBody>
       </p:sp>
       <p:sp>
         <p:nvSpPr>
@@ -11225,7 +11649,7 @@
           <a:bodyPr wrap="square" rtlCol="0" anchor="ctr"/>
           <a:lstStyle/>
           <a:p>
-            <a:pPr algn="ctr" indent="0" marL="0">
+            <a:pPr marL="0" indent="0" algn="ctr">
               <a:buNone/>
             </a:pPr>
             <a:r>
@@ -11264,7 +11688,7 @@
           <a:bodyPr wrap="square" rtlCol="0" anchor="ctr"/>
           <a:lstStyle/>
           <a:p>
-            <a:pPr indent="0" marL="0">
+            <a:pPr marL="0" indent="0">
               <a:buNone/>
             </a:pPr>
             <a:r>
@@ -11301,6 +11725,13 @@
           </a:solidFill>
           <a:ln/>
         </p:spPr>
+        <p:txBody>
+          <a:bodyPr/>
+          <a:lstStyle/>
+          <a:p>
+            <a:endParaRPr lang="es-CL"/>
+          </a:p>
+        </p:txBody>
       </p:sp>
       <p:sp>
         <p:nvSpPr>
@@ -11323,7 +11754,7 @@
           <a:bodyPr wrap="square" rtlCol="0" anchor="ctr"/>
           <a:lstStyle/>
           <a:p>
-            <a:pPr algn="ctr" indent="0" marL="0">
+            <a:pPr marL="0" indent="0" algn="ctr">
               <a:buNone/>
             </a:pPr>
             <a:r>
@@ -11362,7 +11793,7 @@
           <a:bodyPr wrap="square" rtlCol="0" anchor="ctr"/>
           <a:lstStyle/>
           <a:p>
-            <a:pPr indent="0" marL="0">
+            <a:pPr marL="0" indent="0">
               <a:buNone/>
             </a:pPr>
             <a:r>
@@ -11399,6 +11830,13 @@
           </a:solidFill>
           <a:ln/>
         </p:spPr>
+        <p:txBody>
+          <a:bodyPr/>
+          <a:lstStyle/>
+          <a:p>
+            <a:endParaRPr lang="es-CL"/>
+          </a:p>
+        </p:txBody>
       </p:sp>
       <p:sp>
         <p:nvSpPr>
@@ -11421,7 +11859,7 @@
           <a:bodyPr wrap="square" rtlCol="0" anchor="ctr"/>
           <a:lstStyle/>
           <a:p>
-            <a:pPr algn="ctr" indent="0" marL="0">
+            <a:pPr marL="0" indent="0" algn="ctr">
               <a:buNone/>
             </a:pPr>
             <a:r>
@@ -11460,7 +11898,7 @@
           <a:bodyPr wrap="square" rtlCol="0" anchor="ctr"/>
           <a:lstStyle/>
           <a:p>
-            <a:pPr indent="0" marL="0">
+            <a:pPr marL="0" indent="0">
               <a:buNone/>
             </a:pPr>
             <a:r>
@@ -11497,6 +11935,13 @@
           </a:solidFill>
           <a:ln/>
         </p:spPr>
+        <p:txBody>
+          <a:bodyPr/>
+          <a:lstStyle/>
+          <a:p>
+            <a:endParaRPr lang="es-CL"/>
+          </a:p>
+        </p:txBody>
       </p:sp>
       <p:sp>
         <p:nvSpPr>
@@ -11519,7 +11964,7 @@
           <a:bodyPr wrap="square" rtlCol="0" anchor="ctr"/>
           <a:lstStyle/>
           <a:p>
-            <a:pPr algn="ctr" indent="0" marL="0">
+            <a:pPr marL="0" indent="0" algn="ctr">
               <a:buNone/>
             </a:pPr>
             <a:r>
@@ -11558,7 +12003,7 @@
           <a:bodyPr wrap="square" rtlCol="0" anchor="ctr"/>
           <a:lstStyle/>
           <a:p>
-            <a:pPr indent="0" marL="0">
+            <a:pPr marL="0" indent="0">
               <a:buNone/>
             </a:pPr>
             <a:r>
@@ -11597,7 +12042,7 @@
           <a:bodyPr wrap="square" rtlCol="0" anchor="ctr"/>
           <a:lstStyle/>
           <a:p>
-            <a:pPr algn="r" indent="0" marL="0">
+            <a:pPr marL="0" indent="0" algn="r">
               <a:buNone/>
             </a:pPr>
             <a:r>
@@ -11631,6 +12076,7 @@
         <a:solidFill>
           <a:srgbClr val="013A40"/>
         </a:solidFill>
+        <a:effectLst/>
       </p:bgPr>
     </p:bg>
     <p:spTree>
@@ -11668,7 +12114,7 @@
           <a:bodyPr wrap="square" rtlCol="0" anchor="ctr"/>
           <a:lstStyle/>
           <a:p>
-            <a:pPr indent="0" marL="0">
+            <a:pPr marL="0" indent="0">
               <a:buNone/>
             </a:pPr>
             <a:r>
@@ -11707,7 +12153,7 @@
           <a:bodyPr wrap="square" rtlCol="0" anchor="ctr"/>
           <a:lstStyle/>
           <a:p>
-            <a:pPr indent="0" marL="0">
+            <a:pPr marL="0" indent="0">
               <a:buNone/>
             </a:pPr>
             <a:r>
@@ -11744,6 +12190,13 @@
           </a:solidFill>
           <a:ln/>
         </p:spPr>
+        <p:txBody>
+          <a:bodyPr/>
+          <a:lstStyle/>
+          <a:p>
+            <a:endParaRPr lang="es-CL"/>
+          </a:p>
+        </p:txBody>
       </p:sp>
       <p:sp>
         <p:nvSpPr>
@@ -11766,7 +12219,7 @@
           <a:bodyPr wrap="square" rtlCol="0" anchor="ctr"/>
           <a:lstStyle/>
           <a:p>
-            <a:pPr indent="0" marL="0">
+            <a:pPr marL="0" indent="0">
               <a:buNone/>
             </a:pPr>
             <a:r>
@@ -11805,7 +12258,7 @@
           <a:bodyPr wrap="square" rtlCol="0" anchor="t"/>
           <a:lstStyle/>
           <a:p>
-            <a:pPr indent="0" marL="0">
+            <a:pPr marL="0" indent="0">
               <a:buNone/>
             </a:pPr>
             <a:r>
@@ -11822,7 +12275,7 @@
             <a:endParaRPr lang="en-US" sz="1200" dirty="0"/>
           </a:p>
           <a:p>
-            <a:pPr indent="0" marL="0">
+            <a:pPr marL="0" indent="0">
               <a:buNone/>
             </a:pPr>
             <a:r>
@@ -11840,7 +12293,7 @@
             <a:endParaRPr lang="en-US" sz="1200" dirty="0"/>
           </a:p>
           <a:p>
-            <a:pPr indent="0" marL="0">
+            <a:pPr marL="0" indent="0">
               <a:buNone/>
             </a:pPr>
             <a:r>
@@ -11857,7 +12310,7 @@
             <a:endParaRPr lang="en-US" sz="1200" dirty="0"/>
           </a:p>
           <a:p>
-            <a:pPr indent="0" marL="0">
+            <a:pPr marL="0" indent="0">
               <a:buNone/>
             </a:pPr>
             <a:r>
@@ -11875,7 +12328,7 @@
             <a:endParaRPr lang="en-US" sz="1200" dirty="0"/>
           </a:p>
           <a:p>
-            <a:pPr indent="0" marL="0">
+            <a:pPr marL="0" indent="0">
               <a:buNone/>
             </a:pPr>
             <a:r>
@@ -11892,7 +12345,7 @@
             <a:endParaRPr lang="en-US" sz="1200" dirty="0"/>
           </a:p>
           <a:p>
-            <a:pPr indent="0" marL="0">
+            <a:pPr marL="0" indent="0">
               <a:buNone/>
             </a:pPr>
             <a:r>
@@ -11910,7 +12363,7 @@
             <a:endParaRPr lang="en-US" sz="1200" dirty="0"/>
           </a:p>
           <a:p>
-            <a:pPr indent="0" marL="0">
+            <a:pPr marL="0" indent="0">
               <a:buNone/>
             </a:pPr>
             <a:r>
@@ -11927,7 +12380,7 @@
             <a:endParaRPr lang="en-US" sz="1200" dirty="0"/>
           </a:p>
           <a:p>
-            <a:pPr indent="0" marL="0">
+            <a:pPr marL="0" indent="0">
               <a:buNone/>
             </a:pPr>
             <a:r>
@@ -11964,6 +12417,13 @@
           </a:solidFill>
           <a:ln/>
         </p:spPr>
+        <p:txBody>
+          <a:bodyPr/>
+          <a:lstStyle/>
+          <a:p>
+            <a:endParaRPr lang="es-CL"/>
+          </a:p>
+        </p:txBody>
       </p:sp>
       <p:sp>
         <p:nvSpPr>
@@ -11986,7 +12446,7 @@
           <a:bodyPr wrap="square" rtlCol="0" anchor="ctr"/>
           <a:lstStyle/>
           <a:p>
-            <a:pPr indent="0" marL="0">
+            <a:pPr marL="0" indent="0">
               <a:buNone/>
             </a:pPr>
             <a:r>
@@ -12025,7 +12485,7 @@
           <a:bodyPr wrap="square" rtlCol="0" anchor="ctr"/>
           <a:lstStyle/>
           <a:p>
-            <a:pPr indent="0" marL="0">
+            <a:pPr marL="0" indent="0">
               <a:buNone/>
             </a:pPr>
             <a:r>
@@ -12064,7 +12524,7 @@
           <a:bodyPr wrap="square" rtlCol="0" anchor="t"/>
           <a:lstStyle/>
           <a:p>
-            <a:pPr indent="0" marL="0">
+            <a:pPr marL="0" indent="0">
               <a:buNone/>
             </a:pPr>
             <a:r>
@@ -12103,7 +12563,7 @@
           <a:bodyPr wrap="square" rtlCol="0" anchor="ctr"/>
           <a:lstStyle/>
           <a:p>
-            <a:pPr indent="0" marL="0">
+            <a:pPr marL="0" indent="0">
               <a:buNone/>
             </a:pPr>
             <a:r>
@@ -12142,7 +12602,7 @@
           <a:bodyPr wrap="square" rtlCol="0" anchor="t"/>
           <a:lstStyle/>
           <a:p>
-            <a:pPr indent="0" marL="0">
+            <a:pPr marL="0" indent="0">
               <a:buNone/>
             </a:pPr>
             <a:r>
@@ -12181,7 +12641,7 @@
           <a:bodyPr wrap="square" rtlCol="0" anchor="ctr"/>
           <a:lstStyle/>
           <a:p>
-            <a:pPr indent="0" marL="0">
+            <a:pPr marL="0" indent="0">
               <a:buNone/>
             </a:pPr>
             <a:r>
@@ -12220,7 +12680,7 @@
           <a:bodyPr wrap="square" rtlCol="0" anchor="t"/>
           <a:lstStyle/>
           <a:p>
-            <a:pPr indent="0" marL="0">
+            <a:pPr marL="0" indent="0">
               <a:buNone/>
             </a:pPr>
             <a:r>
@@ -12259,7 +12719,7 @@
           <a:bodyPr wrap="square" rtlCol="0" anchor="ctr"/>
           <a:lstStyle/>
           <a:p>
-            <a:pPr indent="0" marL="0">
+            <a:pPr marL="0" indent="0">
               <a:buNone/>
             </a:pPr>
             <a:r>
@@ -12298,7 +12758,7 @@
           <a:bodyPr wrap="square" rtlCol="0" anchor="t"/>
           <a:lstStyle/>
           <a:p>
-            <a:pPr indent="0" marL="0">
+            <a:pPr marL="0" indent="0">
               <a:buNone/>
             </a:pPr>
             <a:r>
@@ -12337,7 +12797,7 @@
           <a:bodyPr wrap="square" rtlCol="0" anchor="ctr"/>
           <a:lstStyle/>
           <a:p>
-            <a:pPr indent="0" marL="0">
+            <a:pPr marL="0" indent="0">
               <a:buNone/>
             </a:pPr>
             <a:r>
@@ -12376,7 +12836,7 @@
           <a:bodyPr wrap="square" rtlCol="0" anchor="t"/>
           <a:lstStyle/>
           <a:p>
-            <a:pPr indent="0" marL="0">
+            <a:pPr marL="0" indent="0">
               <a:buNone/>
             </a:pPr>
             <a:r>
@@ -12415,7 +12875,7 @@
           <a:bodyPr wrap="square" rtlCol="0" anchor="ctr"/>
           <a:lstStyle/>
           <a:p>
-            <a:pPr indent="0" marL="0">
+            <a:pPr marL="0" indent="0">
               <a:buNone/>
             </a:pPr>
             <a:r>
@@ -12454,7 +12914,7 @@
           <a:bodyPr wrap="square" rtlCol="0" anchor="t"/>
           <a:lstStyle/>
           <a:p>
-            <a:pPr indent="0" marL="0">
+            <a:pPr marL="0" indent="0">
               <a:buNone/>
             </a:pPr>
             <a:r>
@@ -12493,7 +12953,7 @@
           <a:bodyPr wrap="square" rtlCol="0" anchor="ctr"/>
           <a:lstStyle/>
           <a:p>
-            <a:pPr algn="r" indent="0" marL="0">
+            <a:pPr marL="0" indent="0" algn="r">
               <a:buNone/>
             </a:pPr>
             <a:r>
@@ -12527,6 +12987,7 @@
         <a:solidFill>
           <a:srgbClr val="FFFFFF"/>
         </a:solidFill>
+        <a:effectLst/>
       </p:bgPr>
     </p:bg>
     <p:spTree>
@@ -12564,7 +13025,7 @@
           <a:bodyPr wrap="square" rtlCol="0" anchor="ctr"/>
           <a:lstStyle/>
           <a:p>
-            <a:pPr indent="0" marL="0">
+            <a:pPr marL="0" indent="0">
               <a:buNone/>
             </a:pPr>
             <a:r>
@@ -12603,7 +13064,7 @@
           <a:bodyPr wrap="square" rtlCol="0" anchor="ctr"/>
           <a:lstStyle/>
           <a:p>
-            <a:pPr indent="0" marL="0">
+            <a:pPr marL="0" indent="0">
               <a:buNone/>
             </a:pPr>
             <a:r>
@@ -12640,6 +13101,13 @@
           </a:solidFill>
           <a:ln/>
         </p:spPr>
+        <p:txBody>
+          <a:bodyPr/>
+          <a:lstStyle/>
+          <a:p>
+            <a:endParaRPr lang="es-CL"/>
+          </a:p>
+        </p:txBody>
       </p:sp>
       <p:sp>
         <p:nvSpPr>
@@ -12662,7 +13130,7 @@
           <a:bodyPr wrap="square" rtlCol="0" anchor="ctr"/>
           <a:lstStyle/>
           <a:p>
-            <a:pPr algn="ctr" indent="0" marL="0">
+            <a:pPr marL="0" indent="0" algn="ctr">
               <a:buNone/>
             </a:pPr>
             <a:r>
@@ -12699,6 +13167,13 @@
           </a:solidFill>
           <a:ln/>
         </p:spPr>
+        <p:txBody>
+          <a:bodyPr/>
+          <a:lstStyle/>
+          <a:p>
+            <a:endParaRPr lang="es-CL"/>
+          </a:p>
+        </p:txBody>
       </p:sp>
       <p:sp>
         <p:nvSpPr>
@@ -12721,7 +13196,7 @@
           <a:bodyPr wrap="square" rtlCol="0" anchor="ctr"/>
           <a:lstStyle/>
           <a:p>
-            <a:pPr indent="0" marL="0">
+            <a:pPr marL="0" indent="0">
               <a:buNone/>
             </a:pPr>
             <a:r>
@@ -12760,7 +13235,7 @@
           <a:bodyPr wrap="square" rtlCol="0" anchor="ctr"/>
           <a:lstStyle/>
           <a:p>
-            <a:pPr indent="0" marL="0">
+            <a:pPr marL="0" indent="0">
               <a:buNone/>
             </a:pPr>
             <a:r>
@@ -12799,7 +13274,7 @@
           <a:bodyPr wrap="square" rtlCol="0" anchor="ctr"/>
           <a:lstStyle/>
           <a:p>
-            <a:pPr indent="0" marL="0">
+            <a:pPr marL="0" indent="0">
               <a:buNone/>
             </a:pPr>
             <a:r>
@@ -12838,7 +13313,7 @@
           <a:bodyPr wrap="square" rtlCol="0" anchor="ctr"/>
           <a:lstStyle/>
           <a:p>
-            <a:pPr indent="0" marL="0">
+            <a:pPr marL="0" indent="0">
               <a:buNone/>
             </a:pPr>
             <a:r>
@@ -12877,7 +13352,7 @@
           <a:bodyPr wrap="square" rtlCol="0" anchor="ctr"/>
           <a:lstStyle/>
           <a:p>
-            <a:pPr indent="0" marL="0">
+            <a:pPr marL="0" indent="0">
               <a:buNone/>
             </a:pPr>
             <a:r>
@@ -12916,7 +13391,7 @@
           <a:bodyPr wrap="square" rtlCol="0" anchor="ctr"/>
           <a:lstStyle/>
           <a:p>
-            <a:pPr indent="0" marL="0">
+            <a:pPr marL="0" indent="0">
               <a:buNone/>
             </a:pPr>
             <a:r>
@@ -12955,7 +13430,7 @@
           <a:bodyPr wrap="square" rtlCol="0" anchor="ctr"/>
           <a:lstStyle/>
           <a:p>
-            <a:pPr indent="0" marL="0">
+            <a:pPr marL="0" indent="0">
               <a:buNone/>
             </a:pPr>
             <a:r>
@@ -12992,6 +13467,13 @@
           </a:solidFill>
           <a:ln/>
         </p:spPr>
+        <p:txBody>
+          <a:bodyPr/>
+          <a:lstStyle/>
+          <a:p>
+            <a:endParaRPr lang="es-CL"/>
+          </a:p>
+        </p:txBody>
       </p:sp>
       <p:sp>
         <p:nvSpPr>
@@ -13014,7 +13496,7 @@
           <a:bodyPr wrap="square" rtlCol="0" anchor="ctr"/>
           <a:lstStyle/>
           <a:p>
-            <a:pPr algn="ctr" indent="0" marL="0">
+            <a:pPr marL="0" indent="0" algn="ctr">
               <a:buNone/>
             </a:pPr>
             <a:r>
@@ -13051,6 +13533,13 @@
           </a:solidFill>
           <a:ln/>
         </p:spPr>
+        <p:txBody>
+          <a:bodyPr/>
+          <a:lstStyle/>
+          <a:p>
+            <a:endParaRPr lang="es-CL"/>
+          </a:p>
+        </p:txBody>
       </p:sp>
       <p:sp>
         <p:nvSpPr>
@@ -13073,7 +13562,7 @@
           <a:bodyPr wrap="square" rtlCol="0" anchor="ctr"/>
           <a:lstStyle/>
           <a:p>
-            <a:pPr indent="0" marL="0">
+            <a:pPr marL="0" indent="0">
               <a:buNone/>
             </a:pPr>
             <a:r>
@@ -13112,7 +13601,7 @@
           <a:bodyPr wrap="square" rtlCol="0" anchor="ctr"/>
           <a:lstStyle/>
           <a:p>
-            <a:pPr indent="0" marL="0">
+            <a:pPr marL="0" indent="0">
               <a:buNone/>
             </a:pPr>
             <a:r>
@@ -13151,7 +13640,7 @@
           <a:bodyPr wrap="square" rtlCol="0" anchor="ctr"/>
           <a:lstStyle/>
           <a:p>
-            <a:pPr indent="0" marL="0">
+            <a:pPr marL="0" indent="0">
               <a:buNone/>
             </a:pPr>
             <a:r>
@@ -13190,7 +13679,7 @@
           <a:bodyPr wrap="square" rtlCol="0" anchor="ctr"/>
           <a:lstStyle/>
           <a:p>
-            <a:pPr indent="0" marL="0">
+            <a:pPr marL="0" indent="0">
               <a:buNone/>
             </a:pPr>
             <a:r>
@@ -13229,7 +13718,7 @@
           <a:bodyPr wrap="square" rtlCol="0" anchor="ctr"/>
           <a:lstStyle/>
           <a:p>
-            <a:pPr indent="0" marL="0">
+            <a:pPr marL="0" indent="0">
               <a:buNone/>
             </a:pPr>
             <a:r>
@@ -13268,7 +13757,7 @@
           <a:bodyPr wrap="square" rtlCol="0" anchor="ctr"/>
           <a:lstStyle/>
           <a:p>
-            <a:pPr indent="0" marL="0">
+            <a:pPr marL="0" indent="0">
               <a:buNone/>
             </a:pPr>
             <a:r>
@@ -13305,6 +13794,13 @@
           </a:solidFill>
           <a:ln/>
         </p:spPr>
+        <p:txBody>
+          <a:bodyPr/>
+          <a:lstStyle/>
+          <a:p>
+            <a:endParaRPr lang="es-CL"/>
+          </a:p>
+        </p:txBody>
       </p:sp>
       <p:sp>
         <p:nvSpPr>
@@ -13327,7 +13823,7 @@
           <a:bodyPr wrap="square" rtlCol="0" anchor="ctr"/>
           <a:lstStyle/>
           <a:p>
-            <a:pPr algn="ctr" indent="0" marL="0">
+            <a:pPr marL="0" indent="0" algn="ctr">
               <a:buNone/>
             </a:pPr>
             <a:r>
@@ -13364,6 +13860,13 @@
           </a:solidFill>
           <a:ln/>
         </p:spPr>
+        <p:txBody>
+          <a:bodyPr/>
+          <a:lstStyle/>
+          <a:p>
+            <a:endParaRPr lang="es-CL"/>
+          </a:p>
+        </p:txBody>
       </p:sp>
       <p:sp>
         <p:nvSpPr>
@@ -13386,7 +13889,7 @@
           <a:bodyPr wrap="square" rtlCol="0" anchor="ctr"/>
           <a:lstStyle/>
           <a:p>
-            <a:pPr indent="0" marL="0">
+            <a:pPr marL="0" indent="0">
               <a:buNone/>
             </a:pPr>
             <a:r>
@@ -13425,7 +13928,7 @@
           <a:bodyPr wrap="square" rtlCol="0" anchor="ctr"/>
           <a:lstStyle/>
           <a:p>
-            <a:pPr indent="0" marL="0">
+            <a:pPr marL="0" indent="0">
               <a:buNone/>
             </a:pPr>
             <a:r>
@@ -13464,7 +13967,7 @@
           <a:bodyPr wrap="square" rtlCol="0" anchor="ctr"/>
           <a:lstStyle/>
           <a:p>
-            <a:pPr indent="0" marL="0">
+            <a:pPr marL="0" indent="0">
               <a:buNone/>
             </a:pPr>
             <a:r>
@@ -13503,7 +14006,7 @@
           <a:bodyPr wrap="square" rtlCol="0" anchor="ctr"/>
           <a:lstStyle/>
           <a:p>
-            <a:pPr indent="0" marL="0">
+            <a:pPr marL="0" indent="0">
               <a:buNone/>
             </a:pPr>
             <a:r>
@@ -13542,7 +14045,7 @@
           <a:bodyPr wrap="square" rtlCol="0" anchor="ctr"/>
           <a:lstStyle/>
           <a:p>
-            <a:pPr indent="0" marL="0">
+            <a:pPr marL="0" indent="0">
               <a:buNone/>
             </a:pPr>
             <a:r>
@@ -13579,6 +14082,13 @@
           </a:solidFill>
           <a:ln/>
         </p:spPr>
+        <p:txBody>
+          <a:bodyPr/>
+          <a:lstStyle/>
+          <a:p>
+            <a:endParaRPr lang="es-CL"/>
+          </a:p>
+        </p:txBody>
       </p:sp>
       <p:sp>
         <p:nvSpPr>
@@ -13601,7 +14111,7 @@
           <a:bodyPr wrap="square" rtlCol="0" anchor="ctr"/>
           <a:lstStyle/>
           <a:p>
-            <a:pPr algn="ctr" indent="0" marL="0">
+            <a:pPr marL="0" indent="0" algn="ctr">
               <a:buNone/>
             </a:pPr>
             <a:r>
@@ -13638,6 +14148,13 @@
           </a:solidFill>
           <a:ln/>
         </p:spPr>
+        <p:txBody>
+          <a:bodyPr/>
+          <a:lstStyle/>
+          <a:p>
+            <a:endParaRPr lang="es-CL"/>
+          </a:p>
+        </p:txBody>
       </p:sp>
       <p:sp>
         <p:nvSpPr>
@@ -13660,7 +14177,7 @@
           <a:bodyPr wrap="square" rtlCol="0" anchor="ctr"/>
           <a:lstStyle/>
           <a:p>
-            <a:pPr indent="0" marL="0">
+            <a:pPr marL="0" indent="0">
               <a:buNone/>
             </a:pPr>
             <a:r>
@@ -13699,7 +14216,7 @@
           <a:bodyPr wrap="square" rtlCol="0" anchor="ctr"/>
           <a:lstStyle/>
           <a:p>
-            <a:pPr indent="0" marL="0">
+            <a:pPr marL="0" indent="0">
               <a:buNone/>
             </a:pPr>
             <a:r>
@@ -13738,7 +14255,7 @@
           <a:bodyPr wrap="square" rtlCol="0" anchor="ctr"/>
           <a:lstStyle/>
           <a:p>
-            <a:pPr indent="0" marL="0">
+            <a:pPr marL="0" indent="0">
               <a:buNone/>
             </a:pPr>
             <a:r>
@@ -13777,7 +14294,7 @@
           <a:bodyPr wrap="square" rtlCol="0" anchor="ctr"/>
           <a:lstStyle/>
           <a:p>
-            <a:pPr indent="0" marL="0">
+            <a:pPr marL="0" indent="0">
               <a:buNone/>
             </a:pPr>
             <a:r>
@@ -13816,7 +14333,7 @@
           <a:bodyPr wrap="square" rtlCol="0" anchor="ctr"/>
           <a:lstStyle/>
           <a:p>
-            <a:pPr indent="0" marL="0">
+            <a:pPr marL="0" indent="0">
               <a:buNone/>
             </a:pPr>
             <a:r>
@@ -13855,7 +14372,7 @@
           <a:bodyPr wrap="square" rtlCol="0" anchor="ctr"/>
           <a:lstStyle/>
           <a:p>
-            <a:pPr indent="0" marL="0">
+            <a:pPr marL="0" indent="0">
               <a:buNone/>
             </a:pPr>
             <a:r>
@@ -13892,6 +14409,13 @@
           </a:solidFill>
           <a:ln/>
         </p:spPr>
+        <p:txBody>
+          <a:bodyPr/>
+          <a:lstStyle/>
+          <a:p>
+            <a:endParaRPr lang="es-CL"/>
+          </a:p>
+        </p:txBody>
       </p:sp>
       <p:sp>
         <p:nvSpPr>
@@ -13914,7 +14438,7 @@
           <a:bodyPr wrap="square" rtlCol="0" anchor="ctr"/>
           <a:lstStyle/>
           <a:p>
-            <a:pPr algn="ctr" indent="0" marL="0">
+            <a:pPr marL="0" indent="0" algn="ctr">
               <a:buNone/>
             </a:pPr>
             <a:r>
@@ -13951,6 +14475,13 @@
           </a:solidFill>
           <a:ln/>
         </p:spPr>
+        <p:txBody>
+          <a:bodyPr/>
+          <a:lstStyle/>
+          <a:p>
+            <a:endParaRPr lang="es-CL"/>
+          </a:p>
+        </p:txBody>
       </p:sp>
       <p:sp>
         <p:nvSpPr>
@@ -13973,7 +14504,7 @@
           <a:bodyPr wrap="square" rtlCol="0" anchor="ctr"/>
           <a:lstStyle/>
           <a:p>
-            <a:pPr indent="0" marL="0">
+            <a:pPr marL="0" indent="0">
               <a:buNone/>
             </a:pPr>
             <a:r>
@@ -14012,7 +14543,7 @@
           <a:bodyPr wrap="square" rtlCol="0" anchor="ctr"/>
           <a:lstStyle/>
           <a:p>
-            <a:pPr indent="0" marL="0">
+            <a:pPr marL="0" indent="0">
               <a:buNone/>
             </a:pPr>
             <a:r>
@@ -14051,7 +14582,7 @@
           <a:bodyPr wrap="square" rtlCol="0" anchor="ctr"/>
           <a:lstStyle/>
           <a:p>
-            <a:pPr indent="0" marL="0">
+            <a:pPr marL="0" indent="0">
               <a:buNone/>
             </a:pPr>
             <a:r>
@@ -14090,7 +14621,7 @@
           <a:bodyPr wrap="square" rtlCol="0" anchor="ctr"/>
           <a:lstStyle/>
           <a:p>
-            <a:pPr indent="0" marL="0">
+            <a:pPr marL="0" indent="0">
               <a:buNone/>
             </a:pPr>
             <a:r>
@@ -14129,7 +14660,7 @@
           <a:bodyPr wrap="square" rtlCol="0" anchor="ctr"/>
           <a:lstStyle/>
           <a:p>
-            <a:pPr indent="0" marL="0">
+            <a:pPr marL="0" indent="0">
               <a:buNone/>
             </a:pPr>
             <a:r>
@@ -14168,7 +14699,7 @@
           <a:bodyPr wrap="square" rtlCol="0" anchor="ctr"/>
           <a:lstStyle/>
           <a:p>
-            <a:pPr indent="0" marL="0">
+            <a:pPr marL="0" indent="0">
               <a:buNone/>
             </a:pPr>
             <a:r>
@@ -14207,7 +14738,7 @@
           <a:bodyPr wrap="square" rtlCol="0" anchor="ctr"/>
           <a:lstStyle/>
           <a:p>
-            <a:pPr algn="r" indent="0" marL="0">
+            <a:pPr marL="0" indent="0" algn="r">
               <a:buNone/>
             </a:pPr>
             <a:r>
@@ -14241,6 +14772,7 @@
         <a:solidFill>
           <a:srgbClr val="013A40"/>
         </a:solidFill>
+        <a:effectLst/>
       </p:bgPr>
     </p:bg>
     <p:spTree>
@@ -14278,7 +14810,7 @@
           <a:bodyPr wrap="square" rtlCol="0" anchor="ctr"/>
           <a:lstStyle/>
           <a:p>
-            <a:pPr indent="0" marL="0">
+            <a:pPr marL="0" indent="0">
               <a:buNone/>
             </a:pPr>
             <a:r>
@@ -14315,6 +14847,13 @@
           </a:solidFill>
           <a:ln/>
         </p:spPr>
+        <p:txBody>
+          <a:bodyPr/>
+          <a:lstStyle/>
+          <a:p>
+            <a:endParaRPr lang="es-CL"/>
+          </a:p>
+        </p:txBody>
       </p:sp>
       <p:sp>
         <p:nvSpPr>
@@ -14337,7 +14876,7 @@
           <a:bodyPr wrap="square" rtlCol="0" anchor="ctr"/>
           <a:lstStyle/>
           <a:p>
-            <a:pPr algn="ctr" indent="0" marL="0">
+            <a:pPr marL="0" indent="0" algn="ctr">
               <a:buNone/>
             </a:pPr>
             <a:r>
@@ -14374,6 +14913,13 @@
           </a:solidFill>
           <a:ln/>
         </p:spPr>
+        <p:txBody>
+          <a:bodyPr/>
+          <a:lstStyle/>
+          <a:p>
+            <a:endParaRPr lang="es-CL"/>
+          </a:p>
+        </p:txBody>
       </p:sp>
       <p:sp>
         <p:nvSpPr>
@@ -14396,7 +14942,7 @@
           <a:bodyPr wrap="square" rtlCol="0" anchor="ctr"/>
           <a:lstStyle/>
           <a:p>
-            <a:pPr indent="0" marL="0">
+            <a:pPr marL="0" indent="0">
               <a:buNone/>
             </a:pPr>
             <a:r>
@@ -14435,7 +14981,7 @@
           <a:bodyPr wrap="square" rtlCol="0" anchor="ctr"/>
           <a:lstStyle/>
           <a:p>
-            <a:pPr indent="0" marL="0">
+            <a:pPr marL="0" indent="0">
               <a:buNone/>
             </a:pPr>
             <a:r>
@@ -14472,6 +15018,13 @@
           </a:solidFill>
           <a:ln/>
         </p:spPr>
+        <p:txBody>
+          <a:bodyPr/>
+          <a:lstStyle/>
+          <a:p>
+            <a:endParaRPr lang="es-CL"/>
+          </a:p>
+        </p:txBody>
       </p:sp>
       <p:sp>
         <p:nvSpPr>
@@ -14494,7 +15047,7 @@
           <a:bodyPr wrap="square" rtlCol="0" anchor="ctr"/>
           <a:lstStyle/>
           <a:p>
-            <a:pPr algn="ctr" indent="0" marL="0">
+            <a:pPr marL="0" indent="0" algn="ctr">
               <a:buNone/>
             </a:pPr>
             <a:r>
@@ -14531,6 +15084,13 @@
           </a:solidFill>
           <a:ln/>
         </p:spPr>
+        <p:txBody>
+          <a:bodyPr/>
+          <a:lstStyle/>
+          <a:p>
+            <a:endParaRPr lang="es-CL"/>
+          </a:p>
+        </p:txBody>
       </p:sp>
       <p:sp>
         <p:nvSpPr>
@@ -14553,7 +15113,7 @@
           <a:bodyPr wrap="square" rtlCol="0" anchor="ctr"/>
           <a:lstStyle/>
           <a:p>
-            <a:pPr indent="0" marL="0">
+            <a:pPr marL="0" indent="0">
               <a:buNone/>
             </a:pPr>
             <a:r>
@@ -14592,7 +15152,7 @@
           <a:bodyPr wrap="square" rtlCol="0" anchor="ctr"/>
           <a:lstStyle/>
           <a:p>
-            <a:pPr indent="0" marL="0">
+            <a:pPr marL="0" indent="0">
               <a:buNone/>
             </a:pPr>
             <a:r>
@@ -14629,6 +15189,13 @@
           </a:solidFill>
           <a:ln/>
         </p:spPr>
+        <p:txBody>
+          <a:bodyPr/>
+          <a:lstStyle/>
+          <a:p>
+            <a:endParaRPr lang="es-CL"/>
+          </a:p>
+        </p:txBody>
       </p:sp>
       <p:sp>
         <p:nvSpPr>
@@ -14651,7 +15218,7 @@
           <a:bodyPr wrap="square" rtlCol="0" anchor="ctr"/>
           <a:lstStyle/>
           <a:p>
-            <a:pPr algn="ctr" indent="0" marL="0">
+            <a:pPr marL="0" indent="0" algn="ctr">
               <a:buNone/>
             </a:pPr>
             <a:r>
@@ -14688,6 +15255,13 @@
           </a:solidFill>
           <a:ln/>
         </p:spPr>
+        <p:txBody>
+          <a:bodyPr/>
+          <a:lstStyle/>
+          <a:p>
+            <a:endParaRPr lang="es-CL"/>
+          </a:p>
+        </p:txBody>
       </p:sp>
       <p:sp>
         <p:nvSpPr>
@@ -14710,7 +15284,7 @@
           <a:bodyPr wrap="square" rtlCol="0" anchor="ctr"/>
           <a:lstStyle/>
           <a:p>
-            <a:pPr indent="0" marL="0">
+            <a:pPr marL="0" indent="0">
               <a:buNone/>
             </a:pPr>
             <a:r>
@@ -14749,7 +15323,7 @@
           <a:bodyPr wrap="square" rtlCol="0" anchor="ctr"/>
           <a:lstStyle/>
           <a:p>
-            <a:pPr indent="0" marL="0">
+            <a:pPr marL="0" indent="0">
               <a:buNone/>
             </a:pPr>
             <a:r>
@@ -14786,6 +15360,13 @@
           </a:solidFill>
           <a:ln/>
         </p:spPr>
+        <p:txBody>
+          <a:bodyPr/>
+          <a:lstStyle/>
+          <a:p>
+            <a:endParaRPr lang="es-CL"/>
+          </a:p>
+        </p:txBody>
       </p:sp>
       <p:sp>
         <p:nvSpPr>
@@ -14808,7 +15389,7 @@
           <a:bodyPr wrap="square" rtlCol="0" anchor="ctr"/>
           <a:lstStyle/>
           <a:p>
-            <a:pPr algn="ctr" indent="0" marL="0">
+            <a:pPr marL="0" indent="0" algn="ctr">
               <a:buNone/>
             </a:pPr>
             <a:r>
@@ -14845,6 +15426,13 @@
           </a:solidFill>
           <a:ln/>
         </p:spPr>
+        <p:txBody>
+          <a:bodyPr/>
+          <a:lstStyle/>
+          <a:p>
+            <a:endParaRPr lang="es-CL"/>
+          </a:p>
+        </p:txBody>
       </p:sp>
       <p:sp>
         <p:nvSpPr>
@@ -14867,7 +15455,7 @@
           <a:bodyPr wrap="square" rtlCol="0" anchor="ctr"/>
           <a:lstStyle/>
           <a:p>
-            <a:pPr indent="0" marL="0">
+            <a:pPr marL="0" indent="0">
               <a:buNone/>
             </a:pPr>
             <a:r>
@@ -14906,7 +15494,7 @@
           <a:bodyPr wrap="square" rtlCol="0" anchor="ctr"/>
           <a:lstStyle/>
           <a:p>
-            <a:pPr indent="0" marL="0">
+            <a:pPr marL="0" indent="0">
               <a:buNone/>
             </a:pPr>
             <a:r>
@@ -14945,7 +15533,7 @@
           <a:bodyPr wrap="square" rtlCol="0" anchor="ctr"/>
           <a:lstStyle/>
           <a:p>
-            <a:pPr algn="r" indent="0" marL="0">
+            <a:pPr marL="0" indent="0" algn="r">
               <a:buNone/>
             </a:pPr>
             <a:r>
@@ -14979,6 +15567,7 @@
         <a:solidFill>
           <a:srgbClr val="F2F2F2"/>
         </a:solidFill>
+        <a:effectLst/>
       </p:bgPr>
     </p:bg>
     <p:spTree>
@@ -15016,7 +15605,7 @@
           <a:bodyPr wrap="square" rtlCol="0" anchor="ctr"/>
           <a:lstStyle/>
           <a:p>
-            <a:pPr indent="0" marL="0">
+            <a:pPr marL="0" indent="0">
               <a:buNone/>
             </a:pPr>
             <a:r>
@@ -15055,7 +15644,7 @@
           <a:bodyPr wrap="square" rtlCol="0" anchor="ctr"/>
           <a:lstStyle/>
           <a:p>
-            <a:pPr indent="0" marL="0">
+            <a:pPr marL="0" indent="0">
               <a:buNone/>
             </a:pPr>
             <a:r>
@@ -15097,6 +15686,13 @@
             <a:prstDash val="solid"/>
           </a:ln>
         </p:spPr>
+        <p:txBody>
+          <a:bodyPr/>
+          <a:lstStyle/>
+          <a:p>
+            <a:endParaRPr lang="es-CL"/>
+          </a:p>
+        </p:txBody>
       </p:sp>
       <p:sp>
         <p:nvSpPr>
@@ -15119,7 +15715,7 @@
           <a:bodyPr wrap="square" rtlCol="0" anchor="ctr"/>
           <a:lstStyle/>
           <a:p>
-            <a:pPr algn="l" indent="0" marL="0">
+            <a:pPr marL="0" indent="0" algn="l">
               <a:buNone/>
             </a:pPr>
             <a:r>
@@ -15161,6 +15757,13 @@
             <a:prstDash val="solid"/>
           </a:ln>
         </p:spPr>
+        <p:txBody>
+          <a:bodyPr/>
+          <a:lstStyle/>
+          <a:p>
+            <a:endParaRPr lang="es-CL"/>
+          </a:p>
+        </p:txBody>
       </p:sp>
       <p:sp>
         <p:nvSpPr>
@@ -15183,7 +15786,7 @@
           <a:bodyPr wrap="square" rtlCol="0" anchor="ctr"/>
           <a:lstStyle/>
           <a:p>
-            <a:pPr algn="ctr" indent="0" marL="0">
+            <a:pPr marL="0" indent="0" algn="ctr">
               <a:buNone/>
             </a:pPr>
             <a:r>
@@ -15225,6 +15828,13 @@
             <a:prstDash val="solid"/>
           </a:ln>
         </p:spPr>
+        <p:txBody>
+          <a:bodyPr/>
+          <a:lstStyle/>
+          <a:p>
+            <a:endParaRPr lang="es-CL"/>
+          </a:p>
+        </p:txBody>
       </p:sp>
       <p:sp>
         <p:nvSpPr>
@@ -15247,7 +15857,7 @@
           <a:bodyPr wrap="square" rtlCol="0" anchor="ctr"/>
           <a:lstStyle/>
           <a:p>
-            <a:pPr algn="ctr" indent="0" marL="0">
+            <a:pPr marL="0" indent="0" algn="ctr">
               <a:buNone/>
             </a:pPr>
             <a:r>
@@ -15289,6 +15899,13 @@
             <a:prstDash val="solid"/>
           </a:ln>
         </p:spPr>
+        <p:txBody>
+          <a:bodyPr/>
+          <a:lstStyle/>
+          <a:p>
+            <a:endParaRPr lang="es-CL"/>
+          </a:p>
+        </p:txBody>
       </p:sp>
       <p:sp>
         <p:nvSpPr>
@@ -15311,7 +15928,7 @@
           <a:bodyPr wrap="square" rtlCol="0" anchor="ctr"/>
           <a:lstStyle/>
           <a:p>
-            <a:pPr algn="l" indent="0" marL="0">
+            <a:pPr marL="0" indent="0" algn="l">
               <a:buNone/>
             </a:pPr>
             <a:r>
@@ -15353,6 +15970,13 @@
             <a:prstDash val="solid"/>
           </a:ln>
         </p:spPr>
+        <p:txBody>
+          <a:bodyPr/>
+          <a:lstStyle/>
+          <a:p>
+            <a:endParaRPr lang="es-CL"/>
+          </a:p>
+        </p:txBody>
       </p:sp>
       <p:sp>
         <p:nvSpPr>
@@ -15375,7 +15999,7 @@
           <a:bodyPr wrap="square" rtlCol="0" anchor="ctr"/>
           <a:lstStyle/>
           <a:p>
-            <a:pPr algn="ctr" indent="0" marL="0">
+            <a:pPr marL="0" indent="0" algn="ctr">
               <a:buNone/>
             </a:pPr>
             <a:r>
@@ -15417,6 +16041,13 @@
             <a:prstDash val="solid"/>
           </a:ln>
         </p:spPr>
+        <p:txBody>
+          <a:bodyPr/>
+          <a:lstStyle/>
+          <a:p>
+            <a:endParaRPr lang="es-CL"/>
+          </a:p>
+        </p:txBody>
       </p:sp>
       <p:sp>
         <p:nvSpPr>
@@ -15439,7 +16070,7 @@
           <a:bodyPr wrap="square" rtlCol="0" anchor="ctr"/>
           <a:lstStyle/>
           <a:p>
-            <a:pPr algn="ctr" indent="0" marL="0">
+            <a:pPr marL="0" indent="0" algn="ctr">
               <a:buNone/>
             </a:pPr>
             <a:r>
@@ -15481,6 +16112,13 @@
             <a:prstDash val="solid"/>
           </a:ln>
         </p:spPr>
+        <p:txBody>
+          <a:bodyPr/>
+          <a:lstStyle/>
+          <a:p>
+            <a:endParaRPr lang="es-CL"/>
+          </a:p>
+        </p:txBody>
       </p:sp>
       <p:sp>
         <p:nvSpPr>
@@ -15503,7 +16141,7 @@
           <a:bodyPr wrap="square" rtlCol="0" anchor="ctr"/>
           <a:lstStyle/>
           <a:p>
-            <a:pPr algn="l" indent="0" marL="0">
+            <a:pPr marL="0" indent="0" algn="l">
               <a:buNone/>
             </a:pPr>
             <a:r>
@@ -15545,6 +16183,13 @@
             <a:prstDash val="solid"/>
           </a:ln>
         </p:spPr>
+        <p:txBody>
+          <a:bodyPr/>
+          <a:lstStyle/>
+          <a:p>
+            <a:endParaRPr lang="es-CL"/>
+          </a:p>
+        </p:txBody>
       </p:sp>
       <p:sp>
         <p:nvSpPr>
@@ -15567,7 +16212,7 @@
           <a:bodyPr wrap="square" rtlCol="0" anchor="ctr"/>
           <a:lstStyle/>
           <a:p>
-            <a:pPr algn="ctr" indent="0" marL="0">
+            <a:pPr marL="0" indent="0" algn="ctr">
               <a:buNone/>
             </a:pPr>
             <a:r>
@@ -15609,6 +16254,13 @@
             <a:prstDash val="solid"/>
           </a:ln>
         </p:spPr>
+        <p:txBody>
+          <a:bodyPr/>
+          <a:lstStyle/>
+          <a:p>
+            <a:endParaRPr lang="es-CL"/>
+          </a:p>
+        </p:txBody>
       </p:sp>
       <p:sp>
         <p:nvSpPr>
@@ -15631,7 +16283,7 @@
           <a:bodyPr wrap="square" rtlCol="0" anchor="ctr"/>
           <a:lstStyle/>
           <a:p>
-            <a:pPr algn="ctr" indent="0" marL="0">
+            <a:pPr marL="0" indent="0" algn="ctr">
               <a:buNone/>
             </a:pPr>
             <a:r>
@@ -15673,6 +16325,13 @@
             <a:prstDash val="solid"/>
           </a:ln>
         </p:spPr>
+        <p:txBody>
+          <a:bodyPr/>
+          <a:lstStyle/>
+          <a:p>
+            <a:endParaRPr lang="es-CL"/>
+          </a:p>
+        </p:txBody>
       </p:sp>
       <p:sp>
         <p:nvSpPr>
@@ -15695,7 +16354,7 @@
           <a:bodyPr wrap="square" rtlCol="0" anchor="ctr"/>
           <a:lstStyle/>
           <a:p>
-            <a:pPr algn="l" indent="0" marL="0">
+            <a:pPr marL="0" indent="0" algn="l">
               <a:buNone/>
             </a:pPr>
             <a:r>
@@ -15737,6 +16396,13 @@
             <a:prstDash val="solid"/>
           </a:ln>
         </p:spPr>
+        <p:txBody>
+          <a:bodyPr/>
+          <a:lstStyle/>
+          <a:p>
+            <a:endParaRPr lang="es-CL"/>
+          </a:p>
+        </p:txBody>
       </p:sp>
       <p:sp>
         <p:nvSpPr>
@@ -15759,7 +16425,7 @@
           <a:bodyPr wrap="square" rtlCol="0" anchor="ctr"/>
           <a:lstStyle/>
           <a:p>
-            <a:pPr algn="ctr" indent="0" marL="0">
+            <a:pPr marL="0" indent="0" algn="ctr">
               <a:buNone/>
             </a:pPr>
             <a:r>
@@ -15801,6 +16467,13 @@
             <a:prstDash val="solid"/>
           </a:ln>
         </p:spPr>
+        <p:txBody>
+          <a:bodyPr/>
+          <a:lstStyle/>
+          <a:p>
+            <a:endParaRPr lang="es-CL"/>
+          </a:p>
+        </p:txBody>
       </p:sp>
       <p:sp>
         <p:nvSpPr>
@@ -15823,7 +16496,7 @@
           <a:bodyPr wrap="square" rtlCol="0" anchor="ctr"/>
           <a:lstStyle/>
           <a:p>
-            <a:pPr algn="ctr" indent="0" marL="0">
+            <a:pPr marL="0" indent="0" algn="ctr">
               <a:buNone/>
             </a:pPr>
             <a:r>
@@ -15865,6 +16538,13 @@
             <a:prstDash val="solid"/>
           </a:ln>
         </p:spPr>
+        <p:txBody>
+          <a:bodyPr/>
+          <a:lstStyle/>
+          <a:p>
+            <a:endParaRPr lang="es-CL"/>
+          </a:p>
+        </p:txBody>
       </p:sp>
       <p:sp>
         <p:nvSpPr>
@@ -15887,7 +16567,7 @@
           <a:bodyPr wrap="square" rtlCol="0" anchor="ctr"/>
           <a:lstStyle/>
           <a:p>
-            <a:pPr algn="l" indent="0" marL="0">
+            <a:pPr marL="0" indent="0" algn="l">
               <a:buNone/>
             </a:pPr>
             <a:r>
@@ -15929,6 +16609,13 @@
             <a:prstDash val="solid"/>
           </a:ln>
         </p:spPr>
+        <p:txBody>
+          <a:bodyPr/>
+          <a:lstStyle/>
+          <a:p>
+            <a:endParaRPr lang="es-CL"/>
+          </a:p>
+        </p:txBody>
       </p:sp>
       <p:sp>
         <p:nvSpPr>
@@ -15951,7 +16638,7 @@
           <a:bodyPr wrap="square" rtlCol="0" anchor="ctr"/>
           <a:lstStyle/>
           <a:p>
-            <a:pPr algn="ctr" indent="0" marL="0">
+            <a:pPr marL="0" indent="0" algn="ctr">
               <a:buNone/>
             </a:pPr>
             <a:r>
@@ -15993,6 +16680,13 @@
             <a:prstDash val="solid"/>
           </a:ln>
         </p:spPr>
+        <p:txBody>
+          <a:bodyPr/>
+          <a:lstStyle/>
+          <a:p>
+            <a:endParaRPr lang="es-CL"/>
+          </a:p>
+        </p:txBody>
       </p:sp>
       <p:sp>
         <p:nvSpPr>
@@ -16015,7 +16709,7 @@
           <a:bodyPr wrap="square" rtlCol="0" anchor="ctr"/>
           <a:lstStyle/>
           <a:p>
-            <a:pPr algn="ctr" indent="0" marL="0">
+            <a:pPr marL="0" indent="0" algn="ctr">
               <a:buNone/>
             </a:pPr>
             <a:r>
@@ -16057,6 +16751,13 @@
             <a:prstDash val="solid"/>
           </a:ln>
         </p:spPr>
+        <p:txBody>
+          <a:bodyPr/>
+          <a:lstStyle/>
+          <a:p>
+            <a:endParaRPr lang="es-CL"/>
+          </a:p>
+        </p:txBody>
       </p:sp>
       <p:sp>
         <p:nvSpPr>
@@ -16079,7 +16780,7 @@
           <a:bodyPr wrap="square" rtlCol="0" anchor="ctr"/>
           <a:lstStyle/>
           <a:p>
-            <a:pPr algn="l" indent="0" marL="0">
+            <a:pPr marL="0" indent="0" algn="l">
               <a:buNone/>
             </a:pPr>
             <a:r>
@@ -16121,6 +16822,13 @@
             <a:prstDash val="solid"/>
           </a:ln>
         </p:spPr>
+        <p:txBody>
+          <a:bodyPr/>
+          <a:lstStyle/>
+          <a:p>
+            <a:endParaRPr lang="es-CL"/>
+          </a:p>
+        </p:txBody>
       </p:sp>
       <p:sp>
         <p:nvSpPr>
@@ -16143,7 +16851,7 @@
           <a:bodyPr wrap="square" rtlCol="0" anchor="ctr"/>
           <a:lstStyle/>
           <a:p>
-            <a:pPr algn="ctr" indent="0" marL="0">
+            <a:pPr marL="0" indent="0" algn="ctr">
               <a:buNone/>
             </a:pPr>
             <a:r>
@@ -16185,6 +16893,13 @@
             <a:prstDash val="solid"/>
           </a:ln>
         </p:spPr>
+        <p:txBody>
+          <a:bodyPr/>
+          <a:lstStyle/>
+          <a:p>
+            <a:endParaRPr lang="es-CL"/>
+          </a:p>
+        </p:txBody>
       </p:sp>
       <p:sp>
         <p:nvSpPr>
@@ -16207,7 +16922,7 @@
           <a:bodyPr wrap="square" rtlCol="0" anchor="ctr"/>
           <a:lstStyle/>
           <a:p>
-            <a:pPr algn="ctr" indent="0" marL="0">
+            <a:pPr marL="0" indent="0" algn="ctr">
               <a:buNone/>
             </a:pPr>
             <a:r>
@@ -16249,6 +16964,13 @@
             <a:prstDash val="solid"/>
           </a:ln>
         </p:spPr>
+        <p:txBody>
+          <a:bodyPr/>
+          <a:lstStyle/>
+          <a:p>
+            <a:endParaRPr lang="es-CL"/>
+          </a:p>
+        </p:txBody>
       </p:sp>
       <p:sp>
         <p:nvSpPr>
@@ -16271,7 +16993,7 @@
           <a:bodyPr wrap="square" rtlCol="0" anchor="ctr"/>
           <a:lstStyle/>
           <a:p>
-            <a:pPr algn="l" indent="0" marL="0">
+            <a:pPr marL="0" indent="0" algn="l">
               <a:buNone/>
             </a:pPr>
             <a:r>
@@ -16313,6 +17035,13 @@
             <a:prstDash val="solid"/>
           </a:ln>
         </p:spPr>
+        <p:txBody>
+          <a:bodyPr/>
+          <a:lstStyle/>
+          <a:p>
+            <a:endParaRPr lang="es-CL"/>
+          </a:p>
+        </p:txBody>
       </p:sp>
       <p:sp>
         <p:nvSpPr>
@@ -16335,7 +17064,7 @@
           <a:bodyPr wrap="square" rtlCol="0" anchor="ctr"/>
           <a:lstStyle/>
           <a:p>
-            <a:pPr algn="ctr" indent="0" marL="0">
+            <a:pPr marL="0" indent="0" algn="ctr">
               <a:buNone/>
             </a:pPr>
             <a:r>
@@ -16377,6 +17106,13 @@
             <a:prstDash val="solid"/>
           </a:ln>
         </p:spPr>
+        <p:txBody>
+          <a:bodyPr/>
+          <a:lstStyle/>
+          <a:p>
+            <a:endParaRPr lang="es-CL"/>
+          </a:p>
+        </p:txBody>
       </p:sp>
       <p:sp>
         <p:nvSpPr>
@@ -16399,7 +17135,7 @@
           <a:bodyPr wrap="square" rtlCol="0" anchor="ctr"/>
           <a:lstStyle/>
           <a:p>
-            <a:pPr algn="ctr" indent="0" marL="0">
+            <a:pPr marL="0" indent="0" algn="ctr">
               <a:buNone/>
             </a:pPr>
             <a:r>
@@ -16438,7 +17174,7 @@
           <a:bodyPr wrap="square" rtlCol="0" anchor="ctr"/>
           <a:lstStyle/>
           <a:p>
-            <a:pPr indent="0" marL="0">
+            <a:pPr marL="0" indent="0">
               <a:buNone/>
             </a:pPr>
             <a:r>
@@ -16477,7 +17213,7 @@
           <a:bodyPr wrap="square" rtlCol="0" anchor="ctr"/>
           <a:lstStyle/>
           <a:p>
-            <a:pPr algn="r" indent="0" marL="0">
+            <a:pPr marL="0" indent="0" algn="r">
               <a:buNone/>
             </a:pPr>
             <a:r>
@@ -16796,4 +17532,319 @@
     </a:ext>
   </a:extLst>
 </a:theme>
+</file>
+
+<file path=ppt/theme/theme2.xml><?xml version="1.0" encoding="utf-8"?>
+<a:theme xmlns:a="http://schemas.openxmlformats.org/drawingml/2006/main" name="Tema de Office">
+  <a:themeElements>
+    <a:clrScheme name="Office">
+      <a:dk1>
+        <a:sysClr val="windowText" lastClr="000000"/>
+      </a:dk1>
+      <a:lt1>
+        <a:sysClr val="window" lastClr="FFFFFF"/>
+      </a:lt1>
+      <a:dk2>
+        <a:srgbClr val="0E2841"/>
+      </a:dk2>
+      <a:lt2>
+        <a:srgbClr val="E8E8E8"/>
+      </a:lt2>
+      <a:accent1>
+        <a:srgbClr val="156082"/>
+      </a:accent1>
+      <a:accent2>
+        <a:srgbClr val="E97132"/>
+      </a:accent2>
+      <a:accent3>
+        <a:srgbClr val="196B24"/>
+      </a:accent3>
+      <a:accent4>
+        <a:srgbClr val="0F9ED5"/>
+      </a:accent4>
+      <a:accent5>
+        <a:srgbClr val="A02B93"/>
+      </a:accent5>
+      <a:accent6>
+        <a:srgbClr val="4EA72E"/>
+      </a:accent6>
+      <a:hlink>
+        <a:srgbClr val="467886"/>
+      </a:hlink>
+      <a:folHlink>
+        <a:srgbClr val="96607D"/>
+      </a:folHlink>
+    </a:clrScheme>
+    <a:fontScheme name="Office">
+      <a:majorFont>
+        <a:latin typeface="Aptos Display" panose="02110004020202020204"/>
+        <a:ea typeface=""/>
+        <a:cs typeface=""/>
+        <a:font script="Jpan" typeface="游ゴシック Light"/>
+        <a:font script="Hang" typeface="맑은 고딕"/>
+        <a:font script="Hans" typeface="等线 Light"/>
+        <a:font script="Hant" typeface="新細明體"/>
+        <a:font script="Arab" typeface="Times New Roman"/>
+        <a:font script="Hebr" typeface="Times New Roman"/>
+        <a:font script="Thai" typeface="Angsana New"/>
+        <a:font script="Ethi" typeface="Nyala"/>
+        <a:font script="Beng" typeface="Vrinda"/>
+        <a:font script="Gujr" typeface="Shruti"/>
+        <a:font script="Khmr" typeface="MoolBoran"/>
+        <a:font script="Knda" typeface="Tunga"/>
+        <a:font script="Guru" typeface="Raavi"/>
+        <a:font script="Cans" typeface="Euphemia"/>
+        <a:font script="Cher" typeface="Plantagenet Cherokee"/>
+        <a:font script="Yiii" typeface="Microsoft Yi Baiti"/>
+        <a:font script="Tibt" typeface="Microsoft Himalaya"/>
+        <a:font script="Thaa" typeface="MV Boli"/>
+        <a:font script="Deva" typeface="Mangal"/>
+        <a:font script="Telu" typeface="Gautami"/>
+        <a:font script="Taml" typeface="Latha"/>
+        <a:font script="Syrc" typeface="Estrangelo Edessa"/>
+        <a:font script="Orya" typeface="Kalinga"/>
+        <a:font script="Mlym" typeface="Kartika"/>
+        <a:font script="Laoo" typeface="DokChampa"/>
+        <a:font script="Sinh" typeface="Iskoola Pota"/>
+        <a:font script="Mong" typeface="Mongolian Baiti"/>
+        <a:font script="Viet" typeface="Times New Roman"/>
+        <a:font script="Uigh" typeface="Microsoft Uighur"/>
+        <a:font script="Geor" typeface="Sylfaen"/>
+        <a:font script="Armn" typeface="Arial"/>
+        <a:font script="Bugi" typeface="Leelawadee UI"/>
+        <a:font script="Bopo" typeface="Microsoft JhengHei"/>
+        <a:font script="Java" typeface="Javanese Text"/>
+        <a:font script="Lisu" typeface="Segoe UI"/>
+        <a:font script="Mymr" typeface="Myanmar Text"/>
+        <a:font script="Nkoo" typeface="Ebrima"/>
+        <a:font script="Olck" typeface="Nirmala UI"/>
+        <a:font script="Osma" typeface="Ebrima"/>
+        <a:font script="Phag" typeface="Phagspa"/>
+        <a:font script="Syrn" typeface="Estrangelo Edessa"/>
+        <a:font script="Syrj" typeface="Estrangelo Edessa"/>
+        <a:font script="Syre" typeface="Estrangelo Edessa"/>
+        <a:font script="Sora" typeface="Nirmala UI"/>
+        <a:font script="Tale" typeface="Microsoft Tai Le"/>
+        <a:font script="Talu" typeface="Microsoft New Tai Lue"/>
+        <a:font script="Tfng" typeface="Ebrima"/>
+      </a:majorFont>
+      <a:minorFont>
+        <a:latin typeface="Aptos" panose="02110004020202020204"/>
+        <a:ea typeface=""/>
+        <a:cs typeface=""/>
+        <a:font script="Jpan" typeface="游ゴシック"/>
+        <a:font script="Hang" typeface="맑은 고딕"/>
+        <a:font script="Hans" typeface="等线"/>
+        <a:font script="Hant" typeface="新細明體"/>
+        <a:font script="Arab" typeface="Arial"/>
+        <a:font script="Hebr" typeface="Arial"/>
+        <a:font script="Thai" typeface="Cordia New"/>
+        <a:font script="Ethi" typeface="Nyala"/>
+        <a:font script="Beng" typeface="Vrinda"/>
+        <a:font script="Gujr" typeface="Shruti"/>
+        <a:font script="Khmr" typeface="DaunPenh"/>
+        <a:font script="Knda" typeface="Tunga"/>
+        <a:font script="Guru" typeface="Raavi"/>
+        <a:font script="Cans" typeface="Euphemia"/>
+        <a:font script="Cher" typeface="Plantagenet Cherokee"/>
+        <a:font script="Yiii" typeface="Microsoft Yi Baiti"/>
+        <a:font script="Tibt" typeface="Microsoft Himalaya"/>
+        <a:font script="Thaa" typeface="MV Boli"/>
+        <a:font script="Deva" typeface="Mangal"/>
+        <a:font script="Telu" typeface="Gautami"/>
+        <a:font script="Taml" typeface="Latha"/>
+        <a:font script="Syrc" typeface="Estrangelo Edessa"/>
+        <a:font script="Orya" typeface="Kalinga"/>
+        <a:font script="Mlym" typeface="Kartika"/>
+        <a:font script="Laoo" typeface="DokChampa"/>
+        <a:font script="Sinh" typeface="Iskoola Pota"/>
+        <a:font script="Mong" typeface="Mongolian Baiti"/>
+        <a:font script="Viet" typeface="Arial"/>
+        <a:font script="Uigh" typeface="Microsoft Uighur"/>
+        <a:font script="Geor" typeface="Sylfaen"/>
+        <a:font script="Armn" typeface="Arial"/>
+        <a:font script="Bugi" typeface="Leelawadee UI"/>
+        <a:font script="Bopo" typeface="Microsoft JhengHei"/>
+        <a:font script="Java" typeface="Javanese Text"/>
+        <a:font script="Lisu" typeface="Segoe UI"/>
+        <a:font script="Mymr" typeface="Myanmar Text"/>
+        <a:font script="Nkoo" typeface="Ebrima"/>
+        <a:font script="Olck" typeface="Nirmala UI"/>
+        <a:font script="Osma" typeface="Ebrima"/>
+        <a:font script="Phag" typeface="Phagspa"/>
+        <a:font script="Syrn" typeface="Estrangelo Edessa"/>
+        <a:font script="Syrj" typeface="Estrangelo Edessa"/>
+        <a:font script="Syre" typeface="Estrangelo Edessa"/>
+        <a:font script="Sora" typeface="Nirmala UI"/>
+        <a:font script="Tale" typeface="Microsoft Tai Le"/>
+        <a:font script="Talu" typeface="Microsoft New Tai Lue"/>
+        <a:font script="Tfng" typeface="Ebrima"/>
+      </a:minorFont>
+    </a:fontScheme>
+    <a:fmtScheme name="Office">
+      <a:fillStyleLst>
+        <a:solidFill>
+          <a:schemeClr val="phClr"/>
+        </a:solidFill>
+        <a:gradFill rotWithShape="1">
+          <a:gsLst>
+            <a:gs pos="0">
+              <a:schemeClr val="phClr">
+                <a:lumMod val="110000"/>
+                <a:satMod val="105000"/>
+                <a:tint val="67000"/>
+              </a:schemeClr>
+            </a:gs>
+            <a:gs pos="50000">
+              <a:schemeClr val="phClr">
+                <a:lumMod val="105000"/>
+                <a:satMod val="103000"/>
+                <a:tint val="73000"/>
+              </a:schemeClr>
+            </a:gs>
+            <a:gs pos="100000">
+              <a:schemeClr val="phClr">
+                <a:lumMod val="105000"/>
+                <a:satMod val="109000"/>
+                <a:tint val="81000"/>
+              </a:schemeClr>
+            </a:gs>
+          </a:gsLst>
+          <a:lin ang="5400000" scaled="0"/>
+        </a:gradFill>
+        <a:gradFill rotWithShape="1">
+          <a:gsLst>
+            <a:gs pos="0">
+              <a:schemeClr val="phClr">
+                <a:satMod val="103000"/>
+                <a:lumMod val="102000"/>
+                <a:tint val="94000"/>
+              </a:schemeClr>
+            </a:gs>
+            <a:gs pos="50000">
+              <a:schemeClr val="phClr">
+                <a:satMod val="110000"/>
+                <a:lumMod val="100000"/>
+                <a:shade val="100000"/>
+              </a:schemeClr>
+            </a:gs>
+            <a:gs pos="100000">
+              <a:schemeClr val="phClr">
+                <a:lumMod val="99000"/>
+                <a:satMod val="120000"/>
+                <a:shade val="78000"/>
+              </a:schemeClr>
+            </a:gs>
+          </a:gsLst>
+          <a:lin ang="5400000" scaled="0"/>
+        </a:gradFill>
+      </a:fillStyleLst>
+      <a:lnStyleLst>
+        <a:ln w="12700" cap="flat" cmpd="sng" algn="ctr">
+          <a:solidFill>
+            <a:schemeClr val="phClr"/>
+          </a:solidFill>
+          <a:prstDash val="solid"/>
+          <a:miter lim="800000"/>
+        </a:ln>
+        <a:ln w="19050" cap="flat" cmpd="sng" algn="ctr">
+          <a:solidFill>
+            <a:schemeClr val="phClr"/>
+          </a:solidFill>
+          <a:prstDash val="solid"/>
+          <a:miter lim="800000"/>
+        </a:ln>
+        <a:ln w="25400" cap="flat" cmpd="sng" algn="ctr">
+          <a:solidFill>
+            <a:schemeClr val="phClr"/>
+          </a:solidFill>
+          <a:prstDash val="solid"/>
+          <a:miter lim="800000"/>
+        </a:ln>
+      </a:lnStyleLst>
+      <a:effectStyleLst>
+        <a:effectStyle>
+          <a:effectLst/>
+        </a:effectStyle>
+        <a:effectStyle>
+          <a:effectLst/>
+        </a:effectStyle>
+        <a:effectStyle>
+          <a:effectLst>
+            <a:outerShdw blurRad="57150" dist="19050" dir="5400000" algn="ctr" rotWithShape="0">
+              <a:srgbClr val="000000">
+                <a:alpha val="63000"/>
+              </a:srgbClr>
+            </a:outerShdw>
+          </a:effectLst>
+        </a:effectStyle>
+      </a:effectStyleLst>
+      <a:bgFillStyleLst>
+        <a:solidFill>
+          <a:schemeClr val="phClr"/>
+        </a:solidFill>
+        <a:solidFill>
+          <a:schemeClr val="phClr">
+            <a:tint val="95000"/>
+            <a:satMod val="170000"/>
+          </a:schemeClr>
+        </a:solidFill>
+        <a:gradFill rotWithShape="1">
+          <a:gsLst>
+            <a:gs pos="0">
+              <a:schemeClr val="phClr">
+                <a:tint val="93000"/>
+                <a:satMod val="150000"/>
+                <a:shade val="98000"/>
+                <a:lumMod val="102000"/>
+              </a:schemeClr>
+            </a:gs>
+            <a:gs pos="50000">
+              <a:schemeClr val="phClr">
+                <a:tint val="98000"/>
+                <a:satMod val="130000"/>
+                <a:shade val="90000"/>
+                <a:lumMod val="103000"/>
+              </a:schemeClr>
+            </a:gs>
+            <a:gs pos="100000">
+              <a:schemeClr val="phClr">
+                <a:shade val="63000"/>
+                <a:satMod val="120000"/>
+              </a:schemeClr>
+            </a:gs>
+          </a:gsLst>
+          <a:lin ang="5400000" scaled="0"/>
+        </a:gradFill>
+      </a:bgFillStyleLst>
+    </a:fmtScheme>
+  </a:themeElements>
+  <a:objectDefaults>
+    <a:lnDef>
+      <a:spPr/>
+      <a:bodyPr/>
+      <a:lstStyle/>
+      <a:style>
+        <a:lnRef idx="2">
+          <a:schemeClr val="accent1"/>
+        </a:lnRef>
+        <a:fillRef idx="0">
+          <a:schemeClr val="accent1"/>
+        </a:fillRef>
+        <a:effectRef idx="1">
+          <a:schemeClr val="accent1"/>
+        </a:effectRef>
+        <a:fontRef idx="minor">
+          <a:schemeClr val="tx1"/>
+        </a:fontRef>
+      </a:style>
+    </a:lnDef>
+  </a:objectDefaults>
+  <a:extraClrSchemeLst/>
+  <a:extLst>
+    <a:ext uri="{05A4C25C-085E-4340-85A3-A5531E510DB2}">
+      <thm15:themeFamily xmlns:thm15="http://schemas.microsoft.com/office/thememl/2012/main" name="Office Theme" id="{2E142A2C-CD16-42D6-873A-C26D2A0506FA}" vid="{1BDDFF52-6CD6-40A5-AB3C-68EB2F1E4D0A}"/>
+    </a:ext>
+  </a:extLst>
+</a:theme>
 </file>
--- a/Fase 1/Evidencias Grupales/Proyecto_APT_App_Finanzas_Completo_1.pptx
+++ b/Fase 1/Evidencias Grupales/Proyecto_APT_App_Finanzas_Completo_1.pptx
@@ -4,9 +4,6 @@
   <p:sldMasterIdLst>
     <p:sldMasterId id="2147483648" r:id="rId1"/>
   </p:sldMasterIdLst>
-  <p:notesMasterIdLst>
-    <p:notesMasterId r:id="rId16"/>
-  </p:notesMasterIdLst>
   <p:sldIdLst>
     <p:sldId id="256" r:id="rId2"/>
     <p:sldId id="257" r:id="rId3"/>
@@ -23,6 +20,9 @@
     <p:sldId id="268" r:id="rId14"/>
     <p:sldId id="269" r:id="rId15"/>
   </p:sldIdLst>
+  <p:notesMasterIdLst>
+    <p:notesMasterId r:id="rId16"/>
+  </p:notesMasterIdLst>
   <p:sldSz cx="12192000" cy="6858000"/>
   <p:notesSz cx="6858000" cy="12192000"/>
   <p:defaultTextStyle>
@@ -117,11 +117,6 @@
       </a:defRPr>
     </a:lvl9pPr>
   </p:defaultTextStyle>
-  <p:extLst>
-    <p:ext uri="{EFAFB233-063F-42B5-8137-9DF3F51BA10A}">
-      <p15:sldGuideLst xmlns:p15="http://schemas.microsoft.com/office/powerpoint/2012/main"/>
-    </p:ext>
-  </p:extLst>
 </p:presentation>
 </file>
 
@@ -147,10 +142,234 @@
           <a:chExt cx="0" cy="0"/>
         </a:xfrm>
       </p:grpSpPr>
+      <p:sp>
+        <p:nvSpPr>
+          <p:cNvPr id="2" name="Header Placeholder 1"/>
+          <p:cNvSpPr>
+            <a:spLocks noGrp="1"/>
+          </p:cNvSpPr>
+          <p:nvPr>
+            <p:ph type="hdr" sz="quarter"/>
+          </p:nvPr>
+        </p:nvSpPr>
+        <p:spPr>
+          <a:xfrm>
+            <a:off x="0" y="0"/>
+            <a:ext cx="2971800" cy="458788"/>
+          </a:xfrm>
+          <a:prstGeom prst="rect">
+            <a:avLst/>
+          </a:prstGeom>
+        </p:spPr>
+        <p:txBody>
+          <a:bodyPr vert="horz" lIns="91440" tIns="45720" rIns="91440" bIns="45720" rtlCol="0"/>
+          <a:lstStyle>
+            <a:lvl1pPr algn="l">
+              <a:defRPr sz="1200"/>
+            </a:lvl1pPr>
+          </a:lstStyle>
+          <a:p>
+            <a:endParaRPr lang="en-US"/>
+          </a:p>
+        </p:txBody>
+      </p:sp>
+      <p:sp>
+        <p:nvSpPr>
+          <p:cNvPr id="3" name="Date Placeholder 2"/>
+          <p:cNvSpPr>
+            <a:spLocks noGrp="1"/>
+          </p:cNvSpPr>
+          <p:nvPr>
+            <p:ph type="dt" idx="1"/>
+          </p:nvPr>
+        </p:nvSpPr>
+        <p:spPr>
+          <a:xfrm>
+            <a:off x="3884613" y="0"/>
+            <a:ext cx="2971800" cy="458788"/>
+          </a:xfrm>
+          <a:prstGeom prst="rect">
+            <a:avLst/>
+          </a:prstGeom>
+        </p:spPr>
+        <p:txBody>
+          <a:bodyPr vert="horz" lIns="91440" tIns="45720" rIns="91440" bIns="45720" rtlCol="0"/>
+          <a:lstStyle>
+            <a:lvl1pPr algn="r">
+              <a:defRPr sz="1200"/>
+            </a:lvl1pPr>
+          </a:lstStyle>
+          <a:p>
+            <a:fld id="{5282F153-3F37-0F45-9E97-73ACFA13230C}" type="datetimeFigureOut">
+              <a:rPr lang="en-US"/>
+              <a:t>7/23/19</a:t>
+            </a:fld>
+            <a:endParaRPr lang="en-US"/>
+          </a:p>
+        </p:txBody>
+      </p:sp>
+      <p:sp>
+        <p:nvSpPr>
+          <p:cNvPr id="4" name="Slide Image Placeholder 3"/>
+          <p:cNvSpPr>
+            <a:spLocks noGrp="1" noRot="1" noChangeAspect="1"/>
+          </p:cNvSpPr>
+          <p:nvPr>
+            <p:ph type="sldImg" idx="2"/>
+          </p:nvPr>
+        </p:nvSpPr>
+        <p:spPr>
+          <a:xfrm>
+            <a:off x="685800" y="1143000"/>
+            <a:ext cx="5486400" cy="3086100"/>
+          </a:xfrm>
+          <a:prstGeom prst="rect">
+            <a:avLst/>
+          </a:prstGeom>
+          <a:noFill/>
+          <a:ln w="12700">
+            <a:solidFill>
+              <a:prstClr val="black"/>
+            </a:solidFill>
+          </a:ln>
+        </p:spPr>
+        <p:txBody>
+          <a:bodyPr vert="horz" lIns="91440" tIns="45720" rIns="91440" bIns="45720" rtlCol="0" anchor="ctr"/>
+          <a:lstStyle/>
+          <a:p>
+            <a:endParaRPr lang="en-US"/>
+          </a:p>
+        </p:txBody>
+      </p:sp>
+      <p:sp>
+        <p:nvSpPr>
+          <p:cNvPr id="5" name="Notes Placeholder 4"/>
+          <p:cNvSpPr>
+            <a:spLocks noGrp="1"/>
+          </p:cNvSpPr>
+          <p:nvPr>
+            <p:ph type="body" sz="quarter" idx="3"/>
+          </p:nvPr>
+        </p:nvSpPr>
+        <p:spPr>
+          <a:xfrm>
+            <a:off x="685800" y="4400550"/>
+            <a:ext cx="5486400" cy="3600450"/>
+          </a:xfrm>
+          <a:prstGeom prst="rect">
+            <a:avLst/>
+          </a:prstGeom>
+        </p:spPr>
+        <p:txBody>
+          <a:bodyPr vert="horz" lIns="91440" tIns="45720" rIns="91440" bIns="45720" rtlCol="0"/>
+          <a:lstStyle/>
+          <a:p>
+            <a:pPr lvl="0"/>
+            <a:r>
+              <a:rPr lang="en-US"/>
+              <a:t>Click to edit Master text styles</a:t>
+            </a:r>
+          </a:p>
+          <a:p>
+            <a:pPr lvl="1"/>
+            <a:r>
+              <a:rPr lang="en-US"/>
+              <a:t>Second level</a:t>
+            </a:r>
+          </a:p>
+          <a:p>
+            <a:pPr lvl="2"/>
+            <a:r>
+              <a:rPr lang="en-US"/>
+              <a:t>Third level</a:t>
+            </a:r>
+          </a:p>
+          <a:p>
+            <a:pPr lvl="3"/>
+            <a:r>
+              <a:rPr lang="en-US"/>
+              <a:t>Fourth level</a:t>
+            </a:r>
+          </a:p>
+          <a:p>
+            <a:pPr lvl="4"/>
+            <a:r>
+              <a:rPr lang="en-US"/>
+              <a:t>Fifth level</a:t>
+            </a:r>
+          </a:p>
+        </p:txBody>
+      </p:sp>
+      <p:sp>
+        <p:nvSpPr>
+          <p:cNvPr id="6" name="Footer Placeholder 5"/>
+          <p:cNvSpPr>
+            <a:spLocks noGrp="1"/>
+          </p:cNvSpPr>
+          <p:nvPr>
+            <p:ph type="ftr" sz="quarter" idx="4"/>
+          </p:nvPr>
+        </p:nvSpPr>
+        <p:spPr>
+          <a:xfrm>
+            <a:off x="0" y="8685213"/>
+            <a:ext cx="2971800" cy="458787"/>
+          </a:xfrm>
+          <a:prstGeom prst="rect">
+            <a:avLst/>
+          </a:prstGeom>
+        </p:spPr>
+        <p:txBody>
+          <a:bodyPr vert="horz" lIns="91440" tIns="45720" rIns="91440" bIns="45720" rtlCol="0" anchor="b"/>
+          <a:lstStyle>
+            <a:lvl1pPr algn="l">
+              <a:defRPr sz="1200"/>
+            </a:lvl1pPr>
+          </a:lstStyle>
+          <a:p>
+            <a:endParaRPr lang="en-US"/>
+          </a:p>
+        </p:txBody>
+      </p:sp>
+      <p:sp>
+        <p:nvSpPr>
+          <p:cNvPr id="7" name="Slide Number Placeholder 6"/>
+          <p:cNvSpPr>
+            <a:spLocks noGrp="1"/>
+          </p:cNvSpPr>
+          <p:nvPr>
+            <p:ph type="sldNum" sz="quarter" idx="5"/>
+          </p:nvPr>
+        </p:nvSpPr>
+        <p:spPr>
+          <a:xfrm>
+            <a:off x="3884613" y="8685213"/>
+            <a:ext cx="2971800" cy="458787"/>
+          </a:xfrm>
+          <a:prstGeom prst="rect">
+            <a:avLst/>
+          </a:prstGeom>
+        </p:spPr>
+        <p:txBody>
+          <a:bodyPr vert="horz" lIns="91440" tIns="45720" rIns="91440" bIns="45720" rtlCol="0" anchor="b"/>
+          <a:lstStyle>
+            <a:lvl1pPr algn="r">
+              <a:defRPr sz="1200"/>
+            </a:lvl1pPr>
+          </a:lstStyle>
+          <a:p>
+            <a:fld id="{CE5E9CC1-C706-0F49-92D6-E571CC5EEA8F}" type="slidenum">
+              <a:rPr lang="en-US"/>
+              <a:t>‹#›</a:t>
+            </a:fld>
+            <a:endParaRPr lang="en-US"/>
+          </a:p>
+        </p:txBody>
+      </p:sp>
     </p:spTree>
     <p:extLst>
       <p:ext uri="{BB962C8B-B14F-4D97-AF65-F5344CB8AC3E}">
-        <p14:creationId xmlns:p14="http://schemas.microsoft.com/office/powerpoint/2010/main" val="3016418684"/>
+        <p14:creationId xmlns:p14="http://schemas.microsoft.com/office/powerpoint/2010/main" val="1024086991"/>
       </p:ext>
     </p:extLst>
   </p:cSld>
@@ -294,6 +513,10 @@
           <a:bodyPr/>
           <a:lstStyle/>
           <a:p>
+            <a:r>
+              <a:rPr lang="en-US" dirty="0"/>
+              <a:t/>
+            </a:r>
             <a:endParaRPr lang="en-US" dirty="0"/>
           </a:p>
         </p:txBody>
@@ -378,6 +601,10 @@
           <a:bodyPr/>
           <a:lstStyle/>
           <a:p>
+            <a:r>
+              <a:rPr lang="en-US" dirty="0"/>
+              <a:t/>
+            </a:r>
             <a:endParaRPr lang="en-US" dirty="0"/>
           </a:p>
         </p:txBody>
@@ -462,6 +689,10 @@
           <a:bodyPr/>
           <a:lstStyle/>
           <a:p>
+            <a:r>
+              <a:rPr lang="en-US" dirty="0"/>
+              <a:t/>
+            </a:r>
             <a:endParaRPr lang="en-US" dirty="0"/>
           </a:p>
         </p:txBody>
@@ -546,6 +777,10 @@
           <a:bodyPr/>
           <a:lstStyle/>
           <a:p>
+            <a:r>
+              <a:rPr lang="en-US" dirty="0"/>
+              <a:t/>
+            </a:r>
             <a:endParaRPr lang="en-US" dirty="0"/>
           </a:p>
         </p:txBody>
@@ -630,6 +865,10 @@
           <a:bodyPr/>
           <a:lstStyle/>
           <a:p>
+            <a:r>
+              <a:rPr lang="en-US" dirty="0"/>
+              <a:t/>
+            </a:r>
             <a:endParaRPr lang="en-US" dirty="0"/>
           </a:p>
         </p:txBody>
@@ -714,6 +953,10 @@
           <a:bodyPr/>
           <a:lstStyle/>
           <a:p>
+            <a:r>
+              <a:rPr lang="en-US" dirty="0"/>
+              <a:t/>
+            </a:r>
             <a:endParaRPr lang="en-US" dirty="0"/>
           </a:p>
         </p:txBody>
@@ -798,6 +1041,10 @@
           <a:bodyPr/>
           <a:lstStyle/>
           <a:p>
+            <a:r>
+              <a:rPr lang="en-US" dirty="0"/>
+              <a:t/>
+            </a:r>
             <a:endParaRPr lang="en-US" dirty="0"/>
           </a:p>
         </p:txBody>
@@ -882,6 +1129,10 @@
           <a:bodyPr/>
           <a:lstStyle/>
           <a:p>
+            <a:r>
+              <a:rPr lang="en-US" dirty="0"/>
+              <a:t/>
+            </a:r>
             <a:endParaRPr lang="en-US" dirty="0"/>
           </a:p>
         </p:txBody>
@@ -966,6 +1217,10 @@
           <a:bodyPr/>
           <a:lstStyle/>
           <a:p>
+            <a:r>
+              <a:rPr lang="en-US" dirty="0"/>
+              <a:t/>
+            </a:r>
             <a:endParaRPr lang="en-US" dirty="0"/>
           </a:p>
         </p:txBody>
@@ -1050,6 +1305,10 @@
           <a:bodyPr/>
           <a:lstStyle/>
           <a:p>
+            <a:r>
+              <a:rPr lang="en-US" dirty="0"/>
+              <a:t/>
+            </a:r>
             <a:endParaRPr lang="en-US" dirty="0"/>
           </a:p>
         </p:txBody>
@@ -1134,6 +1393,10 @@
           <a:bodyPr/>
           <a:lstStyle/>
           <a:p>
+            <a:r>
+              <a:rPr lang="en-US" dirty="0"/>
+              <a:t/>
+            </a:r>
             <a:endParaRPr lang="en-US" dirty="0"/>
           </a:p>
         </p:txBody>
@@ -1218,6 +1481,10 @@
           <a:bodyPr/>
           <a:lstStyle/>
           <a:p>
+            <a:r>
+              <a:rPr lang="en-US" dirty="0"/>
+              <a:t/>
+            </a:r>
             <a:endParaRPr lang="en-US" dirty="0"/>
           </a:p>
         </p:txBody>
@@ -1302,6 +1569,10 @@
           <a:bodyPr/>
           <a:lstStyle/>
           <a:p>
+            <a:r>
+              <a:rPr lang="en-US" dirty="0"/>
+              <a:t/>
+            </a:r>
             <a:endParaRPr lang="en-US" dirty="0"/>
           </a:p>
         </p:txBody>
@@ -1386,6 +1657,10 @@
           <a:bodyPr/>
           <a:lstStyle/>
           <a:p>
+            <a:r>
+              <a:rPr lang="en-US" dirty="0"/>
+              <a:t/>
+            </a:r>
             <a:endParaRPr lang="en-US" dirty="0"/>
           </a:p>
         </p:txBody>
@@ -1459,11 +1734,6 @@
 <file path=ppt/slideMasters/slideMaster1.xml><?xml version="1.0" encoding="utf-8"?>
 <p:sldMaster xmlns:a="http://schemas.openxmlformats.org/drawingml/2006/main" xmlns:r="http://schemas.openxmlformats.org/officeDocument/2006/relationships" xmlns:p="http://schemas.openxmlformats.org/presentationml/2006/main">
   <p:cSld>
-    <p:bg>
-      <p:bgRef idx="1001">
-        <a:schemeClr val="bg1"/>
-      </p:bgRef>
-    </p:bg>
     <p:spTree>
       <p:nvGrpSpPr>
         <p:cNvPr id="1" name=""/>
@@ -1746,7 +2016,6 @@
         <a:solidFill>
           <a:srgbClr val="013A40"/>
         </a:solidFill>
-        <a:effectLst/>
       </p:bgPr>
     </p:bg>
     <p:spTree>
@@ -1784,13 +2053,6 @@
           </a:solidFill>
           <a:ln/>
         </p:spPr>
-        <p:txBody>
-          <a:bodyPr/>
-          <a:lstStyle/>
-          <a:p>
-            <a:endParaRPr lang="es-CL"/>
-          </a:p>
-        </p:txBody>
       </p:sp>
       <p:sp>
         <p:nvSpPr>
@@ -1813,13 +2075,6 @@
           </a:solidFill>
           <a:ln/>
         </p:spPr>
-        <p:txBody>
-          <a:bodyPr/>
-          <a:lstStyle/>
-          <a:p>
-            <a:endParaRPr lang="es-CL"/>
-          </a:p>
-        </p:txBody>
       </p:sp>
       <p:sp>
         <p:nvSpPr>
@@ -1842,11 +2097,11 @@
           <a:bodyPr wrap="square" rtlCol="0" anchor="ctr"/>
           <a:lstStyle/>
           <a:p>
-            <a:pPr marL="0" indent="0">
-              <a:buNone/>
-            </a:pPr>
-            <a:r>
-              <a:rPr lang="en-US" sz="1400" b="1" kern="0" spc="300" dirty="0">
+            <a:pPr indent="0" marL="0">
+              <a:buNone/>
+            </a:pPr>
+            <a:r>
+              <a:rPr lang="en-US" sz="1400" b="1" spc="300" kern="0" dirty="0">
                 <a:solidFill>
                   <a:srgbClr val="02C39A"/>
                 </a:solidFill>
@@ -1881,7 +2136,7 @@
           <a:bodyPr wrap="square" lIns="0" tIns="0" rIns="0" bIns="0" rtlCol="0" anchor="ctr"/>
           <a:lstStyle/>
           <a:p>
-            <a:pPr marL="0" indent="0">
+            <a:pPr indent="0" marL="0">
               <a:buNone/>
             </a:pPr>
             <a:r>
@@ -1920,7 +2175,7 @@
           <a:bodyPr wrap="square" rtlCol="0" anchor="ctr"/>
           <a:lstStyle/>
           <a:p>
-            <a:pPr marL="0" indent="0">
+            <a:pPr indent="0" marL="0">
               <a:buNone/>
             </a:pPr>
             <a:r>
@@ -1960,13 +2215,6 @@
             <a:prstDash val="solid"/>
           </a:ln>
         </p:spPr>
-        <p:txBody>
-          <a:bodyPr/>
-          <a:lstStyle/>
-          <a:p>
-            <a:endParaRPr lang="es-CL"/>
-          </a:p>
-        </p:txBody>
       </p:sp>
       <p:sp>
         <p:nvSpPr>
@@ -1989,7 +2237,7 @@
           <a:bodyPr wrap="square" rtlCol="0" anchor="ctr"/>
           <a:lstStyle/>
           <a:p>
-            <a:pPr marL="0" indent="0">
+            <a:pPr indent="0" marL="0">
               <a:buNone/>
             </a:pPr>
             <a:r>
@@ -2003,6 +2251,9 @@
               </a:rPr>
               <a:t>Alumno: </a:t>
             </a:r>
+            <a:pPr indent="0" marL="0">
+              <a:buNone/>
+            </a:pPr>
             <a:r>
               <a:rPr lang="en-US" sz="1400" dirty="0">
                 <a:solidFill>
@@ -2039,7 +2290,7 @@
           <a:bodyPr wrap="square" rtlCol="0" anchor="ctr"/>
           <a:lstStyle/>
           <a:p>
-            <a:pPr marL="0" indent="0">
+            <a:pPr indent="0" marL="0">
               <a:buNone/>
             </a:pPr>
             <a:r>
@@ -2053,6 +2304,9 @@
               </a:rPr>
               <a:t>Docente: </a:t>
             </a:r>
+            <a:pPr indent="0" marL="0">
+              <a:buNone/>
+            </a:pPr>
             <a:r>
               <a:rPr lang="en-US" sz="1400" dirty="0">
                 <a:solidFill>
@@ -2062,7 +2316,7 @@
                 <a:ea typeface="Calibri" pitchFamily="34" charset="-122"/>
                 <a:cs typeface="Calibri" pitchFamily="34" charset="-120"/>
               </a:rPr>
-              <a:t>Anibal Faundez</a:t>
+              <a:t>German</a:t>
             </a:r>
             <a:endParaRPr lang="en-US" sz="1400" dirty="0"/>
           </a:p>
@@ -2089,7 +2343,7 @@
           <a:bodyPr wrap="square" rtlCol="0" anchor="ctr"/>
           <a:lstStyle/>
           <a:p>
-            <a:pPr marL="0" indent="0">
+            <a:pPr indent="0" marL="0">
               <a:buNone/>
             </a:pPr>
             <a:r>
@@ -2103,6 +2357,9 @@
               </a:rPr>
               <a:t>Carrera: </a:t>
             </a:r>
+            <a:pPr indent="0" marL="0">
+              <a:buNone/>
+            </a:pPr>
             <a:r>
               <a:rPr lang="en-US" sz="1400" dirty="0">
                 <a:solidFill>
@@ -2139,7 +2396,7 @@
           <a:bodyPr wrap="square" rtlCol="0" anchor="ctr"/>
           <a:lstStyle/>
           <a:p>
-            <a:pPr marL="0" indent="0">
+            <a:pPr indent="0" marL="0">
               <a:buNone/>
             </a:pPr>
             <a:r>
@@ -2173,7 +2430,6 @@
         <a:solidFill>
           <a:srgbClr val="FFFFFF"/>
         </a:solidFill>
-        <a:effectLst/>
       </p:bgPr>
     </p:bg>
     <p:spTree>
@@ -2211,7 +2467,7 @@
           <a:bodyPr wrap="square" rtlCol="0" anchor="ctr"/>
           <a:lstStyle/>
           <a:p>
-            <a:pPr marL="0" indent="0">
+            <a:pPr indent="0" marL="0">
               <a:buNone/>
             </a:pPr>
             <a:r>
@@ -2250,7 +2506,7 @@
           <a:bodyPr wrap="square" rtlCol="0" anchor="ctr"/>
           <a:lstStyle/>
           <a:p>
-            <a:pPr marL="0" indent="0">
+            <a:pPr indent="0" marL="0">
               <a:buNone/>
             </a:pPr>
             <a:r>
@@ -2276,8 +2532,8 @@
         </p:nvSpPr>
         <p:spPr>
           <a:xfrm>
-            <a:off x="548640" y="1554480"/>
-            <a:ext cx="2651760" cy="1289304"/>
+            <a:off x="457200" y="1508760"/>
+            <a:ext cx="2468880" cy="1207008"/>
           </a:xfrm>
           <a:prstGeom prst="rect">
             <a:avLst/>
@@ -2292,13 +2548,6 @@
             <a:prstDash val="solid"/>
           </a:ln>
         </p:spPr>
-        <p:txBody>
-          <a:bodyPr/>
-          <a:lstStyle/>
-          <a:p>
-            <a:endParaRPr lang="es-CL"/>
-          </a:p>
-        </p:txBody>
       </p:sp>
       <p:sp>
         <p:nvSpPr>
@@ -2308,8 +2557,8 @@
         </p:nvSpPr>
         <p:spPr>
           <a:xfrm>
-            <a:off x="548640" y="1554480"/>
-            <a:ext cx="2651760" cy="384048"/>
+            <a:off x="457200" y="1508760"/>
+            <a:ext cx="2468880" cy="384048"/>
           </a:xfrm>
           <a:prstGeom prst="rect">
             <a:avLst/>
@@ -2319,13 +2568,6 @@
           </a:solidFill>
           <a:ln/>
         </p:spPr>
-        <p:txBody>
-          <a:bodyPr/>
-          <a:lstStyle/>
-          <a:p>
-            <a:endParaRPr lang="es-CL"/>
-          </a:p>
-        </p:txBody>
       </p:sp>
       <p:sp>
         <p:nvSpPr>
@@ -2335,20 +2577,20 @@
         </p:nvSpPr>
         <p:spPr>
           <a:xfrm>
-            <a:off x="548640" y="1554480"/>
-            <a:ext cx="2651760" cy="384048"/>
-          </a:xfrm>
-          <a:prstGeom prst="rect">
-            <a:avLst/>
-          </a:prstGeom>
-          <a:noFill/>
-          <a:ln/>
-        </p:spPr>
-        <p:txBody>
-          <a:bodyPr wrap="square" rtlCol="0" anchor="ctr"/>
-          <a:lstStyle/>
-          <a:p>
-            <a:pPr marL="0" indent="0" algn="ctr">
+            <a:off x="457200" y="1508760"/>
+            <a:ext cx="2468880" cy="384048"/>
+          </a:xfrm>
+          <a:prstGeom prst="rect">
+            <a:avLst/>
+          </a:prstGeom>
+          <a:noFill/>
+          <a:ln/>
+        </p:spPr>
+        <p:txBody>
+          <a:bodyPr wrap="square" rtlCol="0" anchor="ctr"/>
+          <a:lstStyle/>
+          <a:p>
+            <a:pPr algn="ctr" indent="0" marL="0">
               <a:buNone/>
             </a:pPr>
             <a:r>
@@ -2374,24 +2616,24 @@
         </p:nvSpPr>
         <p:spPr>
           <a:xfrm>
-            <a:off x="685800" y="1938528"/>
-            <a:ext cx="2377440" cy="292608"/>
-          </a:xfrm>
-          <a:prstGeom prst="rect">
-            <a:avLst/>
-          </a:prstGeom>
-          <a:noFill/>
-          <a:ln/>
-        </p:spPr>
-        <p:txBody>
-          <a:bodyPr wrap="square" rtlCol="0" anchor="ctr"/>
-          <a:lstStyle/>
-          <a:p>
-            <a:pPr marL="0" indent="0">
-              <a:buNone/>
-            </a:pPr>
-            <a:r>
-              <a:rPr lang="en-US" sz="1050" dirty="0">
+            <a:off x="594360" y="1892808"/>
+            <a:ext cx="2194560" cy="274320"/>
+          </a:xfrm>
+          <a:prstGeom prst="rect">
+            <a:avLst/>
+          </a:prstGeom>
+          <a:noFill/>
+          <a:ln/>
+        </p:spPr>
+        <p:txBody>
+          <a:bodyPr wrap="square" rtlCol="0" anchor="ctr"/>
+          <a:lstStyle/>
+          <a:p>
+            <a:pPr indent="0" marL="0">
+              <a:buNone/>
+            </a:pPr>
+            <a:r>
+              <a:rPr lang="en-US" sz="970" dirty="0">
                 <a:solidFill>
                   <a:srgbClr val="20363A"/>
                 </a:solidFill>
@@ -2401,7 +2643,7 @@
               </a:rPr>
               <a:t>PK  id_usuario</a:t>
             </a:r>
-            <a:endParaRPr lang="en-US" sz="1050" dirty="0"/>
+            <a:endParaRPr lang="en-US" sz="970" dirty="0"/>
           </a:p>
         </p:txBody>
       </p:sp>
@@ -2413,24 +2655,24 @@
         </p:nvSpPr>
         <p:spPr>
           <a:xfrm>
-            <a:off x="685800" y="2231136"/>
-            <a:ext cx="2377440" cy="292608"/>
-          </a:xfrm>
-          <a:prstGeom prst="rect">
-            <a:avLst/>
-          </a:prstGeom>
-          <a:noFill/>
-          <a:ln/>
-        </p:spPr>
-        <p:txBody>
-          <a:bodyPr wrap="square" rtlCol="0" anchor="ctr"/>
-          <a:lstStyle/>
-          <a:p>
-            <a:pPr marL="0" indent="0">
-              <a:buNone/>
-            </a:pPr>
-            <a:r>
-              <a:rPr lang="en-US" sz="1050" dirty="0">
+            <a:off x="594360" y="2167128"/>
+            <a:ext cx="2194560" cy="274320"/>
+          </a:xfrm>
+          <a:prstGeom prst="rect">
+            <a:avLst/>
+          </a:prstGeom>
+          <a:noFill/>
+          <a:ln/>
+        </p:spPr>
+        <p:txBody>
+          <a:bodyPr wrap="square" rtlCol="0" anchor="ctr"/>
+          <a:lstStyle/>
+          <a:p>
+            <a:pPr indent="0" marL="0">
+              <a:buNone/>
+            </a:pPr>
+            <a:r>
+              <a:rPr lang="en-US" sz="970" dirty="0">
                 <a:solidFill>
                   <a:srgbClr val="20363A"/>
                 </a:solidFill>
@@ -2440,7 +2682,7 @@
               </a:rPr>
               <a:t>nombre</a:t>
             </a:r>
-            <a:endParaRPr lang="en-US" sz="1050" dirty="0"/>
+            <a:endParaRPr lang="en-US" sz="970" dirty="0"/>
           </a:p>
         </p:txBody>
       </p:sp>
@@ -2452,24 +2694,24 @@
         </p:nvSpPr>
         <p:spPr>
           <a:xfrm>
-            <a:off x="685800" y="2523744"/>
-            <a:ext cx="2377440" cy="292608"/>
-          </a:xfrm>
-          <a:prstGeom prst="rect">
-            <a:avLst/>
-          </a:prstGeom>
-          <a:noFill/>
-          <a:ln/>
-        </p:spPr>
-        <p:txBody>
-          <a:bodyPr wrap="square" rtlCol="0" anchor="ctr"/>
-          <a:lstStyle/>
-          <a:p>
-            <a:pPr marL="0" indent="0">
-              <a:buNone/>
-            </a:pPr>
-            <a:r>
-              <a:rPr lang="en-US" sz="1050" dirty="0">
+            <a:off x="594360" y="2441448"/>
+            <a:ext cx="2194560" cy="274320"/>
+          </a:xfrm>
+          <a:prstGeom prst="rect">
+            <a:avLst/>
+          </a:prstGeom>
+          <a:noFill/>
+          <a:ln/>
+        </p:spPr>
+        <p:txBody>
+          <a:bodyPr wrap="square" rtlCol="0" anchor="ctr"/>
+          <a:lstStyle/>
+          <a:p>
+            <a:pPr indent="0" marL="0">
+              <a:buNone/>
+            </a:pPr>
+            <a:r>
+              <a:rPr lang="en-US" sz="970" dirty="0">
                 <a:solidFill>
                   <a:srgbClr val="20363A"/>
                 </a:solidFill>
@@ -2479,7 +2721,7 @@
               </a:rPr>
               <a:t>email</a:t>
             </a:r>
-            <a:endParaRPr lang="en-US" sz="1050" dirty="0"/>
+            <a:endParaRPr lang="en-US" sz="970" dirty="0"/>
           </a:p>
         </p:txBody>
       </p:sp>
@@ -2491,8 +2733,8 @@
         </p:nvSpPr>
         <p:spPr>
           <a:xfrm>
-            <a:off x="548640" y="3749040"/>
-            <a:ext cx="2651760" cy="1289304"/>
+            <a:off x="457200" y="3657600"/>
+            <a:ext cx="2468880" cy="1207008"/>
           </a:xfrm>
           <a:prstGeom prst="rect">
             <a:avLst/>
@@ -2507,13 +2749,6 @@
             <a:prstDash val="solid"/>
           </a:ln>
         </p:spPr>
-        <p:txBody>
-          <a:bodyPr/>
-          <a:lstStyle/>
-          <a:p>
-            <a:endParaRPr lang="es-CL"/>
-          </a:p>
-        </p:txBody>
       </p:sp>
       <p:sp>
         <p:nvSpPr>
@@ -2523,8 +2758,8 @@
         </p:nvSpPr>
         <p:spPr>
           <a:xfrm>
-            <a:off x="548640" y="3749040"/>
-            <a:ext cx="2651760" cy="384048"/>
+            <a:off x="457200" y="3657600"/>
+            <a:ext cx="2468880" cy="384048"/>
           </a:xfrm>
           <a:prstGeom prst="rect">
             <a:avLst/>
@@ -2534,13 +2769,6 @@
           </a:solidFill>
           <a:ln/>
         </p:spPr>
-        <p:txBody>
-          <a:bodyPr/>
-          <a:lstStyle/>
-          <a:p>
-            <a:endParaRPr lang="es-CL"/>
-          </a:p>
-        </p:txBody>
       </p:sp>
       <p:sp>
         <p:nvSpPr>
@@ -2550,20 +2778,20 @@
         </p:nvSpPr>
         <p:spPr>
           <a:xfrm>
-            <a:off x="548640" y="3749040"/>
-            <a:ext cx="2651760" cy="384048"/>
-          </a:xfrm>
-          <a:prstGeom prst="rect">
-            <a:avLst/>
-          </a:prstGeom>
-          <a:noFill/>
-          <a:ln/>
-        </p:spPr>
-        <p:txBody>
-          <a:bodyPr wrap="square" rtlCol="0" anchor="ctr"/>
-          <a:lstStyle/>
-          <a:p>
-            <a:pPr marL="0" indent="0" algn="ctr">
+            <a:off x="457200" y="3657600"/>
+            <a:ext cx="2468880" cy="384048"/>
+          </a:xfrm>
+          <a:prstGeom prst="rect">
+            <a:avLst/>
+          </a:prstGeom>
+          <a:noFill/>
+          <a:ln/>
+        </p:spPr>
+        <p:txBody>
+          <a:bodyPr wrap="square" rtlCol="0" anchor="ctr"/>
+          <a:lstStyle/>
+          <a:p>
+            <a:pPr algn="ctr" indent="0" marL="0">
               <a:buNone/>
             </a:pPr>
             <a:r>
@@ -2589,24 +2817,24 @@
         </p:nvSpPr>
         <p:spPr>
           <a:xfrm>
-            <a:off x="685800" y="4133088"/>
-            <a:ext cx="2377440" cy="292608"/>
-          </a:xfrm>
-          <a:prstGeom prst="rect">
-            <a:avLst/>
-          </a:prstGeom>
-          <a:noFill/>
-          <a:ln/>
-        </p:spPr>
-        <p:txBody>
-          <a:bodyPr wrap="square" rtlCol="0" anchor="ctr"/>
-          <a:lstStyle/>
-          <a:p>
-            <a:pPr marL="0" indent="0">
-              <a:buNone/>
-            </a:pPr>
-            <a:r>
-              <a:rPr lang="en-US" sz="1050" dirty="0">
+            <a:off x="594360" y="4041648"/>
+            <a:ext cx="2194560" cy="274320"/>
+          </a:xfrm>
+          <a:prstGeom prst="rect">
+            <a:avLst/>
+          </a:prstGeom>
+          <a:noFill/>
+          <a:ln/>
+        </p:spPr>
+        <p:txBody>
+          <a:bodyPr wrap="square" rtlCol="0" anchor="ctr"/>
+          <a:lstStyle/>
+          <a:p>
+            <a:pPr indent="0" marL="0">
+              <a:buNone/>
+            </a:pPr>
+            <a:r>
+              <a:rPr lang="en-US" sz="970" dirty="0">
                 <a:solidFill>
                   <a:srgbClr val="20363A"/>
                 </a:solidFill>
@@ -2616,7 +2844,7 @@
               </a:rPr>
               <a:t>PK  id_categoria</a:t>
             </a:r>
-            <a:endParaRPr lang="en-US" sz="1050" dirty="0"/>
+            <a:endParaRPr lang="en-US" sz="970" dirty="0"/>
           </a:p>
         </p:txBody>
       </p:sp>
@@ -2628,24 +2856,24 @@
         </p:nvSpPr>
         <p:spPr>
           <a:xfrm>
-            <a:off x="685800" y="4425696"/>
-            <a:ext cx="2377440" cy="292608"/>
-          </a:xfrm>
-          <a:prstGeom prst="rect">
-            <a:avLst/>
-          </a:prstGeom>
-          <a:noFill/>
-          <a:ln/>
-        </p:spPr>
-        <p:txBody>
-          <a:bodyPr wrap="square" rtlCol="0" anchor="ctr"/>
-          <a:lstStyle/>
-          <a:p>
-            <a:pPr marL="0" indent="0">
-              <a:buNone/>
-            </a:pPr>
-            <a:r>
-              <a:rPr lang="en-US" sz="1050" dirty="0">
+            <a:off x="594360" y="4315968"/>
+            <a:ext cx="2194560" cy="274320"/>
+          </a:xfrm>
+          <a:prstGeom prst="rect">
+            <a:avLst/>
+          </a:prstGeom>
+          <a:noFill/>
+          <a:ln/>
+        </p:spPr>
+        <p:txBody>
+          <a:bodyPr wrap="square" rtlCol="0" anchor="ctr"/>
+          <a:lstStyle/>
+          <a:p>
+            <a:pPr indent="0" marL="0">
+              <a:buNone/>
+            </a:pPr>
+            <a:r>
+              <a:rPr lang="en-US" sz="970" dirty="0">
                 <a:solidFill>
                   <a:srgbClr val="20363A"/>
                 </a:solidFill>
@@ -2655,7 +2883,7 @@
               </a:rPr>
               <a:t>nombre</a:t>
             </a:r>
-            <a:endParaRPr lang="en-US" sz="1050" dirty="0"/>
+            <a:endParaRPr lang="en-US" sz="970" dirty="0"/>
           </a:p>
         </p:txBody>
       </p:sp>
@@ -2667,24 +2895,24 @@
         </p:nvSpPr>
         <p:spPr>
           <a:xfrm>
-            <a:off x="685800" y="4718304"/>
-            <a:ext cx="2377440" cy="292608"/>
-          </a:xfrm>
-          <a:prstGeom prst="rect">
-            <a:avLst/>
-          </a:prstGeom>
-          <a:noFill/>
-          <a:ln/>
-        </p:spPr>
-        <p:txBody>
-          <a:bodyPr wrap="square" rtlCol="0" anchor="ctr"/>
-          <a:lstStyle/>
-          <a:p>
-            <a:pPr marL="0" indent="0">
-              <a:buNone/>
-            </a:pPr>
-            <a:r>
-              <a:rPr lang="en-US" sz="1050" dirty="0">
+            <a:off x="594360" y="4590288"/>
+            <a:ext cx="2194560" cy="274320"/>
+          </a:xfrm>
+          <a:prstGeom prst="rect">
+            <a:avLst/>
+          </a:prstGeom>
+          <a:noFill/>
+          <a:ln/>
+        </p:spPr>
+        <p:txBody>
+          <a:bodyPr wrap="square" rtlCol="0" anchor="ctr"/>
+          <a:lstStyle/>
+          <a:p>
+            <a:pPr indent="0" marL="0">
+              <a:buNone/>
+            </a:pPr>
+            <a:r>
+              <a:rPr lang="en-US" sz="970" dirty="0">
                 <a:solidFill>
                   <a:srgbClr val="20363A"/>
                 </a:solidFill>
@@ -2694,7 +2922,7 @@
               </a:rPr>
               <a:t>tipo (ingreso/gasto)</a:t>
             </a:r>
-            <a:endParaRPr lang="en-US" sz="1050" dirty="0"/>
+            <a:endParaRPr lang="en-US" sz="970" dirty="0"/>
           </a:p>
         </p:txBody>
       </p:sp>
@@ -2706,8 +2934,8 @@
         </p:nvSpPr>
         <p:spPr>
           <a:xfrm>
-            <a:off x="4206240" y="2377440"/>
-            <a:ext cx="3017520" cy="2167128"/>
+            <a:off x="3931920" y="2148840"/>
+            <a:ext cx="3200400" cy="2578608"/>
           </a:xfrm>
           <a:prstGeom prst="rect">
             <a:avLst/>
@@ -2722,13 +2950,6 @@
             <a:prstDash val="solid"/>
           </a:ln>
         </p:spPr>
-        <p:txBody>
-          <a:bodyPr/>
-          <a:lstStyle/>
-          <a:p>
-            <a:endParaRPr lang="es-CL"/>
-          </a:p>
-        </p:txBody>
       </p:sp>
       <p:sp>
         <p:nvSpPr>
@@ -2738,8 +2959,8 @@
         </p:nvSpPr>
         <p:spPr>
           <a:xfrm>
-            <a:off x="4206240" y="2377440"/>
-            <a:ext cx="3017520" cy="384048"/>
+            <a:off x="3931920" y="2148840"/>
+            <a:ext cx="3200400" cy="384048"/>
           </a:xfrm>
           <a:prstGeom prst="rect">
             <a:avLst/>
@@ -2749,13 +2970,6 @@
           </a:solidFill>
           <a:ln/>
         </p:spPr>
-        <p:txBody>
-          <a:bodyPr/>
-          <a:lstStyle/>
-          <a:p>
-            <a:endParaRPr lang="es-CL"/>
-          </a:p>
-        </p:txBody>
       </p:sp>
       <p:sp>
         <p:nvSpPr>
@@ -2765,20 +2979,20 @@
         </p:nvSpPr>
         <p:spPr>
           <a:xfrm>
-            <a:off x="4206240" y="2377440"/>
-            <a:ext cx="3017520" cy="384048"/>
-          </a:xfrm>
-          <a:prstGeom prst="rect">
-            <a:avLst/>
-          </a:prstGeom>
-          <a:noFill/>
-          <a:ln/>
-        </p:spPr>
-        <p:txBody>
-          <a:bodyPr wrap="square" rtlCol="0" anchor="ctr"/>
-          <a:lstStyle/>
-          <a:p>
-            <a:pPr marL="0" indent="0" algn="ctr">
+            <a:off x="3931920" y="2148840"/>
+            <a:ext cx="3200400" cy="384048"/>
+          </a:xfrm>
+          <a:prstGeom prst="rect">
+            <a:avLst/>
+          </a:prstGeom>
+          <a:noFill/>
+          <a:ln/>
+        </p:spPr>
+        <p:txBody>
+          <a:bodyPr wrap="square" rtlCol="0" anchor="ctr"/>
+          <a:lstStyle/>
+          <a:p>
+            <a:pPr algn="ctr" indent="0" marL="0">
               <a:buNone/>
             </a:pPr>
             <a:r>
@@ -2804,24 +3018,24 @@
         </p:nvSpPr>
         <p:spPr>
           <a:xfrm>
-            <a:off x="4343400" y="2761488"/>
-            <a:ext cx="2743200" cy="292608"/>
-          </a:xfrm>
-          <a:prstGeom prst="rect">
-            <a:avLst/>
-          </a:prstGeom>
-          <a:noFill/>
-          <a:ln/>
-        </p:spPr>
-        <p:txBody>
-          <a:bodyPr wrap="square" rtlCol="0" anchor="ctr"/>
-          <a:lstStyle/>
-          <a:p>
-            <a:pPr marL="0" indent="0">
-              <a:buNone/>
-            </a:pPr>
-            <a:r>
-              <a:rPr lang="en-US" sz="1050" dirty="0">
+            <a:off x="4069080" y="2532888"/>
+            <a:ext cx="2926080" cy="274320"/>
+          </a:xfrm>
+          <a:prstGeom prst="rect">
+            <a:avLst/>
+          </a:prstGeom>
+          <a:noFill/>
+          <a:ln/>
+        </p:spPr>
+        <p:txBody>
+          <a:bodyPr wrap="square" rtlCol="0" anchor="ctr"/>
+          <a:lstStyle/>
+          <a:p>
+            <a:pPr indent="0" marL="0">
+              <a:buNone/>
+            </a:pPr>
+            <a:r>
+              <a:rPr lang="en-US" sz="970" dirty="0">
                 <a:solidFill>
                   <a:srgbClr val="20363A"/>
                 </a:solidFill>
@@ -2831,7 +3045,7 @@
               </a:rPr>
               <a:t>PK  id_transaccion</a:t>
             </a:r>
-            <a:endParaRPr lang="en-US" sz="1050" dirty="0"/>
+            <a:endParaRPr lang="en-US" sz="970" dirty="0"/>
           </a:p>
         </p:txBody>
       </p:sp>
@@ -2843,24 +3057,24 @@
         </p:nvSpPr>
         <p:spPr>
           <a:xfrm>
-            <a:off x="4343400" y="3054096"/>
-            <a:ext cx="2743200" cy="292608"/>
-          </a:xfrm>
-          <a:prstGeom prst="rect">
-            <a:avLst/>
-          </a:prstGeom>
-          <a:noFill/>
-          <a:ln/>
-        </p:spPr>
-        <p:txBody>
-          <a:bodyPr wrap="square" rtlCol="0" anchor="ctr"/>
-          <a:lstStyle/>
-          <a:p>
-            <a:pPr marL="0" indent="0">
-              <a:buNone/>
-            </a:pPr>
-            <a:r>
-              <a:rPr lang="en-US" sz="1050" dirty="0">
+            <a:off x="4069080" y="2807208"/>
+            <a:ext cx="2926080" cy="274320"/>
+          </a:xfrm>
+          <a:prstGeom prst="rect">
+            <a:avLst/>
+          </a:prstGeom>
+          <a:noFill/>
+          <a:ln/>
+        </p:spPr>
+        <p:txBody>
+          <a:bodyPr wrap="square" rtlCol="0" anchor="ctr"/>
+          <a:lstStyle/>
+          <a:p>
+            <a:pPr indent="0" marL="0">
+              <a:buNone/>
+            </a:pPr>
+            <a:r>
+              <a:rPr lang="en-US" sz="970" dirty="0">
                 <a:solidFill>
                   <a:srgbClr val="20363A"/>
                 </a:solidFill>
@@ -2870,7 +3084,7 @@
               </a:rPr>
               <a:t>FK  id_usuario</a:t>
             </a:r>
-            <a:endParaRPr lang="en-US" sz="1050" dirty="0"/>
+            <a:endParaRPr lang="en-US" sz="970" dirty="0"/>
           </a:p>
         </p:txBody>
       </p:sp>
@@ -2882,24 +3096,24 @@
         </p:nvSpPr>
         <p:spPr>
           <a:xfrm>
-            <a:off x="4343400" y="3346704"/>
-            <a:ext cx="2743200" cy="292608"/>
-          </a:xfrm>
-          <a:prstGeom prst="rect">
-            <a:avLst/>
-          </a:prstGeom>
-          <a:noFill/>
-          <a:ln/>
-        </p:spPr>
-        <p:txBody>
-          <a:bodyPr wrap="square" rtlCol="0" anchor="ctr"/>
-          <a:lstStyle/>
-          <a:p>
-            <a:pPr marL="0" indent="0">
-              <a:buNone/>
-            </a:pPr>
-            <a:r>
-              <a:rPr lang="en-US" sz="1050" dirty="0">
+            <a:off x="4069080" y="3081528"/>
+            <a:ext cx="2926080" cy="274320"/>
+          </a:xfrm>
+          <a:prstGeom prst="rect">
+            <a:avLst/>
+          </a:prstGeom>
+          <a:noFill/>
+          <a:ln/>
+        </p:spPr>
+        <p:txBody>
+          <a:bodyPr wrap="square" rtlCol="0" anchor="ctr"/>
+          <a:lstStyle/>
+          <a:p>
+            <a:pPr indent="0" marL="0">
+              <a:buNone/>
+            </a:pPr>
+            <a:r>
+              <a:rPr lang="en-US" sz="970" dirty="0">
                 <a:solidFill>
                   <a:srgbClr val="20363A"/>
                 </a:solidFill>
@@ -2909,7 +3123,7 @@
               </a:rPr>
               <a:t>FK  id_categoria</a:t>
             </a:r>
-            <a:endParaRPr lang="en-US" sz="1050" dirty="0"/>
+            <a:endParaRPr lang="en-US" sz="970" dirty="0"/>
           </a:p>
         </p:txBody>
       </p:sp>
@@ -2921,24 +3135,24 @@
         </p:nvSpPr>
         <p:spPr>
           <a:xfrm>
-            <a:off x="4343400" y="3639312"/>
-            <a:ext cx="2743200" cy="292608"/>
-          </a:xfrm>
-          <a:prstGeom prst="rect">
-            <a:avLst/>
-          </a:prstGeom>
-          <a:noFill/>
-          <a:ln/>
-        </p:spPr>
-        <p:txBody>
-          <a:bodyPr wrap="square" rtlCol="0" anchor="ctr"/>
-          <a:lstStyle/>
-          <a:p>
-            <a:pPr marL="0" indent="0">
-              <a:buNone/>
-            </a:pPr>
-            <a:r>
-              <a:rPr lang="en-US" sz="1050" dirty="0">
+            <a:off x="4069080" y="3355848"/>
+            <a:ext cx="2926080" cy="274320"/>
+          </a:xfrm>
+          <a:prstGeom prst="rect">
+            <a:avLst/>
+          </a:prstGeom>
+          <a:noFill/>
+          <a:ln/>
+        </p:spPr>
+        <p:txBody>
+          <a:bodyPr wrap="square" rtlCol="0" anchor="ctr"/>
+          <a:lstStyle/>
+          <a:p>
+            <a:pPr indent="0" marL="0">
+              <a:buNone/>
+            </a:pPr>
+            <a:r>
+              <a:rPr lang="en-US" sz="970" dirty="0">
                 <a:solidFill>
                   <a:srgbClr val="20363A"/>
                 </a:solidFill>
@@ -2948,7 +3162,7 @@
               </a:rPr>
               <a:t>monto</a:t>
             </a:r>
-            <a:endParaRPr lang="en-US" sz="1050" dirty="0"/>
+            <a:endParaRPr lang="en-US" sz="970" dirty="0"/>
           </a:p>
         </p:txBody>
       </p:sp>
@@ -2960,24 +3174,24 @@
         </p:nvSpPr>
         <p:spPr>
           <a:xfrm>
-            <a:off x="4343400" y="3931920"/>
-            <a:ext cx="2743200" cy="292608"/>
-          </a:xfrm>
-          <a:prstGeom prst="rect">
-            <a:avLst/>
-          </a:prstGeom>
-          <a:noFill/>
-          <a:ln/>
-        </p:spPr>
-        <p:txBody>
-          <a:bodyPr wrap="square" rtlCol="0" anchor="ctr"/>
-          <a:lstStyle/>
-          <a:p>
-            <a:pPr marL="0" indent="0">
-              <a:buNone/>
-            </a:pPr>
-            <a:r>
-              <a:rPr lang="en-US" sz="1050" dirty="0">
+            <a:off x="4069080" y="3630168"/>
+            <a:ext cx="2926080" cy="274320"/>
+          </a:xfrm>
+          <a:prstGeom prst="rect">
+            <a:avLst/>
+          </a:prstGeom>
+          <a:noFill/>
+          <a:ln/>
+        </p:spPr>
+        <p:txBody>
+          <a:bodyPr wrap="square" rtlCol="0" anchor="ctr"/>
+          <a:lstStyle/>
+          <a:p>
+            <a:pPr indent="0" marL="0">
+              <a:buNone/>
+            </a:pPr>
+            <a:r>
+              <a:rPr lang="en-US" sz="970" dirty="0">
                 <a:solidFill>
                   <a:srgbClr val="20363A"/>
                 </a:solidFill>
@@ -2987,7 +3201,7 @@
               </a:rPr>
               <a:t>fecha</a:t>
             </a:r>
-            <a:endParaRPr lang="en-US" sz="1050" dirty="0"/>
+            <a:endParaRPr lang="en-US" sz="970" dirty="0"/>
           </a:p>
         </p:txBody>
       </p:sp>
@@ -2999,24 +3213,24 @@
         </p:nvSpPr>
         <p:spPr>
           <a:xfrm>
-            <a:off x="4343400" y="4224528"/>
-            <a:ext cx="2743200" cy="292608"/>
-          </a:xfrm>
-          <a:prstGeom prst="rect">
-            <a:avLst/>
-          </a:prstGeom>
-          <a:noFill/>
-          <a:ln/>
-        </p:spPr>
-        <p:txBody>
-          <a:bodyPr wrap="square" rtlCol="0" anchor="ctr"/>
-          <a:lstStyle/>
-          <a:p>
-            <a:pPr marL="0" indent="0">
-              <a:buNone/>
-            </a:pPr>
-            <a:r>
-              <a:rPr lang="en-US" sz="1050" dirty="0">
+            <a:off x="4069080" y="3904488"/>
+            <a:ext cx="2926080" cy="274320"/>
+          </a:xfrm>
+          <a:prstGeom prst="rect">
+            <a:avLst/>
+          </a:prstGeom>
+          <a:noFill/>
+          <a:ln/>
+        </p:spPr>
+        <p:txBody>
+          <a:bodyPr wrap="square" rtlCol="0" anchor="ctr"/>
+          <a:lstStyle/>
+          <a:p>
+            <a:pPr indent="0" marL="0">
+              <a:buNone/>
+            </a:pPr>
+            <a:r>
+              <a:rPr lang="en-US" sz="970" dirty="0">
                 <a:solidFill>
                   <a:srgbClr val="20363A"/>
                 </a:solidFill>
@@ -3026,20 +3240,98 @@
               </a:rPr>
               <a:t>descripcion</a:t>
             </a:r>
-            <a:endParaRPr lang="en-US" sz="1050" dirty="0"/>
-          </a:p>
-        </p:txBody>
-      </p:sp>
-      <p:sp>
-        <p:nvSpPr>
-          <p:cNvPr id="25" name="Shape 23"/>
-          <p:cNvSpPr/>
-          <p:nvPr/>
-        </p:nvSpPr>
-        <p:spPr>
-          <a:xfrm>
-            <a:off x="8229600" y="1554480"/>
-            <a:ext cx="3017520" cy="1581912"/>
+            <a:endParaRPr lang="en-US" sz="970" dirty="0"/>
+          </a:p>
+        </p:txBody>
+      </p:sp>
+      <p:sp>
+        <p:nvSpPr>
+          <p:cNvPr id="25" name="Text 23"/>
+          <p:cNvSpPr/>
+          <p:nvPr/>
+        </p:nvSpPr>
+        <p:spPr>
+          <a:xfrm>
+            <a:off x="4069080" y="4178808"/>
+            <a:ext cx="2926080" cy="274320"/>
+          </a:xfrm>
+          <a:prstGeom prst="rect">
+            <a:avLst/>
+          </a:prstGeom>
+          <a:noFill/>
+          <a:ln/>
+        </p:spPr>
+        <p:txBody>
+          <a:bodyPr wrap="square" rtlCol="0" anchor="ctr"/>
+          <a:lstStyle/>
+          <a:p>
+            <a:pPr indent="0" marL="0">
+              <a:buNone/>
+            </a:pPr>
+            <a:r>
+              <a:rPr lang="en-US" sz="970" dirty="0">
+                <a:solidFill>
+                  <a:srgbClr val="20363A"/>
+                </a:solidFill>
+                <a:latin typeface="Calibri" pitchFamily="34" charset="0"/>
+                <a:ea typeface="Calibri" pitchFamily="34" charset="-122"/>
+                <a:cs typeface="Calibri" pitchFamily="34" charset="-120"/>
+              </a:rPr>
+              <a:t>origen (manual/automático)</a:t>
+            </a:r>
+            <a:endParaRPr lang="en-US" sz="970" dirty="0"/>
+          </a:p>
+        </p:txBody>
+      </p:sp>
+      <p:sp>
+        <p:nvSpPr>
+          <p:cNvPr id="26" name="Text 24"/>
+          <p:cNvSpPr/>
+          <p:nvPr/>
+        </p:nvSpPr>
+        <p:spPr>
+          <a:xfrm>
+            <a:off x="4069080" y="4453128"/>
+            <a:ext cx="2926080" cy="274320"/>
+          </a:xfrm>
+          <a:prstGeom prst="rect">
+            <a:avLst/>
+          </a:prstGeom>
+          <a:noFill/>
+          <a:ln/>
+        </p:spPr>
+        <p:txBody>
+          <a:bodyPr wrap="square" rtlCol="0" anchor="ctr"/>
+          <a:lstStyle/>
+          <a:p>
+            <a:pPr indent="0" marL="0">
+              <a:buNone/>
+            </a:pPr>
+            <a:r>
+              <a:rPr lang="en-US" sz="970" dirty="0">
+                <a:solidFill>
+                  <a:srgbClr val="20363A"/>
+                </a:solidFill>
+                <a:latin typeface="Calibri" pitchFamily="34" charset="0"/>
+                <a:ea typeface="Calibri" pitchFamily="34" charset="-122"/>
+                <a:cs typeface="Calibri" pitchFamily="34" charset="-120"/>
+              </a:rPr>
+              <a:t>estado (confirmado/pendiente)</a:t>
+            </a:r>
+            <a:endParaRPr lang="en-US" sz="970" dirty="0"/>
+          </a:p>
+        </p:txBody>
+      </p:sp>
+      <p:sp>
+        <p:nvSpPr>
+          <p:cNvPr id="27" name="Shape 25"/>
+          <p:cNvSpPr/>
+          <p:nvPr/>
+        </p:nvSpPr>
+        <p:spPr>
+          <a:xfrm>
+            <a:off x="8321040" y="1508760"/>
+            <a:ext cx="3017520" cy="1481328"/>
           </a:xfrm>
           <a:prstGeom prst="rect">
             <a:avLst/>
@@ -3054,23 +3346,16 @@
             <a:prstDash val="solid"/>
           </a:ln>
         </p:spPr>
-        <p:txBody>
-          <a:bodyPr/>
-          <a:lstStyle/>
-          <a:p>
-            <a:endParaRPr lang="es-CL"/>
-          </a:p>
-        </p:txBody>
-      </p:sp>
-      <p:sp>
-        <p:nvSpPr>
-          <p:cNvPr id="26" name="Shape 24"/>
-          <p:cNvSpPr/>
-          <p:nvPr/>
-        </p:nvSpPr>
-        <p:spPr>
-          <a:xfrm>
-            <a:off x="8229600" y="1554480"/>
+      </p:sp>
+      <p:sp>
+        <p:nvSpPr>
+          <p:cNvPr id="28" name="Shape 26"/>
+          <p:cNvSpPr/>
+          <p:nvPr/>
+        </p:nvSpPr>
+        <p:spPr>
+          <a:xfrm>
+            <a:off x="8321040" y="1508760"/>
             <a:ext cx="3017520" cy="384048"/>
           </a:xfrm>
           <a:prstGeom prst="rect">
@@ -3081,23 +3366,16 @@
           </a:solidFill>
           <a:ln/>
         </p:spPr>
-        <p:txBody>
-          <a:bodyPr/>
-          <a:lstStyle/>
-          <a:p>
-            <a:endParaRPr lang="es-CL"/>
-          </a:p>
-        </p:txBody>
-      </p:sp>
-      <p:sp>
-        <p:nvSpPr>
-          <p:cNvPr id="27" name="Text 25"/>
-          <p:cNvSpPr/>
-          <p:nvPr/>
-        </p:nvSpPr>
-        <p:spPr>
-          <a:xfrm>
-            <a:off x="8229600" y="1554480"/>
+      </p:sp>
+      <p:sp>
+        <p:nvSpPr>
+          <p:cNvPr id="29" name="Text 27"/>
+          <p:cNvSpPr/>
+          <p:nvPr/>
+        </p:nvSpPr>
+        <p:spPr>
+          <a:xfrm>
+            <a:off x="8321040" y="1508760"/>
             <a:ext cx="3017520" cy="384048"/>
           </a:xfrm>
           <a:prstGeom prst="rect">
@@ -3110,7 +3388,7 @@
           <a:bodyPr wrap="square" rtlCol="0" anchor="ctr"/>
           <a:lstStyle/>
           <a:p>
-            <a:pPr marL="0" indent="0" algn="ctr">
+            <a:pPr algn="ctr" indent="0" marL="0">
               <a:buNone/>
             </a:pPr>
             <a:r>
@@ -3130,30 +3408,30 @@
       </p:sp>
       <p:sp>
         <p:nvSpPr>
-          <p:cNvPr id="28" name="Text 26"/>
-          <p:cNvSpPr/>
-          <p:nvPr/>
-        </p:nvSpPr>
-        <p:spPr>
-          <a:xfrm>
-            <a:off x="8366760" y="1938528"/>
-            <a:ext cx="2743200" cy="292608"/>
-          </a:xfrm>
-          <a:prstGeom prst="rect">
-            <a:avLst/>
-          </a:prstGeom>
-          <a:noFill/>
-          <a:ln/>
-        </p:spPr>
-        <p:txBody>
-          <a:bodyPr wrap="square" rtlCol="0" anchor="ctr"/>
-          <a:lstStyle/>
-          <a:p>
-            <a:pPr marL="0" indent="0">
-              <a:buNone/>
-            </a:pPr>
-            <a:r>
-              <a:rPr lang="en-US" sz="1050" dirty="0">
+          <p:cNvPr id="30" name="Text 28"/>
+          <p:cNvSpPr/>
+          <p:nvPr/>
+        </p:nvSpPr>
+        <p:spPr>
+          <a:xfrm>
+            <a:off x="8458200" y="1892808"/>
+            <a:ext cx="2743200" cy="274320"/>
+          </a:xfrm>
+          <a:prstGeom prst="rect">
+            <a:avLst/>
+          </a:prstGeom>
+          <a:noFill/>
+          <a:ln/>
+        </p:spPr>
+        <p:txBody>
+          <a:bodyPr wrap="square" rtlCol="0" anchor="ctr"/>
+          <a:lstStyle/>
+          <a:p>
+            <a:pPr indent="0" marL="0">
+              <a:buNone/>
+            </a:pPr>
+            <a:r>
+              <a:rPr lang="en-US" sz="970" dirty="0">
                 <a:solidFill>
                   <a:srgbClr val="20363A"/>
                 </a:solidFill>
@@ -3163,36 +3441,36 @@
               </a:rPr>
               <a:t>PK  id_presupuesto</a:t>
             </a:r>
-            <a:endParaRPr lang="en-US" sz="1050" dirty="0"/>
-          </a:p>
-        </p:txBody>
-      </p:sp>
-      <p:sp>
-        <p:nvSpPr>
-          <p:cNvPr id="29" name="Text 27"/>
-          <p:cNvSpPr/>
-          <p:nvPr/>
-        </p:nvSpPr>
-        <p:spPr>
-          <a:xfrm>
-            <a:off x="8366760" y="2231136"/>
-            <a:ext cx="2743200" cy="292608"/>
-          </a:xfrm>
-          <a:prstGeom prst="rect">
-            <a:avLst/>
-          </a:prstGeom>
-          <a:noFill/>
-          <a:ln/>
-        </p:spPr>
-        <p:txBody>
-          <a:bodyPr wrap="square" rtlCol="0" anchor="ctr"/>
-          <a:lstStyle/>
-          <a:p>
-            <a:pPr marL="0" indent="0">
-              <a:buNone/>
-            </a:pPr>
-            <a:r>
-              <a:rPr lang="en-US" sz="1050" dirty="0">
+            <a:endParaRPr lang="en-US" sz="970" dirty="0"/>
+          </a:p>
+        </p:txBody>
+      </p:sp>
+      <p:sp>
+        <p:nvSpPr>
+          <p:cNvPr id="31" name="Text 29"/>
+          <p:cNvSpPr/>
+          <p:nvPr/>
+        </p:nvSpPr>
+        <p:spPr>
+          <a:xfrm>
+            <a:off x="8458200" y="2167128"/>
+            <a:ext cx="2743200" cy="274320"/>
+          </a:xfrm>
+          <a:prstGeom prst="rect">
+            <a:avLst/>
+          </a:prstGeom>
+          <a:noFill/>
+          <a:ln/>
+        </p:spPr>
+        <p:txBody>
+          <a:bodyPr wrap="square" rtlCol="0" anchor="ctr"/>
+          <a:lstStyle/>
+          <a:p>
+            <a:pPr indent="0" marL="0">
+              <a:buNone/>
+            </a:pPr>
+            <a:r>
+              <a:rPr lang="en-US" sz="970" dirty="0">
                 <a:solidFill>
                   <a:srgbClr val="20363A"/>
                 </a:solidFill>
@@ -3202,36 +3480,36 @@
               </a:rPr>
               <a:t>FK  id_categoria</a:t>
             </a:r>
-            <a:endParaRPr lang="en-US" sz="1050" dirty="0"/>
-          </a:p>
-        </p:txBody>
-      </p:sp>
-      <p:sp>
-        <p:nvSpPr>
-          <p:cNvPr id="30" name="Text 28"/>
-          <p:cNvSpPr/>
-          <p:nvPr/>
-        </p:nvSpPr>
-        <p:spPr>
-          <a:xfrm>
-            <a:off x="8366760" y="2523744"/>
-            <a:ext cx="2743200" cy="292608"/>
-          </a:xfrm>
-          <a:prstGeom prst="rect">
-            <a:avLst/>
-          </a:prstGeom>
-          <a:noFill/>
-          <a:ln/>
-        </p:spPr>
-        <p:txBody>
-          <a:bodyPr wrap="square" rtlCol="0" anchor="ctr"/>
-          <a:lstStyle/>
-          <a:p>
-            <a:pPr marL="0" indent="0">
-              <a:buNone/>
-            </a:pPr>
-            <a:r>
-              <a:rPr lang="en-US" sz="1050" dirty="0">
+            <a:endParaRPr lang="en-US" sz="970" dirty="0"/>
+          </a:p>
+        </p:txBody>
+      </p:sp>
+      <p:sp>
+        <p:nvSpPr>
+          <p:cNvPr id="32" name="Text 30"/>
+          <p:cNvSpPr/>
+          <p:nvPr/>
+        </p:nvSpPr>
+        <p:spPr>
+          <a:xfrm>
+            <a:off x="8458200" y="2441448"/>
+            <a:ext cx="2743200" cy="274320"/>
+          </a:xfrm>
+          <a:prstGeom prst="rect">
+            <a:avLst/>
+          </a:prstGeom>
+          <a:noFill/>
+          <a:ln/>
+        </p:spPr>
+        <p:txBody>
+          <a:bodyPr wrap="square" rtlCol="0" anchor="ctr"/>
+          <a:lstStyle/>
+          <a:p>
+            <a:pPr indent="0" marL="0">
+              <a:buNone/>
+            </a:pPr>
+            <a:r>
+              <a:rPr lang="en-US" sz="970" dirty="0">
                 <a:solidFill>
                   <a:srgbClr val="20363A"/>
                 </a:solidFill>
@@ -3241,36 +3519,36 @@
               </a:rPr>
               <a:t>monto_limite</a:t>
             </a:r>
-            <a:endParaRPr lang="en-US" sz="1050" dirty="0"/>
-          </a:p>
-        </p:txBody>
-      </p:sp>
-      <p:sp>
-        <p:nvSpPr>
-          <p:cNvPr id="31" name="Text 29"/>
-          <p:cNvSpPr/>
-          <p:nvPr/>
-        </p:nvSpPr>
-        <p:spPr>
-          <a:xfrm>
-            <a:off x="8366760" y="2816352"/>
-            <a:ext cx="2743200" cy="292608"/>
-          </a:xfrm>
-          <a:prstGeom prst="rect">
-            <a:avLst/>
-          </a:prstGeom>
-          <a:noFill/>
-          <a:ln/>
-        </p:spPr>
-        <p:txBody>
-          <a:bodyPr wrap="square" rtlCol="0" anchor="ctr"/>
-          <a:lstStyle/>
-          <a:p>
-            <a:pPr marL="0" indent="0">
-              <a:buNone/>
-            </a:pPr>
-            <a:r>
-              <a:rPr lang="en-US" sz="1050" dirty="0">
+            <a:endParaRPr lang="en-US" sz="970" dirty="0"/>
+          </a:p>
+        </p:txBody>
+      </p:sp>
+      <p:sp>
+        <p:nvSpPr>
+          <p:cNvPr id="33" name="Text 31"/>
+          <p:cNvSpPr/>
+          <p:nvPr/>
+        </p:nvSpPr>
+        <p:spPr>
+          <a:xfrm>
+            <a:off x="8458200" y="2715768"/>
+            <a:ext cx="2743200" cy="274320"/>
+          </a:xfrm>
+          <a:prstGeom prst="rect">
+            <a:avLst/>
+          </a:prstGeom>
+          <a:noFill/>
+          <a:ln/>
+        </p:spPr>
+        <p:txBody>
+          <a:bodyPr wrap="square" rtlCol="0" anchor="ctr"/>
+          <a:lstStyle/>
+          <a:p>
+            <a:pPr indent="0" marL="0">
+              <a:buNone/>
+            </a:pPr>
+            <a:r>
+              <a:rPr lang="en-US" sz="970" dirty="0">
                 <a:solidFill>
                   <a:srgbClr val="20363A"/>
                 </a:solidFill>
@@ -3280,20 +3558,20 @@
               </a:rPr>
               <a:t>mes</a:t>
             </a:r>
-            <a:endParaRPr lang="en-US" sz="1050" dirty="0"/>
-          </a:p>
-        </p:txBody>
-      </p:sp>
-      <p:sp>
-        <p:nvSpPr>
-          <p:cNvPr id="32" name="Shape 30"/>
-          <p:cNvSpPr/>
-          <p:nvPr/>
-        </p:nvSpPr>
-        <p:spPr>
-          <a:xfrm>
-            <a:off x="3200400" y="2199132"/>
-            <a:ext cx="1005840" cy="1261872"/>
+            <a:endParaRPr lang="en-US" sz="970" dirty="0"/>
+          </a:p>
+        </p:txBody>
+      </p:sp>
+      <p:sp>
+        <p:nvSpPr>
+          <p:cNvPr id="34" name="Shape 32"/>
+          <p:cNvSpPr/>
+          <p:nvPr/>
+        </p:nvSpPr>
+        <p:spPr>
+          <a:xfrm>
+            <a:off x="2926080" y="2112264"/>
+            <a:ext cx="1005840" cy="1325880"/>
           </a:xfrm>
           <a:prstGeom prst="line">
             <a:avLst/>
@@ -3306,24 +3584,17 @@
             <a:prstDash val="solid"/>
           </a:ln>
         </p:spPr>
-        <p:txBody>
-          <a:bodyPr/>
-          <a:lstStyle/>
-          <a:p>
-            <a:endParaRPr lang="es-CL"/>
-          </a:p>
-        </p:txBody>
-      </p:sp>
-      <p:sp>
-        <p:nvSpPr>
-          <p:cNvPr id="33" name="Shape 31"/>
-          <p:cNvSpPr/>
-          <p:nvPr/>
-        </p:nvSpPr>
-        <p:spPr>
-          <a:xfrm>
-            <a:off x="3200400" y="4393692"/>
-            <a:ext cx="1005840" cy="0"/>
+      </p:sp>
+      <p:sp>
+        <p:nvSpPr>
+          <p:cNvPr id="35" name="Shape 33"/>
+          <p:cNvSpPr/>
+          <p:nvPr/>
+        </p:nvSpPr>
+        <p:spPr>
+          <a:xfrm>
+            <a:off x="2926080" y="4261104"/>
+            <a:ext cx="1005840" cy="-822960"/>
           </a:xfrm>
           <a:prstGeom prst="line">
             <a:avLst/>
@@ -3336,24 +3607,17 @@
             <a:prstDash val="solid"/>
           </a:ln>
         </p:spPr>
-        <p:txBody>
-          <a:bodyPr/>
-          <a:lstStyle/>
-          <a:p>
-            <a:endParaRPr lang="es-CL"/>
-          </a:p>
-        </p:txBody>
-      </p:sp>
-      <p:sp>
-        <p:nvSpPr>
-          <p:cNvPr id="34" name="Shape 32"/>
-          <p:cNvSpPr/>
-          <p:nvPr/>
-        </p:nvSpPr>
-        <p:spPr>
-          <a:xfrm>
-            <a:off x="7223760" y="3461004"/>
-            <a:ext cx="1005840" cy="0"/>
+      </p:sp>
+      <p:sp>
+        <p:nvSpPr>
+          <p:cNvPr id="36" name="Shape 34"/>
+          <p:cNvSpPr/>
+          <p:nvPr/>
+        </p:nvSpPr>
+        <p:spPr>
+          <a:xfrm>
+            <a:off x="7132320" y="3438144"/>
+            <a:ext cx="1188720" cy="-1380744"/>
           </a:xfrm>
           <a:prstGeom prst="line">
             <a:avLst/>
@@ -3366,23 +3630,16 @@
             <a:prstDash val="solid"/>
           </a:ln>
         </p:spPr>
-        <p:txBody>
-          <a:bodyPr/>
-          <a:lstStyle/>
-          <a:p>
-            <a:endParaRPr lang="es-CL"/>
-          </a:p>
-        </p:txBody>
-      </p:sp>
-      <p:sp>
-        <p:nvSpPr>
-          <p:cNvPr id="35" name="Text 33"/>
-          <p:cNvSpPr/>
-          <p:nvPr/>
-        </p:nvSpPr>
-        <p:spPr>
-          <a:xfrm>
-            <a:off x="3291840" y="1879092"/>
+      </p:sp>
+      <p:sp>
+        <p:nvSpPr>
+          <p:cNvPr id="37" name="Text 35"/>
+          <p:cNvSpPr/>
+          <p:nvPr/>
+        </p:nvSpPr>
+        <p:spPr>
+          <a:xfrm>
+            <a:off x="3017520" y="1792224"/>
             <a:ext cx="548640" cy="274320"/>
           </a:xfrm>
           <a:prstGeom prst="rect">
@@ -3395,7 +3652,7 @@
           <a:bodyPr wrap="square" rtlCol="0" anchor="ctr"/>
           <a:lstStyle/>
           <a:p>
-            <a:pPr marL="0" indent="0">
+            <a:pPr indent="0" marL="0">
               <a:buNone/>
             </a:pPr>
             <a:r>
@@ -3415,13 +3672,13 @@
       </p:sp>
       <p:sp>
         <p:nvSpPr>
-          <p:cNvPr id="36" name="Text 34"/>
-          <p:cNvSpPr/>
-          <p:nvPr/>
-        </p:nvSpPr>
-        <p:spPr>
-          <a:xfrm>
-            <a:off x="3291840" y="3890772"/>
+          <p:cNvPr id="38" name="Text 36"/>
+          <p:cNvSpPr/>
+          <p:nvPr/>
+        </p:nvSpPr>
+        <p:spPr>
+          <a:xfrm>
+            <a:off x="3017520" y="3758184"/>
             <a:ext cx="548640" cy="274320"/>
           </a:xfrm>
           <a:prstGeom prst="rect">
@@ -3434,7 +3691,7 @@
           <a:bodyPr wrap="square" rtlCol="0" anchor="ctr"/>
           <a:lstStyle/>
           <a:p>
-            <a:pPr marL="0" indent="0">
+            <a:pPr indent="0" marL="0">
               <a:buNone/>
             </a:pPr>
             <a:r>
@@ -3454,13 +3711,13 @@
       </p:sp>
       <p:sp>
         <p:nvSpPr>
-          <p:cNvPr id="37" name="Text 35"/>
-          <p:cNvSpPr/>
-          <p:nvPr/>
-        </p:nvSpPr>
-        <p:spPr>
-          <a:xfrm>
-            <a:off x="7315200" y="3140964"/>
+          <p:cNvPr id="39" name="Text 37"/>
+          <p:cNvSpPr/>
+          <p:nvPr/>
+        </p:nvSpPr>
+        <p:spPr>
+          <a:xfrm>
+            <a:off x="7223760" y="3118104"/>
             <a:ext cx="548640" cy="274320"/>
           </a:xfrm>
           <a:prstGeom prst="rect">
@@ -3473,7 +3730,7 @@
           <a:bodyPr wrap="square" rtlCol="0" anchor="ctr"/>
           <a:lstStyle/>
           <a:p>
-            <a:pPr marL="0" indent="0">
+            <a:pPr indent="0" marL="0">
               <a:buNone/>
             </a:pPr>
             <a:r>
@@ -3493,30 +3750,30 @@
       </p:sp>
       <p:sp>
         <p:nvSpPr>
-          <p:cNvPr id="38" name="Text 36"/>
+          <p:cNvPr id="40" name="Text 38"/>
           <p:cNvSpPr/>
           <p:nvPr/>
         </p:nvSpPr>
         <p:spPr>
           <a:xfrm>
             <a:off x="548640" y="5989320"/>
-            <a:ext cx="10972800" cy="365760"/>
-          </a:xfrm>
-          <a:prstGeom prst="rect">
-            <a:avLst/>
-          </a:prstGeom>
-          <a:noFill/>
-          <a:ln/>
-        </p:spPr>
-        <p:txBody>
-          <a:bodyPr wrap="square" rtlCol="0" anchor="ctr"/>
-          <a:lstStyle/>
-          <a:p>
-            <a:pPr marL="0" indent="0">
-              <a:buNone/>
-            </a:pPr>
-            <a:r>
-              <a:rPr lang="en-US" sz="1100" i="1" dirty="0">
+            <a:ext cx="11064240" cy="457200"/>
+          </a:xfrm>
+          <a:prstGeom prst="rect">
+            <a:avLst/>
+          </a:prstGeom>
+          <a:noFill/>
+          <a:ln/>
+        </p:spPr>
+        <p:txBody>
+          <a:bodyPr wrap="square" rtlCol="0" anchor="ctr"/>
+          <a:lstStyle/>
+          <a:p>
+            <a:pPr indent="0" marL="0">
+              <a:buNone/>
+            </a:pPr>
+            <a:r>
+              <a:rPr lang="en-US" sz="1050" i="1" dirty="0">
                 <a:solidFill>
                   <a:srgbClr val="028090"/>
                 </a:solidFill>
@@ -3524,15 +3781,15 @@
                 <a:ea typeface="Calibri" pitchFamily="34" charset="-122"/>
                 <a:cs typeface="Calibri" pitchFamily="34" charset="-120"/>
               </a:rPr>
-              <a:t>Nota: esquema preliminar de Fase 1 — sujeto a normalización y ajustes durante el diseño detallado (Fase 2).</a:t>
-            </a:r>
-            <a:endParaRPr lang="en-US" sz="1100" dirty="0"/>
-          </a:p>
-        </p:txBody>
-      </p:sp>
-      <p:sp>
-        <p:nvSpPr>
-          <p:cNvPr id="39" name="Text 37"/>
+              <a:t>Nota: los campos origen/estado permiten distinguir movimientos ingresados manualmente de los detectados automáticamente desde notificaciones bancarias, pendientes de confirmación del usuario.</a:t>
+            </a:r>
+            <a:endParaRPr lang="en-US" sz="1050" dirty="0"/>
+          </a:p>
+        </p:txBody>
+      </p:sp>
+      <p:sp>
+        <p:nvSpPr>
+          <p:cNvPr id="41" name="Text 39"/>
           <p:cNvSpPr/>
           <p:nvPr/>
         </p:nvSpPr>
@@ -3551,7 +3808,7 @@
           <a:bodyPr wrap="square" rtlCol="0" anchor="ctr"/>
           <a:lstStyle/>
           <a:p>
-            <a:pPr marL="0" indent="0" algn="r">
+            <a:pPr algn="r" indent="0" marL="0">
               <a:buNone/>
             </a:pPr>
             <a:r>
@@ -3585,7 +3842,6 @@
         <a:solidFill>
           <a:srgbClr val="F2F2F2"/>
         </a:solidFill>
-        <a:effectLst/>
       </p:bgPr>
     </p:bg>
     <p:spTree>
@@ -3623,7 +3879,7 @@
           <a:bodyPr wrap="square" rtlCol="0" anchor="ctr"/>
           <a:lstStyle/>
           <a:p>
-            <a:pPr marL="0" indent="0">
+            <a:pPr indent="0" marL="0">
               <a:buNone/>
             </a:pPr>
             <a:r>
@@ -3662,7 +3918,7 @@
           <a:bodyPr wrap="square" rtlCol="0" anchor="ctr"/>
           <a:lstStyle/>
           <a:p>
-            <a:pPr marL="0" indent="0">
+            <a:pPr indent="0" marL="0">
               <a:buNone/>
             </a:pPr>
             <a:r>
@@ -3688,8 +3944,8 @@
         </p:nvSpPr>
         <p:spPr>
           <a:xfrm>
-            <a:off x="548640" y="1600200"/>
-            <a:ext cx="822960" cy="640080"/>
+            <a:off x="548640" y="1536192"/>
+            <a:ext cx="822960" cy="603504"/>
           </a:xfrm>
           <a:prstGeom prst="rect">
             <a:avLst/>
@@ -3699,13 +3955,6 @@
           </a:solidFill>
           <a:ln/>
         </p:spPr>
-        <p:txBody>
-          <a:bodyPr/>
-          <a:lstStyle/>
-          <a:p>
-            <a:endParaRPr lang="es-CL"/>
-          </a:p>
-        </p:txBody>
       </p:sp>
       <p:sp>
         <p:nvSpPr>
@@ -3715,20 +3964,20 @@
         </p:nvSpPr>
         <p:spPr>
           <a:xfrm>
-            <a:off x="548640" y="1600200"/>
-            <a:ext cx="822960" cy="640080"/>
-          </a:xfrm>
-          <a:prstGeom prst="rect">
-            <a:avLst/>
-          </a:prstGeom>
-          <a:noFill/>
-          <a:ln/>
-        </p:spPr>
-        <p:txBody>
-          <a:bodyPr wrap="square" rtlCol="0" anchor="ctr"/>
-          <a:lstStyle/>
-          <a:p>
-            <a:pPr marL="0" indent="0" algn="ctr">
+            <a:off x="548640" y="1536192"/>
+            <a:ext cx="822960" cy="603504"/>
+          </a:xfrm>
+          <a:prstGeom prst="rect">
+            <a:avLst/>
+          </a:prstGeom>
+          <a:noFill/>
+          <a:ln/>
+        </p:spPr>
+        <p:txBody>
+          <a:bodyPr wrap="square" rtlCol="0" anchor="ctr"/>
+          <a:lstStyle/>
+          <a:p>
+            <a:pPr algn="ctr" indent="0" marL="0">
               <a:buNone/>
             </a:pPr>
             <a:r>
@@ -3754,8 +4003,8 @@
         </p:nvSpPr>
         <p:spPr>
           <a:xfrm>
-            <a:off x="1417320" y="1600200"/>
-            <a:ext cx="10058400" cy="640080"/>
+            <a:off x="1417320" y="1536192"/>
+            <a:ext cx="10058400" cy="603504"/>
           </a:xfrm>
           <a:prstGeom prst="rect">
             <a:avLst/>
@@ -3765,13 +4014,6 @@
           </a:solidFill>
           <a:ln/>
         </p:spPr>
-        <p:txBody>
-          <a:bodyPr/>
-          <a:lstStyle/>
-          <a:p>
-            <a:endParaRPr lang="es-CL"/>
-          </a:p>
-        </p:txBody>
       </p:sp>
       <p:sp>
         <p:nvSpPr>
@@ -3781,24 +4023,24 @@
         </p:nvSpPr>
         <p:spPr>
           <a:xfrm>
-            <a:off x="1645920" y="1600200"/>
-            <a:ext cx="9601200" cy="640080"/>
-          </a:xfrm>
-          <a:prstGeom prst="rect">
-            <a:avLst/>
-          </a:prstGeom>
-          <a:noFill/>
-          <a:ln/>
-        </p:spPr>
-        <p:txBody>
-          <a:bodyPr wrap="square" rtlCol="0" anchor="ctr"/>
-          <a:lstStyle/>
-          <a:p>
-            <a:pPr marL="0" indent="0">
-              <a:buNone/>
-            </a:pPr>
-            <a:r>
-              <a:rPr lang="en-US" sz="1300" dirty="0">
+            <a:off x="1645920" y="1536192"/>
+            <a:ext cx="9601200" cy="603504"/>
+          </a:xfrm>
+          <a:prstGeom prst="rect">
+            <a:avLst/>
+          </a:prstGeom>
+          <a:noFill/>
+          <a:ln/>
+        </p:spPr>
+        <p:txBody>
+          <a:bodyPr wrap="square" rtlCol="0" anchor="ctr"/>
+          <a:lstStyle/>
+          <a:p>
+            <a:pPr indent="0" marL="0">
+              <a:buNone/>
+            </a:pPr>
+            <a:r>
+              <a:rPr lang="en-US" sz="1250" dirty="0">
                 <a:solidFill>
                   <a:srgbClr val="20363A"/>
                 </a:solidFill>
@@ -3808,7 +4050,7 @@
               </a:rPr>
               <a:t>Registrar un movimiento (ingreso o gasto) con monto, fecha, categoría y descripción.</a:t>
             </a:r>
-            <a:endParaRPr lang="en-US" sz="1300" dirty="0"/>
+            <a:endParaRPr lang="en-US" sz="1250" dirty="0"/>
           </a:p>
         </p:txBody>
       </p:sp>
@@ -3820,8 +4062,8 @@
         </p:nvSpPr>
         <p:spPr>
           <a:xfrm>
-            <a:off x="548640" y="2350008"/>
-            <a:ext cx="822960" cy="640080"/>
+            <a:off x="548640" y="2231136"/>
+            <a:ext cx="822960" cy="603504"/>
           </a:xfrm>
           <a:prstGeom prst="rect">
             <a:avLst/>
@@ -3831,13 +4073,6 @@
           </a:solidFill>
           <a:ln/>
         </p:spPr>
-        <p:txBody>
-          <a:bodyPr/>
-          <a:lstStyle/>
-          <a:p>
-            <a:endParaRPr lang="es-CL"/>
-          </a:p>
-        </p:txBody>
       </p:sp>
       <p:sp>
         <p:nvSpPr>
@@ -3847,20 +4082,20 @@
         </p:nvSpPr>
         <p:spPr>
           <a:xfrm>
-            <a:off x="548640" y="2350008"/>
-            <a:ext cx="822960" cy="640080"/>
-          </a:xfrm>
-          <a:prstGeom prst="rect">
-            <a:avLst/>
-          </a:prstGeom>
-          <a:noFill/>
-          <a:ln/>
-        </p:spPr>
-        <p:txBody>
-          <a:bodyPr wrap="square" rtlCol="0" anchor="ctr"/>
-          <a:lstStyle/>
-          <a:p>
-            <a:pPr marL="0" indent="0" algn="ctr">
+            <a:off x="548640" y="2231136"/>
+            <a:ext cx="822960" cy="603504"/>
+          </a:xfrm>
+          <a:prstGeom prst="rect">
+            <a:avLst/>
+          </a:prstGeom>
+          <a:noFill/>
+          <a:ln/>
+        </p:spPr>
+        <p:txBody>
+          <a:bodyPr wrap="square" rtlCol="0" anchor="ctr"/>
+          <a:lstStyle/>
+          <a:p>
+            <a:pPr algn="ctr" indent="0" marL="0">
               <a:buNone/>
             </a:pPr>
             <a:r>
@@ -3886,8 +4121,8 @@
         </p:nvSpPr>
         <p:spPr>
           <a:xfrm>
-            <a:off x="1417320" y="2350008"/>
-            <a:ext cx="10058400" cy="640080"/>
+            <a:off x="1417320" y="2231136"/>
+            <a:ext cx="10058400" cy="603504"/>
           </a:xfrm>
           <a:prstGeom prst="rect">
             <a:avLst/>
@@ -3897,13 +4132,6 @@
           </a:solidFill>
           <a:ln/>
         </p:spPr>
-        <p:txBody>
-          <a:bodyPr/>
-          <a:lstStyle/>
-          <a:p>
-            <a:endParaRPr lang="es-CL"/>
-          </a:p>
-        </p:txBody>
       </p:sp>
       <p:sp>
         <p:nvSpPr>
@@ -3913,24 +4141,24 @@
         </p:nvSpPr>
         <p:spPr>
           <a:xfrm>
-            <a:off x="1645920" y="2350008"/>
-            <a:ext cx="9601200" cy="640080"/>
-          </a:xfrm>
-          <a:prstGeom prst="rect">
-            <a:avLst/>
-          </a:prstGeom>
-          <a:noFill/>
-          <a:ln/>
-        </p:spPr>
-        <p:txBody>
-          <a:bodyPr wrap="square" rtlCol="0" anchor="ctr"/>
-          <a:lstStyle/>
-          <a:p>
-            <a:pPr marL="0" indent="0">
-              <a:buNone/>
-            </a:pPr>
-            <a:r>
-              <a:rPr lang="en-US" sz="1300" dirty="0">
+            <a:off x="1645920" y="2231136"/>
+            <a:ext cx="9601200" cy="603504"/>
+          </a:xfrm>
+          <a:prstGeom prst="rect">
+            <a:avLst/>
+          </a:prstGeom>
+          <a:noFill/>
+          <a:ln/>
+        </p:spPr>
+        <p:txBody>
+          <a:bodyPr wrap="square" rtlCol="0" anchor="ctr"/>
+          <a:lstStyle/>
+          <a:p>
+            <a:pPr indent="0" marL="0">
+              <a:buNone/>
+            </a:pPr>
+            <a:r>
+              <a:rPr lang="en-US" sz="1250" dirty="0">
                 <a:solidFill>
                   <a:srgbClr val="20363A"/>
                 </a:solidFill>
@@ -3940,7 +4168,7 @@
               </a:rPr>
               <a:t>Crear, editar y eliminar categorías personalizadas de ingresos/gastos.</a:t>
             </a:r>
-            <a:endParaRPr lang="en-US" sz="1300" dirty="0"/>
+            <a:endParaRPr lang="en-US" sz="1250" dirty="0"/>
           </a:p>
         </p:txBody>
       </p:sp>
@@ -3952,8 +4180,8 @@
         </p:nvSpPr>
         <p:spPr>
           <a:xfrm>
-            <a:off x="548640" y="3099816"/>
-            <a:ext cx="822960" cy="640080"/>
+            <a:off x="548640" y="2926080"/>
+            <a:ext cx="822960" cy="603504"/>
           </a:xfrm>
           <a:prstGeom prst="rect">
             <a:avLst/>
@@ -3963,13 +4191,6 @@
           </a:solidFill>
           <a:ln/>
         </p:spPr>
-        <p:txBody>
-          <a:bodyPr/>
-          <a:lstStyle/>
-          <a:p>
-            <a:endParaRPr lang="es-CL"/>
-          </a:p>
-        </p:txBody>
       </p:sp>
       <p:sp>
         <p:nvSpPr>
@@ -3979,20 +4200,20 @@
         </p:nvSpPr>
         <p:spPr>
           <a:xfrm>
-            <a:off x="548640" y="3099816"/>
-            <a:ext cx="822960" cy="640080"/>
-          </a:xfrm>
-          <a:prstGeom prst="rect">
-            <a:avLst/>
-          </a:prstGeom>
-          <a:noFill/>
-          <a:ln/>
-        </p:spPr>
-        <p:txBody>
-          <a:bodyPr wrap="square" rtlCol="0" anchor="ctr"/>
-          <a:lstStyle/>
-          <a:p>
-            <a:pPr marL="0" indent="0" algn="ctr">
+            <a:off x="548640" y="2926080"/>
+            <a:ext cx="822960" cy="603504"/>
+          </a:xfrm>
+          <a:prstGeom prst="rect">
+            <a:avLst/>
+          </a:prstGeom>
+          <a:noFill/>
+          <a:ln/>
+        </p:spPr>
+        <p:txBody>
+          <a:bodyPr wrap="square" rtlCol="0" anchor="ctr"/>
+          <a:lstStyle/>
+          <a:p>
+            <a:pPr algn="ctr" indent="0" marL="0">
               <a:buNone/>
             </a:pPr>
             <a:r>
@@ -4018,8 +4239,8 @@
         </p:nvSpPr>
         <p:spPr>
           <a:xfrm>
-            <a:off x="1417320" y="3099816"/>
-            <a:ext cx="10058400" cy="640080"/>
+            <a:off x="1417320" y="2926080"/>
+            <a:ext cx="10058400" cy="603504"/>
           </a:xfrm>
           <a:prstGeom prst="rect">
             <a:avLst/>
@@ -4029,13 +4250,6 @@
           </a:solidFill>
           <a:ln/>
         </p:spPr>
-        <p:txBody>
-          <a:bodyPr/>
-          <a:lstStyle/>
-          <a:p>
-            <a:endParaRPr lang="es-CL"/>
-          </a:p>
-        </p:txBody>
       </p:sp>
       <p:sp>
         <p:nvSpPr>
@@ -4045,24 +4259,24 @@
         </p:nvSpPr>
         <p:spPr>
           <a:xfrm>
-            <a:off x="1645920" y="3099816"/>
-            <a:ext cx="9601200" cy="640080"/>
-          </a:xfrm>
-          <a:prstGeom prst="rect">
-            <a:avLst/>
-          </a:prstGeom>
-          <a:noFill/>
-          <a:ln/>
-        </p:spPr>
-        <p:txBody>
-          <a:bodyPr wrap="square" rtlCol="0" anchor="ctr"/>
-          <a:lstStyle/>
-          <a:p>
-            <a:pPr marL="0" indent="0">
-              <a:buNone/>
-            </a:pPr>
-            <a:r>
-              <a:rPr lang="en-US" sz="1300" dirty="0">
+            <a:off x="1645920" y="2926080"/>
+            <a:ext cx="9601200" cy="603504"/>
+          </a:xfrm>
+          <a:prstGeom prst="rect">
+            <a:avLst/>
+          </a:prstGeom>
+          <a:noFill/>
+          <a:ln/>
+        </p:spPr>
+        <p:txBody>
+          <a:bodyPr wrap="square" rtlCol="0" anchor="ctr"/>
+          <a:lstStyle/>
+          <a:p>
+            <a:pPr indent="0" marL="0">
+              <a:buNone/>
+            </a:pPr>
+            <a:r>
+              <a:rPr lang="en-US" sz="1250" dirty="0">
                 <a:solidFill>
                   <a:srgbClr val="20363A"/>
                 </a:solidFill>
@@ -4072,7 +4286,7 @@
               </a:rPr>
               <a:t>Definir un presupuesto mensual por categoría.</a:t>
             </a:r>
-            <a:endParaRPr lang="en-US" sz="1300" dirty="0"/>
+            <a:endParaRPr lang="en-US" sz="1250" dirty="0"/>
           </a:p>
         </p:txBody>
       </p:sp>
@@ -4084,8 +4298,8 @@
         </p:nvSpPr>
         <p:spPr>
           <a:xfrm>
-            <a:off x="548640" y="3849624"/>
-            <a:ext cx="822960" cy="640080"/>
+            <a:off x="548640" y="3621024"/>
+            <a:ext cx="822960" cy="603504"/>
           </a:xfrm>
           <a:prstGeom prst="rect">
             <a:avLst/>
@@ -4095,13 +4309,6 @@
           </a:solidFill>
           <a:ln/>
         </p:spPr>
-        <p:txBody>
-          <a:bodyPr/>
-          <a:lstStyle/>
-          <a:p>
-            <a:endParaRPr lang="es-CL"/>
-          </a:p>
-        </p:txBody>
       </p:sp>
       <p:sp>
         <p:nvSpPr>
@@ -4111,20 +4318,20 @@
         </p:nvSpPr>
         <p:spPr>
           <a:xfrm>
-            <a:off x="548640" y="3849624"/>
-            <a:ext cx="822960" cy="640080"/>
-          </a:xfrm>
-          <a:prstGeom prst="rect">
-            <a:avLst/>
-          </a:prstGeom>
-          <a:noFill/>
-          <a:ln/>
-        </p:spPr>
-        <p:txBody>
-          <a:bodyPr wrap="square" rtlCol="0" anchor="ctr"/>
-          <a:lstStyle/>
-          <a:p>
-            <a:pPr marL="0" indent="0" algn="ctr">
+            <a:off x="548640" y="3621024"/>
+            <a:ext cx="822960" cy="603504"/>
+          </a:xfrm>
+          <a:prstGeom prst="rect">
+            <a:avLst/>
+          </a:prstGeom>
+          <a:noFill/>
+          <a:ln/>
+        </p:spPr>
+        <p:txBody>
+          <a:bodyPr wrap="square" rtlCol="0" anchor="ctr"/>
+          <a:lstStyle/>
+          <a:p>
+            <a:pPr algn="ctr" indent="0" marL="0">
               <a:buNone/>
             </a:pPr>
             <a:r>
@@ -4150,8 +4357,8 @@
         </p:nvSpPr>
         <p:spPr>
           <a:xfrm>
-            <a:off x="1417320" y="3849624"/>
-            <a:ext cx="10058400" cy="640080"/>
+            <a:off x="1417320" y="3621024"/>
+            <a:ext cx="10058400" cy="603504"/>
           </a:xfrm>
           <a:prstGeom prst="rect">
             <a:avLst/>
@@ -4161,13 +4368,6 @@
           </a:solidFill>
           <a:ln/>
         </p:spPr>
-        <p:txBody>
-          <a:bodyPr/>
-          <a:lstStyle/>
-          <a:p>
-            <a:endParaRPr lang="es-CL"/>
-          </a:p>
-        </p:txBody>
       </p:sp>
       <p:sp>
         <p:nvSpPr>
@@ -4177,24 +4377,24 @@
         </p:nvSpPr>
         <p:spPr>
           <a:xfrm>
-            <a:off x="1645920" y="3849624"/>
-            <a:ext cx="9601200" cy="640080"/>
-          </a:xfrm>
-          <a:prstGeom prst="rect">
-            <a:avLst/>
-          </a:prstGeom>
-          <a:noFill/>
-          <a:ln/>
-        </p:spPr>
-        <p:txBody>
-          <a:bodyPr wrap="square" rtlCol="0" anchor="ctr"/>
-          <a:lstStyle/>
-          <a:p>
-            <a:pPr marL="0" indent="0">
-              <a:buNone/>
-            </a:pPr>
-            <a:r>
-              <a:rPr lang="en-US" sz="1300" dirty="0">
+            <a:off x="1645920" y="3621024"/>
+            <a:ext cx="9601200" cy="603504"/>
+          </a:xfrm>
+          <a:prstGeom prst="rect">
+            <a:avLst/>
+          </a:prstGeom>
+          <a:noFill/>
+          <a:ln/>
+        </p:spPr>
+        <p:txBody>
+          <a:bodyPr wrap="square" rtlCol="0" anchor="ctr"/>
+          <a:lstStyle/>
+          <a:p>
+            <a:pPr indent="0" marL="0">
+              <a:buNone/>
+            </a:pPr>
+            <a:r>
+              <a:rPr lang="en-US" sz="1250" dirty="0">
                 <a:solidFill>
                   <a:srgbClr val="20363A"/>
                 </a:solidFill>
@@ -4204,7 +4404,7 @@
               </a:rPr>
               <a:t>Mostrar alertas cuando el gasto se acerque o supere el presupuesto definido.</a:t>
             </a:r>
-            <a:endParaRPr lang="en-US" sz="1300" dirty="0"/>
+            <a:endParaRPr lang="en-US" sz="1250" dirty="0"/>
           </a:p>
         </p:txBody>
       </p:sp>
@@ -4216,8 +4416,8 @@
         </p:nvSpPr>
         <p:spPr>
           <a:xfrm>
-            <a:off x="548640" y="4599432"/>
-            <a:ext cx="822960" cy="640080"/>
+            <a:off x="548640" y="4315968"/>
+            <a:ext cx="822960" cy="603504"/>
           </a:xfrm>
           <a:prstGeom prst="rect">
             <a:avLst/>
@@ -4227,13 +4427,6 @@
           </a:solidFill>
           <a:ln/>
         </p:spPr>
-        <p:txBody>
-          <a:bodyPr/>
-          <a:lstStyle/>
-          <a:p>
-            <a:endParaRPr lang="es-CL"/>
-          </a:p>
-        </p:txBody>
       </p:sp>
       <p:sp>
         <p:nvSpPr>
@@ -4243,20 +4436,20 @@
         </p:nvSpPr>
         <p:spPr>
           <a:xfrm>
-            <a:off x="548640" y="4599432"/>
-            <a:ext cx="822960" cy="640080"/>
-          </a:xfrm>
-          <a:prstGeom prst="rect">
-            <a:avLst/>
-          </a:prstGeom>
-          <a:noFill/>
-          <a:ln/>
-        </p:spPr>
-        <p:txBody>
-          <a:bodyPr wrap="square" rtlCol="0" anchor="ctr"/>
-          <a:lstStyle/>
-          <a:p>
-            <a:pPr marL="0" indent="0" algn="ctr">
+            <a:off x="548640" y="4315968"/>
+            <a:ext cx="822960" cy="603504"/>
+          </a:xfrm>
+          <a:prstGeom prst="rect">
+            <a:avLst/>
+          </a:prstGeom>
+          <a:noFill/>
+          <a:ln/>
+        </p:spPr>
+        <p:txBody>
+          <a:bodyPr wrap="square" rtlCol="0" anchor="ctr"/>
+          <a:lstStyle/>
+          <a:p>
+            <a:pPr algn="ctr" indent="0" marL="0">
               <a:buNone/>
             </a:pPr>
             <a:r>
@@ -4282,8 +4475,8 @@
         </p:nvSpPr>
         <p:spPr>
           <a:xfrm>
-            <a:off x="1417320" y="4599432"/>
-            <a:ext cx="10058400" cy="640080"/>
+            <a:off x="1417320" y="4315968"/>
+            <a:ext cx="10058400" cy="603504"/>
           </a:xfrm>
           <a:prstGeom prst="rect">
             <a:avLst/>
@@ -4293,13 +4486,6 @@
           </a:solidFill>
           <a:ln/>
         </p:spPr>
-        <p:txBody>
-          <a:bodyPr/>
-          <a:lstStyle/>
-          <a:p>
-            <a:endParaRPr lang="es-CL"/>
-          </a:p>
-        </p:txBody>
       </p:sp>
       <p:sp>
         <p:nvSpPr>
@@ -4309,24 +4495,24 @@
         </p:nvSpPr>
         <p:spPr>
           <a:xfrm>
-            <a:off x="1645920" y="4599432"/>
-            <a:ext cx="9601200" cy="640080"/>
-          </a:xfrm>
-          <a:prstGeom prst="rect">
-            <a:avLst/>
-          </a:prstGeom>
-          <a:noFill/>
-          <a:ln/>
-        </p:spPr>
-        <p:txBody>
-          <a:bodyPr wrap="square" rtlCol="0" anchor="ctr"/>
-          <a:lstStyle/>
-          <a:p>
-            <a:pPr marL="0" indent="0">
-              <a:buNone/>
-            </a:pPr>
-            <a:r>
-              <a:rPr lang="en-US" sz="1300" dirty="0">
+            <a:off x="1645920" y="4315968"/>
+            <a:ext cx="9601200" cy="603504"/>
+          </a:xfrm>
+          <a:prstGeom prst="rect">
+            <a:avLst/>
+          </a:prstGeom>
+          <a:noFill/>
+          <a:ln/>
+        </p:spPr>
+        <p:txBody>
+          <a:bodyPr wrap="square" rtlCol="0" anchor="ctr"/>
+          <a:lstStyle/>
+          <a:p>
+            <a:pPr indent="0" marL="0">
+              <a:buNone/>
+            </a:pPr>
+            <a:r>
+              <a:rPr lang="en-US" sz="1250" dirty="0">
                 <a:solidFill>
                   <a:srgbClr val="20363A"/>
                 </a:solidFill>
@@ -4334,9 +4520,9 @@
                 <a:ea typeface="Calibri" pitchFamily="34" charset="-122"/>
                 <a:cs typeface="Calibri" pitchFamily="34" charset="-120"/>
               </a:rPr>
-              <a:t>Generar reportes visuales (gráficos por categoría y por mes).</a:t>
-            </a:r>
-            <a:endParaRPr lang="en-US" sz="1300" dirty="0"/>
+              <a:t>Detectar automáticamente cargos desde notificaciones bancarias y solicitar confirmación del usuario.</a:t>
+            </a:r>
+            <a:endParaRPr lang="en-US" sz="1250" dirty="0"/>
           </a:p>
         </p:txBody>
       </p:sp>
@@ -4348,8 +4534,8 @@
         </p:nvSpPr>
         <p:spPr>
           <a:xfrm>
-            <a:off x="548640" y="5349240"/>
-            <a:ext cx="822960" cy="640080"/>
+            <a:off x="548640" y="5010912"/>
+            <a:ext cx="822960" cy="603504"/>
           </a:xfrm>
           <a:prstGeom prst="rect">
             <a:avLst/>
@@ -4359,13 +4545,6 @@
           </a:solidFill>
           <a:ln/>
         </p:spPr>
-        <p:txBody>
-          <a:bodyPr/>
-          <a:lstStyle/>
-          <a:p>
-            <a:endParaRPr lang="es-CL"/>
-          </a:p>
-        </p:txBody>
       </p:sp>
       <p:sp>
         <p:nvSpPr>
@@ -4375,20 +4554,20 @@
         </p:nvSpPr>
         <p:spPr>
           <a:xfrm>
-            <a:off x="548640" y="5349240"/>
-            <a:ext cx="822960" cy="640080"/>
-          </a:xfrm>
-          <a:prstGeom prst="rect">
-            <a:avLst/>
-          </a:prstGeom>
-          <a:noFill/>
-          <a:ln/>
-        </p:spPr>
-        <p:txBody>
-          <a:bodyPr wrap="square" rtlCol="0" anchor="ctr"/>
-          <a:lstStyle/>
-          <a:p>
-            <a:pPr marL="0" indent="0" algn="ctr">
+            <a:off x="548640" y="5010912"/>
+            <a:ext cx="822960" cy="603504"/>
+          </a:xfrm>
+          <a:prstGeom prst="rect">
+            <a:avLst/>
+          </a:prstGeom>
+          <a:noFill/>
+          <a:ln/>
+        </p:spPr>
+        <p:txBody>
+          <a:bodyPr wrap="square" rtlCol="0" anchor="ctr"/>
+          <a:lstStyle/>
+          <a:p>
+            <a:pPr algn="ctr" indent="0" marL="0">
               <a:buNone/>
             </a:pPr>
             <a:r>
@@ -4414,8 +4593,8 @@
         </p:nvSpPr>
         <p:spPr>
           <a:xfrm>
-            <a:off x="1417320" y="5349240"/>
-            <a:ext cx="10058400" cy="640080"/>
+            <a:off x="1417320" y="5010912"/>
+            <a:ext cx="10058400" cy="603504"/>
           </a:xfrm>
           <a:prstGeom prst="rect">
             <a:avLst/>
@@ -4425,13 +4604,6 @@
           </a:solidFill>
           <a:ln/>
         </p:spPr>
-        <p:txBody>
-          <a:bodyPr/>
-          <a:lstStyle/>
-          <a:p>
-            <a:endParaRPr lang="es-CL"/>
-          </a:p>
-        </p:txBody>
       </p:sp>
       <p:sp>
         <p:nvSpPr>
@@ -4441,24 +4613,24 @@
         </p:nvSpPr>
         <p:spPr>
           <a:xfrm>
-            <a:off x="1645920" y="5349240"/>
-            <a:ext cx="9601200" cy="640080"/>
-          </a:xfrm>
-          <a:prstGeom prst="rect">
-            <a:avLst/>
-          </a:prstGeom>
-          <a:noFill/>
-          <a:ln/>
-        </p:spPr>
-        <p:txBody>
-          <a:bodyPr wrap="square" rtlCol="0" anchor="ctr"/>
-          <a:lstStyle/>
-          <a:p>
-            <a:pPr marL="0" indent="0">
-              <a:buNone/>
-            </a:pPr>
-            <a:r>
-              <a:rPr lang="en-US" sz="1300" dirty="0">
+            <a:off x="1645920" y="5010912"/>
+            <a:ext cx="9601200" cy="603504"/>
+          </a:xfrm>
+          <a:prstGeom prst="rect">
+            <a:avLst/>
+          </a:prstGeom>
+          <a:noFill/>
+          <a:ln/>
+        </p:spPr>
+        <p:txBody>
+          <a:bodyPr wrap="square" rtlCol="0" anchor="ctr"/>
+          <a:lstStyle/>
+          <a:p>
+            <a:pPr indent="0" marL="0">
+              <a:buNone/>
+            </a:pPr>
+            <a:r>
+              <a:rPr lang="en-US" sz="1250" dirty="0">
                 <a:solidFill>
                   <a:srgbClr val="20363A"/>
                 </a:solidFill>
@@ -4466,15 +4638,133 @@
                 <a:ea typeface="Calibri" pitchFamily="34" charset="-122"/>
                 <a:cs typeface="Calibri" pitchFamily="34" charset="-120"/>
               </a:rPr>
+              <a:t>Generar reportes visuales (gráficos por categoría y por mes).</a:t>
+            </a:r>
+            <a:endParaRPr lang="en-US" sz="1250" dirty="0"/>
+          </a:p>
+        </p:txBody>
+      </p:sp>
+      <p:sp>
+        <p:nvSpPr>
+          <p:cNvPr id="28" name="Shape 26"/>
+          <p:cNvSpPr/>
+          <p:nvPr/>
+        </p:nvSpPr>
+        <p:spPr>
+          <a:xfrm>
+            <a:off x="548640" y="5705856"/>
+            <a:ext cx="822960" cy="603504"/>
+          </a:xfrm>
+          <a:prstGeom prst="rect">
+            <a:avLst/>
+          </a:prstGeom>
+          <a:solidFill>
+            <a:srgbClr val="013A40"/>
+          </a:solidFill>
+          <a:ln/>
+        </p:spPr>
+      </p:sp>
+      <p:sp>
+        <p:nvSpPr>
+          <p:cNvPr id="29" name="Text 27"/>
+          <p:cNvSpPr/>
+          <p:nvPr/>
+        </p:nvSpPr>
+        <p:spPr>
+          <a:xfrm>
+            <a:off x="548640" y="5705856"/>
+            <a:ext cx="822960" cy="603504"/>
+          </a:xfrm>
+          <a:prstGeom prst="rect">
+            <a:avLst/>
+          </a:prstGeom>
+          <a:noFill/>
+          <a:ln/>
+        </p:spPr>
+        <p:txBody>
+          <a:bodyPr wrap="square" rtlCol="0" anchor="ctr"/>
+          <a:lstStyle/>
+          <a:p>
+            <a:pPr algn="ctr" indent="0" marL="0">
+              <a:buNone/>
+            </a:pPr>
+            <a:r>
+              <a:rPr lang="en-US" sz="1300" b="1" dirty="0">
+                <a:solidFill>
+                  <a:srgbClr val="02C39A"/>
+                </a:solidFill>
+                <a:latin typeface="Calibri" pitchFamily="34" charset="0"/>
+                <a:ea typeface="Calibri" pitchFamily="34" charset="-122"/>
+                <a:cs typeface="Calibri" pitchFamily="34" charset="-120"/>
+              </a:rPr>
+              <a:t>RF7</a:t>
+            </a:r>
+            <a:endParaRPr lang="en-US" sz="1300" dirty="0"/>
+          </a:p>
+        </p:txBody>
+      </p:sp>
+      <p:sp>
+        <p:nvSpPr>
+          <p:cNvPr id="30" name="Shape 28"/>
+          <p:cNvSpPr/>
+          <p:nvPr/>
+        </p:nvSpPr>
+        <p:spPr>
+          <a:xfrm>
+            <a:off x="1417320" y="5705856"/>
+            <a:ext cx="10058400" cy="603504"/>
+          </a:xfrm>
+          <a:prstGeom prst="rect">
+            <a:avLst/>
+          </a:prstGeom>
+          <a:solidFill>
+            <a:srgbClr val="FFFFFF"/>
+          </a:solidFill>
+          <a:ln/>
+        </p:spPr>
+      </p:sp>
+      <p:sp>
+        <p:nvSpPr>
+          <p:cNvPr id="31" name="Text 29"/>
+          <p:cNvSpPr/>
+          <p:nvPr/>
+        </p:nvSpPr>
+        <p:spPr>
+          <a:xfrm>
+            <a:off x="1645920" y="5705856"/>
+            <a:ext cx="9601200" cy="603504"/>
+          </a:xfrm>
+          <a:prstGeom prst="rect">
+            <a:avLst/>
+          </a:prstGeom>
+          <a:noFill/>
+          <a:ln/>
+        </p:spPr>
+        <p:txBody>
+          <a:bodyPr wrap="square" rtlCol="0" anchor="ctr"/>
+          <a:lstStyle/>
+          <a:p>
+            <a:pPr indent="0" marL="0">
+              <a:buNone/>
+            </a:pPr>
+            <a:r>
+              <a:rPr lang="en-US" sz="1250" dirty="0">
+                <a:solidFill>
+                  <a:srgbClr val="20363A"/>
+                </a:solidFill>
+                <a:latin typeface="Calibri" pitchFamily="34" charset="0"/>
+                <a:ea typeface="Calibri" pitchFamily="34" charset="-122"/>
+                <a:cs typeface="Calibri" pitchFamily="34" charset="-120"/>
+              </a:rPr>
               <a:t>Permitir respaldar/exportar los datos almacenados localmente.</a:t>
             </a:r>
-            <a:endParaRPr lang="en-US" sz="1300" dirty="0"/>
-          </a:p>
-        </p:txBody>
-      </p:sp>
-      <p:sp>
-        <p:nvSpPr>
-          <p:cNvPr id="28" name="Text 26"/>
+            <a:endParaRPr lang="en-US" sz="1250" dirty="0"/>
+          </a:p>
+        </p:txBody>
+      </p:sp>
+      <p:sp>
+        <p:nvSpPr>
+          <p:cNvPr id="32" name="Text 30"/>
           <p:cNvSpPr/>
           <p:nvPr/>
         </p:nvSpPr>
@@ -4493,7 +4783,7 @@
           <a:bodyPr wrap="square" rtlCol="0" anchor="ctr"/>
           <a:lstStyle/>
           <a:p>
-            <a:pPr marL="0" indent="0" algn="r">
+            <a:pPr algn="r" indent="0" marL="0">
               <a:buNone/>
             </a:pPr>
             <a:r>
@@ -4527,7 +4817,6 @@
         <a:solidFill>
           <a:srgbClr val="013A40"/>
         </a:solidFill>
-        <a:effectLst/>
       </p:bgPr>
     </p:bg>
     <p:spTree>
@@ -4565,7 +4854,7 @@
           <a:bodyPr wrap="square" rtlCol="0" anchor="ctr"/>
           <a:lstStyle/>
           <a:p>
-            <a:pPr marL="0" indent="0">
+            <a:pPr indent="0" marL="0">
               <a:buNone/>
             </a:pPr>
             <a:r>
@@ -4604,7 +4893,7 @@
           <a:bodyPr wrap="square" rtlCol="0" anchor="ctr"/>
           <a:lstStyle/>
           <a:p>
-            <a:pPr marL="0" indent="0">
+            <a:pPr indent="0" marL="0">
               <a:buNone/>
             </a:pPr>
             <a:r>
@@ -4630,7 +4919,7 @@
         </p:nvSpPr>
         <p:spPr>
           <a:xfrm>
-            <a:off x="548640" y="1600200"/>
+            <a:off x="548640" y="1554480"/>
             <a:ext cx="502920" cy="502920"/>
           </a:xfrm>
           <a:prstGeom prst="ellipse">
@@ -4641,13 +4930,6 @@
           </a:solidFill>
           <a:ln/>
         </p:spPr>
-        <p:txBody>
-          <a:bodyPr/>
-          <a:lstStyle/>
-          <a:p>
-            <a:endParaRPr lang="es-CL"/>
-          </a:p>
-        </p:txBody>
       </p:sp>
       <p:sp>
         <p:nvSpPr>
@@ -4657,7 +4939,7 @@
         </p:nvSpPr>
         <p:spPr>
           <a:xfrm>
-            <a:off x="548640" y="1600200"/>
+            <a:off x="548640" y="1554480"/>
             <a:ext cx="502920" cy="502920"/>
           </a:xfrm>
           <a:prstGeom prst="rect">
@@ -4670,7 +4952,7 @@
           <a:bodyPr wrap="square" rtlCol="0" anchor="ctr"/>
           <a:lstStyle/>
           <a:p>
-            <a:pPr marL="0" indent="0" algn="ctr">
+            <a:pPr algn="ctr" indent="0" marL="0">
               <a:buNone/>
             </a:pPr>
             <a:r>
@@ -4696,7 +4978,7 @@
         </p:nvSpPr>
         <p:spPr>
           <a:xfrm>
-            <a:off x="1234440" y="1554480"/>
+            <a:off x="1234440" y="1508760"/>
             <a:ext cx="2377440" cy="502920"/>
           </a:xfrm>
           <a:prstGeom prst="rect">
@@ -4709,7 +4991,7 @@
           <a:bodyPr wrap="square" rtlCol="0" anchor="ctr"/>
           <a:lstStyle/>
           <a:p>
-            <a:pPr marL="0" indent="0">
+            <a:pPr indent="0" marL="0">
               <a:buNone/>
             </a:pPr>
             <a:r>
@@ -4735,7 +5017,7 @@
         </p:nvSpPr>
         <p:spPr>
           <a:xfrm>
-            <a:off x="3657600" y="1554480"/>
+            <a:off x="3657600" y="1508760"/>
             <a:ext cx="7406640" cy="502920"/>
           </a:xfrm>
           <a:prstGeom prst="rect">
@@ -4748,11 +5030,11 @@
           <a:bodyPr wrap="square" rtlCol="0" anchor="ctr"/>
           <a:lstStyle/>
           <a:p>
-            <a:pPr marL="0" indent="0">
-              <a:buNone/>
-            </a:pPr>
-            <a:r>
-              <a:rPr lang="en-US" sz="1250" dirty="0">
+            <a:pPr indent="0" marL="0">
+              <a:buNone/>
+            </a:pPr>
+            <a:r>
+              <a:rPr lang="en-US" sz="1200" dirty="0">
                 <a:solidFill>
                   <a:srgbClr val="F2F2F2"/>
                 </a:solidFill>
@@ -4762,7 +5044,7 @@
               </a:rPr>
               <a:t>Interfaz simple y comprensible, usable sin capacitación previa por cualquier persona.</a:t>
             </a:r>
-            <a:endParaRPr lang="en-US" sz="1250" dirty="0"/>
+            <a:endParaRPr lang="en-US" sz="1200" dirty="0"/>
           </a:p>
         </p:txBody>
       </p:sp>
@@ -4774,7 +5056,7 @@
         </p:nvSpPr>
         <p:spPr>
           <a:xfrm>
-            <a:off x="548640" y="2468880"/>
+            <a:off x="548640" y="2423160"/>
             <a:ext cx="502920" cy="502920"/>
           </a:xfrm>
           <a:prstGeom prst="ellipse">
@@ -4785,13 +5067,6 @@
           </a:solidFill>
           <a:ln/>
         </p:spPr>
-        <p:txBody>
-          <a:bodyPr/>
-          <a:lstStyle/>
-          <a:p>
-            <a:endParaRPr lang="es-CL"/>
-          </a:p>
-        </p:txBody>
       </p:sp>
       <p:sp>
         <p:nvSpPr>
@@ -4801,7 +5076,7 @@
         </p:nvSpPr>
         <p:spPr>
           <a:xfrm>
-            <a:off x="548640" y="2468880"/>
+            <a:off x="548640" y="2423160"/>
             <a:ext cx="502920" cy="502920"/>
           </a:xfrm>
           <a:prstGeom prst="rect">
@@ -4814,7 +5089,7 @@
           <a:bodyPr wrap="square" rtlCol="0" anchor="ctr"/>
           <a:lstStyle/>
           <a:p>
-            <a:pPr marL="0" indent="0" algn="ctr">
+            <a:pPr algn="ctr" indent="0" marL="0">
               <a:buNone/>
             </a:pPr>
             <a:r>
@@ -4840,7 +5115,7 @@
         </p:nvSpPr>
         <p:spPr>
           <a:xfrm>
-            <a:off x="1234440" y="2423160"/>
+            <a:off x="1234440" y="2377440"/>
             <a:ext cx="2377440" cy="502920"/>
           </a:xfrm>
           <a:prstGeom prst="rect">
@@ -4853,7 +5128,7 @@
           <a:bodyPr wrap="square" rtlCol="0" anchor="ctr"/>
           <a:lstStyle/>
           <a:p>
-            <a:pPr marL="0" indent="0">
+            <a:pPr indent="0" marL="0">
               <a:buNone/>
             </a:pPr>
             <a:r>
@@ -4879,7 +5154,7 @@
         </p:nvSpPr>
         <p:spPr>
           <a:xfrm>
-            <a:off x="3657600" y="2423160"/>
+            <a:off x="3657600" y="2377440"/>
             <a:ext cx="7406640" cy="502920"/>
           </a:xfrm>
           <a:prstGeom prst="rect">
@@ -4892,11 +5167,11 @@
           <a:bodyPr wrap="square" rtlCol="0" anchor="ctr"/>
           <a:lstStyle/>
           <a:p>
-            <a:pPr marL="0" indent="0">
-              <a:buNone/>
-            </a:pPr>
-            <a:r>
-              <a:rPr lang="en-US" sz="1250" dirty="0">
+            <a:pPr indent="0" marL="0">
+              <a:buNone/>
+            </a:pPr>
+            <a:r>
+              <a:rPr lang="en-US" sz="1200" dirty="0">
                 <a:solidFill>
                   <a:srgbClr val="F2F2F2"/>
                 </a:solidFill>
@@ -4906,7 +5181,7 @@
               </a:rPr>
               <a:t>Operaciones de registro y consulta deben responder en menos de 2 segundos.</a:t>
             </a:r>
-            <a:endParaRPr lang="en-US" sz="1250" dirty="0"/>
+            <a:endParaRPr lang="en-US" sz="1200" dirty="0"/>
           </a:p>
         </p:txBody>
       </p:sp>
@@ -4918,7 +5193,7 @@
         </p:nvSpPr>
         <p:spPr>
           <a:xfrm>
-            <a:off x="548640" y="3337560"/>
+            <a:off x="548640" y="3291840"/>
             <a:ext cx="502920" cy="502920"/>
           </a:xfrm>
           <a:prstGeom prst="ellipse">
@@ -4929,13 +5204,6 @@
           </a:solidFill>
           <a:ln/>
         </p:spPr>
-        <p:txBody>
-          <a:bodyPr/>
-          <a:lstStyle/>
-          <a:p>
-            <a:endParaRPr lang="es-CL"/>
-          </a:p>
-        </p:txBody>
       </p:sp>
       <p:sp>
         <p:nvSpPr>
@@ -4945,7 +5213,7 @@
         </p:nvSpPr>
         <p:spPr>
           <a:xfrm>
-            <a:off x="548640" y="3337560"/>
+            <a:off x="548640" y="3291840"/>
             <a:ext cx="502920" cy="502920"/>
           </a:xfrm>
           <a:prstGeom prst="rect">
@@ -4958,7 +5226,7 @@
           <a:bodyPr wrap="square" rtlCol="0" anchor="ctr"/>
           <a:lstStyle/>
           <a:p>
-            <a:pPr marL="0" indent="0" algn="ctr">
+            <a:pPr algn="ctr" indent="0" marL="0">
               <a:buNone/>
             </a:pPr>
             <a:r>
@@ -4984,7 +5252,7 @@
         </p:nvSpPr>
         <p:spPr>
           <a:xfrm>
-            <a:off x="1234440" y="3291840"/>
+            <a:off x="1234440" y="3246120"/>
             <a:ext cx="2377440" cy="502920"/>
           </a:xfrm>
           <a:prstGeom prst="rect">
@@ -4997,7 +5265,7 @@
           <a:bodyPr wrap="square" rtlCol="0" anchor="ctr"/>
           <a:lstStyle/>
           <a:p>
-            <a:pPr marL="0" indent="0">
+            <a:pPr indent="0" marL="0">
               <a:buNone/>
             </a:pPr>
             <a:r>
@@ -5023,7 +5291,7 @@
         </p:nvSpPr>
         <p:spPr>
           <a:xfrm>
-            <a:off x="3657600" y="3291840"/>
+            <a:off x="3657600" y="3246120"/>
             <a:ext cx="7406640" cy="502920"/>
           </a:xfrm>
           <a:prstGeom prst="rect">
@@ -5036,11 +5304,11 @@
           <a:bodyPr wrap="square" rtlCol="0" anchor="ctr"/>
           <a:lstStyle/>
           <a:p>
-            <a:pPr marL="0" indent="0">
-              <a:buNone/>
-            </a:pPr>
-            <a:r>
-              <a:rPr lang="en-US" sz="1250" dirty="0">
+            <a:pPr indent="0" marL="0">
+              <a:buNone/>
+            </a:pPr>
+            <a:r>
+              <a:rPr lang="en-US" sz="1200" dirty="0">
                 <a:solidFill>
                   <a:srgbClr val="F2F2F2"/>
                 </a:solidFill>
@@ -5050,7 +5318,7 @@
               </a:rPr>
               <a:t>La app debe funcionar sin conexión, con datos almacenados localmente (SQLite).</a:t>
             </a:r>
-            <a:endParaRPr lang="en-US" sz="1250" dirty="0"/>
+            <a:endParaRPr lang="en-US" sz="1200" dirty="0"/>
           </a:p>
         </p:txBody>
       </p:sp>
@@ -5062,7 +5330,7 @@
         </p:nvSpPr>
         <p:spPr>
           <a:xfrm>
-            <a:off x="548640" y="4206240"/>
+            <a:off x="548640" y="4160520"/>
             <a:ext cx="502920" cy="502920"/>
           </a:xfrm>
           <a:prstGeom prst="ellipse">
@@ -5073,13 +5341,6 @@
           </a:solidFill>
           <a:ln/>
         </p:spPr>
-        <p:txBody>
-          <a:bodyPr/>
-          <a:lstStyle/>
-          <a:p>
-            <a:endParaRPr lang="es-CL"/>
-          </a:p>
-        </p:txBody>
       </p:sp>
       <p:sp>
         <p:nvSpPr>
@@ -5089,7 +5350,7 @@
         </p:nvSpPr>
         <p:spPr>
           <a:xfrm>
-            <a:off x="548640" y="4206240"/>
+            <a:off x="548640" y="4160520"/>
             <a:ext cx="502920" cy="502920"/>
           </a:xfrm>
           <a:prstGeom prst="rect">
@@ -5102,7 +5363,7 @@
           <a:bodyPr wrap="square" rtlCol="0" anchor="ctr"/>
           <a:lstStyle/>
           <a:p>
-            <a:pPr marL="0" indent="0" algn="ctr">
+            <a:pPr algn="ctr" indent="0" marL="0">
               <a:buNone/>
             </a:pPr>
             <a:r>
@@ -5128,7 +5389,7 @@
         </p:nvSpPr>
         <p:spPr>
           <a:xfrm>
-            <a:off x="1234440" y="4160520"/>
+            <a:off x="1234440" y="4114800"/>
             <a:ext cx="2377440" cy="502920"/>
           </a:xfrm>
           <a:prstGeom prst="rect">
@@ -5141,7 +5402,7 @@
           <a:bodyPr wrap="square" rtlCol="0" anchor="ctr"/>
           <a:lstStyle/>
           <a:p>
-            <a:pPr marL="0" indent="0">
+            <a:pPr indent="0" marL="0">
               <a:buNone/>
             </a:pPr>
             <a:r>
@@ -5153,7 +5414,7 @@
                 <a:ea typeface="Calibri" pitchFamily="34" charset="-122"/>
                 <a:cs typeface="Calibri" pitchFamily="34" charset="-120"/>
               </a:rPr>
-              <a:t>Seguridad</a:t>
+              <a:t>Seguridad y privacidad</a:t>
             </a:r>
             <a:endParaRPr lang="en-US" sz="1300" dirty="0"/>
           </a:p>
@@ -5167,7 +5428,7 @@
         </p:nvSpPr>
         <p:spPr>
           <a:xfrm>
-            <a:off x="3657600" y="4160520"/>
+            <a:off x="3657600" y="4114800"/>
             <a:ext cx="7406640" cy="502920"/>
           </a:xfrm>
           <a:prstGeom prst="rect">
@@ -5180,11 +5441,11 @@
           <a:bodyPr wrap="square" rtlCol="0" anchor="ctr"/>
           <a:lstStyle/>
           <a:p>
-            <a:pPr marL="0" indent="0">
-              <a:buNone/>
-            </a:pPr>
-            <a:r>
-              <a:rPr lang="en-US" sz="1250" dirty="0">
+            <a:pPr indent="0" marL="0">
+              <a:buNone/>
+            </a:pPr>
+            <a:r>
+              <a:rPr lang="en-US" sz="1200" dirty="0">
                 <a:solidFill>
                   <a:srgbClr val="F2F2F2"/>
                 </a:solidFill>
@@ -5192,9 +5453,9 @@
                 <a:ea typeface="Calibri" pitchFamily="34" charset="-122"/>
                 <a:cs typeface="Calibri" pitchFamily="34" charset="-120"/>
               </a:rPr>
-              <a:t>Los datos financieros del usuario se almacenan localmente sin exponerse a terceros.</a:t>
-            </a:r>
-            <a:endParaRPr lang="en-US" sz="1250" dirty="0"/>
+              <a:t>El procesamiento de notificaciones bancarias es 100% local; los datos no se envían a servidores externos.</a:t>
+            </a:r>
+            <a:endParaRPr lang="en-US" sz="1200" dirty="0"/>
           </a:p>
         </p:txBody>
       </p:sp>
@@ -5206,7 +5467,7 @@
         </p:nvSpPr>
         <p:spPr>
           <a:xfrm>
-            <a:off x="548640" y="5074920"/>
+            <a:off x="548640" y="5029200"/>
             <a:ext cx="502920" cy="502920"/>
           </a:xfrm>
           <a:prstGeom prst="ellipse">
@@ -5217,13 +5478,6 @@
           </a:solidFill>
           <a:ln/>
         </p:spPr>
-        <p:txBody>
-          <a:bodyPr/>
-          <a:lstStyle/>
-          <a:p>
-            <a:endParaRPr lang="es-CL"/>
-          </a:p>
-        </p:txBody>
       </p:sp>
       <p:sp>
         <p:nvSpPr>
@@ -5233,7 +5487,7 @@
         </p:nvSpPr>
         <p:spPr>
           <a:xfrm>
-            <a:off x="548640" y="5074920"/>
+            <a:off x="548640" y="5029200"/>
             <a:ext cx="502920" cy="502920"/>
           </a:xfrm>
           <a:prstGeom prst="rect">
@@ -5246,7 +5500,7 @@
           <a:bodyPr wrap="square" rtlCol="0" anchor="ctr"/>
           <a:lstStyle/>
           <a:p>
-            <a:pPr marL="0" indent="0" algn="ctr">
+            <a:pPr algn="ctr" indent="0" marL="0">
               <a:buNone/>
             </a:pPr>
             <a:r>
@@ -5272,7 +5526,7 @@
         </p:nvSpPr>
         <p:spPr>
           <a:xfrm>
-            <a:off x="1234440" y="5029200"/>
+            <a:off x="1234440" y="4983480"/>
             <a:ext cx="2377440" cy="502920"/>
           </a:xfrm>
           <a:prstGeom prst="rect">
@@ -5285,7 +5539,7 @@
           <a:bodyPr wrap="square" rtlCol="0" anchor="ctr"/>
           <a:lstStyle/>
           <a:p>
-            <a:pPr marL="0" indent="0">
+            <a:pPr indent="0" marL="0">
               <a:buNone/>
             </a:pPr>
             <a:r>
@@ -5311,7 +5565,7 @@
         </p:nvSpPr>
         <p:spPr>
           <a:xfrm>
-            <a:off x="3657600" y="5029200"/>
+            <a:off x="3657600" y="4983480"/>
             <a:ext cx="7406640" cy="502920"/>
           </a:xfrm>
           <a:prstGeom prst="rect">
@@ -5324,11 +5578,11 @@
           <a:bodyPr wrap="square" rtlCol="0" anchor="ctr"/>
           <a:lstStyle/>
           <a:p>
-            <a:pPr marL="0" indent="0">
-              <a:buNone/>
-            </a:pPr>
-            <a:r>
-              <a:rPr lang="en-US" sz="1250" dirty="0">
+            <a:pPr indent="0" marL="0">
+              <a:buNone/>
+            </a:pPr>
+            <a:r>
+              <a:rPr lang="en-US" sz="1200" dirty="0">
                 <a:solidFill>
                   <a:srgbClr val="F2F2F2"/>
                 </a:solidFill>
@@ -5338,7 +5592,7 @@
               </a:rPr>
               <a:t>Funcional en dispositivos Android 8.0 o superior.</a:t>
             </a:r>
-            <a:endParaRPr lang="en-US" sz="1250" dirty="0"/>
+            <a:endParaRPr lang="en-US" sz="1200" dirty="0"/>
           </a:p>
         </p:txBody>
       </p:sp>
@@ -5363,7 +5617,7 @@
           <a:bodyPr wrap="square" rtlCol="0" anchor="ctr"/>
           <a:lstStyle/>
           <a:p>
-            <a:pPr marL="0" indent="0" algn="r">
+            <a:pPr algn="r" indent="0" marL="0">
               <a:buNone/>
             </a:pPr>
             <a:r>
@@ -5397,7 +5651,6 @@
         <a:solidFill>
           <a:srgbClr val="F2F2F2"/>
         </a:solidFill>
-        <a:effectLst/>
       </p:bgPr>
     </p:bg>
     <p:spTree>
@@ -5435,7 +5688,7 @@
           <a:bodyPr wrap="square" rtlCol="0" anchor="ctr"/>
           <a:lstStyle/>
           <a:p>
-            <a:pPr marL="0" indent="0">
+            <a:pPr indent="0" marL="0">
               <a:buNone/>
             </a:pPr>
             <a:r>
@@ -5474,7 +5727,7 @@
           <a:bodyPr wrap="square" rtlCol="0" anchor="ctr"/>
           <a:lstStyle/>
           <a:p>
-            <a:pPr marL="0" indent="0">
+            <a:pPr indent="0" marL="0">
               <a:buNone/>
             </a:pPr>
             <a:r>
@@ -5513,13 +5766,6 @@
           </a:solidFill>
           <a:ln/>
         </p:spPr>
-        <p:txBody>
-          <a:bodyPr/>
-          <a:lstStyle/>
-          <a:p>
-            <a:endParaRPr lang="es-CL"/>
-          </a:p>
-        </p:txBody>
       </p:sp>
       <p:sp>
         <p:nvSpPr>
@@ -5542,13 +5788,6 @@
           </a:solidFill>
           <a:ln/>
         </p:spPr>
-        <p:txBody>
-          <a:bodyPr/>
-          <a:lstStyle/>
-          <a:p>
-            <a:endParaRPr lang="es-CL"/>
-          </a:p>
-        </p:txBody>
       </p:sp>
       <p:sp>
         <p:nvSpPr>
@@ -5571,13 +5810,6 @@
           </a:solidFill>
           <a:ln/>
         </p:spPr>
-        <p:txBody>
-          <a:bodyPr/>
-          <a:lstStyle/>
-          <a:p>
-            <a:endParaRPr lang="es-CL"/>
-          </a:p>
-        </p:txBody>
       </p:sp>
       <p:sp>
         <p:nvSpPr>
@@ -5600,7 +5832,7 @@
           <a:bodyPr wrap="square" rtlCol="0" anchor="ctr"/>
           <a:lstStyle/>
           <a:p>
-            <a:pPr marL="0" indent="0">
+            <a:pPr indent="0" marL="0">
               <a:buNone/>
             </a:pPr>
             <a:r>
@@ -5637,13 +5869,6 @@
           </a:solidFill>
           <a:ln/>
         </p:spPr>
-        <p:txBody>
-          <a:bodyPr/>
-          <a:lstStyle/>
-          <a:p>
-            <a:endParaRPr lang="es-CL"/>
-          </a:p>
-        </p:txBody>
       </p:sp>
       <p:sp>
         <p:nvSpPr>
@@ -5666,7 +5891,7 @@
           <a:bodyPr wrap="square" rtlCol="0" anchor="ctr"/>
           <a:lstStyle/>
           <a:p>
-            <a:pPr marL="0" indent="0">
+            <a:pPr indent="0" marL="0">
               <a:buNone/>
             </a:pPr>
             <a:r>
@@ -5705,13 +5930,6 @@
           </a:solidFill>
           <a:ln/>
         </p:spPr>
-        <p:txBody>
-          <a:bodyPr/>
-          <a:lstStyle/>
-          <a:p>
-            <a:endParaRPr lang="es-CL"/>
-          </a:p>
-        </p:txBody>
       </p:sp>
       <p:sp>
         <p:nvSpPr>
@@ -5734,7 +5952,7 @@
           <a:bodyPr wrap="square" rtlCol="0" anchor="ctr"/>
           <a:lstStyle/>
           <a:p>
-            <a:pPr marL="0" indent="0">
+            <a:pPr indent="0" marL="0">
               <a:buNone/>
             </a:pPr>
             <a:r>
@@ -5773,7 +5991,7 @@
           <a:bodyPr wrap="square" rtlCol="0" anchor="ctr"/>
           <a:lstStyle/>
           <a:p>
-            <a:pPr marL="0" indent="0">
+            <a:pPr indent="0" marL="0">
               <a:buNone/>
             </a:pPr>
             <a:r>
@@ -5812,7 +6030,7 @@
           <a:bodyPr wrap="square" rtlCol="0" anchor="ctr"/>
           <a:lstStyle/>
           <a:p>
-            <a:pPr marL="0" indent="0">
+            <a:pPr indent="0" marL="0">
               <a:buNone/>
             </a:pPr>
             <a:r>
@@ -5851,7 +6069,7 @@
           <a:bodyPr wrap="square" rtlCol="0" anchor="ctr"/>
           <a:lstStyle/>
           <a:p>
-            <a:pPr marL="0" indent="0">
+            <a:pPr indent="0" marL="0">
               <a:buNone/>
             </a:pPr>
             <a:r>
@@ -5888,13 +6106,6 @@
           </a:solidFill>
           <a:ln/>
         </p:spPr>
-        <p:txBody>
-          <a:bodyPr/>
-          <a:lstStyle/>
-          <a:p>
-            <a:endParaRPr lang="es-CL"/>
-          </a:p>
-        </p:txBody>
       </p:sp>
       <p:sp>
         <p:nvSpPr>
@@ -5915,13 +6126,6 @@
           </a:solidFill>
           <a:ln/>
         </p:spPr>
-        <p:txBody>
-          <a:bodyPr/>
-          <a:lstStyle/>
-          <a:p>
-            <a:endParaRPr lang="es-CL"/>
-          </a:p>
-        </p:txBody>
       </p:sp>
       <p:sp>
         <p:nvSpPr>
@@ -5944,7 +6148,7 @@
           <a:bodyPr wrap="square" rtlCol="0" anchor="ctr"/>
           <a:lstStyle/>
           <a:p>
-            <a:pPr marL="0" indent="0">
+            <a:pPr indent="0" marL="0">
               <a:buNone/>
             </a:pPr>
             <a:r>
@@ -5981,13 +6185,6 @@
           </a:solidFill>
           <a:ln/>
         </p:spPr>
-        <p:txBody>
-          <a:bodyPr/>
-          <a:lstStyle/>
-          <a:p>
-            <a:endParaRPr lang="es-CL"/>
-          </a:p>
-        </p:txBody>
       </p:sp>
       <p:sp>
         <p:nvSpPr>
@@ -6008,13 +6205,6 @@
           </a:solidFill>
           <a:ln/>
         </p:spPr>
-        <p:txBody>
-          <a:bodyPr/>
-          <a:lstStyle/>
-          <a:p>
-            <a:endParaRPr lang="es-CL"/>
-          </a:p>
-        </p:txBody>
       </p:sp>
       <p:sp>
         <p:nvSpPr>
@@ -6037,7 +6227,7 @@
           <a:bodyPr wrap="square" rtlCol="0" anchor="ctr"/>
           <a:lstStyle/>
           <a:p>
-            <a:pPr marL="0" indent="0">
+            <a:pPr indent="0" marL="0">
               <a:buNone/>
             </a:pPr>
             <a:r>
@@ -6074,13 +6264,6 @@
           </a:solidFill>
           <a:ln/>
         </p:spPr>
-        <p:txBody>
-          <a:bodyPr/>
-          <a:lstStyle/>
-          <a:p>
-            <a:endParaRPr lang="es-CL"/>
-          </a:p>
-        </p:txBody>
       </p:sp>
       <p:sp>
         <p:nvSpPr>
@@ -6101,13 +6284,6 @@
           </a:solidFill>
           <a:ln/>
         </p:spPr>
-        <p:txBody>
-          <a:bodyPr/>
-          <a:lstStyle/>
-          <a:p>
-            <a:endParaRPr lang="es-CL"/>
-          </a:p>
-        </p:txBody>
       </p:sp>
       <p:sp>
         <p:nvSpPr>
@@ -6130,7 +6306,7 @@
           <a:bodyPr wrap="square" rtlCol="0" anchor="ctr"/>
           <a:lstStyle/>
           <a:p>
-            <a:pPr marL="0" indent="0">
+            <a:pPr indent="0" marL="0">
               <a:buNone/>
             </a:pPr>
             <a:r>
@@ -6169,7 +6345,7 @@
           <a:bodyPr wrap="square" rtlCol="0" anchor="ctr"/>
           <a:lstStyle/>
           <a:p>
-            <a:pPr marL="0" indent="0">
+            <a:pPr indent="0" marL="0">
               <a:buNone/>
             </a:pPr>
             <a:r>
@@ -6208,7 +6384,7 @@
           <a:bodyPr wrap="square" rtlCol="0" anchor="ctr"/>
           <a:lstStyle/>
           <a:p>
-            <a:pPr marL="0" indent="0" algn="r">
+            <a:pPr algn="r" indent="0" marL="0">
               <a:buNone/>
             </a:pPr>
             <a:r>
@@ -6247,7 +6423,7 @@
           <a:bodyPr wrap="square" rtlCol="0" anchor="ctr"/>
           <a:lstStyle/>
           <a:p>
-            <a:pPr marL="0" indent="0">
+            <a:pPr indent="0" marL="0">
               <a:buNone/>
             </a:pPr>
             <a:r>
@@ -6286,7 +6462,7 @@
           <a:bodyPr wrap="square" rtlCol="0" anchor="ctr"/>
           <a:lstStyle/>
           <a:p>
-            <a:pPr marL="0" indent="0" algn="r">
+            <a:pPr algn="r" indent="0" marL="0">
               <a:buNone/>
             </a:pPr>
             <a:r>
@@ -6325,7 +6501,7 @@
           <a:bodyPr wrap="square" rtlCol="0" anchor="ctr"/>
           <a:lstStyle/>
           <a:p>
-            <a:pPr marL="0" indent="0">
+            <a:pPr indent="0" marL="0">
               <a:buNone/>
             </a:pPr>
             <a:r>
@@ -6364,7 +6540,7 @@
           <a:bodyPr wrap="square" rtlCol="0" anchor="ctr"/>
           <a:lstStyle/>
           <a:p>
-            <a:pPr marL="0" indent="0" algn="r">
+            <a:pPr algn="r" indent="0" marL="0">
               <a:buNone/>
             </a:pPr>
             <a:r>
@@ -6403,13 +6579,6 @@
           </a:solidFill>
           <a:ln/>
         </p:spPr>
-        <p:txBody>
-          <a:bodyPr/>
-          <a:lstStyle/>
-          <a:p>
-            <a:endParaRPr lang="es-CL"/>
-          </a:p>
-        </p:txBody>
       </p:sp>
       <p:sp>
         <p:nvSpPr>
@@ -6432,13 +6601,6 @@
           </a:solidFill>
           <a:ln/>
         </p:spPr>
-        <p:txBody>
-          <a:bodyPr/>
-          <a:lstStyle/>
-          <a:p>
-            <a:endParaRPr lang="es-CL"/>
-          </a:p>
-        </p:txBody>
       </p:sp>
       <p:sp>
         <p:nvSpPr>
@@ -6461,13 +6623,6 @@
           </a:solidFill>
           <a:ln/>
         </p:spPr>
-        <p:txBody>
-          <a:bodyPr/>
-          <a:lstStyle/>
-          <a:p>
-            <a:endParaRPr lang="es-CL"/>
-          </a:p>
-        </p:txBody>
       </p:sp>
       <p:sp>
         <p:nvSpPr>
@@ -6490,7 +6645,7 @@
           <a:bodyPr wrap="square" rtlCol="0" anchor="ctr"/>
           <a:lstStyle/>
           <a:p>
-            <a:pPr marL="0" indent="0">
+            <a:pPr indent="0" marL="0">
               <a:buNone/>
             </a:pPr>
             <a:r>
@@ -6527,13 +6682,6 @@
           </a:solidFill>
           <a:ln/>
         </p:spPr>
-        <p:txBody>
-          <a:bodyPr/>
-          <a:lstStyle/>
-          <a:p>
-            <a:endParaRPr lang="es-CL"/>
-          </a:p>
-        </p:txBody>
       </p:sp>
       <p:sp>
         <p:nvSpPr>
@@ -6556,7 +6704,7 @@
           <a:bodyPr wrap="square" rtlCol="0" anchor="ctr"/>
           <a:lstStyle/>
           <a:p>
-            <a:pPr marL="0" indent="0">
+            <a:pPr indent="0" marL="0">
               <a:buNone/>
             </a:pPr>
             <a:r>
@@ -6595,13 +6743,6 @@
           </a:solidFill>
           <a:ln/>
         </p:spPr>
-        <p:txBody>
-          <a:bodyPr/>
-          <a:lstStyle/>
-          <a:p>
-            <a:endParaRPr lang="es-CL"/>
-          </a:p>
-        </p:txBody>
       </p:sp>
       <p:sp>
         <p:nvSpPr>
@@ -6624,7 +6765,7 @@
           <a:bodyPr wrap="square" rtlCol="0" anchor="ctr"/>
           <a:lstStyle/>
           <a:p>
-            <a:pPr marL="0" indent="0" algn="ctr">
+            <a:pPr algn="ctr" indent="0" marL="0">
               <a:buNone/>
             </a:pPr>
             <a:r>
@@ -6663,13 +6804,6 @@
           </a:solidFill>
           <a:ln/>
         </p:spPr>
-        <p:txBody>
-          <a:bodyPr/>
-          <a:lstStyle/>
-          <a:p>
-            <a:endParaRPr lang="es-CL"/>
-          </a:p>
-        </p:txBody>
       </p:sp>
       <p:sp>
         <p:nvSpPr>
@@ -6692,7 +6826,7 @@
           <a:bodyPr wrap="square" rtlCol="0" anchor="ctr"/>
           <a:lstStyle/>
           <a:p>
-            <a:pPr marL="0" indent="0" algn="ctr">
+            <a:pPr algn="ctr" indent="0" marL="0">
               <a:buNone/>
             </a:pPr>
             <a:r>
@@ -6731,7 +6865,7 @@
           <a:bodyPr wrap="square" rtlCol="0" anchor="ctr"/>
           <a:lstStyle/>
           <a:p>
-            <a:pPr marL="0" indent="0">
+            <a:pPr indent="0" marL="0">
               <a:buNone/>
             </a:pPr>
             <a:r>
@@ -6770,7 +6904,7 @@
           <a:bodyPr wrap="square" rtlCol="0" anchor="ctr"/>
           <a:lstStyle/>
           <a:p>
-            <a:pPr marL="0" indent="0">
+            <a:pPr indent="0" marL="0">
               <a:buNone/>
             </a:pPr>
             <a:r>
@@ -6810,13 +6944,6 @@
             <a:prstDash val="solid"/>
           </a:ln>
         </p:spPr>
-        <p:txBody>
-          <a:bodyPr/>
-          <a:lstStyle/>
-          <a:p>
-            <a:endParaRPr lang="es-CL"/>
-          </a:p>
-        </p:txBody>
       </p:sp>
       <p:sp>
         <p:nvSpPr>
@@ -6839,7 +6966,7 @@
           <a:bodyPr wrap="square" rtlCol="0" anchor="ctr"/>
           <a:lstStyle/>
           <a:p>
-            <a:pPr marL="0" indent="0">
+            <a:pPr indent="0" marL="0">
               <a:buNone/>
             </a:pPr>
             <a:r>
@@ -6878,13 +7005,6 @@
           </a:solidFill>
           <a:ln/>
         </p:spPr>
-        <p:txBody>
-          <a:bodyPr/>
-          <a:lstStyle/>
-          <a:p>
-            <a:endParaRPr lang="es-CL"/>
-          </a:p>
-        </p:txBody>
       </p:sp>
       <p:sp>
         <p:nvSpPr>
@@ -6907,7 +7027,7 @@
           <a:bodyPr wrap="square" rtlCol="0" anchor="ctr"/>
           <a:lstStyle/>
           <a:p>
-            <a:pPr marL="0" indent="0">
+            <a:pPr indent="0" marL="0">
               <a:buNone/>
             </a:pPr>
             <a:r>
@@ -6946,7 +7066,7 @@
           <a:bodyPr wrap="square" rtlCol="0" anchor="ctr"/>
           <a:lstStyle/>
           <a:p>
-            <a:pPr marL="0" indent="0">
+            <a:pPr indent="0" marL="0">
               <a:buNone/>
             </a:pPr>
             <a:r>
@@ -6985,13 +7105,6 @@
           </a:solidFill>
           <a:ln/>
         </p:spPr>
-        <p:txBody>
-          <a:bodyPr/>
-          <a:lstStyle/>
-          <a:p>
-            <a:endParaRPr lang="es-CL"/>
-          </a:p>
-        </p:txBody>
       </p:sp>
       <p:sp>
         <p:nvSpPr>
@@ -7014,7 +7127,7 @@
           <a:bodyPr wrap="square" rtlCol="0" anchor="ctr"/>
           <a:lstStyle/>
           <a:p>
-            <a:pPr marL="0" indent="0">
+            <a:pPr indent="0" marL="0">
               <a:buNone/>
             </a:pPr>
             <a:r>
@@ -7053,7 +7166,7 @@
           <a:bodyPr wrap="square" rtlCol="0" anchor="ctr"/>
           <a:lstStyle/>
           <a:p>
-            <a:pPr marL="0" indent="0">
+            <a:pPr indent="0" marL="0">
               <a:buNone/>
             </a:pPr>
             <a:r>
@@ -7092,13 +7205,6 @@
           </a:solidFill>
           <a:ln/>
         </p:spPr>
-        <p:txBody>
-          <a:bodyPr/>
-          <a:lstStyle/>
-          <a:p>
-            <a:endParaRPr lang="es-CL"/>
-          </a:p>
-        </p:txBody>
       </p:sp>
       <p:sp>
         <p:nvSpPr>
@@ -7121,7 +7227,7 @@
           <a:bodyPr wrap="square" rtlCol="0" anchor="ctr"/>
           <a:lstStyle/>
           <a:p>
-            <a:pPr marL="0" indent="0">
+            <a:pPr indent="0" marL="0">
               <a:buNone/>
             </a:pPr>
             <a:r>
@@ -7160,13 +7266,6 @@
           </a:solidFill>
           <a:ln/>
         </p:spPr>
-        <p:txBody>
-          <a:bodyPr/>
-          <a:lstStyle/>
-          <a:p>
-            <a:endParaRPr lang="es-CL"/>
-          </a:p>
-        </p:txBody>
       </p:sp>
       <p:sp>
         <p:nvSpPr>
@@ -7189,7 +7288,7 @@
           <a:bodyPr wrap="square" rtlCol="0" anchor="ctr"/>
           <a:lstStyle/>
           <a:p>
-            <a:pPr marL="0" indent="0" algn="ctr">
+            <a:pPr algn="ctr" indent="0" marL="0">
               <a:buNone/>
             </a:pPr>
             <a:r>
@@ -7228,7 +7327,7 @@
           <a:bodyPr wrap="square" rtlCol="0" anchor="ctr"/>
           <a:lstStyle/>
           <a:p>
-            <a:pPr marL="0" indent="0" algn="r">
+            <a:pPr algn="r" indent="0" marL="0">
               <a:buNone/>
             </a:pPr>
             <a:r>
@@ -7262,7 +7361,6 @@
         <a:solidFill>
           <a:srgbClr val="F2F2F2"/>
         </a:solidFill>
-        <a:effectLst/>
       </p:bgPr>
     </p:bg>
     <p:spTree>
@@ -7300,7 +7398,7 @@
           <a:bodyPr wrap="square" rtlCol="0" anchor="ctr"/>
           <a:lstStyle/>
           <a:p>
-            <a:pPr marL="0" indent="0">
+            <a:pPr indent="0" marL="0">
               <a:buNone/>
             </a:pPr>
             <a:r>
@@ -7339,7 +7437,7 @@
           <a:bodyPr wrap="square" rtlCol="0" anchor="ctr"/>
           <a:lstStyle/>
           <a:p>
-            <a:pPr marL="0" indent="0">
+            <a:pPr indent="0" marL="0">
               <a:buNone/>
             </a:pPr>
             <a:r>
@@ -7378,13 +7476,6 @@
           </a:solidFill>
           <a:ln/>
         </p:spPr>
-        <p:txBody>
-          <a:bodyPr/>
-          <a:lstStyle/>
-          <a:p>
-            <a:endParaRPr lang="es-CL"/>
-          </a:p>
-        </p:txBody>
       </p:sp>
       <p:sp>
         <p:nvSpPr>
@@ -7407,13 +7498,6 @@
           </a:solidFill>
           <a:ln/>
         </p:spPr>
-        <p:txBody>
-          <a:bodyPr/>
-          <a:lstStyle/>
-          <a:p>
-            <a:endParaRPr lang="es-CL"/>
-          </a:p>
-        </p:txBody>
       </p:sp>
       <p:sp>
         <p:nvSpPr>
@@ -7436,13 +7520,6 @@
           </a:solidFill>
           <a:ln/>
         </p:spPr>
-        <p:txBody>
-          <a:bodyPr/>
-          <a:lstStyle/>
-          <a:p>
-            <a:endParaRPr lang="es-CL"/>
-          </a:p>
-        </p:txBody>
       </p:sp>
       <p:sp>
         <p:nvSpPr>
@@ -7465,7 +7542,7 @@
           <a:bodyPr wrap="square" rtlCol="0" anchor="ctr"/>
           <a:lstStyle/>
           <a:p>
-            <a:pPr marL="0" indent="0">
+            <a:pPr indent="0" marL="0">
               <a:buNone/>
             </a:pPr>
             <a:r>
@@ -7502,13 +7579,6 @@
           </a:solidFill>
           <a:ln/>
         </p:spPr>
-        <p:txBody>
-          <a:bodyPr/>
-          <a:lstStyle/>
-          <a:p>
-            <a:endParaRPr lang="es-CL"/>
-          </a:p>
-        </p:txBody>
       </p:sp>
       <p:sp>
         <p:nvSpPr>
@@ -7531,7 +7601,7 @@
           <a:bodyPr wrap="square" rtlCol="0" anchor="ctr"/>
           <a:lstStyle/>
           <a:p>
-            <a:pPr marL="0" indent="0">
+            <a:pPr indent="0" marL="0">
               <a:buNone/>
             </a:pPr>
             <a:r>
@@ -7570,7 +7640,7 @@
           <a:bodyPr wrap="square" rtlCol="0" anchor="ctr"/>
           <a:lstStyle/>
           <a:p>
-            <a:pPr marL="0" indent="0">
+            <a:pPr indent="0" marL="0">
               <a:buNone/>
             </a:pPr>
             <a:r>
@@ -7607,13 +7677,6 @@
           </a:solidFill>
           <a:ln/>
         </p:spPr>
-        <p:txBody>
-          <a:bodyPr/>
-          <a:lstStyle/>
-          <a:p>
-            <a:endParaRPr lang="es-CL"/>
-          </a:p>
-        </p:txBody>
       </p:sp>
       <p:sp>
         <p:nvSpPr>
@@ -7634,13 +7697,6 @@
           </a:solidFill>
           <a:ln/>
         </p:spPr>
-        <p:txBody>
-          <a:bodyPr/>
-          <a:lstStyle/>
-          <a:p>
-            <a:endParaRPr lang="es-CL"/>
-          </a:p>
-        </p:txBody>
       </p:sp>
       <p:sp>
         <p:nvSpPr>
@@ -7663,7 +7719,7 @@
           <a:bodyPr wrap="square" rtlCol="0" anchor="ctr"/>
           <a:lstStyle/>
           <a:p>
-            <a:pPr marL="0" indent="0">
+            <a:pPr indent="0" marL="0">
               <a:buNone/>
             </a:pPr>
             <a:r>
@@ -7702,7 +7758,7 @@
           <a:bodyPr wrap="square" rtlCol="0" anchor="ctr"/>
           <a:lstStyle/>
           <a:p>
-            <a:pPr marL="0" indent="0">
+            <a:pPr indent="0" marL="0">
               <a:buNone/>
             </a:pPr>
             <a:r>
@@ -7739,13 +7795,6 @@
           </a:solidFill>
           <a:ln/>
         </p:spPr>
-        <p:txBody>
-          <a:bodyPr/>
-          <a:lstStyle/>
-          <a:p>
-            <a:endParaRPr lang="es-CL"/>
-          </a:p>
-        </p:txBody>
       </p:sp>
       <p:sp>
         <p:nvSpPr>
@@ -7766,13 +7815,6 @@
           </a:solidFill>
           <a:ln/>
         </p:spPr>
-        <p:txBody>
-          <a:bodyPr/>
-          <a:lstStyle/>
-          <a:p>
-            <a:endParaRPr lang="es-CL"/>
-          </a:p>
-        </p:txBody>
       </p:sp>
       <p:sp>
         <p:nvSpPr>
@@ -7795,7 +7837,7 @@
           <a:bodyPr wrap="square" rtlCol="0" anchor="ctr"/>
           <a:lstStyle/>
           <a:p>
-            <a:pPr marL="0" indent="0">
+            <a:pPr indent="0" marL="0">
               <a:buNone/>
             </a:pPr>
             <a:r>
@@ -7834,7 +7876,7 @@
           <a:bodyPr wrap="square" rtlCol="0" anchor="ctr"/>
           <a:lstStyle/>
           <a:p>
-            <a:pPr marL="0" indent="0">
+            <a:pPr indent="0" marL="0">
               <a:buNone/>
             </a:pPr>
             <a:r>
@@ -7871,13 +7913,6 @@
           </a:solidFill>
           <a:ln/>
         </p:spPr>
-        <p:txBody>
-          <a:bodyPr/>
-          <a:lstStyle/>
-          <a:p>
-            <a:endParaRPr lang="es-CL"/>
-          </a:p>
-        </p:txBody>
       </p:sp>
       <p:sp>
         <p:nvSpPr>
@@ -7898,13 +7933,6 @@
           </a:solidFill>
           <a:ln/>
         </p:spPr>
-        <p:txBody>
-          <a:bodyPr/>
-          <a:lstStyle/>
-          <a:p>
-            <a:endParaRPr lang="es-CL"/>
-          </a:p>
-        </p:txBody>
       </p:sp>
       <p:sp>
         <p:nvSpPr>
@@ -7927,7 +7955,7 @@
           <a:bodyPr wrap="square" rtlCol="0" anchor="ctr"/>
           <a:lstStyle/>
           <a:p>
-            <a:pPr marL="0" indent="0">
+            <a:pPr indent="0" marL="0">
               <a:buNone/>
             </a:pPr>
             <a:r>
@@ -7966,7 +7994,7 @@
           <a:bodyPr wrap="square" rtlCol="0" anchor="ctr"/>
           <a:lstStyle/>
           <a:p>
-            <a:pPr marL="0" indent="0">
+            <a:pPr indent="0" marL="0">
               <a:buNone/>
             </a:pPr>
             <a:r>
@@ -8003,13 +8031,6 @@
           </a:solidFill>
           <a:ln/>
         </p:spPr>
-        <p:txBody>
-          <a:bodyPr/>
-          <a:lstStyle/>
-          <a:p>
-            <a:endParaRPr lang="es-CL"/>
-          </a:p>
-        </p:txBody>
       </p:sp>
       <p:sp>
         <p:nvSpPr>
@@ -8030,13 +8051,6 @@
           </a:solidFill>
           <a:ln/>
         </p:spPr>
-        <p:txBody>
-          <a:bodyPr/>
-          <a:lstStyle/>
-          <a:p>
-            <a:endParaRPr lang="es-CL"/>
-          </a:p>
-        </p:txBody>
       </p:sp>
       <p:sp>
         <p:nvSpPr>
@@ -8059,7 +8073,7 @@
           <a:bodyPr wrap="square" rtlCol="0" anchor="ctr"/>
           <a:lstStyle/>
           <a:p>
-            <a:pPr marL="0" indent="0">
+            <a:pPr indent="0" marL="0">
               <a:buNone/>
             </a:pPr>
             <a:r>
@@ -8103,13 +8117,6 @@
             <a:prstDash val="solid"/>
           </a:ln>
         </p:spPr>
-        <p:txBody>
-          <a:bodyPr/>
-          <a:lstStyle/>
-          <a:p>
-            <a:endParaRPr lang="es-CL"/>
-          </a:p>
-        </p:txBody>
       </p:sp>
       <p:sp>
         <p:nvSpPr>
@@ -8132,7 +8139,7 @@
           <a:bodyPr wrap="square" rtlCol="0" anchor="ctr"/>
           <a:lstStyle/>
           <a:p>
-            <a:pPr marL="0" indent="0" algn="ctr">
+            <a:pPr algn="ctr" indent="0" marL="0">
               <a:buNone/>
             </a:pPr>
             <a:r>
@@ -8171,13 +8178,6 @@
           </a:solidFill>
           <a:ln/>
         </p:spPr>
-        <p:txBody>
-          <a:bodyPr/>
-          <a:lstStyle/>
-          <a:p>
-            <a:endParaRPr lang="es-CL"/>
-          </a:p>
-        </p:txBody>
       </p:sp>
       <p:sp>
         <p:nvSpPr>
@@ -8200,13 +8200,6 @@
           </a:solidFill>
           <a:ln/>
         </p:spPr>
-        <p:txBody>
-          <a:bodyPr/>
-          <a:lstStyle/>
-          <a:p>
-            <a:endParaRPr lang="es-CL"/>
-          </a:p>
-        </p:txBody>
       </p:sp>
       <p:sp>
         <p:nvSpPr>
@@ -8229,13 +8222,6 @@
           </a:solidFill>
           <a:ln/>
         </p:spPr>
-        <p:txBody>
-          <a:bodyPr/>
-          <a:lstStyle/>
-          <a:p>
-            <a:endParaRPr lang="es-CL"/>
-          </a:p>
-        </p:txBody>
       </p:sp>
       <p:sp>
         <p:nvSpPr>
@@ -8258,7 +8244,7 @@
           <a:bodyPr wrap="square" rtlCol="0" anchor="ctr"/>
           <a:lstStyle/>
           <a:p>
-            <a:pPr marL="0" indent="0">
+            <a:pPr indent="0" marL="0">
               <a:buNone/>
             </a:pPr>
             <a:r>
@@ -8295,13 +8281,6 @@
           </a:solidFill>
           <a:ln/>
         </p:spPr>
-        <p:txBody>
-          <a:bodyPr/>
-          <a:lstStyle/>
-          <a:p>
-            <a:endParaRPr lang="es-CL"/>
-          </a:p>
-        </p:txBody>
       </p:sp>
       <p:sp>
         <p:nvSpPr>
@@ -8324,7 +8303,7 @@
           <a:bodyPr wrap="square" rtlCol="0" anchor="ctr"/>
           <a:lstStyle/>
           <a:p>
-            <a:pPr marL="0" indent="0">
+            <a:pPr indent="0" marL="0">
               <a:buNone/>
             </a:pPr>
             <a:r>
@@ -8363,13 +8342,6 @@
           </a:solidFill>
           <a:ln/>
         </p:spPr>
-        <p:txBody>
-          <a:bodyPr/>
-          <a:lstStyle/>
-          <a:p>
-            <a:endParaRPr lang="es-CL"/>
-          </a:p>
-        </p:txBody>
       </p:sp>
       <p:sp>
         <p:nvSpPr>
@@ -8392,7 +8364,7 @@
           <a:bodyPr wrap="square" rtlCol="0" anchor="ctr"/>
           <a:lstStyle/>
           <a:p>
-            <a:pPr marL="0" indent="0">
+            <a:pPr indent="0" marL="0">
               <a:buNone/>
             </a:pPr>
             <a:r>
@@ -8431,7 +8403,7 @@
           <a:bodyPr wrap="square" rtlCol="0" anchor="ctr"/>
           <a:lstStyle/>
           <a:p>
-            <a:pPr marL="0" indent="0">
+            <a:pPr indent="0" marL="0">
               <a:buNone/>
             </a:pPr>
             <a:r>
@@ -8470,7 +8442,7 @@
           <a:bodyPr wrap="square" rtlCol="0" anchor="ctr"/>
           <a:lstStyle/>
           <a:p>
-            <a:pPr marL="0" indent="0">
+            <a:pPr indent="0" marL="0">
               <a:buNone/>
             </a:pPr>
             <a:r>
@@ -8509,7 +8481,7 @@
           <a:bodyPr wrap="square" rtlCol="0" anchor="ctr"/>
           <a:lstStyle/>
           <a:p>
-            <a:pPr marL="0" indent="0">
+            <a:pPr indent="0" marL="0">
               <a:buNone/>
             </a:pPr>
             <a:r>
@@ -8548,7 +8520,7 @@
           <a:bodyPr wrap="square" rtlCol="0" anchor="ctr"/>
           <a:lstStyle/>
           <a:p>
-            <a:pPr marL="0" indent="0">
+            <a:pPr indent="0" marL="0">
               <a:buNone/>
             </a:pPr>
             <a:r>
@@ -8587,7 +8559,7 @@
           <a:bodyPr wrap="square" rtlCol="0" anchor="ctr"/>
           <a:lstStyle/>
           <a:p>
-            <a:pPr marL="0" indent="0">
+            <a:pPr indent="0" marL="0">
               <a:buNone/>
             </a:pPr>
             <a:r>
@@ -8624,13 +8596,6 @@
           </a:solidFill>
           <a:ln/>
         </p:spPr>
-        <p:txBody>
-          <a:bodyPr/>
-          <a:lstStyle/>
-          <a:p>
-            <a:endParaRPr lang="es-CL"/>
-          </a:p>
-        </p:txBody>
       </p:sp>
       <p:sp>
         <p:nvSpPr>
@@ -8651,13 +8616,6 @@
           </a:solidFill>
           <a:ln/>
         </p:spPr>
-        <p:txBody>
-          <a:bodyPr/>
-          <a:lstStyle/>
-          <a:p>
-            <a:endParaRPr lang="es-CL"/>
-          </a:p>
-        </p:txBody>
       </p:sp>
       <p:sp>
         <p:nvSpPr>
@@ -8680,7 +8638,7 @@
           <a:bodyPr wrap="square" rtlCol="0" anchor="ctr"/>
           <a:lstStyle/>
           <a:p>
-            <a:pPr marL="0" indent="0">
+            <a:pPr indent="0" marL="0">
               <a:buNone/>
             </a:pPr>
             <a:r>
@@ -8719,7 +8677,7 @@
           <a:bodyPr wrap="square" rtlCol="0" anchor="ctr"/>
           <a:lstStyle/>
           <a:p>
-            <a:pPr marL="0" indent="0">
+            <a:pPr indent="0" marL="0">
               <a:buNone/>
             </a:pPr>
             <a:r>
@@ -8756,13 +8714,6 @@
           </a:solidFill>
           <a:ln/>
         </p:spPr>
-        <p:txBody>
-          <a:bodyPr/>
-          <a:lstStyle/>
-          <a:p>
-            <a:endParaRPr lang="es-CL"/>
-          </a:p>
-        </p:txBody>
       </p:sp>
       <p:sp>
         <p:nvSpPr>
@@ -8783,13 +8734,6 @@
           </a:solidFill>
           <a:ln/>
         </p:spPr>
-        <p:txBody>
-          <a:bodyPr/>
-          <a:lstStyle/>
-          <a:p>
-            <a:endParaRPr lang="es-CL"/>
-          </a:p>
-        </p:txBody>
       </p:sp>
       <p:sp>
         <p:nvSpPr>
@@ -8812,7 +8756,7 @@
           <a:bodyPr wrap="square" rtlCol="0" anchor="ctr"/>
           <a:lstStyle/>
           <a:p>
-            <a:pPr marL="0" indent="0">
+            <a:pPr indent="0" marL="0">
               <a:buNone/>
             </a:pPr>
             <a:r>
@@ -8851,7 +8795,7 @@
           <a:bodyPr wrap="square" rtlCol="0" anchor="ctr"/>
           <a:lstStyle/>
           <a:p>
-            <a:pPr marL="0" indent="0">
+            <a:pPr indent="0" marL="0">
               <a:buNone/>
             </a:pPr>
             <a:r>
@@ -8888,13 +8832,6 @@
           </a:solidFill>
           <a:ln/>
         </p:spPr>
-        <p:txBody>
-          <a:bodyPr/>
-          <a:lstStyle/>
-          <a:p>
-            <a:endParaRPr lang="es-CL"/>
-          </a:p>
-        </p:txBody>
       </p:sp>
       <p:sp>
         <p:nvSpPr>
@@ -8915,13 +8852,6 @@
           </a:solidFill>
           <a:ln/>
         </p:spPr>
-        <p:txBody>
-          <a:bodyPr/>
-          <a:lstStyle/>
-          <a:p>
-            <a:endParaRPr lang="es-CL"/>
-          </a:p>
-        </p:txBody>
       </p:sp>
       <p:sp>
         <p:nvSpPr>
@@ -8944,7 +8874,7 @@
           <a:bodyPr wrap="square" rtlCol="0" anchor="ctr"/>
           <a:lstStyle/>
           <a:p>
-            <a:pPr marL="0" indent="0">
+            <a:pPr indent="0" marL="0">
               <a:buNone/>
             </a:pPr>
             <a:r>
@@ -8983,7 +8913,7 @@
           <a:bodyPr wrap="square" rtlCol="0" anchor="ctr"/>
           <a:lstStyle/>
           <a:p>
-            <a:pPr marL="0" indent="0">
+            <a:pPr indent="0" marL="0">
               <a:buNone/>
             </a:pPr>
             <a:r>
@@ -9020,13 +8950,6 @@
           </a:solidFill>
           <a:ln/>
         </p:spPr>
-        <p:txBody>
-          <a:bodyPr/>
-          <a:lstStyle/>
-          <a:p>
-            <a:endParaRPr lang="es-CL"/>
-          </a:p>
-        </p:txBody>
       </p:sp>
       <p:sp>
         <p:nvSpPr>
@@ -9047,13 +8970,6 @@
           </a:solidFill>
           <a:ln/>
         </p:spPr>
-        <p:txBody>
-          <a:bodyPr/>
-          <a:lstStyle/>
-          <a:p>
-            <a:endParaRPr lang="es-CL"/>
-          </a:p>
-        </p:txBody>
       </p:sp>
       <p:sp>
         <p:nvSpPr>
@@ -9076,7 +8992,7 @@
           <a:bodyPr wrap="square" rtlCol="0" anchor="ctr"/>
           <a:lstStyle/>
           <a:p>
-            <a:pPr marL="0" indent="0">
+            <a:pPr indent="0" marL="0">
               <a:buNone/>
             </a:pPr>
             <a:r>
@@ -9115,7 +9031,7 @@
           <a:bodyPr wrap="square" rtlCol="0" anchor="ctr"/>
           <a:lstStyle/>
           <a:p>
-            <a:pPr marL="0" indent="0">
+            <a:pPr indent="0" marL="0">
               <a:buNone/>
             </a:pPr>
             <a:r>
@@ -9152,13 +9068,6 @@
           </a:solidFill>
           <a:ln/>
         </p:spPr>
-        <p:txBody>
-          <a:bodyPr/>
-          <a:lstStyle/>
-          <a:p>
-            <a:endParaRPr lang="es-CL"/>
-          </a:p>
-        </p:txBody>
       </p:sp>
       <p:sp>
         <p:nvSpPr>
@@ -9179,13 +9088,6 @@
           </a:solidFill>
           <a:ln/>
         </p:spPr>
-        <p:txBody>
-          <a:bodyPr/>
-          <a:lstStyle/>
-          <a:p>
-            <a:endParaRPr lang="es-CL"/>
-          </a:p>
-        </p:txBody>
       </p:sp>
       <p:sp>
         <p:nvSpPr>
@@ -9208,7 +9110,7 @@
           <a:bodyPr wrap="square" rtlCol="0" anchor="ctr"/>
           <a:lstStyle/>
           <a:p>
-            <a:pPr marL="0" indent="0">
+            <a:pPr indent="0" marL="0">
               <a:buNone/>
             </a:pPr>
             <a:r>
@@ -9247,7 +9149,7 @@
           <a:bodyPr wrap="square" rtlCol="0" anchor="ctr"/>
           <a:lstStyle/>
           <a:p>
-            <a:pPr marL="0" indent="0" algn="r">
+            <a:pPr algn="r" indent="0" marL="0">
               <a:buNone/>
             </a:pPr>
             <a:r>
@@ -9281,7 +9183,6 @@
         <a:solidFill>
           <a:srgbClr val="FFFFFF"/>
         </a:solidFill>
-        <a:effectLst/>
       </p:bgPr>
     </p:bg>
     <p:spTree>
@@ -9319,7 +9220,7 @@
           <a:bodyPr wrap="square" rtlCol="0" anchor="ctr"/>
           <a:lstStyle/>
           <a:p>
-            <a:pPr marL="0" indent="0">
+            <a:pPr indent="0" marL="0">
               <a:buNone/>
             </a:pPr>
             <a:r>
@@ -9358,7 +9259,7 @@
           <a:bodyPr wrap="square" rtlCol="0" anchor="ctr"/>
           <a:lstStyle/>
           <a:p>
-            <a:pPr marL="0" indent="0">
+            <a:pPr indent="0" marL="0">
               <a:buNone/>
             </a:pPr>
             <a:r>
@@ -9395,13 +9296,6 @@
           </a:solidFill>
           <a:ln/>
         </p:spPr>
-        <p:txBody>
-          <a:bodyPr/>
-          <a:lstStyle/>
-          <a:p>
-            <a:endParaRPr lang="es-CL"/>
-          </a:p>
-        </p:txBody>
       </p:sp>
       <p:sp>
         <p:nvSpPr>
@@ -9424,7 +9318,7 @@
           <a:bodyPr wrap="square" rtlCol="0" anchor="ctr"/>
           <a:lstStyle/>
           <a:p>
-            <a:pPr marL="0" indent="0">
+            <a:pPr indent="0" marL="0">
               <a:buNone/>
             </a:pPr>
             <a:r>
@@ -9463,7 +9357,7 @@
           <a:bodyPr wrap="square" rtlCol="0" anchor="ctr"/>
           <a:lstStyle/>
           <a:p>
-            <a:pPr marL="0" indent="0">
+            <a:pPr indent="0" marL="0">
               <a:buNone/>
             </a:pPr>
             <a:r>
@@ -9475,7 +9369,7 @@
                 <a:ea typeface="Calibri" pitchFamily="34" charset="-122"/>
                 <a:cs typeface="Calibri" pitchFamily="34" charset="-120"/>
               </a:rPr>
-              <a:t>Una aplicación móvil que permite registrar ingresos y gastos, clasificarlos por categoría, definir presupuestos y visualizar reportes, para ayudar a cualquier persona a controlar sus finanzas personales sin depender de planillas complejas.</a:t>
+              <a:t>Una aplicación móvil que permite registrar ingresos y gastos (manualmente o detectados automáticamente desde notificaciones bancarias), clasificarlos por categoría, definir presupuestos y visualizar reportes.</a:t>
             </a:r>
             <a:endParaRPr lang="en-US" sz="1300" dirty="0"/>
           </a:p>
@@ -9505,13 +9399,6 @@
             <a:prstDash val="solid"/>
           </a:ln>
         </p:spPr>
-        <p:txBody>
-          <a:bodyPr/>
-          <a:lstStyle/>
-          <a:p>
-            <a:endParaRPr lang="es-CL"/>
-          </a:p>
-        </p:txBody>
       </p:sp>
       <p:sp>
         <p:nvSpPr>
@@ -9532,13 +9419,6 @@
           </a:solidFill>
           <a:ln/>
         </p:spPr>
-        <p:txBody>
-          <a:bodyPr/>
-          <a:lstStyle/>
-          <a:p>
-            <a:endParaRPr lang="es-CL"/>
-          </a:p>
-        </p:txBody>
       </p:sp>
       <p:sp>
         <p:nvSpPr>
@@ -9561,7 +9441,7 @@
           <a:bodyPr wrap="square" rtlCol="0" anchor="ctr"/>
           <a:lstStyle/>
           <a:p>
-            <a:pPr marL="0" indent="0" algn="ctr">
+            <a:pPr algn="ctr" indent="0" marL="0">
               <a:buNone/>
             </a:pPr>
             <a:r>
@@ -9600,7 +9480,7 @@
           <a:bodyPr wrap="square" rtlCol="0" anchor="ctr"/>
           <a:lstStyle/>
           <a:p>
-            <a:pPr marL="0" indent="0" algn="ctr">
+            <a:pPr algn="ctr" indent="0" marL="0">
               <a:buNone/>
             </a:pPr>
             <a:r>
@@ -9639,7 +9519,7 @@
           <a:bodyPr wrap="square" rtlCol="0" anchor="ctr"/>
           <a:lstStyle/>
           <a:p>
-            <a:pPr marL="0" indent="0" algn="ctr">
+            <a:pPr algn="ctr" indent="0" marL="0">
               <a:buNone/>
             </a:pPr>
             <a:r>
@@ -9681,13 +9561,6 @@
             <a:prstDash val="solid"/>
           </a:ln>
         </p:spPr>
-        <p:txBody>
-          <a:bodyPr/>
-          <a:lstStyle/>
-          <a:p>
-            <a:endParaRPr lang="es-CL"/>
-          </a:p>
-        </p:txBody>
       </p:sp>
       <p:sp>
         <p:nvSpPr>
@@ -9708,13 +9581,6 @@
           </a:solidFill>
           <a:ln/>
         </p:spPr>
-        <p:txBody>
-          <a:bodyPr/>
-          <a:lstStyle/>
-          <a:p>
-            <a:endParaRPr lang="es-CL"/>
-          </a:p>
-        </p:txBody>
       </p:sp>
       <p:sp>
         <p:nvSpPr>
@@ -9737,7 +9603,7 @@
           <a:bodyPr wrap="square" rtlCol="0" anchor="ctr"/>
           <a:lstStyle/>
           <a:p>
-            <a:pPr marL="0" indent="0" algn="ctr">
+            <a:pPr algn="ctr" indent="0" marL="0">
               <a:buNone/>
             </a:pPr>
             <a:r>
@@ -9776,7 +9642,7 @@
           <a:bodyPr wrap="square" rtlCol="0" anchor="ctr"/>
           <a:lstStyle/>
           <a:p>
-            <a:pPr marL="0" indent="0" algn="ctr">
+            <a:pPr algn="ctr" indent="0" marL="0">
               <a:buNone/>
             </a:pPr>
             <a:r>
@@ -9815,7 +9681,7 @@
           <a:bodyPr wrap="square" rtlCol="0" anchor="ctr"/>
           <a:lstStyle/>
           <a:p>
-            <a:pPr marL="0" indent="0" algn="ctr">
+            <a:pPr algn="ctr" indent="0" marL="0">
               <a:buNone/>
             </a:pPr>
             <a:r>
@@ -9857,13 +9723,6 @@
             <a:prstDash val="solid"/>
           </a:ln>
         </p:spPr>
-        <p:txBody>
-          <a:bodyPr/>
-          <a:lstStyle/>
-          <a:p>
-            <a:endParaRPr lang="es-CL"/>
-          </a:p>
-        </p:txBody>
       </p:sp>
       <p:sp>
         <p:nvSpPr>
@@ -9884,13 +9743,6 @@
           </a:solidFill>
           <a:ln/>
         </p:spPr>
-        <p:txBody>
-          <a:bodyPr/>
-          <a:lstStyle/>
-          <a:p>
-            <a:endParaRPr lang="es-CL"/>
-          </a:p>
-        </p:txBody>
       </p:sp>
       <p:sp>
         <p:nvSpPr>
@@ -9913,7 +9765,7 @@
           <a:bodyPr wrap="square" rtlCol="0" anchor="ctr"/>
           <a:lstStyle/>
           <a:p>
-            <a:pPr marL="0" indent="0" algn="ctr">
+            <a:pPr algn="ctr" indent="0" marL="0">
               <a:buNone/>
             </a:pPr>
             <a:r>
@@ -9952,7 +9804,7 @@
           <a:bodyPr wrap="square" rtlCol="0" anchor="ctr"/>
           <a:lstStyle/>
           <a:p>
-            <a:pPr marL="0" indent="0" algn="ctr">
+            <a:pPr algn="ctr" indent="0" marL="0">
               <a:buNone/>
             </a:pPr>
             <a:r>
@@ -9991,7 +9843,7 @@
           <a:bodyPr wrap="square" rtlCol="0" anchor="ctr"/>
           <a:lstStyle/>
           <a:p>
-            <a:pPr marL="0" indent="0" algn="ctr">
+            <a:pPr algn="ctr" indent="0" marL="0">
               <a:buNone/>
             </a:pPr>
             <a:r>
@@ -10030,7 +9882,7 @@
           <a:bodyPr wrap="square" rtlCol="0" anchor="ctr"/>
           <a:lstStyle/>
           <a:p>
-            <a:pPr marL="0" indent="0" algn="r">
+            <a:pPr algn="r" indent="0" marL="0">
               <a:buNone/>
             </a:pPr>
             <a:r>
@@ -10064,7 +9916,6 @@
         <a:solidFill>
           <a:srgbClr val="F2F2F2"/>
         </a:solidFill>
-        <a:effectLst/>
       </p:bgPr>
     </p:bg>
     <p:spTree>
@@ -10102,7 +9953,7 @@
           <a:bodyPr wrap="square" rtlCol="0" anchor="ctr"/>
           <a:lstStyle/>
           <a:p>
-            <a:pPr marL="0" indent="0">
+            <a:pPr indent="0" marL="0">
               <a:buNone/>
             </a:pPr>
             <a:r>
@@ -10141,7 +9992,7 @@
           <a:bodyPr wrap="square" rtlCol="0" anchor="ctr"/>
           <a:lstStyle/>
           <a:p>
-            <a:pPr marL="0" indent="0">
+            <a:pPr indent="0" marL="0">
               <a:buNone/>
             </a:pPr>
             <a:r>
@@ -10178,13 +10029,6 @@
           </a:solidFill>
           <a:ln/>
         </p:spPr>
-        <p:txBody>
-          <a:bodyPr/>
-          <a:lstStyle/>
-          <a:p>
-            <a:endParaRPr lang="es-CL"/>
-          </a:p>
-        </p:txBody>
       </p:sp>
       <p:sp>
         <p:nvSpPr>
@@ -10205,13 +10049,6 @@
           </a:solidFill>
           <a:ln/>
         </p:spPr>
-        <p:txBody>
-          <a:bodyPr/>
-          <a:lstStyle/>
-          <a:p>
-            <a:endParaRPr lang="es-CL"/>
-          </a:p>
-        </p:txBody>
       </p:sp>
       <p:sp>
         <p:nvSpPr>
@@ -10234,7 +10071,7 @@
           <a:bodyPr wrap="square" rtlCol="0" anchor="ctr"/>
           <a:lstStyle/>
           <a:p>
-            <a:pPr marL="0" indent="0" algn="ctr">
+            <a:pPr algn="ctr" indent="0" marL="0">
               <a:buNone/>
             </a:pPr>
             <a:r>
@@ -10273,7 +10110,7 @@
           <a:bodyPr wrap="square" rtlCol="0" anchor="ctr"/>
           <a:lstStyle/>
           <a:p>
-            <a:pPr marL="0" indent="0" algn="ctr">
+            <a:pPr algn="ctr" indent="0" marL="0">
               <a:buNone/>
             </a:pPr>
             <a:r>
@@ -10312,7 +10149,7 @@
           <a:bodyPr wrap="square" rtlCol="0" anchor="ctr"/>
           <a:lstStyle/>
           <a:p>
-            <a:pPr marL="0" indent="0" algn="ctr">
+            <a:pPr algn="ctr" indent="0" marL="0">
               <a:buNone/>
             </a:pPr>
             <a:r>
@@ -10349,13 +10186,6 @@
           </a:solidFill>
           <a:ln/>
         </p:spPr>
-        <p:txBody>
-          <a:bodyPr/>
-          <a:lstStyle/>
-          <a:p>
-            <a:endParaRPr lang="es-CL"/>
-          </a:p>
-        </p:txBody>
       </p:sp>
       <p:sp>
         <p:nvSpPr>
@@ -10376,13 +10206,6 @@
           </a:solidFill>
           <a:ln/>
         </p:spPr>
-        <p:txBody>
-          <a:bodyPr/>
-          <a:lstStyle/>
-          <a:p>
-            <a:endParaRPr lang="es-CL"/>
-          </a:p>
-        </p:txBody>
       </p:sp>
       <p:sp>
         <p:nvSpPr>
@@ -10405,7 +10228,7 @@
           <a:bodyPr wrap="square" rtlCol="0" anchor="ctr"/>
           <a:lstStyle/>
           <a:p>
-            <a:pPr marL="0" indent="0" algn="ctr">
+            <a:pPr algn="ctr" indent="0" marL="0">
               <a:buNone/>
             </a:pPr>
             <a:r>
@@ -10444,7 +10267,7 @@
           <a:bodyPr wrap="square" rtlCol="0" anchor="ctr"/>
           <a:lstStyle/>
           <a:p>
-            <a:pPr marL="0" indent="0" algn="ctr">
+            <a:pPr algn="ctr" indent="0" marL="0">
               <a:buNone/>
             </a:pPr>
             <a:r>
@@ -10483,7 +10306,7 @@
           <a:bodyPr wrap="square" rtlCol="0" anchor="ctr"/>
           <a:lstStyle/>
           <a:p>
-            <a:pPr marL="0" indent="0" algn="ctr">
+            <a:pPr algn="ctr" indent="0" marL="0">
               <a:buNone/>
             </a:pPr>
             <a:r>
@@ -10520,13 +10343,6 @@
           </a:solidFill>
           <a:ln/>
         </p:spPr>
-        <p:txBody>
-          <a:bodyPr/>
-          <a:lstStyle/>
-          <a:p>
-            <a:endParaRPr lang="es-CL"/>
-          </a:p>
-        </p:txBody>
       </p:sp>
       <p:sp>
         <p:nvSpPr>
@@ -10547,13 +10363,6 @@
           </a:solidFill>
           <a:ln/>
         </p:spPr>
-        <p:txBody>
-          <a:bodyPr/>
-          <a:lstStyle/>
-          <a:p>
-            <a:endParaRPr lang="es-CL"/>
-          </a:p>
-        </p:txBody>
       </p:sp>
       <p:sp>
         <p:nvSpPr>
@@ -10576,7 +10385,7 @@
           <a:bodyPr wrap="square" rtlCol="0" anchor="ctr"/>
           <a:lstStyle/>
           <a:p>
-            <a:pPr marL="0" indent="0" algn="ctr">
+            <a:pPr algn="ctr" indent="0" marL="0">
               <a:buNone/>
             </a:pPr>
             <a:r>
@@ -10615,7 +10424,7 @@
           <a:bodyPr wrap="square" rtlCol="0" anchor="ctr"/>
           <a:lstStyle/>
           <a:p>
-            <a:pPr marL="0" indent="0" algn="ctr">
+            <a:pPr algn="ctr" indent="0" marL="0">
               <a:buNone/>
             </a:pPr>
             <a:r>
@@ -10654,7 +10463,7 @@
           <a:bodyPr wrap="square" rtlCol="0" anchor="ctr"/>
           <a:lstStyle/>
           <a:p>
-            <a:pPr marL="0" indent="0" algn="ctr">
+            <a:pPr algn="ctr" indent="0" marL="0">
               <a:buNone/>
             </a:pPr>
             <a:r>
@@ -10693,7 +10502,7 @@
           <a:bodyPr wrap="square" rtlCol="0" anchor="ctr"/>
           <a:lstStyle/>
           <a:p>
-            <a:pPr marL="0" indent="0" algn="r">
+            <a:pPr algn="r" indent="0" marL="0">
               <a:buNone/>
             </a:pPr>
             <a:r>
@@ -10727,7 +10536,6 @@
         <a:solidFill>
           <a:srgbClr val="FFFFFF"/>
         </a:solidFill>
-        <a:effectLst/>
       </p:bgPr>
     </p:bg>
     <p:spTree>
@@ -10765,7 +10573,7 @@
           <a:bodyPr wrap="square" rtlCol="0" anchor="ctr"/>
           <a:lstStyle/>
           <a:p>
-            <a:pPr marL="0" indent="0">
+            <a:pPr indent="0" marL="0">
               <a:buNone/>
             </a:pPr>
             <a:r>
@@ -10804,7 +10612,7 @@
           <a:bodyPr wrap="square" rtlCol="0" anchor="ctr"/>
           <a:lstStyle/>
           <a:p>
-            <a:pPr marL="0" indent="0">
+            <a:pPr indent="0" marL="0">
               <a:buNone/>
             </a:pPr>
             <a:r>
@@ -10841,13 +10649,6 @@
           </a:solidFill>
           <a:ln/>
         </p:spPr>
-        <p:txBody>
-          <a:bodyPr/>
-          <a:lstStyle/>
-          <a:p>
-            <a:endParaRPr lang="es-CL"/>
-          </a:p>
-        </p:txBody>
       </p:sp>
       <p:sp>
         <p:nvSpPr>
@@ -10870,7 +10671,7 @@
           <a:bodyPr wrap="square" rtlCol="0" anchor="ctr"/>
           <a:lstStyle/>
           <a:p>
-            <a:pPr marL="0" indent="0">
+            <a:pPr indent="0" marL="0">
               <a:buNone/>
             </a:pPr>
             <a:r>
@@ -10909,7 +10710,7 @@
           <a:bodyPr wrap="square" rtlCol="0" anchor="t"/>
           <a:lstStyle/>
           <a:p>
-            <a:pPr marL="0" indent="0">
+            <a:pPr indent="0" marL="0">
               <a:buNone/>
             </a:pPr>
             <a:r>
@@ -10926,7 +10727,7 @@
             <a:endParaRPr lang="en-US" sz="1250" dirty="0"/>
           </a:p>
           <a:p>
-            <a:pPr marL="0" indent="0">
+            <a:pPr indent="0" marL="0">
               <a:buNone/>
             </a:pPr>
             <a:r>
@@ -10944,7 +10745,7 @@
             <a:endParaRPr lang="en-US" sz="1250" dirty="0"/>
           </a:p>
           <a:p>
-            <a:pPr marL="0" indent="0">
+            <a:pPr indent="0" marL="0">
               <a:buNone/>
             </a:pPr>
             <a:r>
@@ -10961,7 +10762,7 @@
             <a:endParaRPr lang="en-US" sz="1250" dirty="0"/>
           </a:p>
           <a:p>
-            <a:pPr marL="0" indent="0">
+            <a:pPr indent="0" marL="0">
               <a:buNone/>
             </a:pPr>
             <a:r>
@@ -10979,7 +10780,7 @@
             <a:endParaRPr lang="en-US" sz="1250" dirty="0"/>
           </a:p>
           <a:p>
-            <a:pPr marL="0" indent="0">
+            <a:pPr indent="0" marL="0">
               <a:buNone/>
             </a:pPr>
             <a:r>
@@ -10996,7 +10797,7 @@
             <a:endParaRPr lang="en-US" sz="1250" dirty="0"/>
           </a:p>
           <a:p>
-            <a:pPr marL="0" indent="0">
+            <a:pPr indent="0" marL="0">
               <a:buNone/>
             </a:pPr>
             <a:r>
@@ -11033,13 +10834,6 @@
           </a:solidFill>
           <a:ln/>
         </p:spPr>
-        <p:txBody>
-          <a:bodyPr/>
-          <a:lstStyle/>
-          <a:p>
-            <a:endParaRPr lang="es-CL"/>
-          </a:p>
-        </p:txBody>
       </p:sp>
       <p:sp>
         <p:nvSpPr>
@@ -11062,7 +10856,7 @@
           <a:bodyPr wrap="square" rtlCol="0" anchor="ctr"/>
           <a:lstStyle/>
           <a:p>
-            <a:pPr marL="0" indent="0">
+            <a:pPr indent="0" marL="0">
               <a:buNone/>
             </a:pPr>
             <a:r>
@@ -11101,7 +10895,7 @@
           <a:bodyPr wrap="square" rtlCol="0" anchor="t"/>
           <a:lstStyle/>
           <a:p>
-            <a:pPr marL="0" indent="0">
+            <a:pPr indent="0" marL="0">
               <a:buNone/>
             </a:pPr>
             <a:r>
@@ -11118,7 +10912,7 @@
             <a:endParaRPr lang="en-US" sz="1250" dirty="0"/>
           </a:p>
           <a:p>
-            <a:pPr marL="0" indent="0">
+            <a:pPr indent="0" marL="0">
               <a:buNone/>
             </a:pPr>
             <a:r>
@@ -11130,13 +10924,13 @@
                 <a:ea typeface="Calibri" pitchFamily="34" charset="-122"/>
                 <a:cs typeface="Calibri" pitchFamily="34" charset="-120"/>
               </a:rPr>
-              <a:t>registro, categorías, presupuesto y reportes — sin funciones avanzadas de banca.
+              <a:t>registro, categorías, presupuesto, reportes y detección automática básica (1-2 bancos).
 </a:t>
             </a:r>
             <a:endParaRPr lang="en-US" sz="1250" dirty="0"/>
           </a:p>
           <a:p>
-            <a:pPr marL="0" indent="0">
+            <a:pPr indent="0" marL="0">
               <a:buNone/>
             </a:pPr>
             <a:r>
@@ -11153,7 +10947,7 @@
             <a:endParaRPr lang="en-US" sz="1250" dirty="0"/>
           </a:p>
           <a:p>
-            <a:pPr marL="0" indent="0">
+            <a:pPr indent="0" marL="0">
               <a:buNone/>
             </a:pPr>
             <a:r>
@@ -11165,13 +10959,13 @@
                 <a:ea typeface="Calibri" pitchFamily="34" charset="-122"/>
                 <a:cs typeface="Calibri" pitchFamily="34" charset="-120"/>
               </a:rPr>
-              <a:t>18 semanas, trabajo individual compatible con práctica profesional y trabajo part-time.
+              <a:t>17 semanas, trabajo individual compatible con práctica profesional y trabajo part-time.
 </a:t>
             </a:r>
             <a:endParaRPr lang="en-US" sz="1250" dirty="0"/>
           </a:p>
           <a:p>
-            <a:pPr marL="0" indent="0">
+            <a:pPr indent="0" marL="0">
               <a:buNone/>
             </a:pPr>
             <a:r>
@@ -11188,7 +10982,7 @@
             <a:endParaRPr lang="en-US" sz="1250" dirty="0"/>
           </a:p>
           <a:p>
-            <a:pPr marL="0" indent="0">
+            <a:pPr indent="0" marL="0">
               <a:buNone/>
             </a:pPr>
             <a:r>
@@ -11206,7 +11000,7 @@
             <a:endParaRPr lang="en-US" sz="1250" dirty="0"/>
           </a:p>
           <a:p>
-            <a:pPr marL="0" indent="0">
+            <a:pPr indent="0" marL="0">
               <a:buNone/>
             </a:pPr>
             <a:r>
@@ -11223,7 +11017,7 @@
             <a:endParaRPr lang="en-US" sz="1250" dirty="0"/>
           </a:p>
           <a:p>
-            <a:pPr marL="0" indent="0">
+            <a:pPr indent="0" marL="0">
               <a:buNone/>
             </a:pPr>
             <a:r>
@@ -11235,7 +11029,7 @@
                 <a:ea typeface="Calibri" pitchFamily="34" charset="-122"/>
                 <a:cs typeface="Calibri" pitchFamily="34" charset="-120"/>
               </a:rPr>
-              <a:t>bajo — no depende de datos externos ni APIs de terceros para el MVP.</a:t>
+              <a:t>bajo — no depende de APIs bancarias externas ni credenciales del usuario.</a:t>
             </a:r>
             <a:endParaRPr lang="en-US" sz="1250" dirty="0"/>
           </a:p>
@@ -11262,7 +11056,7 @@
           <a:bodyPr wrap="square" rtlCol="0" anchor="ctr"/>
           <a:lstStyle/>
           <a:p>
-            <a:pPr marL="0" indent="0" algn="r">
+            <a:pPr algn="r" indent="0" marL="0">
               <a:buNone/>
             </a:pPr>
             <a:r>
@@ -11296,7 +11090,6 @@
         <a:solidFill>
           <a:srgbClr val="F2F2F2"/>
         </a:solidFill>
-        <a:effectLst/>
       </p:bgPr>
     </p:bg>
     <p:spTree>
@@ -11334,7 +11127,7 @@
           <a:bodyPr wrap="square" rtlCol="0" anchor="ctr"/>
           <a:lstStyle/>
           <a:p>
-            <a:pPr marL="0" indent="0">
+            <a:pPr indent="0" marL="0">
               <a:buNone/>
             </a:pPr>
             <a:r>
@@ -11371,13 +11164,6 @@
           </a:solidFill>
           <a:ln/>
         </p:spPr>
-        <p:txBody>
-          <a:bodyPr/>
-          <a:lstStyle/>
-          <a:p>
-            <a:endParaRPr lang="es-CL"/>
-          </a:p>
-        </p:txBody>
       </p:sp>
       <p:sp>
         <p:nvSpPr>
@@ -11400,7 +11186,7 @@
           <a:bodyPr wrap="square" rtlCol="0" anchor="ctr"/>
           <a:lstStyle/>
           <a:p>
-            <a:pPr marL="0" indent="0">
+            <a:pPr indent="0" marL="0">
               <a:buNone/>
             </a:pPr>
             <a:r>
@@ -11439,7 +11225,7 @@
           <a:bodyPr wrap="square" rtlCol="0" anchor="ctr"/>
           <a:lstStyle/>
           <a:p>
-            <a:pPr marL="0" indent="0">
+            <a:pPr indent="0" marL="0">
               <a:buNone/>
             </a:pPr>
             <a:r>
@@ -11478,7 +11264,7 @@
           <a:bodyPr wrap="square" rtlCol="0" anchor="ctr"/>
           <a:lstStyle/>
           <a:p>
-            <a:pPr marL="0" indent="0">
+            <a:pPr indent="0" marL="0">
               <a:buNone/>
             </a:pPr>
             <a:r>
@@ -11505,7 +11291,7 @@
         <p:spPr>
           <a:xfrm>
             <a:off x="548640" y="2926080"/>
-            <a:ext cx="292608" cy="292608"/>
+            <a:ext cx="274320" cy="274320"/>
           </a:xfrm>
           <a:prstGeom prst="ellipse">
             <a:avLst/>
@@ -11515,13 +11301,6 @@
           </a:solidFill>
           <a:ln/>
         </p:spPr>
-        <p:txBody>
-          <a:bodyPr/>
-          <a:lstStyle/>
-          <a:p>
-            <a:endParaRPr lang="es-CL"/>
-          </a:p>
-        </p:txBody>
       </p:sp>
       <p:sp>
         <p:nvSpPr>
@@ -11532,23 +11311,23 @@
         <p:spPr>
           <a:xfrm>
             <a:off x="548640" y="2926080"/>
-            <a:ext cx="292608" cy="292608"/>
-          </a:xfrm>
-          <a:prstGeom prst="rect">
-            <a:avLst/>
-          </a:prstGeom>
-          <a:noFill/>
-          <a:ln/>
-        </p:spPr>
-        <p:txBody>
-          <a:bodyPr wrap="square" rtlCol="0" anchor="ctr"/>
-          <a:lstStyle/>
-          <a:p>
-            <a:pPr marL="0" indent="0" algn="ctr">
-              <a:buNone/>
-            </a:pPr>
-            <a:r>
-              <a:rPr lang="en-US" sz="1100" b="1" dirty="0">
+            <a:ext cx="274320" cy="274320"/>
+          </a:xfrm>
+          <a:prstGeom prst="rect">
+            <a:avLst/>
+          </a:prstGeom>
+          <a:noFill/>
+          <a:ln/>
+        </p:spPr>
+        <p:txBody>
+          <a:bodyPr wrap="square" rtlCol="0" anchor="ctr"/>
+          <a:lstStyle/>
+          <a:p>
+            <a:pPr algn="ctr" indent="0" marL="0">
+              <a:buNone/>
+            </a:pPr>
+            <a:r>
+              <a:rPr lang="en-US" sz="1050" b="1" dirty="0">
                 <a:solidFill>
                   <a:srgbClr val="FFFFFF"/>
                 </a:solidFill>
@@ -11558,7 +11337,7 @@
               </a:rPr>
               <a:t>1</a:t>
             </a:r>
-            <a:endParaRPr lang="en-US" sz="1100" dirty="0"/>
+            <a:endParaRPr lang="en-US" sz="1050" dirty="0"/>
           </a:p>
         </p:txBody>
       </p:sp>
@@ -11570,24 +11349,24 @@
         </p:nvSpPr>
         <p:spPr>
           <a:xfrm>
-            <a:off x="1005840" y="2871216"/>
-            <a:ext cx="10607040" cy="457200"/>
-          </a:xfrm>
-          <a:prstGeom prst="rect">
-            <a:avLst/>
-          </a:prstGeom>
-          <a:noFill/>
-          <a:ln/>
-        </p:spPr>
-        <p:txBody>
-          <a:bodyPr wrap="square" rtlCol="0" anchor="ctr"/>
-          <a:lstStyle/>
-          <a:p>
-            <a:pPr marL="0" indent="0">
-              <a:buNone/>
-            </a:pPr>
-            <a:r>
-              <a:rPr lang="en-US" sz="1300" dirty="0">
+            <a:off x="960120" y="2871216"/>
+            <a:ext cx="10607040" cy="438912"/>
+          </a:xfrm>
+          <a:prstGeom prst="rect">
+            <a:avLst/>
+          </a:prstGeom>
+          <a:noFill/>
+          <a:ln/>
+        </p:spPr>
+        <p:txBody>
+          <a:bodyPr wrap="square" rtlCol="0" anchor="ctr"/>
+          <a:lstStyle/>
+          <a:p>
+            <a:pPr indent="0" marL="0">
+              <a:buNone/>
+            </a:pPr>
+            <a:r>
+              <a:rPr lang="en-US" sz="1250" dirty="0">
                 <a:solidFill>
                   <a:srgbClr val="20363A"/>
                 </a:solidFill>
@@ -11597,7 +11376,7 @@
               </a:rPr>
               <a:t>Diseñar un modelo de datos que soporte el registro de ingresos, gastos y categorías.</a:t>
             </a:r>
-            <a:endParaRPr lang="en-US" sz="1300" dirty="0"/>
+            <a:endParaRPr lang="en-US" sz="1250" dirty="0"/>
           </a:p>
         </p:txBody>
       </p:sp>
@@ -11609,8 +11388,8 @@
         </p:nvSpPr>
         <p:spPr>
           <a:xfrm>
-            <a:off x="548640" y="3474720"/>
-            <a:ext cx="292608" cy="292608"/>
+            <a:off x="548640" y="3438144"/>
+            <a:ext cx="274320" cy="274320"/>
           </a:xfrm>
           <a:prstGeom prst="ellipse">
             <a:avLst/>
@@ -11620,13 +11399,6 @@
           </a:solidFill>
           <a:ln/>
         </p:spPr>
-        <p:txBody>
-          <a:bodyPr/>
-          <a:lstStyle/>
-          <a:p>
-            <a:endParaRPr lang="es-CL"/>
-          </a:p>
-        </p:txBody>
       </p:sp>
       <p:sp>
         <p:nvSpPr>
@@ -11636,24 +11408,24 @@
         </p:nvSpPr>
         <p:spPr>
           <a:xfrm>
-            <a:off x="548640" y="3474720"/>
-            <a:ext cx="292608" cy="292608"/>
-          </a:xfrm>
-          <a:prstGeom prst="rect">
-            <a:avLst/>
-          </a:prstGeom>
-          <a:noFill/>
-          <a:ln/>
-        </p:spPr>
-        <p:txBody>
-          <a:bodyPr wrap="square" rtlCol="0" anchor="ctr"/>
-          <a:lstStyle/>
-          <a:p>
-            <a:pPr marL="0" indent="0" algn="ctr">
-              <a:buNone/>
-            </a:pPr>
-            <a:r>
-              <a:rPr lang="en-US" sz="1100" b="1" dirty="0">
+            <a:off x="548640" y="3438144"/>
+            <a:ext cx="274320" cy="274320"/>
+          </a:xfrm>
+          <a:prstGeom prst="rect">
+            <a:avLst/>
+          </a:prstGeom>
+          <a:noFill/>
+          <a:ln/>
+        </p:spPr>
+        <p:txBody>
+          <a:bodyPr wrap="square" rtlCol="0" anchor="ctr"/>
+          <a:lstStyle/>
+          <a:p>
+            <a:pPr algn="ctr" indent="0" marL="0">
+              <a:buNone/>
+            </a:pPr>
+            <a:r>
+              <a:rPr lang="en-US" sz="1050" b="1" dirty="0">
                 <a:solidFill>
                   <a:srgbClr val="FFFFFF"/>
                 </a:solidFill>
@@ -11663,7 +11435,7 @@
               </a:rPr>
               <a:t>2</a:t>
             </a:r>
-            <a:endParaRPr lang="en-US" sz="1100" dirty="0"/>
+            <a:endParaRPr lang="en-US" sz="1050" dirty="0"/>
           </a:p>
         </p:txBody>
       </p:sp>
@@ -11675,24 +11447,24 @@
         </p:nvSpPr>
         <p:spPr>
           <a:xfrm>
-            <a:off x="1005840" y="3419856"/>
-            <a:ext cx="10607040" cy="457200"/>
-          </a:xfrm>
-          <a:prstGeom prst="rect">
-            <a:avLst/>
-          </a:prstGeom>
-          <a:noFill/>
-          <a:ln/>
-        </p:spPr>
-        <p:txBody>
-          <a:bodyPr wrap="square" rtlCol="0" anchor="ctr"/>
-          <a:lstStyle/>
-          <a:p>
-            <a:pPr marL="0" indent="0">
-              <a:buNone/>
-            </a:pPr>
-            <a:r>
-              <a:rPr lang="en-US" sz="1300" dirty="0">
+            <a:off x="960120" y="3383280"/>
+            <a:ext cx="10607040" cy="438912"/>
+          </a:xfrm>
+          <a:prstGeom prst="rect">
+            <a:avLst/>
+          </a:prstGeom>
+          <a:noFill/>
+          <a:ln/>
+        </p:spPr>
+        <p:txBody>
+          <a:bodyPr wrap="square" rtlCol="0" anchor="ctr"/>
+          <a:lstStyle/>
+          <a:p>
+            <a:pPr indent="0" marL="0">
+              <a:buNone/>
+            </a:pPr>
+            <a:r>
+              <a:rPr lang="en-US" sz="1250" dirty="0">
                 <a:solidFill>
                   <a:srgbClr val="20363A"/>
                 </a:solidFill>
@@ -11702,7 +11474,7 @@
               </a:rPr>
               <a:t>Desarrollar el registro y clasificación de movimientos financieros (predefinidos y personalizables).</a:t>
             </a:r>
-            <a:endParaRPr lang="en-US" sz="1300" dirty="0"/>
+            <a:endParaRPr lang="en-US" sz="1250" dirty="0"/>
           </a:p>
         </p:txBody>
       </p:sp>
@@ -11714,8 +11486,8 @@
         </p:nvSpPr>
         <p:spPr>
           <a:xfrm>
-            <a:off x="548640" y="4023360"/>
-            <a:ext cx="292608" cy="292608"/>
+            <a:off x="548640" y="3950208"/>
+            <a:ext cx="274320" cy="274320"/>
           </a:xfrm>
           <a:prstGeom prst="ellipse">
             <a:avLst/>
@@ -11725,13 +11497,6 @@
           </a:solidFill>
           <a:ln/>
         </p:spPr>
-        <p:txBody>
-          <a:bodyPr/>
-          <a:lstStyle/>
-          <a:p>
-            <a:endParaRPr lang="es-CL"/>
-          </a:p>
-        </p:txBody>
       </p:sp>
       <p:sp>
         <p:nvSpPr>
@@ -11741,24 +11506,24 @@
         </p:nvSpPr>
         <p:spPr>
           <a:xfrm>
-            <a:off x="548640" y="4023360"/>
-            <a:ext cx="292608" cy="292608"/>
-          </a:xfrm>
-          <a:prstGeom prst="rect">
-            <a:avLst/>
-          </a:prstGeom>
-          <a:noFill/>
-          <a:ln/>
-        </p:spPr>
-        <p:txBody>
-          <a:bodyPr wrap="square" rtlCol="0" anchor="ctr"/>
-          <a:lstStyle/>
-          <a:p>
-            <a:pPr marL="0" indent="0" algn="ctr">
-              <a:buNone/>
-            </a:pPr>
-            <a:r>
-              <a:rPr lang="en-US" sz="1100" b="1" dirty="0">
+            <a:off x="548640" y="3950208"/>
+            <a:ext cx="274320" cy="274320"/>
+          </a:xfrm>
+          <a:prstGeom prst="rect">
+            <a:avLst/>
+          </a:prstGeom>
+          <a:noFill/>
+          <a:ln/>
+        </p:spPr>
+        <p:txBody>
+          <a:bodyPr wrap="square" rtlCol="0" anchor="ctr"/>
+          <a:lstStyle/>
+          <a:p>
+            <a:pPr algn="ctr" indent="0" marL="0">
+              <a:buNone/>
+            </a:pPr>
+            <a:r>
+              <a:rPr lang="en-US" sz="1050" b="1" dirty="0">
                 <a:solidFill>
                   <a:srgbClr val="FFFFFF"/>
                 </a:solidFill>
@@ -11768,7 +11533,7 @@
               </a:rPr>
               <a:t>3</a:t>
             </a:r>
-            <a:endParaRPr lang="en-US" sz="1100" dirty="0"/>
+            <a:endParaRPr lang="en-US" sz="1050" dirty="0"/>
           </a:p>
         </p:txBody>
       </p:sp>
@@ -11780,24 +11545,24 @@
         </p:nvSpPr>
         <p:spPr>
           <a:xfrm>
-            <a:off x="1005840" y="3968496"/>
-            <a:ext cx="10607040" cy="457200"/>
-          </a:xfrm>
-          <a:prstGeom prst="rect">
-            <a:avLst/>
-          </a:prstGeom>
-          <a:noFill/>
-          <a:ln/>
-        </p:spPr>
-        <p:txBody>
-          <a:bodyPr wrap="square" rtlCol="0" anchor="ctr"/>
-          <a:lstStyle/>
-          <a:p>
-            <a:pPr marL="0" indent="0">
-              <a:buNone/>
-            </a:pPr>
-            <a:r>
-              <a:rPr lang="en-US" sz="1300" dirty="0">
+            <a:off x="960120" y="3895344"/>
+            <a:ext cx="10607040" cy="438912"/>
+          </a:xfrm>
+          <a:prstGeom prst="rect">
+            <a:avLst/>
+          </a:prstGeom>
+          <a:noFill/>
+          <a:ln/>
+        </p:spPr>
+        <p:txBody>
+          <a:bodyPr wrap="square" rtlCol="0" anchor="ctr"/>
+          <a:lstStyle/>
+          <a:p>
+            <a:pPr indent="0" marL="0">
+              <a:buNone/>
+            </a:pPr>
+            <a:r>
+              <a:rPr lang="en-US" sz="1250" dirty="0">
                 <a:solidFill>
                   <a:srgbClr val="20363A"/>
                 </a:solidFill>
@@ -11807,7 +11572,7 @@
               </a:rPr>
               <a:t>Implementar presupuestos y metas de ahorro con alertas cuando se acerquen al límite.</a:t>
             </a:r>
-            <a:endParaRPr lang="en-US" sz="1300" dirty="0"/>
+            <a:endParaRPr lang="en-US" sz="1250" dirty="0"/>
           </a:p>
         </p:txBody>
       </p:sp>
@@ -11819,8 +11584,8 @@
         </p:nvSpPr>
         <p:spPr>
           <a:xfrm>
-            <a:off x="548640" y="4572000"/>
-            <a:ext cx="292608" cy="292608"/>
+            <a:off x="548640" y="4462272"/>
+            <a:ext cx="274320" cy="274320"/>
           </a:xfrm>
           <a:prstGeom prst="ellipse">
             <a:avLst/>
@@ -11830,13 +11595,6 @@
           </a:solidFill>
           <a:ln/>
         </p:spPr>
-        <p:txBody>
-          <a:bodyPr/>
-          <a:lstStyle/>
-          <a:p>
-            <a:endParaRPr lang="es-CL"/>
-          </a:p>
-        </p:txBody>
       </p:sp>
       <p:sp>
         <p:nvSpPr>
@@ -11846,24 +11604,24 @@
         </p:nvSpPr>
         <p:spPr>
           <a:xfrm>
-            <a:off x="548640" y="4572000"/>
-            <a:ext cx="292608" cy="292608"/>
-          </a:xfrm>
-          <a:prstGeom prst="rect">
-            <a:avLst/>
-          </a:prstGeom>
-          <a:noFill/>
-          <a:ln/>
-        </p:spPr>
-        <p:txBody>
-          <a:bodyPr wrap="square" rtlCol="0" anchor="ctr"/>
-          <a:lstStyle/>
-          <a:p>
-            <a:pPr marL="0" indent="0" algn="ctr">
-              <a:buNone/>
-            </a:pPr>
-            <a:r>
-              <a:rPr lang="en-US" sz="1100" b="1" dirty="0">
+            <a:off x="548640" y="4462272"/>
+            <a:ext cx="274320" cy="274320"/>
+          </a:xfrm>
+          <a:prstGeom prst="rect">
+            <a:avLst/>
+          </a:prstGeom>
+          <a:noFill/>
+          <a:ln/>
+        </p:spPr>
+        <p:txBody>
+          <a:bodyPr wrap="square" rtlCol="0" anchor="ctr"/>
+          <a:lstStyle/>
+          <a:p>
+            <a:pPr algn="ctr" indent="0" marL="0">
+              <a:buNone/>
+            </a:pPr>
+            <a:r>
+              <a:rPr lang="en-US" sz="1050" b="1" dirty="0">
                 <a:solidFill>
                   <a:srgbClr val="FFFFFF"/>
                 </a:solidFill>
@@ -11873,7 +11631,7 @@
               </a:rPr>
               <a:t>4</a:t>
             </a:r>
-            <a:endParaRPr lang="en-US" sz="1100" dirty="0"/>
+            <a:endParaRPr lang="en-US" sz="1050" dirty="0"/>
           </a:p>
         </p:txBody>
       </p:sp>
@@ -11885,24 +11643,24 @@
         </p:nvSpPr>
         <p:spPr>
           <a:xfrm>
-            <a:off x="1005840" y="4517136"/>
-            <a:ext cx="10607040" cy="457200"/>
-          </a:xfrm>
-          <a:prstGeom prst="rect">
-            <a:avLst/>
-          </a:prstGeom>
-          <a:noFill/>
-          <a:ln/>
-        </p:spPr>
-        <p:txBody>
-          <a:bodyPr wrap="square" rtlCol="0" anchor="ctr"/>
-          <a:lstStyle/>
-          <a:p>
-            <a:pPr marL="0" indent="0">
-              <a:buNone/>
-            </a:pPr>
-            <a:r>
-              <a:rPr lang="en-US" sz="1300" dirty="0">
+            <a:off x="960120" y="4407408"/>
+            <a:ext cx="10607040" cy="438912"/>
+          </a:xfrm>
+          <a:prstGeom prst="rect">
+            <a:avLst/>
+          </a:prstGeom>
+          <a:noFill/>
+          <a:ln/>
+        </p:spPr>
+        <p:txBody>
+          <a:bodyPr wrap="square" rtlCol="0" anchor="ctr"/>
+          <a:lstStyle/>
+          <a:p>
+            <a:pPr indent="0" marL="0">
+              <a:buNone/>
+            </a:pPr>
+            <a:r>
+              <a:rPr lang="en-US" sz="1250" dirty="0">
                 <a:solidFill>
                   <a:srgbClr val="20363A"/>
                 </a:solidFill>
@@ -11910,9 +11668,9 @@
                 <a:ea typeface="Calibri" pitchFamily="34" charset="-122"/>
                 <a:cs typeface="Calibri" pitchFamily="34" charset="-120"/>
               </a:rPr>
-              <a:t>Construir reportes visuales (gráficos por categoría, por mes) para el usuario.</a:t>
-            </a:r>
-            <a:endParaRPr lang="en-US" sz="1300" dirty="0"/>
+              <a:t>Detectar automáticamente gastos desde notificaciones bancarias, con confirmación del usuario.</a:t>
+            </a:r>
+            <a:endParaRPr lang="en-US" sz="1250" dirty="0"/>
           </a:p>
         </p:txBody>
       </p:sp>
@@ -11924,8 +11682,8 @@
         </p:nvSpPr>
         <p:spPr>
           <a:xfrm>
-            <a:off x="548640" y="5120640"/>
-            <a:ext cx="292608" cy="292608"/>
+            <a:off x="548640" y="4974336"/>
+            <a:ext cx="274320" cy="274320"/>
           </a:xfrm>
           <a:prstGeom prst="ellipse">
             <a:avLst/>
@@ -11935,13 +11693,6 @@
           </a:solidFill>
           <a:ln/>
         </p:spPr>
-        <p:txBody>
-          <a:bodyPr/>
-          <a:lstStyle/>
-          <a:p>
-            <a:endParaRPr lang="es-CL"/>
-          </a:p>
-        </p:txBody>
       </p:sp>
       <p:sp>
         <p:nvSpPr>
@@ -11951,24 +11702,24 @@
         </p:nvSpPr>
         <p:spPr>
           <a:xfrm>
-            <a:off x="548640" y="5120640"/>
-            <a:ext cx="292608" cy="292608"/>
-          </a:xfrm>
-          <a:prstGeom prst="rect">
-            <a:avLst/>
-          </a:prstGeom>
-          <a:noFill/>
-          <a:ln/>
-        </p:spPr>
-        <p:txBody>
-          <a:bodyPr wrap="square" rtlCol="0" anchor="ctr"/>
-          <a:lstStyle/>
-          <a:p>
-            <a:pPr marL="0" indent="0" algn="ctr">
-              <a:buNone/>
-            </a:pPr>
-            <a:r>
-              <a:rPr lang="en-US" sz="1100" b="1" dirty="0">
+            <a:off x="548640" y="4974336"/>
+            <a:ext cx="274320" cy="274320"/>
+          </a:xfrm>
+          <a:prstGeom prst="rect">
+            <a:avLst/>
+          </a:prstGeom>
+          <a:noFill/>
+          <a:ln/>
+        </p:spPr>
+        <p:txBody>
+          <a:bodyPr wrap="square" rtlCol="0" anchor="ctr"/>
+          <a:lstStyle/>
+          <a:p>
+            <a:pPr algn="ctr" indent="0" marL="0">
+              <a:buNone/>
+            </a:pPr>
+            <a:r>
+              <a:rPr lang="en-US" sz="1050" b="1" dirty="0">
                 <a:solidFill>
                   <a:srgbClr val="FFFFFF"/>
                 </a:solidFill>
@@ -11978,7 +11729,7 @@
               </a:rPr>
               <a:t>5</a:t>
             </a:r>
-            <a:endParaRPr lang="en-US" sz="1100" dirty="0"/>
+            <a:endParaRPr lang="en-US" sz="1050" dirty="0"/>
           </a:p>
         </p:txBody>
       </p:sp>
@@ -11990,24 +11741,24 @@
         </p:nvSpPr>
         <p:spPr>
           <a:xfrm>
-            <a:off x="1005840" y="5065776"/>
-            <a:ext cx="10607040" cy="457200"/>
-          </a:xfrm>
-          <a:prstGeom prst="rect">
-            <a:avLst/>
-          </a:prstGeom>
-          <a:noFill/>
-          <a:ln/>
-        </p:spPr>
-        <p:txBody>
-          <a:bodyPr wrap="square" rtlCol="0" anchor="ctr"/>
-          <a:lstStyle/>
-          <a:p>
-            <a:pPr marL="0" indent="0">
-              <a:buNone/>
-            </a:pPr>
-            <a:r>
-              <a:rPr lang="en-US" sz="1300" dirty="0">
+            <a:off x="960120" y="4919472"/>
+            <a:ext cx="10607040" cy="438912"/>
+          </a:xfrm>
+          <a:prstGeom prst="rect">
+            <a:avLst/>
+          </a:prstGeom>
+          <a:noFill/>
+          <a:ln/>
+        </p:spPr>
+        <p:txBody>
+          <a:bodyPr wrap="square" rtlCol="0" anchor="ctr"/>
+          <a:lstStyle/>
+          <a:p>
+            <a:pPr indent="0" marL="0">
+              <a:buNone/>
+            </a:pPr>
+            <a:r>
+              <a:rPr lang="en-US" sz="1250" dirty="0">
                 <a:solidFill>
                   <a:srgbClr val="20363A"/>
                 </a:solidFill>
@@ -12015,15 +11766,113 @@
                 <a:ea typeface="Calibri" pitchFamily="34" charset="-122"/>
                 <a:cs typeface="Calibri" pitchFamily="34" charset="-120"/>
               </a:rPr>
+              <a:t>Construir reportes visuales (gráficos por categoría, por mes) para el usuario.</a:t>
+            </a:r>
+            <a:endParaRPr lang="en-US" sz="1250" dirty="0"/>
+          </a:p>
+        </p:txBody>
+      </p:sp>
+      <p:sp>
+        <p:nvSpPr>
+          <p:cNvPr id="22" name="Shape 20"/>
+          <p:cNvSpPr/>
+          <p:nvPr/>
+        </p:nvSpPr>
+        <p:spPr>
+          <a:xfrm>
+            <a:off x="548640" y="5486400"/>
+            <a:ext cx="274320" cy="274320"/>
+          </a:xfrm>
+          <a:prstGeom prst="ellipse">
+            <a:avLst/>
+          </a:prstGeom>
+          <a:solidFill>
+            <a:srgbClr val="00A896"/>
+          </a:solidFill>
+          <a:ln/>
+        </p:spPr>
+      </p:sp>
+      <p:sp>
+        <p:nvSpPr>
+          <p:cNvPr id="23" name="Text 21"/>
+          <p:cNvSpPr/>
+          <p:nvPr/>
+        </p:nvSpPr>
+        <p:spPr>
+          <a:xfrm>
+            <a:off x="548640" y="5486400"/>
+            <a:ext cx="274320" cy="274320"/>
+          </a:xfrm>
+          <a:prstGeom prst="rect">
+            <a:avLst/>
+          </a:prstGeom>
+          <a:noFill/>
+          <a:ln/>
+        </p:spPr>
+        <p:txBody>
+          <a:bodyPr wrap="square" rtlCol="0" anchor="ctr"/>
+          <a:lstStyle/>
+          <a:p>
+            <a:pPr algn="ctr" indent="0" marL="0">
+              <a:buNone/>
+            </a:pPr>
+            <a:r>
+              <a:rPr lang="en-US" sz="1050" b="1" dirty="0">
+                <a:solidFill>
+                  <a:srgbClr val="FFFFFF"/>
+                </a:solidFill>
+                <a:latin typeface="Calibri" pitchFamily="34" charset="0"/>
+                <a:ea typeface="Calibri" pitchFamily="34" charset="-122"/>
+                <a:cs typeface="Calibri" pitchFamily="34" charset="-120"/>
+              </a:rPr>
+              <a:t>6</a:t>
+            </a:r>
+            <a:endParaRPr lang="en-US" sz="1050" dirty="0"/>
+          </a:p>
+        </p:txBody>
+      </p:sp>
+      <p:sp>
+        <p:nvSpPr>
+          <p:cNvPr id="24" name="Text 22"/>
+          <p:cNvSpPr/>
+          <p:nvPr/>
+        </p:nvSpPr>
+        <p:spPr>
+          <a:xfrm>
+            <a:off x="960120" y="5431536"/>
+            <a:ext cx="10607040" cy="438912"/>
+          </a:xfrm>
+          <a:prstGeom prst="rect">
+            <a:avLst/>
+          </a:prstGeom>
+          <a:noFill/>
+          <a:ln/>
+        </p:spPr>
+        <p:txBody>
+          <a:bodyPr wrap="square" rtlCol="0" anchor="ctr"/>
+          <a:lstStyle/>
+          <a:p>
+            <a:pPr indent="0" marL="0">
+              <a:buNone/>
+            </a:pPr>
+            <a:r>
+              <a:rPr lang="en-US" sz="1250" dirty="0">
+                <a:solidFill>
+                  <a:srgbClr val="20363A"/>
+                </a:solidFill>
+                <a:latin typeface="Calibri" pitchFamily="34" charset="0"/>
+                <a:ea typeface="Calibri" pitchFamily="34" charset="-122"/>
+                <a:cs typeface="Calibri" pitchFamily="34" charset="-120"/>
+              </a:rPr>
               <a:t>Validar la aplicación mediante pruebas funcionales y de usabilidad.</a:t>
             </a:r>
-            <a:endParaRPr lang="en-US" sz="1300" dirty="0"/>
-          </a:p>
-        </p:txBody>
-      </p:sp>
-      <p:sp>
-        <p:nvSpPr>
-          <p:cNvPr id="22" name="Text 20"/>
+            <a:endParaRPr lang="en-US" sz="1250" dirty="0"/>
+          </a:p>
+        </p:txBody>
+      </p:sp>
+      <p:sp>
+        <p:nvSpPr>
+          <p:cNvPr id="25" name="Text 23"/>
           <p:cNvSpPr/>
           <p:nvPr/>
         </p:nvSpPr>
@@ -12042,7 +11891,7 @@
           <a:bodyPr wrap="square" rtlCol="0" anchor="ctr"/>
           <a:lstStyle/>
           <a:p>
-            <a:pPr marL="0" indent="0" algn="r">
+            <a:pPr algn="r" indent="0" marL="0">
               <a:buNone/>
             </a:pPr>
             <a:r>
@@ -12076,7 +11925,6 @@
         <a:solidFill>
           <a:srgbClr val="013A40"/>
         </a:solidFill>
-        <a:effectLst/>
       </p:bgPr>
     </p:bg>
     <p:spTree>
@@ -12114,7 +11962,7 @@
           <a:bodyPr wrap="square" rtlCol="0" anchor="ctr"/>
           <a:lstStyle/>
           <a:p>
-            <a:pPr marL="0" indent="0">
+            <a:pPr indent="0" marL="0">
               <a:buNone/>
             </a:pPr>
             <a:r>
@@ -12153,7 +12001,7 @@
           <a:bodyPr wrap="square" rtlCol="0" anchor="ctr"/>
           <a:lstStyle/>
           <a:p>
-            <a:pPr marL="0" indent="0">
+            <a:pPr indent="0" marL="0">
               <a:buNone/>
             </a:pPr>
             <a:r>
@@ -12190,13 +12038,6 @@
           </a:solidFill>
           <a:ln/>
         </p:spPr>
-        <p:txBody>
-          <a:bodyPr/>
-          <a:lstStyle/>
-          <a:p>
-            <a:endParaRPr lang="es-CL"/>
-          </a:p>
-        </p:txBody>
       </p:sp>
       <p:sp>
         <p:nvSpPr>
@@ -12219,7 +12060,7 @@
           <a:bodyPr wrap="square" rtlCol="0" anchor="ctr"/>
           <a:lstStyle/>
           <a:p>
-            <a:pPr marL="0" indent="0">
+            <a:pPr indent="0" marL="0">
               <a:buNone/>
             </a:pPr>
             <a:r>
@@ -12258,7 +12099,7 @@
           <a:bodyPr wrap="square" rtlCol="0" anchor="t"/>
           <a:lstStyle/>
           <a:p>
-            <a:pPr marL="0" indent="0">
+            <a:pPr indent="0" marL="0">
               <a:buNone/>
             </a:pPr>
             <a:r>
@@ -12275,7 +12116,7 @@
             <a:endParaRPr lang="en-US" sz="1200" dirty="0"/>
           </a:p>
           <a:p>
-            <a:pPr marL="0" indent="0">
+            <a:pPr indent="0" marL="0">
               <a:buNone/>
             </a:pPr>
             <a:r>
@@ -12293,7 +12134,7 @@
             <a:endParaRPr lang="en-US" sz="1200" dirty="0"/>
           </a:p>
           <a:p>
-            <a:pPr marL="0" indent="0">
+            <a:pPr indent="0" marL="0">
               <a:buNone/>
             </a:pPr>
             <a:r>
@@ -12310,7 +12151,7 @@
             <a:endParaRPr lang="en-US" sz="1200" dirty="0"/>
           </a:p>
           <a:p>
-            <a:pPr marL="0" indent="0">
+            <a:pPr indent="0" marL="0">
               <a:buNone/>
             </a:pPr>
             <a:r>
@@ -12328,7 +12169,7 @@
             <a:endParaRPr lang="en-US" sz="1200" dirty="0"/>
           </a:p>
           <a:p>
-            <a:pPr marL="0" indent="0">
+            <a:pPr indent="0" marL="0">
               <a:buNone/>
             </a:pPr>
             <a:r>
@@ -12345,7 +12186,7 @@
             <a:endParaRPr lang="en-US" sz="1200" dirty="0"/>
           </a:p>
           <a:p>
-            <a:pPr marL="0" indent="0">
+            <a:pPr indent="0" marL="0">
               <a:buNone/>
             </a:pPr>
             <a:r>
@@ -12363,7 +12204,7 @@
             <a:endParaRPr lang="en-US" sz="1200" dirty="0"/>
           </a:p>
           <a:p>
-            <a:pPr marL="0" indent="0">
+            <a:pPr indent="0" marL="0">
               <a:buNone/>
             </a:pPr>
             <a:r>
@@ -12380,7 +12221,7 @@
             <a:endParaRPr lang="en-US" sz="1200" dirty="0"/>
           </a:p>
           <a:p>
-            <a:pPr marL="0" indent="0">
+            <a:pPr indent="0" marL="0">
               <a:buNone/>
             </a:pPr>
             <a:r>
@@ -12392,7 +12233,7 @@
                 <a:ea typeface="Calibri" pitchFamily="34" charset="-122"/>
                 <a:cs typeface="Calibri" pitchFamily="34" charset="-120"/>
               </a:rPr>
-              <a:t>da flexibilidad para reordenar tareas según disponibilidad real (práctica + trabajo), manteniendo visibilidad continua del avance a lo largo de las 5 fases del cronograma (17 semanas).</a:t>
+              <a:t>da flexibilidad para reordenar tareas según disponibilidad real, manteniendo visibilidad continua del avance a lo largo de las 5 fases del cronograma (17 semanas).</a:t>
             </a:r>
             <a:endParaRPr lang="en-US" sz="1200" dirty="0"/>
           </a:p>
@@ -12417,13 +12258,6 @@
           </a:solidFill>
           <a:ln/>
         </p:spPr>
-        <p:txBody>
-          <a:bodyPr/>
-          <a:lstStyle/>
-          <a:p>
-            <a:endParaRPr lang="es-CL"/>
-          </a:p>
-        </p:txBody>
       </p:sp>
       <p:sp>
         <p:nvSpPr>
@@ -12446,7 +12280,7 @@
           <a:bodyPr wrap="square" rtlCol="0" anchor="ctr"/>
           <a:lstStyle/>
           <a:p>
-            <a:pPr marL="0" indent="0">
+            <a:pPr indent="0" marL="0">
               <a:buNone/>
             </a:pPr>
             <a:r>
@@ -12485,7 +12319,7 @@
           <a:bodyPr wrap="square" rtlCol="0" anchor="ctr"/>
           <a:lstStyle/>
           <a:p>
-            <a:pPr marL="0" indent="0">
+            <a:pPr indent="0" marL="0">
               <a:buNone/>
             </a:pPr>
             <a:r>
@@ -12524,7 +12358,7 @@
           <a:bodyPr wrap="square" rtlCol="0" anchor="t"/>
           <a:lstStyle/>
           <a:p>
-            <a:pPr marL="0" indent="0">
+            <a:pPr indent="0" marL="0">
               <a:buNone/>
             </a:pPr>
             <a:r>
@@ -12563,7 +12397,7 @@
           <a:bodyPr wrap="square" rtlCol="0" anchor="ctr"/>
           <a:lstStyle/>
           <a:p>
-            <a:pPr marL="0" indent="0">
+            <a:pPr indent="0" marL="0">
               <a:buNone/>
             </a:pPr>
             <a:r>
@@ -12602,7 +12436,7 @@
           <a:bodyPr wrap="square" rtlCol="0" anchor="t"/>
           <a:lstStyle/>
           <a:p>
-            <a:pPr marL="0" indent="0">
+            <a:pPr indent="0" marL="0">
               <a:buNone/>
             </a:pPr>
             <a:r>
@@ -12641,7 +12475,7 @@
           <a:bodyPr wrap="square" rtlCol="0" anchor="ctr"/>
           <a:lstStyle/>
           <a:p>
-            <a:pPr marL="0" indent="0">
+            <a:pPr indent="0" marL="0">
               <a:buNone/>
             </a:pPr>
             <a:r>
@@ -12653,7 +12487,7 @@
                 <a:ea typeface="Calibri" pitchFamily="34" charset="-122"/>
                 <a:cs typeface="Calibri" pitchFamily="34" charset="-120"/>
               </a:rPr>
-              <a:t>Control de versiones</a:t>
+              <a:t>Detección automática</a:t>
             </a:r>
             <a:endParaRPr lang="en-US" sz="1150" dirty="0"/>
           </a:p>
@@ -12680,7 +12514,7 @@
           <a:bodyPr wrap="square" rtlCol="0" anchor="t"/>
           <a:lstStyle/>
           <a:p>
-            <a:pPr marL="0" indent="0">
+            <a:pPr indent="0" marL="0">
               <a:buNone/>
             </a:pPr>
             <a:r>
@@ -12692,7 +12526,7 @@
                 <a:ea typeface="Calibri" pitchFamily="34" charset="-122"/>
                 <a:cs typeface="Calibri" pitchFamily="34" charset="-120"/>
               </a:rPr>
-              <a:t>Git + GitHub (repositorio individual, commits por tarea).</a:t>
+              <a:t>NotificationListenerService (Android) + regex por banco.</a:t>
             </a:r>
             <a:endParaRPr lang="en-US" sz="1100" dirty="0"/>
           </a:p>
@@ -12719,7 +12553,7 @@
           <a:bodyPr wrap="square" rtlCol="0" anchor="ctr"/>
           <a:lstStyle/>
           <a:p>
-            <a:pPr marL="0" indent="0">
+            <a:pPr indent="0" marL="0">
               <a:buNone/>
             </a:pPr>
             <a:r>
@@ -12731,7 +12565,7 @@
                 <a:ea typeface="Calibri" pitchFamily="34" charset="-122"/>
                 <a:cs typeface="Calibri" pitchFamily="34" charset="-120"/>
               </a:rPr>
-              <a:t>Gestión de tareas</a:t>
+              <a:t>Control de versiones</a:t>
             </a:r>
             <a:endParaRPr lang="en-US" sz="1150" dirty="0"/>
           </a:p>
@@ -12758,7 +12592,7 @@
           <a:bodyPr wrap="square" rtlCol="0" anchor="t"/>
           <a:lstStyle/>
           <a:p>
-            <a:pPr marL="0" indent="0">
+            <a:pPr indent="0" marL="0">
               <a:buNone/>
             </a:pPr>
             <a:r>
@@ -12770,7 +12604,7 @@
                 <a:ea typeface="Calibri" pitchFamily="34" charset="-122"/>
                 <a:cs typeface="Calibri" pitchFamily="34" charset="-120"/>
               </a:rPr>
-              <a:t>GitHub Projects (tablero Kanban integrado al repo).</a:t>
+              <a:t>Git + GitHub (repositorio individual, commits por tarea).</a:t>
             </a:r>
             <a:endParaRPr lang="en-US" sz="1100" dirty="0"/>
           </a:p>
@@ -12797,7 +12631,7 @@
           <a:bodyPr wrap="square" rtlCol="0" anchor="ctr"/>
           <a:lstStyle/>
           <a:p>
-            <a:pPr marL="0" indent="0">
+            <a:pPr indent="0" marL="0">
               <a:buNone/>
             </a:pPr>
             <a:r>
@@ -12809,7 +12643,7 @@
                 <a:ea typeface="Calibri" pitchFamily="34" charset="-122"/>
                 <a:cs typeface="Calibri" pitchFamily="34" charset="-120"/>
               </a:rPr>
-              <a:t>Diseño de mockups</a:t>
+              <a:t>Gestión de tareas</a:t>
             </a:r>
             <a:endParaRPr lang="en-US" sz="1150" dirty="0"/>
           </a:p>
@@ -12836,7 +12670,7 @@
           <a:bodyPr wrap="square" rtlCol="0" anchor="t"/>
           <a:lstStyle/>
           <a:p>
-            <a:pPr marL="0" indent="0">
+            <a:pPr indent="0" marL="0">
               <a:buNone/>
             </a:pPr>
             <a:r>
@@ -12848,7 +12682,7 @@
                 <a:ea typeface="Calibri" pitchFamily="34" charset="-122"/>
                 <a:cs typeface="Calibri" pitchFamily="34" charset="-120"/>
               </a:rPr>
-              <a:t>Figma / Draw.io para prototipos de baja fidelidad.</a:t>
+              <a:t>GitHub Projects (tablero Kanban integrado al repo).</a:t>
             </a:r>
             <a:endParaRPr lang="en-US" sz="1100" dirty="0"/>
           </a:p>
@@ -12875,7 +12709,7 @@
           <a:bodyPr wrap="square" rtlCol="0" anchor="ctr"/>
           <a:lstStyle/>
           <a:p>
-            <a:pPr marL="0" indent="0">
+            <a:pPr indent="0" marL="0">
               <a:buNone/>
             </a:pPr>
             <a:r>
@@ -12914,7 +12748,7 @@
           <a:bodyPr wrap="square" rtlCol="0" anchor="t"/>
           <a:lstStyle/>
           <a:p>
-            <a:pPr marL="0" indent="0">
+            <a:pPr indent="0" marL="0">
               <a:buNone/>
             </a:pPr>
             <a:r>
@@ -12953,7 +12787,7 @@
           <a:bodyPr wrap="square" rtlCol="0" anchor="ctr"/>
           <a:lstStyle/>
           <a:p>
-            <a:pPr marL="0" indent="0" algn="r">
+            <a:pPr algn="r" indent="0" marL="0">
               <a:buNone/>
             </a:pPr>
             <a:r>
@@ -12987,7 +12821,6 @@
         <a:solidFill>
           <a:srgbClr val="FFFFFF"/>
         </a:solidFill>
-        <a:effectLst/>
       </p:bgPr>
     </p:bg>
     <p:spTree>
@@ -13025,7 +12858,7 @@
           <a:bodyPr wrap="square" rtlCol="0" anchor="ctr"/>
           <a:lstStyle/>
           <a:p>
-            <a:pPr marL="0" indent="0">
+            <a:pPr indent="0" marL="0">
               <a:buNone/>
             </a:pPr>
             <a:r>
@@ -13064,7 +12897,7 @@
           <a:bodyPr wrap="square" rtlCol="0" anchor="ctr"/>
           <a:lstStyle/>
           <a:p>
-            <a:pPr marL="0" indent="0">
+            <a:pPr indent="0" marL="0">
               <a:buNone/>
             </a:pPr>
             <a:r>
@@ -13101,13 +12934,6 @@
           </a:solidFill>
           <a:ln/>
         </p:spPr>
-        <p:txBody>
-          <a:bodyPr/>
-          <a:lstStyle/>
-          <a:p>
-            <a:endParaRPr lang="es-CL"/>
-          </a:p>
-        </p:txBody>
       </p:sp>
       <p:sp>
         <p:nvSpPr>
@@ -13130,7 +12956,7 @@
           <a:bodyPr wrap="square" rtlCol="0" anchor="ctr"/>
           <a:lstStyle/>
           <a:p>
-            <a:pPr marL="0" indent="0" algn="ctr">
+            <a:pPr algn="ctr" indent="0" marL="0">
               <a:buNone/>
             </a:pPr>
             <a:r>
@@ -13167,13 +12993,6 @@
           </a:solidFill>
           <a:ln/>
         </p:spPr>
-        <p:txBody>
-          <a:bodyPr/>
-          <a:lstStyle/>
-          <a:p>
-            <a:endParaRPr lang="es-CL"/>
-          </a:p>
-        </p:txBody>
       </p:sp>
       <p:sp>
         <p:nvSpPr>
@@ -13196,7 +13015,7 @@
           <a:bodyPr wrap="square" rtlCol="0" anchor="ctr"/>
           <a:lstStyle/>
           <a:p>
-            <a:pPr marL="0" indent="0">
+            <a:pPr indent="0" marL="0">
               <a:buNone/>
             </a:pPr>
             <a:r>
@@ -13235,7 +13054,7 @@
           <a:bodyPr wrap="square" rtlCol="0" anchor="ctr"/>
           <a:lstStyle/>
           <a:p>
-            <a:pPr marL="0" indent="0">
+            <a:pPr indent="0" marL="0">
               <a:buNone/>
             </a:pPr>
             <a:r>
@@ -13274,11 +13093,11 @@
           <a:bodyPr wrap="square" rtlCol="0" anchor="ctr"/>
           <a:lstStyle/>
           <a:p>
-            <a:pPr marL="0" indent="0">
-              <a:buNone/>
-            </a:pPr>
-            <a:r>
-              <a:rPr lang="en-US" sz="870" dirty="0">
+            <a:pPr indent="0" marL="0">
+              <a:buNone/>
+            </a:pPr>
+            <a:r>
+              <a:rPr lang="en-US" sz="850" dirty="0">
                 <a:solidFill>
                   <a:srgbClr val="20363A"/>
                 </a:solidFill>
@@ -13288,7 +13107,7 @@
               </a:rPr>
               <a:t>•  Alcance y objetivos (03–07 ago)</a:t>
             </a:r>
-            <a:endParaRPr lang="en-US" sz="870" dirty="0"/>
+            <a:endParaRPr lang="en-US" sz="850" dirty="0"/>
           </a:p>
         </p:txBody>
       </p:sp>
@@ -13313,11 +13132,11 @@
           <a:bodyPr wrap="square" rtlCol="0" anchor="ctr"/>
           <a:lstStyle/>
           <a:p>
-            <a:pPr marL="0" indent="0">
-              <a:buNone/>
-            </a:pPr>
-            <a:r>
-              <a:rPr lang="en-US" sz="870" dirty="0">
+            <a:pPr indent="0" marL="0">
+              <a:buNone/>
+            </a:pPr>
+            <a:r>
+              <a:rPr lang="en-US" sz="850" dirty="0">
                 <a:solidFill>
                   <a:srgbClr val="20363A"/>
                 </a:solidFill>
@@ -13327,7 +13146,7 @@
               </a:rPr>
               <a:t>•  Requisitos func./no func. (10–14 ago)</a:t>
             </a:r>
-            <a:endParaRPr lang="en-US" sz="870" dirty="0"/>
+            <a:endParaRPr lang="en-US" sz="850" dirty="0"/>
           </a:p>
         </p:txBody>
       </p:sp>
@@ -13352,11 +13171,11 @@
           <a:bodyPr wrap="square" rtlCol="0" anchor="ctr"/>
           <a:lstStyle/>
           <a:p>
-            <a:pPr marL="0" indent="0">
-              <a:buNone/>
-            </a:pPr>
-            <a:r>
-              <a:rPr lang="en-US" sz="870" dirty="0">
+            <a:pPr indent="0" marL="0">
+              <a:buNone/>
+            </a:pPr>
+            <a:r>
+              <a:rPr lang="en-US" sz="850" dirty="0">
                 <a:solidFill>
                   <a:srgbClr val="20363A"/>
                 </a:solidFill>
@@ -13366,7 +13185,7 @@
               </a:rPr>
               <a:t>•  Modelo de datos y mockups (17–21 ago)</a:t>
             </a:r>
-            <a:endParaRPr lang="en-US" sz="870" dirty="0"/>
+            <a:endParaRPr lang="en-US" sz="850" dirty="0"/>
           </a:p>
         </p:txBody>
       </p:sp>
@@ -13391,11 +13210,11 @@
           <a:bodyPr wrap="square" rtlCol="0" anchor="ctr"/>
           <a:lstStyle/>
           <a:p>
-            <a:pPr marL="0" indent="0">
-              <a:buNone/>
-            </a:pPr>
-            <a:r>
-              <a:rPr lang="en-US" sz="870" dirty="0">
+            <a:pPr indent="0" marL="0">
+              <a:buNone/>
+            </a:pPr>
+            <a:r>
+              <a:rPr lang="en-US" sz="850" dirty="0">
                 <a:solidFill>
                   <a:srgbClr val="20363A"/>
                 </a:solidFill>
@@ -13405,7 +13224,7 @@
               </a:rPr>
               <a:t>•  Metodología y plan (24–26 ago)</a:t>
             </a:r>
-            <a:endParaRPr lang="en-US" sz="870" dirty="0"/>
+            <a:endParaRPr lang="en-US" sz="850" dirty="0"/>
           </a:p>
         </p:txBody>
       </p:sp>
@@ -13430,11 +13249,11 @@
           <a:bodyPr wrap="square" rtlCol="0" anchor="ctr"/>
           <a:lstStyle/>
           <a:p>
-            <a:pPr marL="0" indent="0">
-              <a:buNone/>
-            </a:pPr>
-            <a:r>
-              <a:rPr lang="en-US" sz="870" dirty="0">
+            <a:pPr indent="0" marL="0">
+              <a:buNone/>
+            </a:pPr>
+            <a:r>
+              <a:rPr lang="en-US" sz="850" dirty="0">
                 <a:solidFill>
                   <a:srgbClr val="20363A"/>
                 </a:solidFill>
@@ -13444,7 +13263,7 @@
               </a:rPr>
               <a:t>•  Presentación avance (31 ago)</a:t>
             </a:r>
-            <a:endParaRPr lang="en-US" sz="870" dirty="0"/>
+            <a:endParaRPr lang="en-US" sz="850" dirty="0"/>
           </a:p>
         </p:txBody>
       </p:sp>
@@ -13467,13 +13286,6 @@
           </a:solidFill>
           <a:ln/>
         </p:spPr>
-        <p:txBody>
-          <a:bodyPr/>
-          <a:lstStyle/>
-          <a:p>
-            <a:endParaRPr lang="es-CL"/>
-          </a:p>
-        </p:txBody>
       </p:sp>
       <p:sp>
         <p:nvSpPr>
@@ -13496,7 +13308,7 @@
           <a:bodyPr wrap="square" rtlCol="0" anchor="ctr"/>
           <a:lstStyle/>
           <a:p>
-            <a:pPr marL="0" indent="0" algn="ctr">
+            <a:pPr algn="ctr" indent="0" marL="0">
               <a:buNone/>
             </a:pPr>
             <a:r>
@@ -13533,13 +13345,6 @@
           </a:solidFill>
           <a:ln/>
         </p:spPr>
-        <p:txBody>
-          <a:bodyPr/>
-          <a:lstStyle/>
-          <a:p>
-            <a:endParaRPr lang="es-CL"/>
-          </a:p>
-        </p:txBody>
       </p:sp>
       <p:sp>
         <p:nvSpPr>
@@ -13562,7 +13367,7 @@
           <a:bodyPr wrap="square" rtlCol="0" anchor="ctr"/>
           <a:lstStyle/>
           <a:p>
-            <a:pPr marL="0" indent="0">
+            <a:pPr indent="0" marL="0">
               <a:buNone/>
             </a:pPr>
             <a:r>
@@ -13601,7 +13406,7 @@
           <a:bodyPr wrap="square" rtlCol="0" anchor="ctr"/>
           <a:lstStyle/>
           <a:p>
-            <a:pPr marL="0" indent="0">
+            <a:pPr indent="0" marL="0">
               <a:buNone/>
             </a:pPr>
             <a:r>
@@ -13640,11 +13445,11 @@
           <a:bodyPr wrap="square" rtlCol="0" anchor="ctr"/>
           <a:lstStyle/>
           <a:p>
-            <a:pPr marL="0" indent="0">
-              <a:buNone/>
-            </a:pPr>
-            <a:r>
-              <a:rPr lang="en-US" sz="870" dirty="0">
+            <a:pPr indent="0" marL="0">
+              <a:buNone/>
+            </a:pPr>
+            <a:r>
+              <a:rPr lang="en-US" sz="850" dirty="0">
                 <a:solidFill>
                   <a:srgbClr val="20363A"/>
                 </a:solidFill>
@@ -13654,7 +13459,7 @@
               </a:rPr>
               <a:t>•  Entorno Flutter + SQLite (07–09 sep)</a:t>
             </a:r>
-            <a:endParaRPr lang="en-US" sz="870" dirty="0"/>
+            <a:endParaRPr lang="en-US" sz="850" dirty="0"/>
           </a:p>
         </p:txBody>
       </p:sp>
@@ -13679,11 +13484,11 @@
           <a:bodyPr wrap="square" rtlCol="0" anchor="ctr"/>
           <a:lstStyle/>
           <a:p>
-            <a:pPr marL="0" indent="0">
-              <a:buNone/>
-            </a:pPr>
-            <a:r>
-              <a:rPr lang="en-US" sz="870" dirty="0">
+            <a:pPr indent="0" marL="0">
+              <a:buNone/>
+            </a:pPr>
+            <a:r>
+              <a:rPr lang="en-US" sz="850" dirty="0">
                 <a:solidFill>
                   <a:srgbClr val="20363A"/>
                 </a:solidFill>
@@ -13693,7 +13498,7 @@
               </a:rPr>
               <a:t>•  Estructura de base de datos (09–11 sep)</a:t>
             </a:r>
-            <a:endParaRPr lang="en-US" sz="870" dirty="0"/>
+            <a:endParaRPr lang="en-US" sz="850" dirty="0"/>
           </a:p>
         </p:txBody>
       </p:sp>
@@ -13718,11 +13523,11 @@
           <a:bodyPr wrap="square" rtlCol="0" anchor="ctr"/>
           <a:lstStyle/>
           <a:p>
-            <a:pPr marL="0" indent="0">
-              <a:buNone/>
-            </a:pPr>
-            <a:r>
-              <a:rPr lang="en-US" sz="870" dirty="0">
+            <a:pPr indent="0" marL="0">
+              <a:buNone/>
+            </a:pPr>
+            <a:r>
+              <a:rPr lang="en-US" sz="850" dirty="0">
                 <a:solidFill>
                   <a:srgbClr val="20363A"/>
                 </a:solidFill>
@@ -13732,7 +13537,7 @@
               </a:rPr>
               <a:t>•  Navegación base de la app (14–18 sep)</a:t>
             </a:r>
-            <a:endParaRPr lang="en-US" sz="870" dirty="0"/>
+            <a:endParaRPr lang="en-US" sz="850" dirty="0"/>
           </a:p>
         </p:txBody>
       </p:sp>
@@ -13757,11 +13562,11 @@
           <a:bodyPr wrap="square" rtlCol="0" anchor="ctr"/>
           <a:lstStyle/>
           <a:p>
-            <a:pPr marL="0" indent="0">
-              <a:buNone/>
-            </a:pPr>
-            <a:r>
-              <a:rPr lang="en-US" sz="870" dirty="0">
+            <a:pPr indent="0" marL="0">
+              <a:buNone/>
+            </a:pPr>
+            <a:r>
+              <a:rPr lang="en-US" sz="850" dirty="0">
                 <a:solidFill>
                   <a:srgbClr val="20363A"/>
                 </a:solidFill>
@@ -13771,7 +13576,7 @@
               </a:rPr>
               <a:t>•  Validación con docente guía (21–25 sep)</a:t>
             </a:r>
-            <a:endParaRPr lang="en-US" sz="870" dirty="0"/>
+            <a:endParaRPr lang="en-US" sz="850" dirty="0"/>
           </a:p>
         </p:txBody>
       </p:sp>
@@ -13794,13 +13599,6 @@
           </a:solidFill>
           <a:ln/>
         </p:spPr>
-        <p:txBody>
-          <a:bodyPr/>
-          <a:lstStyle/>
-          <a:p>
-            <a:endParaRPr lang="es-CL"/>
-          </a:p>
-        </p:txBody>
       </p:sp>
       <p:sp>
         <p:nvSpPr>
@@ -13823,7 +13621,7 @@
           <a:bodyPr wrap="square" rtlCol="0" anchor="ctr"/>
           <a:lstStyle/>
           <a:p>
-            <a:pPr marL="0" indent="0" algn="ctr">
+            <a:pPr algn="ctr" indent="0" marL="0">
               <a:buNone/>
             </a:pPr>
             <a:r>
@@ -13860,13 +13658,6 @@
           </a:solidFill>
           <a:ln/>
         </p:spPr>
-        <p:txBody>
-          <a:bodyPr/>
-          <a:lstStyle/>
-          <a:p>
-            <a:endParaRPr lang="es-CL"/>
-          </a:p>
-        </p:txBody>
       </p:sp>
       <p:sp>
         <p:nvSpPr>
@@ -13889,7 +13680,7 @@
           <a:bodyPr wrap="square" rtlCol="0" anchor="ctr"/>
           <a:lstStyle/>
           <a:p>
-            <a:pPr marL="0" indent="0">
+            <a:pPr indent="0" marL="0">
               <a:buNone/>
             </a:pPr>
             <a:r>
@@ -13928,7 +13719,7 @@
           <a:bodyPr wrap="square" rtlCol="0" anchor="ctr"/>
           <a:lstStyle/>
           <a:p>
-            <a:pPr marL="0" indent="0">
+            <a:pPr indent="0" marL="0">
               <a:buNone/>
             </a:pPr>
             <a:r>
@@ -13967,11 +13758,11 @@
           <a:bodyPr wrap="square" rtlCol="0" anchor="ctr"/>
           <a:lstStyle/>
           <a:p>
-            <a:pPr marL="0" indent="0">
-              <a:buNone/>
-            </a:pPr>
-            <a:r>
-              <a:rPr lang="en-US" sz="870" dirty="0">
+            <a:pPr indent="0" marL="0">
+              <a:buNone/>
+            </a:pPr>
+            <a:r>
+              <a:rPr lang="en-US" sz="850" dirty="0">
                 <a:solidFill>
                   <a:srgbClr val="20363A"/>
                 </a:solidFill>
@@ -13981,7 +13772,7 @@
               </a:rPr>
               <a:t>•  Registro y clasificación (28 sep–02 oct)</a:t>
             </a:r>
-            <a:endParaRPr lang="en-US" sz="870" dirty="0"/>
+            <a:endParaRPr lang="en-US" sz="850" dirty="0"/>
           </a:p>
         </p:txBody>
       </p:sp>
@@ -14006,11 +13797,11 @@
           <a:bodyPr wrap="square" rtlCol="0" anchor="ctr"/>
           <a:lstStyle/>
           <a:p>
-            <a:pPr marL="0" indent="0">
-              <a:buNone/>
-            </a:pPr>
-            <a:r>
-              <a:rPr lang="en-US" sz="870" dirty="0">
+            <a:pPr indent="0" marL="0">
+              <a:buNone/>
+            </a:pPr>
+            <a:r>
+              <a:rPr lang="en-US" sz="850" dirty="0">
                 <a:solidFill>
                   <a:srgbClr val="20363A"/>
                 </a:solidFill>
@@ -14020,7 +13811,7 @@
               </a:rPr>
               <a:t>•  Gestión de categorías (05–09 oct)</a:t>
             </a:r>
-            <a:endParaRPr lang="en-US" sz="870" dirty="0"/>
+            <a:endParaRPr lang="en-US" sz="850" dirty="0"/>
           </a:p>
         </p:txBody>
       </p:sp>
@@ -14045,11 +13836,11 @@
           <a:bodyPr wrap="square" rtlCol="0" anchor="ctr"/>
           <a:lstStyle/>
           <a:p>
-            <a:pPr marL="0" indent="0">
-              <a:buNone/>
-            </a:pPr>
-            <a:r>
-              <a:rPr lang="en-US" sz="870" dirty="0">
+            <a:pPr indent="0" marL="0">
+              <a:buNone/>
+            </a:pPr>
+            <a:r>
+              <a:rPr lang="en-US" sz="850" dirty="0">
                 <a:solidFill>
                   <a:srgbClr val="20363A"/>
                 </a:solidFill>
@@ -14057,15 +13848,54 @@
                 <a:ea typeface="Calibri" pitchFamily="34" charset="-122"/>
                 <a:cs typeface="Calibri" pitchFamily="34" charset="-120"/>
               </a:rPr>
-              <a:t>•  Presupuestos y alertas (12–28 oct)</a:t>
-            </a:r>
-            <a:endParaRPr lang="en-US" sz="870" dirty="0"/>
-          </a:p>
-        </p:txBody>
-      </p:sp>
-      <p:sp>
-        <p:nvSpPr>
-          <p:cNvPr id="31" name="Shape 29"/>
+              <a:t>•  Detección automática (notificaciones) (12–20 oct)</a:t>
+            </a:r>
+            <a:endParaRPr lang="en-US" sz="850" dirty="0"/>
+          </a:p>
+        </p:txBody>
+      </p:sp>
+      <p:sp>
+        <p:nvSpPr>
+          <p:cNvPr id="31" name="Text 29"/>
+          <p:cNvSpPr/>
+          <p:nvPr/>
+        </p:nvSpPr>
+        <p:spPr>
+          <a:xfrm>
+            <a:off x="5138928" y="4581144"/>
+            <a:ext cx="2011680" cy="685800"/>
+          </a:xfrm>
+          <a:prstGeom prst="rect">
+            <a:avLst/>
+          </a:prstGeom>
+          <a:noFill/>
+          <a:ln/>
+        </p:spPr>
+        <p:txBody>
+          <a:bodyPr wrap="square" rtlCol="0" anchor="ctr"/>
+          <a:lstStyle/>
+          <a:p>
+            <a:pPr indent="0" marL="0">
+              <a:buNone/>
+            </a:pPr>
+            <a:r>
+              <a:rPr lang="en-US" sz="850" dirty="0">
+                <a:solidFill>
+                  <a:srgbClr val="20363A"/>
+                </a:solidFill>
+                <a:latin typeface="Calibri" pitchFamily="34" charset="0"/>
+                <a:ea typeface="Calibri" pitchFamily="34" charset="-122"/>
+                <a:cs typeface="Calibri" pitchFamily="34" charset="-120"/>
+              </a:rPr>
+              <a:t>•  Presupuestos y alertas (20–28 oct)</a:t>
+            </a:r>
+            <a:endParaRPr lang="en-US" sz="850" dirty="0"/>
+          </a:p>
+        </p:txBody>
+      </p:sp>
+      <p:sp>
+        <p:nvSpPr>
+          <p:cNvPr id="32" name="Shape 30"/>
           <p:cNvSpPr/>
           <p:nvPr/>
         </p:nvSpPr>
@@ -14082,17 +13912,10 @@
           </a:solidFill>
           <a:ln/>
         </p:spPr>
-        <p:txBody>
-          <a:bodyPr/>
-          <a:lstStyle/>
-          <a:p>
-            <a:endParaRPr lang="es-CL"/>
-          </a:p>
-        </p:txBody>
-      </p:sp>
-      <p:sp>
-        <p:nvSpPr>
-          <p:cNvPr id="32" name="Text 30"/>
+      </p:sp>
+      <p:sp>
+        <p:nvSpPr>
+          <p:cNvPr id="33" name="Text 31"/>
           <p:cNvSpPr/>
           <p:nvPr/>
         </p:nvSpPr>
@@ -14111,7 +13934,7 @@
           <a:bodyPr wrap="square" rtlCol="0" anchor="ctr"/>
           <a:lstStyle/>
           <a:p>
-            <a:pPr marL="0" indent="0" algn="ctr">
+            <a:pPr algn="ctr" indent="0" marL="0">
               <a:buNone/>
             </a:pPr>
             <a:r>
@@ -14131,7 +13954,7 @@
       </p:sp>
       <p:sp>
         <p:nvSpPr>
-          <p:cNvPr id="33" name="Shape 31"/>
+          <p:cNvPr id="34" name="Shape 32"/>
           <p:cNvSpPr/>
           <p:nvPr/>
         </p:nvSpPr>
@@ -14148,17 +13971,10 @@
           </a:solidFill>
           <a:ln/>
         </p:spPr>
-        <p:txBody>
-          <a:bodyPr/>
-          <a:lstStyle/>
-          <a:p>
-            <a:endParaRPr lang="es-CL"/>
-          </a:p>
-        </p:txBody>
-      </p:sp>
-      <p:sp>
-        <p:nvSpPr>
-          <p:cNvPr id="34" name="Text 32"/>
+      </p:sp>
+      <p:sp>
+        <p:nvSpPr>
+          <p:cNvPr id="35" name="Text 33"/>
           <p:cNvSpPr/>
           <p:nvPr/>
         </p:nvSpPr>
@@ -14177,7 +13993,7 @@
           <a:bodyPr wrap="square" rtlCol="0" anchor="ctr"/>
           <a:lstStyle/>
           <a:p>
-            <a:pPr marL="0" indent="0">
+            <a:pPr indent="0" marL="0">
               <a:buNone/>
             </a:pPr>
             <a:r>
@@ -14197,7 +14013,7 @@
       </p:sp>
       <p:sp>
         <p:nvSpPr>
-          <p:cNvPr id="35" name="Text 33"/>
+          <p:cNvPr id="36" name="Text 34"/>
           <p:cNvSpPr/>
           <p:nvPr/>
         </p:nvSpPr>
@@ -14216,7 +14032,7 @@
           <a:bodyPr wrap="square" rtlCol="0" anchor="ctr"/>
           <a:lstStyle/>
           <a:p>
-            <a:pPr marL="0" indent="0">
+            <a:pPr indent="0" marL="0">
               <a:buNone/>
             </a:pPr>
             <a:r>
@@ -14236,7 +14052,7 @@
       </p:sp>
       <p:sp>
         <p:nvSpPr>
-          <p:cNvPr id="36" name="Text 34"/>
+          <p:cNvPr id="37" name="Text 35"/>
           <p:cNvSpPr/>
           <p:nvPr/>
         </p:nvSpPr>
@@ -14255,11 +14071,11 @@
           <a:bodyPr wrap="square" rtlCol="0" anchor="ctr"/>
           <a:lstStyle/>
           <a:p>
-            <a:pPr marL="0" indent="0">
-              <a:buNone/>
-            </a:pPr>
-            <a:r>
-              <a:rPr lang="en-US" sz="870" dirty="0">
+            <a:pPr indent="0" marL="0">
+              <a:buNone/>
+            </a:pPr>
+            <a:r>
+              <a:rPr lang="en-US" sz="850" dirty="0">
                 <a:solidFill>
                   <a:srgbClr val="20363A"/>
                 </a:solidFill>
@@ -14269,13 +14085,13 @@
               </a:rPr>
               <a:t>•  Reportes visuales (02–04 nov)</a:t>
             </a:r>
-            <a:endParaRPr lang="en-US" sz="870" dirty="0"/>
-          </a:p>
-        </p:txBody>
-      </p:sp>
-      <p:sp>
-        <p:nvSpPr>
-          <p:cNvPr id="37" name="Text 35"/>
+            <a:endParaRPr lang="en-US" sz="850" dirty="0"/>
+          </a:p>
+        </p:txBody>
+      </p:sp>
+      <p:sp>
+        <p:nvSpPr>
+          <p:cNvPr id="38" name="Text 36"/>
           <p:cNvSpPr/>
           <p:nvPr/>
         </p:nvSpPr>
@@ -14294,11 +14110,11 @@
           <a:bodyPr wrap="square" rtlCol="0" anchor="ctr"/>
           <a:lstStyle/>
           <a:p>
-            <a:pPr marL="0" indent="0">
-              <a:buNone/>
-            </a:pPr>
-            <a:r>
-              <a:rPr lang="en-US" sz="870" dirty="0">
+            <a:pPr indent="0" marL="0">
+              <a:buNone/>
+            </a:pPr>
+            <a:r>
+              <a:rPr lang="en-US" sz="850" dirty="0">
                 <a:solidFill>
                   <a:srgbClr val="20363A"/>
                 </a:solidFill>
@@ -14308,13 +14124,13 @@
               </a:rPr>
               <a:t>•  Pruebas funcionales (04–06 nov)</a:t>
             </a:r>
-            <a:endParaRPr lang="en-US" sz="870" dirty="0"/>
-          </a:p>
-        </p:txBody>
-      </p:sp>
-      <p:sp>
-        <p:nvSpPr>
-          <p:cNvPr id="38" name="Text 36"/>
+            <a:endParaRPr lang="en-US" sz="850" dirty="0"/>
+          </a:p>
+        </p:txBody>
+      </p:sp>
+      <p:sp>
+        <p:nvSpPr>
+          <p:cNvPr id="39" name="Text 37"/>
           <p:cNvSpPr/>
           <p:nvPr/>
         </p:nvSpPr>
@@ -14333,11 +14149,11 @@
           <a:bodyPr wrap="square" rtlCol="0" anchor="ctr"/>
           <a:lstStyle/>
           <a:p>
-            <a:pPr marL="0" indent="0">
-              <a:buNone/>
-            </a:pPr>
-            <a:r>
-              <a:rPr lang="en-US" sz="870" dirty="0">
+            <a:pPr indent="0" marL="0">
+              <a:buNone/>
+            </a:pPr>
+            <a:r>
+              <a:rPr lang="en-US" sz="850" dirty="0">
                 <a:solidFill>
                   <a:srgbClr val="20363A"/>
                 </a:solidFill>
@@ -14347,13 +14163,13 @@
               </a:rPr>
               <a:t>•  Pruebas de usabilidad (09–11 nov)</a:t>
             </a:r>
-            <a:endParaRPr lang="en-US" sz="870" dirty="0"/>
-          </a:p>
-        </p:txBody>
-      </p:sp>
-      <p:sp>
-        <p:nvSpPr>
-          <p:cNvPr id="39" name="Text 37"/>
+            <a:endParaRPr lang="en-US" sz="850" dirty="0"/>
+          </a:p>
+        </p:txBody>
+      </p:sp>
+      <p:sp>
+        <p:nvSpPr>
+          <p:cNvPr id="40" name="Text 38"/>
           <p:cNvSpPr/>
           <p:nvPr/>
         </p:nvSpPr>
@@ -14372,11 +14188,11 @@
           <a:bodyPr wrap="square" rtlCol="0" anchor="ctr"/>
           <a:lstStyle/>
           <a:p>
-            <a:pPr marL="0" indent="0">
-              <a:buNone/>
-            </a:pPr>
-            <a:r>
-              <a:rPr lang="en-US" sz="870" dirty="0">
+            <a:pPr indent="0" marL="0">
+              <a:buNone/>
+            </a:pPr>
+            <a:r>
+              <a:rPr lang="en-US" sz="850" dirty="0">
                 <a:solidFill>
                   <a:srgbClr val="20363A"/>
                 </a:solidFill>
@@ -14386,13 +14202,13 @@
               </a:rPr>
               <a:t>•  Corrección de observaciones (11–13 nov)</a:t>
             </a:r>
-            <a:endParaRPr lang="en-US" sz="870" dirty="0"/>
-          </a:p>
-        </p:txBody>
-      </p:sp>
-      <p:sp>
-        <p:nvSpPr>
-          <p:cNvPr id="40" name="Shape 38"/>
+            <a:endParaRPr lang="en-US" sz="850" dirty="0"/>
+          </a:p>
+        </p:txBody>
+      </p:sp>
+      <p:sp>
+        <p:nvSpPr>
+          <p:cNvPr id="41" name="Shape 39"/>
           <p:cNvSpPr/>
           <p:nvPr/>
         </p:nvSpPr>
@@ -14409,17 +14225,10 @@
           </a:solidFill>
           <a:ln/>
         </p:spPr>
-        <p:txBody>
-          <a:bodyPr/>
-          <a:lstStyle/>
-          <a:p>
-            <a:endParaRPr lang="es-CL"/>
-          </a:p>
-        </p:txBody>
-      </p:sp>
-      <p:sp>
-        <p:nvSpPr>
-          <p:cNvPr id="41" name="Text 39"/>
+      </p:sp>
+      <p:sp>
+        <p:nvSpPr>
+          <p:cNvPr id="42" name="Text 40"/>
           <p:cNvSpPr/>
           <p:nvPr/>
         </p:nvSpPr>
@@ -14438,7 +14247,7 @@
           <a:bodyPr wrap="square" rtlCol="0" anchor="ctr"/>
           <a:lstStyle/>
           <a:p>
-            <a:pPr marL="0" indent="0" algn="ctr">
+            <a:pPr algn="ctr" indent="0" marL="0">
               <a:buNone/>
             </a:pPr>
             <a:r>
@@ -14458,7 +14267,7 @@
       </p:sp>
       <p:sp>
         <p:nvSpPr>
-          <p:cNvPr id="42" name="Shape 40"/>
+          <p:cNvPr id="43" name="Shape 41"/>
           <p:cNvSpPr/>
           <p:nvPr/>
         </p:nvSpPr>
@@ -14475,17 +14284,10 @@
           </a:solidFill>
           <a:ln/>
         </p:spPr>
-        <p:txBody>
-          <a:bodyPr/>
-          <a:lstStyle/>
-          <a:p>
-            <a:endParaRPr lang="es-CL"/>
-          </a:p>
-        </p:txBody>
-      </p:sp>
-      <p:sp>
-        <p:nvSpPr>
-          <p:cNvPr id="43" name="Text 41"/>
+      </p:sp>
+      <p:sp>
+        <p:nvSpPr>
+          <p:cNvPr id="44" name="Text 42"/>
           <p:cNvSpPr/>
           <p:nvPr/>
         </p:nvSpPr>
@@ -14504,7 +14306,7 @@
           <a:bodyPr wrap="square" rtlCol="0" anchor="ctr"/>
           <a:lstStyle/>
           <a:p>
-            <a:pPr marL="0" indent="0">
+            <a:pPr indent="0" marL="0">
               <a:buNone/>
             </a:pPr>
             <a:r>
@@ -14524,7 +14326,7 @@
       </p:sp>
       <p:sp>
         <p:nvSpPr>
-          <p:cNvPr id="44" name="Text 42"/>
+          <p:cNvPr id="45" name="Text 43"/>
           <p:cNvSpPr/>
           <p:nvPr/>
         </p:nvSpPr>
@@ -14543,7 +14345,7 @@
           <a:bodyPr wrap="square" rtlCol="0" anchor="ctr"/>
           <a:lstStyle/>
           <a:p>
-            <a:pPr marL="0" indent="0">
+            <a:pPr indent="0" marL="0">
               <a:buNone/>
             </a:pPr>
             <a:r>
@@ -14563,7 +14365,7 @@
       </p:sp>
       <p:sp>
         <p:nvSpPr>
-          <p:cNvPr id="45" name="Text 43"/>
+          <p:cNvPr id="46" name="Text 44"/>
           <p:cNvSpPr/>
           <p:nvPr/>
         </p:nvSpPr>
@@ -14582,11 +14384,11 @@
           <a:bodyPr wrap="square" rtlCol="0" anchor="ctr"/>
           <a:lstStyle/>
           <a:p>
-            <a:pPr marL="0" indent="0">
-              <a:buNone/>
-            </a:pPr>
-            <a:r>
-              <a:rPr lang="en-US" sz="870" dirty="0">
+            <a:pPr indent="0" marL="0">
+              <a:buNone/>
+            </a:pPr>
+            <a:r>
+              <a:rPr lang="en-US" sz="850" dirty="0">
                 <a:solidFill>
                   <a:srgbClr val="20363A"/>
                 </a:solidFill>
@@ -14596,13 +14398,13 @@
               </a:rPr>
               <a:t>•  Documentación de cierre (16–18 nov)</a:t>
             </a:r>
-            <a:endParaRPr lang="en-US" sz="870" dirty="0"/>
-          </a:p>
-        </p:txBody>
-      </p:sp>
-      <p:sp>
-        <p:nvSpPr>
-          <p:cNvPr id="46" name="Text 44"/>
+            <a:endParaRPr lang="en-US" sz="850" dirty="0"/>
+          </a:p>
+        </p:txBody>
+      </p:sp>
+      <p:sp>
+        <p:nvSpPr>
+          <p:cNvPr id="47" name="Text 45"/>
           <p:cNvSpPr/>
           <p:nvPr/>
         </p:nvSpPr>
@@ -14621,11 +14423,11 @@
           <a:bodyPr wrap="square" rtlCol="0" anchor="ctr"/>
           <a:lstStyle/>
           <a:p>
-            <a:pPr marL="0" indent="0">
-              <a:buNone/>
-            </a:pPr>
-            <a:r>
-              <a:rPr lang="en-US" sz="870" dirty="0">
+            <a:pPr indent="0" marL="0">
+              <a:buNone/>
+            </a:pPr>
+            <a:r>
+              <a:rPr lang="en-US" sz="850" dirty="0">
                 <a:solidFill>
                   <a:srgbClr val="20363A"/>
                 </a:solidFill>
@@ -14635,13 +14437,13 @@
               </a:rPr>
               <a:t>•  Manual de usuario (18–20 nov)</a:t>
             </a:r>
-            <a:endParaRPr lang="en-US" sz="870" dirty="0"/>
-          </a:p>
-        </p:txBody>
-      </p:sp>
-      <p:sp>
-        <p:nvSpPr>
-          <p:cNvPr id="47" name="Text 45"/>
+            <a:endParaRPr lang="en-US" sz="850" dirty="0"/>
+          </a:p>
+        </p:txBody>
+      </p:sp>
+      <p:sp>
+        <p:nvSpPr>
+          <p:cNvPr id="48" name="Text 46"/>
           <p:cNvSpPr/>
           <p:nvPr/>
         </p:nvSpPr>
@@ -14660,11 +14462,11 @@
           <a:bodyPr wrap="square" rtlCol="0" anchor="ctr"/>
           <a:lstStyle/>
           <a:p>
-            <a:pPr marL="0" indent="0">
-              <a:buNone/>
-            </a:pPr>
-            <a:r>
-              <a:rPr lang="en-US" sz="870" dirty="0">
+            <a:pPr indent="0" marL="0">
+              <a:buNone/>
+            </a:pPr>
+            <a:r>
+              <a:rPr lang="en-US" sz="850" dirty="0">
                 <a:solidFill>
                   <a:srgbClr val="20363A"/>
                 </a:solidFill>
@@ -14674,13 +14476,13 @@
               </a:rPr>
               <a:t>•  Presentación final (23–25 nov)</a:t>
             </a:r>
-            <a:endParaRPr lang="en-US" sz="870" dirty="0"/>
-          </a:p>
-        </p:txBody>
-      </p:sp>
-      <p:sp>
-        <p:nvSpPr>
-          <p:cNvPr id="48" name="Text 46"/>
+            <a:endParaRPr lang="en-US" sz="850" dirty="0"/>
+          </a:p>
+        </p:txBody>
+      </p:sp>
+      <p:sp>
+        <p:nvSpPr>
+          <p:cNvPr id="49" name="Text 47"/>
           <p:cNvSpPr/>
           <p:nvPr/>
         </p:nvSpPr>
@@ -14699,11 +14501,11 @@
           <a:bodyPr wrap="square" rtlCol="0" anchor="ctr"/>
           <a:lstStyle/>
           <a:p>
-            <a:pPr marL="0" indent="0">
-              <a:buNone/>
-            </a:pPr>
-            <a:r>
-              <a:rPr lang="en-US" sz="870" dirty="0">
+            <a:pPr indent="0" marL="0">
+              <a:buNone/>
+            </a:pPr>
+            <a:r>
+              <a:rPr lang="en-US" sz="850" dirty="0">
                 <a:solidFill>
                   <a:srgbClr val="20363A"/>
                 </a:solidFill>
@@ -14713,13 +14515,13 @@
               </a:rPr>
               <a:t>•  Entrega del proyecto (27 nov)</a:t>
             </a:r>
-            <a:endParaRPr lang="en-US" sz="870" dirty="0"/>
-          </a:p>
-        </p:txBody>
-      </p:sp>
-      <p:sp>
-        <p:nvSpPr>
-          <p:cNvPr id="49" name="Text 47"/>
+            <a:endParaRPr lang="en-US" sz="850" dirty="0"/>
+          </a:p>
+        </p:txBody>
+      </p:sp>
+      <p:sp>
+        <p:nvSpPr>
+          <p:cNvPr id="50" name="Text 48"/>
           <p:cNvSpPr/>
           <p:nvPr/>
         </p:nvSpPr>
@@ -14738,7 +14540,7 @@
           <a:bodyPr wrap="square" rtlCol="0" anchor="ctr"/>
           <a:lstStyle/>
           <a:p>
-            <a:pPr marL="0" indent="0" algn="r">
+            <a:pPr algn="r" indent="0" marL="0">
               <a:buNone/>
             </a:pPr>
             <a:r>
@@ -14772,7 +14574,6 @@
         <a:solidFill>
           <a:srgbClr val="013A40"/>
         </a:solidFill>
-        <a:effectLst/>
       </p:bgPr>
     </p:bg>
     <p:spTree>
@@ -14810,7 +14611,7 @@
           <a:bodyPr wrap="square" rtlCol="0" anchor="ctr"/>
           <a:lstStyle/>
           <a:p>
-            <a:pPr marL="0" indent="0">
+            <a:pPr indent="0" marL="0">
               <a:buNone/>
             </a:pPr>
             <a:r>
@@ -14847,13 +14648,6 @@
           </a:solidFill>
           <a:ln/>
         </p:spPr>
-        <p:txBody>
-          <a:bodyPr/>
-          <a:lstStyle/>
-          <a:p>
-            <a:endParaRPr lang="es-CL"/>
-          </a:p>
-        </p:txBody>
       </p:sp>
       <p:sp>
         <p:nvSpPr>
@@ -14876,7 +14670,7 @@
           <a:bodyPr wrap="square" rtlCol="0" anchor="ctr"/>
           <a:lstStyle/>
           <a:p>
-            <a:pPr marL="0" indent="0" algn="ctr">
+            <a:pPr algn="ctr" indent="0" marL="0">
               <a:buNone/>
             </a:pPr>
             <a:r>
@@ -14913,13 +14707,6 @@
           </a:solidFill>
           <a:ln/>
         </p:spPr>
-        <p:txBody>
-          <a:bodyPr/>
-          <a:lstStyle/>
-          <a:p>
-            <a:endParaRPr lang="es-CL"/>
-          </a:p>
-        </p:txBody>
       </p:sp>
       <p:sp>
         <p:nvSpPr>
@@ -14942,7 +14729,7 @@
           <a:bodyPr wrap="square" rtlCol="0" anchor="ctr"/>
           <a:lstStyle/>
           <a:p>
-            <a:pPr marL="0" indent="0">
+            <a:pPr indent="0" marL="0">
               <a:buNone/>
             </a:pPr>
             <a:r>
@@ -14981,7 +14768,7 @@
           <a:bodyPr wrap="square" rtlCol="0" anchor="ctr"/>
           <a:lstStyle/>
           <a:p>
-            <a:pPr marL="0" indent="0">
+            <a:pPr indent="0" marL="0">
               <a:buNone/>
             </a:pPr>
             <a:r>
@@ -15018,13 +14805,6 @@
           </a:solidFill>
           <a:ln/>
         </p:spPr>
-        <p:txBody>
-          <a:bodyPr/>
-          <a:lstStyle/>
-          <a:p>
-            <a:endParaRPr lang="es-CL"/>
-          </a:p>
-        </p:txBody>
       </p:sp>
       <p:sp>
         <p:nvSpPr>
@@ -15047,7 +14827,7 @@
           <a:bodyPr wrap="square" rtlCol="0" anchor="ctr"/>
           <a:lstStyle/>
           <a:p>
-            <a:pPr marL="0" indent="0" algn="ctr">
+            <a:pPr algn="ctr" indent="0" marL="0">
               <a:buNone/>
             </a:pPr>
             <a:r>
@@ -15084,13 +14864,6 @@
           </a:solidFill>
           <a:ln/>
         </p:spPr>
-        <p:txBody>
-          <a:bodyPr/>
-          <a:lstStyle/>
-          <a:p>
-            <a:endParaRPr lang="es-CL"/>
-          </a:p>
-        </p:txBody>
       </p:sp>
       <p:sp>
         <p:nvSpPr>
@@ -15113,7 +14886,7 @@
           <a:bodyPr wrap="square" rtlCol="0" anchor="ctr"/>
           <a:lstStyle/>
           <a:p>
-            <a:pPr marL="0" indent="0">
+            <a:pPr indent="0" marL="0">
               <a:buNone/>
             </a:pPr>
             <a:r>
@@ -15152,7 +14925,7 @@
           <a:bodyPr wrap="square" rtlCol="0" anchor="ctr"/>
           <a:lstStyle/>
           <a:p>
-            <a:pPr marL="0" indent="0">
+            <a:pPr indent="0" marL="0">
               <a:buNone/>
             </a:pPr>
             <a:r>
@@ -15189,13 +14962,6 @@
           </a:solidFill>
           <a:ln/>
         </p:spPr>
-        <p:txBody>
-          <a:bodyPr/>
-          <a:lstStyle/>
-          <a:p>
-            <a:endParaRPr lang="es-CL"/>
-          </a:p>
-        </p:txBody>
       </p:sp>
       <p:sp>
         <p:nvSpPr>
@@ -15218,7 +14984,7 @@
           <a:bodyPr wrap="square" rtlCol="0" anchor="ctr"/>
           <a:lstStyle/>
           <a:p>
-            <a:pPr marL="0" indent="0" algn="ctr">
+            <a:pPr algn="ctr" indent="0" marL="0">
               <a:buNone/>
             </a:pPr>
             <a:r>
@@ -15255,13 +15021,6 @@
           </a:solidFill>
           <a:ln/>
         </p:spPr>
-        <p:txBody>
-          <a:bodyPr/>
-          <a:lstStyle/>
-          <a:p>
-            <a:endParaRPr lang="es-CL"/>
-          </a:p>
-        </p:txBody>
       </p:sp>
       <p:sp>
         <p:nvSpPr>
@@ -15284,7 +15043,7 @@
           <a:bodyPr wrap="square" rtlCol="0" anchor="ctr"/>
           <a:lstStyle/>
           <a:p>
-            <a:pPr marL="0" indent="0">
+            <a:pPr indent="0" marL="0">
               <a:buNone/>
             </a:pPr>
             <a:r>
@@ -15323,7 +15082,7 @@
           <a:bodyPr wrap="square" rtlCol="0" anchor="ctr"/>
           <a:lstStyle/>
           <a:p>
-            <a:pPr marL="0" indent="0">
+            <a:pPr indent="0" marL="0">
               <a:buNone/>
             </a:pPr>
             <a:r>
@@ -15360,13 +15119,6 @@
           </a:solidFill>
           <a:ln/>
         </p:spPr>
-        <p:txBody>
-          <a:bodyPr/>
-          <a:lstStyle/>
-          <a:p>
-            <a:endParaRPr lang="es-CL"/>
-          </a:p>
-        </p:txBody>
       </p:sp>
       <p:sp>
         <p:nvSpPr>
@@ -15389,7 +15141,7 @@
           <a:bodyPr wrap="square" rtlCol="0" anchor="ctr"/>
           <a:lstStyle/>
           <a:p>
-            <a:pPr marL="0" indent="0" algn="ctr">
+            <a:pPr algn="ctr" indent="0" marL="0">
               <a:buNone/>
             </a:pPr>
             <a:r>
@@ -15426,13 +15178,6 @@
           </a:solidFill>
           <a:ln/>
         </p:spPr>
-        <p:txBody>
-          <a:bodyPr/>
-          <a:lstStyle/>
-          <a:p>
-            <a:endParaRPr lang="es-CL"/>
-          </a:p>
-        </p:txBody>
       </p:sp>
       <p:sp>
         <p:nvSpPr>
@@ -15455,7 +15200,7 @@
           <a:bodyPr wrap="square" rtlCol="0" anchor="ctr"/>
           <a:lstStyle/>
           <a:p>
-            <a:pPr marL="0" indent="0">
+            <a:pPr indent="0" marL="0">
               <a:buNone/>
             </a:pPr>
             <a:r>
@@ -15494,7 +15239,7 @@
           <a:bodyPr wrap="square" rtlCol="0" anchor="ctr"/>
           <a:lstStyle/>
           <a:p>
-            <a:pPr marL="0" indent="0">
+            <a:pPr indent="0" marL="0">
               <a:buNone/>
             </a:pPr>
             <a:r>
@@ -15506,7 +15251,7 @@
                 <a:ea typeface="Calibri" pitchFamily="34" charset="-122"/>
                 <a:cs typeface="Calibri" pitchFamily="34" charset="-120"/>
               </a:rPr>
-              <a:t>App móvil + base de datos + reportes integrados, evidencia central del logro de los objetivos.</a:t>
+              <a:t>App móvil + base de datos + reportes + detección automática, evidencia central del logro de los objetivos.</a:t>
             </a:r>
             <a:endParaRPr lang="en-US" sz="1150" dirty="0"/>
           </a:p>
@@ -15533,7 +15278,7 @@
           <a:bodyPr wrap="square" rtlCol="0" anchor="ctr"/>
           <a:lstStyle/>
           <a:p>
-            <a:pPr marL="0" indent="0" algn="r">
+            <a:pPr algn="r" indent="0" marL="0">
               <a:buNone/>
             </a:pPr>
             <a:r>
@@ -15567,7 +15312,6 @@
         <a:solidFill>
           <a:srgbClr val="F2F2F2"/>
         </a:solidFill>
-        <a:effectLst/>
       </p:bgPr>
     </p:bg>
     <p:spTree>
@@ -15605,7 +15349,7 @@
           <a:bodyPr wrap="square" rtlCol="0" anchor="ctr"/>
           <a:lstStyle/>
           <a:p>
-            <a:pPr marL="0" indent="0">
+            <a:pPr indent="0" marL="0">
               <a:buNone/>
             </a:pPr>
             <a:r>
@@ -15644,7 +15388,7 @@
           <a:bodyPr wrap="square" rtlCol="0" anchor="ctr"/>
           <a:lstStyle/>
           <a:p>
-            <a:pPr marL="0" indent="0">
+            <a:pPr indent="0" marL="0">
               <a:buNone/>
             </a:pPr>
             <a:r>
@@ -15686,13 +15430,6 @@
             <a:prstDash val="solid"/>
           </a:ln>
         </p:spPr>
-        <p:txBody>
-          <a:bodyPr/>
-          <a:lstStyle/>
-          <a:p>
-            <a:endParaRPr lang="es-CL"/>
-          </a:p>
-        </p:txBody>
       </p:sp>
       <p:sp>
         <p:nvSpPr>
@@ -15715,7 +15452,7 @@
           <a:bodyPr wrap="square" rtlCol="0" anchor="ctr"/>
           <a:lstStyle/>
           <a:p>
-            <a:pPr marL="0" indent="0" algn="l">
+            <a:pPr algn="l" indent="0" marL="0">
               <a:buNone/>
             </a:pPr>
             <a:r>
@@ -15757,13 +15494,6 @@
             <a:prstDash val="solid"/>
           </a:ln>
         </p:spPr>
-        <p:txBody>
-          <a:bodyPr/>
-          <a:lstStyle/>
-          <a:p>
-            <a:endParaRPr lang="es-CL"/>
-          </a:p>
-        </p:txBody>
       </p:sp>
       <p:sp>
         <p:nvSpPr>
@@ -15786,7 +15516,7 @@
           <a:bodyPr wrap="square" rtlCol="0" anchor="ctr"/>
           <a:lstStyle/>
           <a:p>
-            <a:pPr marL="0" indent="0" algn="ctr">
+            <a:pPr algn="ctr" indent="0" marL="0">
               <a:buNone/>
             </a:pPr>
             <a:r>
@@ -15828,13 +15558,6 @@
             <a:prstDash val="solid"/>
           </a:ln>
         </p:spPr>
-        <p:txBody>
-          <a:bodyPr/>
-          <a:lstStyle/>
-          <a:p>
-            <a:endParaRPr lang="es-CL"/>
-          </a:p>
-        </p:txBody>
       </p:sp>
       <p:sp>
         <p:nvSpPr>
@@ -15857,7 +15580,7 @@
           <a:bodyPr wrap="square" rtlCol="0" anchor="ctr"/>
           <a:lstStyle/>
           <a:p>
-            <a:pPr marL="0" indent="0" algn="ctr">
+            <a:pPr algn="ctr" indent="0" marL="0">
               <a:buNone/>
             </a:pPr>
             <a:r>
@@ -15899,13 +15622,6 @@
             <a:prstDash val="solid"/>
           </a:ln>
         </p:spPr>
-        <p:txBody>
-          <a:bodyPr/>
-          <a:lstStyle/>
-          <a:p>
-            <a:endParaRPr lang="es-CL"/>
-          </a:p>
-        </p:txBody>
       </p:sp>
       <p:sp>
         <p:nvSpPr>
@@ -15928,7 +15644,7 @@
           <a:bodyPr wrap="square" rtlCol="0" anchor="ctr"/>
           <a:lstStyle/>
           <a:p>
-            <a:pPr marL="0" indent="0" algn="l">
+            <a:pPr algn="l" indent="0" marL="0">
               <a:buNone/>
             </a:pPr>
             <a:r>
@@ -15970,13 +15686,6 @@
             <a:prstDash val="solid"/>
           </a:ln>
         </p:spPr>
-        <p:txBody>
-          <a:bodyPr/>
-          <a:lstStyle/>
-          <a:p>
-            <a:endParaRPr lang="es-CL"/>
-          </a:p>
-        </p:txBody>
       </p:sp>
       <p:sp>
         <p:nvSpPr>
@@ -15999,7 +15708,7 @@
           <a:bodyPr wrap="square" rtlCol="0" anchor="ctr"/>
           <a:lstStyle/>
           <a:p>
-            <a:pPr marL="0" indent="0" algn="ctr">
+            <a:pPr algn="ctr" indent="0" marL="0">
               <a:buNone/>
             </a:pPr>
             <a:r>
@@ -16041,13 +15750,6 @@
             <a:prstDash val="solid"/>
           </a:ln>
         </p:spPr>
-        <p:txBody>
-          <a:bodyPr/>
-          <a:lstStyle/>
-          <a:p>
-            <a:endParaRPr lang="es-CL"/>
-          </a:p>
-        </p:txBody>
       </p:sp>
       <p:sp>
         <p:nvSpPr>
@@ -16070,7 +15772,7 @@
           <a:bodyPr wrap="square" rtlCol="0" anchor="ctr"/>
           <a:lstStyle/>
           <a:p>
-            <a:pPr marL="0" indent="0" algn="ctr">
+            <a:pPr algn="ctr" indent="0" marL="0">
               <a:buNone/>
             </a:pPr>
             <a:r>
@@ -16112,13 +15814,6 @@
             <a:prstDash val="solid"/>
           </a:ln>
         </p:spPr>
-        <p:txBody>
-          <a:bodyPr/>
-          <a:lstStyle/>
-          <a:p>
-            <a:endParaRPr lang="es-CL"/>
-          </a:p>
-        </p:txBody>
       </p:sp>
       <p:sp>
         <p:nvSpPr>
@@ -16141,7 +15836,7 @@
           <a:bodyPr wrap="square" rtlCol="0" anchor="ctr"/>
           <a:lstStyle/>
           <a:p>
-            <a:pPr marL="0" indent="0" algn="l">
+            <a:pPr algn="l" indent="0" marL="0">
               <a:buNone/>
             </a:pPr>
             <a:r>
@@ -16183,13 +15878,6 @@
             <a:prstDash val="solid"/>
           </a:ln>
         </p:spPr>
-        <p:txBody>
-          <a:bodyPr/>
-          <a:lstStyle/>
-          <a:p>
-            <a:endParaRPr lang="es-CL"/>
-          </a:p>
-        </p:txBody>
       </p:sp>
       <p:sp>
         <p:nvSpPr>
@@ -16212,7 +15900,7 @@
           <a:bodyPr wrap="square" rtlCol="0" anchor="ctr"/>
           <a:lstStyle/>
           <a:p>
-            <a:pPr marL="0" indent="0" algn="ctr">
+            <a:pPr algn="ctr" indent="0" marL="0">
               <a:buNone/>
             </a:pPr>
             <a:r>
@@ -16254,13 +15942,6 @@
             <a:prstDash val="solid"/>
           </a:ln>
         </p:spPr>
-        <p:txBody>
-          <a:bodyPr/>
-          <a:lstStyle/>
-          <a:p>
-            <a:endParaRPr lang="es-CL"/>
-          </a:p>
-        </p:txBody>
       </p:sp>
       <p:sp>
         <p:nvSpPr>
@@ -16283,7 +15964,7 @@
           <a:bodyPr wrap="square" rtlCol="0" anchor="ctr"/>
           <a:lstStyle/>
           <a:p>
-            <a:pPr marL="0" indent="0" algn="ctr">
+            <a:pPr algn="ctr" indent="0" marL="0">
               <a:buNone/>
             </a:pPr>
             <a:r>
@@ -16325,13 +16006,6 @@
             <a:prstDash val="solid"/>
           </a:ln>
         </p:spPr>
-        <p:txBody>
-          <a:bodyPr/>
-          <a:lstStyle/>
-          <a:p>
-            <a:endParaRPr lang="es-CL"/>
-          </a:p>
-        </p:txBody>
       </p:sp>
       <p:sp>
         <p:nvSpPr>
@@ -16354,7 +16028,7 @@
           <a:bodyPr wrap="square" rtlCol="0" anchor="ctr"/>
           <a:lstStyle/>
           <a:p>
-            <a:pPr marL="0" indent="0" algn="l">
+            <a:pPr algn="l" indent="0" marL="0">
               <a:buNone/>
             </a:pPr>
             <a:r>
@@ -16396,13 +16070,6 @@
             <a:prstDash val="solid"/>
           </a:ln>
         </p:spPr>
-        <p:txBody>
-          <a:bodyPr/>
-          <a:lstStyle/>
-          <a:p>
-            <a:endParaRPr lang="es-CL"/>
-          </a:p>
-        </p:txBody>
       </p:sp>
       <p:sp>
         <p:nvSpPr>
@@ -16425,7 +16092,7 @@
           <a:bodyPr wrap="square" rtlCol="0" anchor="ctr"/>
           <a:lstStyle/>
           <a:p>
-            <a:pPr marL="0" indent="0" algn="ctr">
+            <a:pPr algn="ctr" indent="0" marL="0">
               <a:buNone/>
             </a:pPr>
             <a:r>
@@ -16467,13 +16134,6 @@
             <a:prstDash val="solid"/>
           </a:ln>
         </p:spPr>
-        <p:txBody>
-          <a:bodyPr/>
-          <a:lstStyle/>
-          <a:p>
-            <a:endParaRPr lang="es-CL"/>
-          </a:p>
-        </p:txBody>
       </p:sp>
       <p:sp>
         <p:nvSpPr>
@@ -16496,7 +16156,7 @@
           <a:bodyPr wrap="square" rtlCol="0" anchor="ctr"/>
           <a:lstStyle/>
           <a:p>
-            <a:pPr marL="0" indent="0" algn="ctr">
+            <a:pPr algn="ctr" indent="0" marL="0">
               <a:buNone/>
             </a:pPr>
             <a:r>
@@ -16538,13 +16198,6 @@
             <a:prstDash val="solid"/>
           </a:ln>
         </p:spPr>
-        <p:txBody>
-          <a:bodyPr/>
-          <a:lstStyle/>
-          <a:p>
-            <a:endParaRPr lang="es-CL"/>
-          </a:p>
-        </p:txBody>
       </p:sp>
       <p:sp>
         <p:nvSpPr>
@@ -16567,7 +16220,7 @@
           <a:bodyPr wrap="square" rtlCol="0" anchor="ctr"/>
           <a:lstStyle/>
           <a:p>
-            <a:pPr marL="0" indent="0" algn="l">
+            <a:pPr algn="l" indent="0" marL="0">
               <a:buNone/>
             </a:pPr>
             <a:r>
@@ -16609,13 +16262,6 @@
             <a:prstDash val="solid"/>
           </a:ln>
         </p:spPr>
-        <p:txBody>
-          <a:bodyPr/>
-          <a:lstStyle/>
-          <a:p>
-            <a:endParaRPr lang="es-CL"/>
-          </a:p>
-        </p:txBody>
       </p:sp>
       <p:sp>
         <p:nvSpPr>
@@ -16638,7 +16284,7 @@
           <a:bodyPr wrap="square" rtlCol="0" anchor="ctr"/>
           <a:lstStyle/>
           <a:p>
-            <a:pPr marL="0" indent="0" algn="ctr">
+            <a:pPr algn="ctr" indent="0" marL="0">
               <a:buNone/>
             </a:pPr>
             <a:r>
@@ -16680,13 +16326,6 @@
             <a:prstDash val="solid"/>
           </a:ln>
         </p:spPr>
-        <p:txBody>
-          <a:bodyPr/>
-          <a:lstStyle/>
-          <a:p>
-            <a:endParaRPr lang="es-CL"/>
-          </a:p>
-        </p:txBody>
       </p:sp>
       <p:sp>
         <p:nvSpPr>
@@ -16709,7 +16348,7 @@
           <a:bodyPr wrap="square" rtlCol="0" anchor="ctr"/>
           <a:lstStyle/>
           <a:p>
-            <a:pPr marL="0" indent="0" algn="ctr">
+            <a:pPr algn="ctr" indent="0" marL="0">
               <a:buNone/>
             </a:pPr>
             <a:r>
@@ -16751,13 +16390,6 @@
             <a:prstDash val="solid"/>
           </a:ln>
         </p:spPr>
-        <p:txBody>
-          <a:bodyPr/>
-          <a:lstStyle/>
-          <a:p>
-            <a:endParaRPr lang="es-CL"/>
-          </a:p>
-        </p:txBody>
       </p:sp>
       <p:sp>
         <p:nvSpPr>
@@ -16780,7 +16412,7 @@
           <a:bodyPr wrap="square" rtlCol="0" anchor="ctr"/>
           <a:lstStyle/>
           <a:p>
-            <a:pPr marL="0" indent="0" algn="l">
+            <a:pPr algn="l" indent="0" marL="0">
               <a:buNone/>
             </a:pPr>
             <a:r>
@@ -16822,13 +16454,6 @@
             <a:prstDash val="solid"/>
           </a:ln>
         </p:spPr>
-        <p:txBody>
-          <a:bodyPr/>
-          <a:lstStyle/>
-          <a:p>
-            <a:endParaRPr lang="es-CL"/>
-          </a:p>
-        </p:txBody>
       </p:sp>
       <p:sp>
         <p:nvSpPr>
@@ -16851,7 +16476,7 @@
           <a:bodyPr wrap="square" rtlCol="0" anchor="ctr"/>
           <a:lstStyle/>
           <a:p>
-            <a:pPr marL="0" indent="0" algn="ctr">
+            <a:pPr algn="ctr" indent="0" marL="0">
               <a:buNone/>
             </a:pPr>
             <a:r>
@@ -16893,13 +16518,6 @@
             <a:prstDash val="solid"/>
           </a:ln>
         </p:spPr>
-        <p:txBody>
-          <a:bodyPr/>
-          <a:lstStyle/>
-          <a:p>
-            <a:endParaRPr lang="es-CL"/>
-          </a:p>
-        </p:txBody>
       </p:sp>
       <p:sp>
         <p:nvSpPr>
@@ -16922,7 +16540,7 @@
           <a:bodyPr wrap="square" rtlCol="0" anchor="ctr"/>
           <a:lstStyle/>
           <a:p>
-            <a:pPr marL="0" indent="0" algn="ctr">
+            <a:pPr algn="ctr" indent="0" marL="0">
               <a:buNone/>
             </a:pPr>
             <a:r>
@@ -16964,13 +16582,6 @@
             <a:prstDash val="solid"/>
           </a:ln>
         </p:spPr>
-        <p:txBody>
-          <a:bodyPr/>
-          <a:lstStyle/>
-          <a:p>
-            <a:endParaRPr lang="es-CL"/>
-          </a:p>
-        </p:txBody>
       </p:sp>
       <p:sp>
         <p:nvSpPr>
@@ -16993,7 +16604,7 @@
           <a:bodyPr wrap="square" rtlCol="0" anchor="ctr"/>
           <a:lstStyle/>
           <a:p>
-            <a:pPr marL="0" indent="0" algn="l">
+            <a:pPr algn="l" indent="0" marL="0">
               <a:buNone/>
             </a:pPr>
             <a:r>
@@ -17035,13 +16646,6 @@
             <a:prstDash val="solid"/>
           </a:ln>
         </p:spPr>
-        <p:txBody>
-          <a:bodyPr/>
-          <a:lstStyle/>
-          <a:p>
-            <a:endParaRPr lang="es-CL"/>
-          </a:p>
-        </p:txBody>
       </p:sp>
       <p:sp>
         <p:nvSpPr>
@@ -17064,7 +16668,7 @@
           <a:bodyPr wrap="square" rtlCol="0" anchor="ctr"/>
           <a:lstStyle/>
           <a:p>
-            <a:pPr marL="0" indent="0" algn="ctr">
+            <a:pPr algn="ctr" indent="0" marL="0">
               <a:buNone/>
             </a:pPr>
             <a:r>
@@ -17106,13 +16710,6 @@
             <a:prstDash val="solid"/>
           </a:ln>
         </p:spPr>
-        <p:txBody>
-          <a:bodyPr/>
-          <a:lstStyle/>
-          <a:p>
-            <a:endParaRPr lang="es-CL"/>
-          </a:p>
-        </p:txBody>
       </p:sp>
       <p:sp>
         <p:nvSpPr>
@@ -17135,7 +16732,7 @@
           <a:bodyPr wrap="square" rtlCol="0" anchor="ctr"/>
           <a:lstStyle/>
           <a:p>
-            <a:pPr marL="0" indent="0" algn="ctr">
+            <a:pPr algn="ctr" indent="0" marL="0">
               <a:buNone/>
             </a:pPr>
             <a:r>
@@ -17174,7 +16771,7 @@
           <a:bodyPr wrap="square" rtlCol="0" anchor="ctr"/>
           <a:lstStyle/>
           <a:p>
-            <a:pPr marL="0" indent="0">
+            <a:pPr indent="0" marL="0">
               <a:buNone/>
             </a:pPr>
             <a:r>
@@ -17213,7 +16810,7 @@
           <a:bodyPr wrap="square" rtlCol="0" anchor="ctr"/>
           <a:lstStyle/>
           <a:p>
-            <a:pPr marL="0" indent="0" algn="r">
+            <a:pPr algn="r" indent="0" marL="0">
               <a:buNone/>
             </a:pPr>
             <a:r>
@@ -17532,319 +17129,4 @@
     </a:ext>
   </a:extLst>
 </a:theme>
-</file>
-
-<file path=ppt/theme/theme2.xml><?xml version="1.0" encoding="utf-8"?>
-<a:theme xmlns:a="http://schemas.openxmlformats.org/drawingml/2006/main" name="Tema de Office">
-  <a:themeElements>
-    <a:clrScheme name="Office">
-      <a:dk1>
-        <a:sysClr val="windowText" lastClr="000000"/>
-      </a:dk1>
-      <a:lt1>
-        <a:sysClr val="window" lastClr="FFFFFF"/>
-      </a:lt1>
-      <a:dk2>
-        <a:srgbClr val="0E2841"/>
-      </a:dk2>
-      <a:lt2>
-        <a:srgbClr val="E8E8E8"/>
-      </a:lt2>
-      <a:accent1>
-        <a:srgbClr val="156082"/>
-      </a:accent1>
-      <a:accent2>
-        <a:srgbClr val="E97132"/>
-      </a:accent2>
-      <a:accent3>
-        <a:srgbClr val="196B24"/>
-      </a:accent3>
-      <a:accent4>
-        <a:srgbClr val="0F9ED5"/>
-      </a:accent4>
-      <a:accent5>
-        <a:srgbClr val="A02B93"/>
-      </a:accent5>
-      <a:accent6>
-        <a:srgbClr val="4EA72E"/>
-      </a:accent6>
-      <a:hlink>
-        <a:srgbClr val="467886"/>
-      </a:hlink>
-      <a:folHlink>
-        <a:srgbClr val="96607D"/>
-      </a:folHlink>
-    </a:clrScheme>
-    <a:fontScheme name="Office">
-      <a:majorFont>
-        <a:latin typeface="Aptos Display" panose="02110004020202020204"/>
-        <a:ea typeface=""/>
-        <a:cs typeface=""/>
-        <a:font script="Jpan" typeface="游ゴシック Light"/>
-        <a:font script="Hang" typeface="맑은 고딕"/>
-        <a:font script="Hans" typeface="等线 Light"/>
-        <a:font script="Hant" typeface="新細明體"/>
-        <a:font script="Arab" typeface="Times New Roman"/>
-        <a:font script="Hebr" typeface="Times New Roman"/>
-        <a:font script="Thai" typeface="Angsana New"/>
-        <a:font script="Ethi" typeface="Nyala"/>
-        <a:font script="Beng" typeface="Vrinda"/>
-        <a:font script="Gujr" typeface="Shruti"/>
-        <a:font script="Khmr" typeface="MoolBoran"/>
-        <a:font script="Knda" typeface="Tunga"/>
-        <a:font script="Guru" typeface="Raavi"/>
-        <a:font script="Cans" typeface="Euphemia"/>
-        <a:font script="Cher" typeface="Plantagenet Cherokee"/>
-        <a:font script="Yiii" typeface="Microsoft Yi Baiti"/>
-        <a:font script="Tibt" typeface="Microsoft Himalaya"/>
-        <a:font script="Thaa" typeface="MV Boli"/>
-        <a:font script="Deva" typeface="Mangal"/>
-        <a:font script="Telu" typeface="Gautami"/>
-        <a:font script="Taml" typeface="Latha"/>
-        <a:font script="Syrc" typeface="Estrangelo Edessa"/>
-        <a:font script="Orya" typeface="Kalinga"/>
-        <a:font script="Mlym" typeface="Kartika"/>
-        <a:font script="Laoo" typeface="DokChampa"/>
-        <a:font script="Sinh" typeface="Iskoola Pota"/>
-        <a:font script="Mong" typeface="Mongolian Baiti"/>
-        <a:font script="Viet" typeface="Times New Roman"/>
-        <a:font script="Uigh" typeface="Microsoft Uighur"/>
-        <a:font script="Geor" typeface="Sylfaen"/>
-        <a:font script="Armn" typeface="Arial"/>
-        <a:font script="Bugi" typeface="Leelawadee UI"/>
-        <a:font script="Bopo" typeface="Microsoft JhengHei"/>
-        <a:font script="Java" typeface="Javanese Text"/>
-        <a:font script="Lisu" typeface="Segoe UI"/>
-        <a:font script="Mymr" typeface="Myanmar Text"/>
-        <a:font script="Nkoo" typeface="Ebrima"/>
-        <a:font script="Olck" typeface="Nirmala UI"/>
-        <a:font script="Osma" typeface="Ebrima"/>
-        <a:font script="Phag" typeface="Phagspa"/>
-        <a:font script="Syrn" typeface="Estrangelo Edessa"/>
-        <a:font script="Syrj" typeface="Estrangelo Edessa"/>
-        <a:font script="Syre" typeface="Estrangelo Edessa"/>
-        <a:font script="Sora" typeface="Nirmala UI"/>
-        <a:font script="Tale" typeface="Microsoft Tai Le"/>
-        <a:font script="Talu" typeface="Microsoft New Tai Lue"/>
-        <a:font script="Tfng" typeface="Ebrima"/>
-      </a:majorFont>
-      <a:minorFont>
-        <a:latin typeface="Aptos" panose="02110004020202020204"/>
-        <a:ea typeface=""/>
-        <a:cs typeface=""/>
-        <a:font script="Jpan" typeface="游ゴシック"/>
-        <a:font script="Hang" typeface="맑은 고딕"/>
-        <a:font script="Hans" typeface="等线"/>
-        <a:font script="Hant" typeface="新細明體"/>
-        <a:font script="Arab" typeface="Arial"/>
-        <a:font script="Hebr" typeface="Arial"/>
-        <a:font script="Thai" typeface="Cordia New"/>
-        <a:font script="Ethi" typeface="Nyala"/>
-        <a:font script="Beng" typeface="Vrinda"/>
-        <a:font script="Gujr" typeface="Shruti"/>
-        <a:font script="Khmr" typeface="DaunPenh"/>
-        <a:font script="Knda" typeface="Tunga"/>
-        <a:font script="Guru" typeface="Raavi"/>
-        <a:font script="Cans" typeface="Euphemia"/>
-        <a:font script="Cher" typeface="Plantagenet Cherokee"/>
-        <a:font script="Yiii" typeface="Microsoft Yi Baiti"/>
-        <a:font script="Tibt" typeface="Microsoft Himalaya"/>
-        <a:font script="Thaa" typeface="MV Boli"/>
-        <a:font script="Deva" typeface="Mangal"/>
-        <a:font script="Telu" typeface="Gautami"/>
-        <a:font script="Taml" typeface="Latha"/>
-        <a:font script="Syrc" typeface="Estrangelo Edessa"/>
-        <a:font script="Orya" typeface="Kalinga"/>
-        <a:font script="Mlym" typeface="Kartika"/>
-        <a:font script="Laoo" typeface="DokChampa"/>
-        <a:font script="Sinh" typeface="Iskoola Pota"/>
-        <a:font script="Mong" typeface="Mongolian Baiti"/>
-        <a:font script="Viet" typeface="Arial"/>
-        <a:font script="Uigh" typeface="Microsoft Uighur"/>
-        <a:font script="Geor" typeface="Sylfaen"/>
-        <a:font script="Armn" typeface="Arial"/>
-        <a:font script="Bugi" typeface="Leelawadee UI"/>
-        <a:font script="Bopo" typeface="Microsoft JhengHei"/>
-        <a:font script="Java" typeface="Javanese Text"/>
-        <a:font script="Lisu" typeface="Segoe UI"/>
-        <a:font script="Mymr" typeface="Myanmar Text"/>
-        <a:font script="Nkoo" typeface="Ebrima"/>
-        <a:font script="Olck" typeface="Nirmala UI"/>
-        <a:font script="Osma" typeface="Ebrima"/>
-        <a:font script="Phag" typeface="Phagspa"/>
-        <a:font script="Syrn" typeface="Estrangelo Edessa"/>
-        <a:font script="Syrj" typeface="Estrangelo Edessa"/>
-        <a:font script="Syre" typeface="Estrangelo Edessa"/>
-        <a:font script="Sora" typeface="Nirmala UI"/>
-        <a:font script="Tale" typeface="Microsoft Tai Le"/>
-        <a:font script="Talu" typeface="Microsoft New Tai Lue"/>
-        <a:font script="Tfng" typeface="Ebrima"/>
-      </a:minorFont>
-    </a:fontScheme>
-    <a:fmtScheme name="Office">
-      <a:fillStyleLst>
-        <a:solidFill>
-          <a:schemeClr val="phClr"/>
-        </a:solidFill>
-        <a:gradFill rotWithShape="1">
-          <a:gsLst>
-            <a:gs pos="0">
-              <a:schemeClr val="phClr">
-                <a:lumMod val="110000"/>
-                <a:satMod val="105000"/>
-                <a:tint val="67000"/>
-              </a:schemeClr>
-            </a:gs>
-            <a:gs pos="50000">
-              <a:schemeClr val="phClr">
-                <a:lumMod val="105000"/>
-                <a:satMod val="103000"/>
-                <a:tint val="73000"/>
-              </a:schemeClr>
-            </a:gs>
-            <a:gs pos="100000">
-              <a:schemeClr val="phClr">
-                <a:lumMod val="105000"/>
-                <a:satMod val="109000"/>
-                <a:tint val="81000"/>
-              </a:schemeClr>
-            </a:gs>
-          </a:gsLst>
-          <a:lin ang="5400000" scaled="0"/>
-        </a:gradFill>
-        <a:gradFill rotWithShape="1">
-          <a:gsLst>
-            <a:gs pos="0">
-              <a:schemeClr val="phClr">
-                <a:satMod val="103000"/>
-                <a:lumMod val="102000"/>
-                <a:tint val="94000"/>
-              </a:schemeClr>
-            </a:gs>
-            <a:gs pos="50000">
-              <a:schemeClr val="phClr">
-                <a:satMod val="110000"/>
-                <a:lumMod val="100000"/>
-                <a:shade val="100000"/>
-              </a:schemeClr>
-            </a:gs>
-            <a:gs pos="100000">
-              <a:schemeClr val="phClr">
-                <a:lumMod val="99000"/>
-                <a:satMod val="120000"/>
-                <a:shade val="78000"/>
-              </a:schemeClr>
-            </a:gs>
-          </a:gsLst>
-          <a:lin ang="5400000" scaled="0"/>
-        </a:gradFill>
-      </a:fillStyleLst>
-      <a:lnStyleLst>
-        <a:ln w="12700" cap="flat" cmpd="sng" algn="ctr">
-          <a:solidFill>
-            <a:schemeClr val="phClr"/>
-          </a:solidFill>
-          <a:prstDash val="solid"/>
-          <a:miter lim="800000"/>
-        </a:ln>
-        <a:ln w="19050" cap="flat" cmpd="sng" algn="ctr">
-          <a:solidFill>
-            <a:schemeClr val="phClr"/>
-          </a:solidFill>
-          <a:prstDash val="solid"/>
-          <a:miter lim="800000"/>
-        </a:ln>
-        <a:ln w="25400" cap="flat" cmpd="sng" algn="ctr">
-          <a:solidFill>
-            <a:schemeClr val="phClr"/>
-          </a:solidFill>
-          <a:prstDash val="solid"/>
-          <a:miter lim="800000"/>
-        </a:ln>
-      </a:lnStyleLst>
-      <a:effectStyleLst>
-        <a:effectStyle>
-          <a:effectLst/>
-        </a:effectStyle>
-        <a:effectStyle>
-          <a:effectLst/>
-        </a:effectStyle>
-        <a:effectStyle>
-          <a:effectLst>
-            <a:outerShdw blurRad="57150" dist="19050" dir="5400000" algn="ctr" rotWithShape="0">
-              <a:srgbClr val="000000">
-                <a:alpha val="63000"/>
-              </a:srgbClr>
-            </a:outerShdw>
-          </a:effectLst>
-        </a:effectStyle>
-      </a:effectStyleLst>
-      <a:bgFillStyleLst>
-        <a:solidFill>
-          <a:schemeClr val="phClr"/>
-        </a:solidFill>
-        <a:solidFill>
-          <a:schemeClr val="phClr">
-            <a:tint val="95000"/>
-            <a:satMod val="170000"/>
-          </a:schemeClr>
-        </a:solidFill>
-        <a:gradFill rotWithShape="1">
-          <a:gsLst>
-            <a:gs pos="0">
-              <a:schemeClr val="phClr">
-                <a:tint val="93000"/>
-                <a:satMod val="150000"/>
-                <a:shade val="98000"/>
-                <a:lumMod val="102000"/>
-              </a:schemeClr>
-            </a:gs>
-            <a:gs pos="50000">
-              <a:schemeClr val="phClr">
-                <a:tint val="98000"/>
-                <a:satMod val="130000"/>
-                <a:shade val="90000"/>
-                <a:lumMod val="103000"/>
-              </a:schemeClr>
-            </a:gs>
-            <a:gs pos="100000">
-              <a:schemeClr val="phClr">
-                <a:shade val="63000"/>
-                <a:satMod val="120000"/>
-              </a:schemeClr>
-            </a:gs>
-          </a:gsLst>
-          <a:lin ang="5400000" scaled="0"/>
-        </a:gradFill>
-      </a:bgFillStyleLst>
-    </a:fmtScheme>
-  </a:themeElements>
-  <a:objectDefaults>
-    <a:lnDef>
-      <a:spPr/>
-      <a:bodyPr/>
-      <a:lstStyle/>
-      <a:style>
-        <a:lnRef idx="2">
-          <a:schemeClr val="accent1"/>
-        </a:lnRef>
-        <a:fillRef idx="0">
-          <a:schemeClr val="accent1"/>
-        </a:fillRef>
-        <a:effectRef idx="1">
-          <a:schemeClr val="accent1"/>
-        </a:effectRef>
-        <a:fontRef idx="minor">
-          <a:schemeClr val="tx1"/>
-        </a:fontRef>
-      </a:style>
-    </a:lnDef>
-  </a:objectDefaults>
-  <a:extraClrSchemeLst/>
-  <a:extLst>
-    <a:ext uri="{05A4C25C-085E-4340-85A3-A5531E510DB2}">
-      <thm15:themeFamily xmlns:thm15="http://schemas.microsoft.com/office/thememl/2012/main" name="Office Theme" id="{2E142A2C-CD16-42D6-873A-C26D2A0506FA}" vid="{1BDDFF52-6CD6-40A5-AB3C-68EB2F1E4D0A}"/>
-    </a:ext>
-  </a:extLst>
-</a:theme>
 </file>